--- a/docs/pptx/auc3/jx-auc3-linsubhr-ratio-hosp7.pptx
+++ b/docs/pptx/auc3/jx-auc3-linsubhr-ratio-hosp7.pptx
@@ -2271,7 +2271,7 @@
           </p:nvSpPr>
           <p:spPr>
             <a:xfrm>
-              <a:off x="817517" y="5114368"/>
+              <a:off x="817517" y="5142518"/>
               <a:ext cx="7799693" cy="0"/>
             </a:xfrm>
             <a:custGeom>
@@ -2314,7 +2314,7 @@
           </p:nvSpPr>
           <p:spPr>
             <a:xfrm>
-              <a:off x="817517" y="4244691"/>
+              <a:off x="817517" y="4313054"/>
               <a:ext cx="7799693" cy="0"/>
             </a:xfrm>
             <a:custGeom>
@@ -2357,7 +2357,7 @@
           </p:nvSpPr>
           <p:spPr>
             <a:xfrm>
-              <a:off x="817517" y="3375014"/>
+              <a:off x="817517" y="3483591"/>
               <a:ext cx="7799693" cy="0"/>
             </a:xfrm>
             <a:custGeom>
@@ -2400,7 +2400,7 @@
           </p:nvSpPr>
           <p:spPr>
             <a:xfrm>
-              <a:off x="817517" y="2505337"/>
+              <a:off x="817517" y="2654127"/>
               <a:ext cx="7799693" cy="0"/>
             </a:xfrm>
             <a:custGeom>
@@ -2443,15 +2443,15 @@
           </p:nvSpPr>
           <p:spPr>
             <a:xfrm>
-              <a:off x="1615213" y="1896563"/>
-              <a:ext cx="0" cy="3826579"/>
+              <a:off x="1615213" y="2073503"/>
+              <a:ext cx="0" cy="3649639"/>
             </a:xfrm>
             <a:custGeom>
               <a:avLst/>
               <a:pathLst>
-                <a:path w="0" h="3826579">
+                <a:path w="0" h="3649639">
                   <a:moveTo>
-                    <a:pt x="0" y="3826579"/>
+                    <a:pt x="0" y="3649639"/>
                   </a:moveTo>
                   <a:lnTo>
                     <a:pt x="0" y="0"/>
@@ -2486,15 +2486,15 @@
           </p:nvSpPr>
           <p:spPr>
             <a:xfrm>
-              <a:off x="3387871" y="1896563"/>
-              <a:ext cx="0" cy="3826579"/>
+              <a:off x="3387871" y="2073503"/>
+              <a:ext cx="0" cy="3649639"/>
             </a:xfrm>
             <a:custGeom>
               <a:avLst/>
               <a:pathLst>
-                <a:path w="0" h="3826579">
+                <a:path w="0" h="3649639">
                   <a:moveTo>
-                    <a:pt x="0" y="3826579"/>
+                    <a:pt x="0" y="3649639"/>
                   </a:moveTo>
                   <a:lnTo>
                     <a:pt x="0" y="0"/>
@@ -2529,15 +2529,15 @@
           </p:nvSpPr>
           <p:spPr>
             <a:xfrm>
-              <a:off x="5160528" y="1896563"/>
-              <a:ext cx="0" cy="3826579"/>
+              <a:off x="5160528" y="2073503"/>
+              <a:ext cx="0" cy="3649639"/>
             </a:xfrm>
             <a:custGeom>
               <a:avLst/>
               <a:pathLst>
-                <a:path w="0" h="3826579">
+                <a:path w="0" h="3649639">
                   <a:moveTo>
-                    <a:pt x="0" y="3826579"/>
+                    <a:pt x="0" y="3649639"/>
                   </a:moveTo>
                   <a:lnTo>
                     <a:pt x="0" y="0"/>
@@ -2572,15 +2572,15 @@
           </p:nvSpPr>
           <p:spPr>
             <a:xfrm>
-              <a:off x="6933186" y="1896563"/>
-              <a:ext cx="0" cy="3826579"/>
+              <a:off x="6933186" y="2073503"/>
+              <a:ext cx="0" cy="3649639"/>
             </a:xfrm>
             <a:custGeom>
               <a:avLst/>
               <a:pathLst>
-                <a:path w="0" h="3826579">
+                <a:path w="0" h="3649639">
                   <a:moveTo>
-                    <a:pt x="0" y="3826579"/>
+                    <a:pt x="0" y="3649639"/>
                   </a:moveTo>
                   <a:lnTo>
                     <a:pt x="0" y="0"/>
@@ -2615,7 +2615,7 @@
           </p:nvSpPr>
           <p:spPr>
             <a:xfrm>
-              <a:off x="817517" y="5549207"/>
+              <a:off x="817517" y="5557249"/>
               <a:ext cx="7799693" cy="0"/>
             </a:xfrm>
             <a:custGeom>
@@ -2658,7 +2658,7 @@
           </p:nvSpPr>
           <p:spPr>
             <a:xfrm>
-              <a:off x="817517" y="4679530"/>
+              <a:off x="817517" y="4727786"/>
               <a:ext cx="7799693" cy="0"/>
             </a:xfrm>
             <a:custGeom>
@@ -2701,7 +2701,7 @@
           </p:nvSpPr>
           <p:spPr>
             <a:xfrm>
-              <a:off x="817517" y="3809853"/>
+              <a:off x="817517" y="3898322"/>
               <a:ext cx="7799693" cy="0"/>
             </a:xfrm>
             <a:custGeom>
@@ -2744,7 +2744,7 @@
           </p:nvSpPr>
           <p:spPr>
             <a:xfrm>
-              <a:off x="817517" y="2940175"/>
+              <a:off x="817517" y="3068859"/>
               <a:ext cx="7799693" cy="0"/>
             </a:xfrm>
             <a:custGeom>
@@ -2787,7 +2787,7 @@
           </p:nvSpPr>
           <p:spPr>
             <a:xfrm>
-              <a:off x="817517" y="2070498"/>
+              <a:off x="817517" y="2239395"/>
               <a:ext cx="7799693" cy="0"/>
             </a:xfrm>
             <a:custGeom>
@@ -2830,15 +2830,15 @@
           </p:nvSpPr>
           <p:spPr>
             <a:xfrm>
-              <a:off x="2501542" y="1896563"/>
-              <a:ext cx="0" cy="3826579"/>
+              <a:off x="2501542" y="2073503"/>
+              <a:ext cx="0" cy="3649639"/>
             </a:xfrm>
             <a:custGeom>
               <a:avLst/>
               <a:pathLst>
-                <a:path w="0" h="3826579">
+                <a:path w="0" h="3649639">
                   <a:moveTo>
-                    <a:pt x="0" y="3826579"/>
+                    <a:pt x="0" y="3649639"/>
                   </a:moveTo>
                   <a:lnTo>
                     <a:pt x="0" y="0"/>
@@ -2873,15 +2873,15 @@
           </p:nvSpPr>
           <p:spPr>
             <a:xfrm>
-              <a:off x="4274200" y="1896563"/>
-              <a:ext cx="0" cy="3826579"/>
+              <a:off x="4274200" y="2073503"/>
+              <a:ext cx="0" cy="3649639"/>
             </a:xfrm>
             <a:custGeom>
               <a:avLst/>
               <a:pathLst>
-                <a:path w="0" h="3826579">
+                <a:path w="0" h="3649639">
                   <a:moveTo>
-                    <a:pt x="0" y="3826579"/>
+                    <a:pt x="0" y="3649639"/>
                   </a:moveTo>
                   <a:lnTo>
                     <a:pt x="0" y="0"/>
@@ -2916,15 +2916,15 @@
           </p:nvSpPr>
           <p:spPr>
             <a:xfrm>
-              <a:off x="6046857" y="1896563"/>
-              <a:ext cx="0" cy="3826579"/>
+              <a:off x="6046857" y="2073503"/>
+              <a:ext cx="0" cy="3649639"/>
             </a:xfrm>
             <a:custGeom>
               <a:avLst/>
               <a:pathLst>
-                <a:path w="0" h="3826579">
+                <a:path w="0" h="3649639">
                   <a:moveTo>
-                    <a:pt x="0" y="3826579"/>
+                    <a:pt x="0" y="3649639"/>
                   </a:moveTo>
                   <a:lnTo>
                     <a:pt x="0" y="0"/>
@@ -2959,15 +2959,15 @@
           </p:nvSpPr>
           <p:spPr>
             <a:xfrm>
-              <a:off x="7819515" y="1896563"/>
-              <a:ext cx="0" cy="3826579"/>
+              <a:off x="7819515" y="2073503"/>
+              <a:ext cx="0" cy="3649639"/>
             </a:xfrm>
             <a:custGeom>
               <a:avLst/>
               <a:pathLst>
-                <a:path w="0" h="3826579">
+                <a:path w="0" h="3649639">
                   <a:moveTo>
-                    <a:pt x="0" y="3826579"/>
+                    <a:pt x="0" y="3649639"/>
                   </a:moveTo>
                   <a:lnTo>
                     <a:pt x="0" y="0"/>
@@ -3002,567 +3002,567 @@
           </p:nvSpPr>
           <p:spPr>
             <a:xfrm>
-              <a:off x="817517" y="1896563"/>
-              <a:ext cx="7392041" cy="3563942"/>
+              <a:off x="817517" y="2073503"/>
+              <a:ext cx="7392041" cy="3399147"/>
             </a:xfrm>
             <a:custGeom>
               <a:avLst/>
               <a:pathLst>
-                <a:path w="7392041" h="3563942">
+                <a:path w="7392041" h="3399147">
                   <a:moveTo>
                     <a:pt x="727872" y="0"/>
                   </a:moveTo>
                   <a:lnTo>
-                    <a:pt x="749094" y="43660"/>
-                  </a:lnTo>
-                  <a:lnTo>
-                    <a:pt x="826337" y="195875"/>
-                  </a:lnTo>
-                  <a:lnTo>
-                    <a:pt x="903581" y="341671"/>
-                  </a:lnTo>
-                  <a:lnTo>
-                    <a:pt x="980824" y="481317"/>
-                  </a:lnTo>
-                  <a:lnTo>
-                    <a:pt x="1058068" y="615073"/>
-                  </a:lnTo>
-                  <a:lnTo>
-                    <a:pt x="1135311" y="743187"/>
-                  </a:lnTo>
-                  <a:lnTo>
-                    <a:pt x="1212555" y="865899"/>
-                  </a:lnTo>
-                  <a:lnTo>
-                    <a:pt x="1289799" y="983435"/>
-                  </a:lnTo>
-                  <a:lnTo>
-                    <a:pt x="1367042" y="1096013"/>
-                  </a:lnTo>
-                  <a:lnTo>
-                    <a:pt x="1444286" y="1203843"/>
-                  </a:lnTo>
-                  <a:lnTo>
-                    <a:pt x="1521529" y="1307126"/>
-                  </a:lnTo>
-                  <a:lnTo>
-                    <a:pt x="1598773" y="1406052"/>
-                  </a:lnTo>
-                  <a:lnTo>
-                    <a:pt x="1676016" y="1500806"/>
-                  </a:lnTo>
-                  <a:lnTo>
-                    <a:pt x="1753260" y="1591563"/>
-                  </a:lnTo>
-                  <a:lnTo>
-                    <a:pt x="1830504" y="1678493"/>
-                  </a:lnTo>
-                  <a:lnTo>
-                    <a:pt x="1907747" y="1761756"/>
-                  </a:lnTo>
-                  <a:lnTo>
-                    <a:pt x="1984991" y="1841508"/>
-                  </a:lnTo>
-                  <a:lnTo>
-                    <a:pt x="2062234" y="1917895"/>
-                  </a:lnTo>
-                  <a:lnTo>
-                    <a:pt x="2139478" y="1991061"/>
-                  </a:lnTo>
-                  <a:lnTo>
-                    <a:pt x="2216721" y="2061141"/>
-                  </a:lnTo>
-                  <a:lnTo>
-                    <a:pt x="2293965" y="2128266"/>
-                  </a:lnTo>
-                  <a:lnTo>
-                    <a:pt x="2371209" y="2192559"/>
-                  </a:lnTo>
-                  <a:lnTo>
-                    <a:pt x="2448452" y="2254141"/>
-                  </a:lnTo>
-                  <a:lnTo>
-                    <a:pt x="2525696" y="2313125"/>
-                  </a:lnTo>
-                  <a:lnTo>
-                    <a:pt x="2602939" y="2369621"/>
-                  </a:lnTo>
-                  <a:lnTo>
-                    <a:pt x="2680183" y="2423735"/>
-                  </a:lnTo>
-                  <a:lnTo>
-                    <a:pt x="2757426" y="2475566"/>
-                  </a:lnTo>
-                  <a:lnTo>
-                    <a:pt x="2834670" y="2525212"/>
-                  </a:lnTo>
-                  <a:lnTo>
-                    <a:pt x="2911914" y="2572763"/>
-                  </a:lnTo>
-                  <a:lnTo>
-                    <a:pt x="2989157" y="2618309"/>
-                  </a:lnTo>
-                  <a:lnTo>
-                    <a:pt x="3066401" y="2661934"/>
-                  </a:lnTo>
-                  <a:lnTo>
-                    <a:pt x="3143644" y="2703719"/>
-                  </a:lnTo>
-                  <a:lnTo>
-                    <a:pt x="3220888" y="2743741"/>
-                  </a:lnTo>
-                  <a:lnTo>
-                    <a:pt x="3298131" y="2782076"/>
-                  </a:lnTo>
-                  <a:lnTo>
-                    <a:pt x="3375375" y="2787337"/>
-                  </a:lnTo>
-                  <a:lnTo>
-                    <a:pt x="3452619" y="2791792"/>
-                  </a:lnTo>
-                  <a:lnTo>
-                    <a:pt x="3529862" y="2796223"/>
-                  </a:lnTo>
-                  <a:lnTo>
-                    <a:pt x="3607106" y="2800632"/>
-                  </a:lnTo>
-                  <a:lnTo>
-                    <a:pt x="3684349" y="2805018"/>
-                  </a:lnTo>
-                  <a:lnTo>
-                    <a:pt x="3761593" y="2809381"/>
-                  </a:lnTo>
-                  <a:lnTo>
-                    <a:pt x="3838836" y="2813722"/>
-                  </a:lnTo>
-                  <a:lnTo>
-                    <a:pt x="3916080" y="2818041"/>
-                  </a:lnTo>
-                  <a:lnTo>
-                    <a:pt x="3993324" y="2822337"/>
-                  </a:lnTo>
-                  <a:lnTo>
-                    <a:pt x="4070567" y="2826611"/>
-                  </a:lnTo>
-                  <a:lnTo>
-                    <a:pt x="4147811" y="2830864"/>
-                  </a:lnTo>
-                  <a:lnTo>
-                    <a:pt x="4225054" y="2835094"/>
-                  </a:lnTo>
-                  <a:lnTo>
-                    <a:pt x="4302298" y="2839303"/>
-                  </a:lnTo>
-                  <a:lnTo>
-                    <a:pt x="4379541" y="2843490"/>
-                  </a:lnTo>
-                  <a:lnTo>
-                    <a:pt x="4456785" y="2847655"/>
-                  </a:lnTo>
-                  <a:lnTo>
-                    <a:pt x="4534029" y="2851799"/>
-                  </a:lnTo>
-                  <a:lnTo>
-                    <a:pt x="4611272" y="2855921"/>
-                  </a:lnTo>
-                  <a:lnTo>
-                    <a:pt x="4688516" y="2860023"/>
-                  </a:lnTo>
-                  <a:lnTo>
-                    <a:pt x="4765759" y="2864103"/>
-                  </a:lnTo>
-                  <a:lnTo>
-                    <a:pt x="4843003" y="2868162"/>
-                  </a:lnTo>
-                  <a:lnTo>
-                    <a:pt x="4920246" y="2872201"/>
-                  </a:lnTo>
-                  <a:lnTo>
-                    <a:pt x="4997490" y="2876218"/>
-                  </a:lnTo>
-                  <a:lnTo>
-                    <a:pt x="5074734" y="2880215"/>
-                  </a:lnTo>
-                  <a:lnTo>
-                    <a:pt x="5151977" y="2884191"/>
-                  </a:lnTo>
-                  <a:lnTo>
-                    <a:pt x="5229221" y="2888147"/>
-                  </a:lnTo>
-                  <a:lnTo>
-                    <a:pt x="5306464" y="2892083"/>
-                  </a:lnTo>
-                  <a:lnTo>
-                    <a:pt x="5383708" y="2895998"/>
-                  </a:lnTo>
-                  <a:lnTo>
-                    <a:pt x="5460951" y="2899893"/>
-                  </a:lnTo>
-                  <a:lnTo>
-                    <a:pt x="5538195" y="2903768"/>
-                  </a:lnTo>
-                  <a:lnTo>
-                    <a:pt x="5615439" y="2907623"/>
-                  </a:lnTo>
-                  <a:lnTo>
-                    <a:pt x="5692682" y="2911458"/>
-                  </a:lnTo>
-                  <a:lnTo>
-                    <a:pt x="5769926" y="2915274"/>
-                  </a:lnTo>
-                  <a:lnTo>
-                    <a:pt x="5847169" y="2919070"/>
-                  </a:lnTo>
-                  <a:lnTo>
-                    <a:pt x="5924413" y="2922846"/>
-                  </a:lnTo>
-                  <a:lnTo>
-                    <a:pt x="6001656" y="2926603"/>
-                  </a:lnTo>
-                  <a:lnTo>
-                    <a:pt x="6078900" y="2930340"/>
-                  </a:lnTo>
-                  <a:lnTo>
-                    <a:pt x="6156144" y="2934059"/>
-                  </a:lnTo>
-                  <a:lnTo>
-                    <a:pt x="6233387" y="2937758"/>
-                  </a:lnTo>
-                  <a:lnTo>
-                    <a:pt x="6310631" y="2941438"/>
-                  </a:lnTo>
-                  <a:lnTo>
-                    <a:pt x="6387874" y="2945099"/>
-                  </a:lnTo>
-                  <a:lnTo>
-                    <a:pt x="6465118" y="2948741"/>
-                  </a:lnTo>
-                  <a:lnTo>
-                    <a:pt x="6542361" y="2952365"/>
-                  </a:lnTo>
-                  <a:lnTo>
-                    <a:pt x="6619605" y="2955970"/>
-                  </a:lnTo>
-                  <a:lnTo>
-                    <a:pt x="6696849" y="2959556"/>
-                  </a:lnTo>
-                  <a:lnTo>
-                    <a:pt x="6774092" y="2963124"/>
-                  </a:lnTo>
-                  <a:lnTo>
-                    <a:pt x="6851336" y="2966674"/>
-                  </a:lnTo>
-                  <a:lnTo>
-                    <a:pt x="6928579" y="2970205"/>
-                  </a:lnTo>
-                  <a:lnTo>
-                    <a:pt x="7005823" y="2973718"/>
-                  </a:lnTo>
-                  <a:lnTo>
-                    <a:pt x="7083066" y="2977213"/>
-                  </a:lnTo>
-                  <a:lnTo>
-                    <a:pt x="7160310" y="2980690"/>
-                  </a:lnTo>
-                  <a:lnTo>
-                    <a:pt x="7237554" y="2984149"/>
-                  </a:lnTo>
-                  <a:lnTo>
-                    <a:pt x="7314797" y="2987590"/>
-                  </a:lnTo>
-                  <a:lnTo>
-                    <a:pt x="7392041" y="2991014"/>
-                  </a:lnTo>
-                  <a:lnTo>
-                    <a:pt x="7392041" y="3563942"/>
-                  </a:lnTo>
-                  <a:lnTo>
-                    <a:pt x="7314797" y="3560037"/>
-                  </a:lnTo>
-                  <a:lnTo>
-                    <a:pt x="7237554" y="3555959"/>
-                  </a:lnTo>
-                  <a:lnTo>
-                    <a:pt x="7160310" y="3551701"/>
-                  </a:lnTo>
-                  <a:lnTo>
-                    <a:pt x="7083066" y="3547256"/>
-                  </a:lnTo>
-                  <a:lnTo>
-                    <a:pt x="7005823" y="3542616"/>
-                  </a:lnTo>
-                  <a:lnTo>
-                    <a:pt x="6928579" y="3537771"/>
-                  </a:lnTo>
-                  <a:lnTo>
-                    <a:pt x="6851336" y="3532713"/>
-                  </a:lnTo>
-                  <a:lnTo>
-                    <a:pt x="6774092" y="3527432"/>
-                  </a:lnTo>
-                  <a:lnTo>
-                    <a:pt x="6696849" y="3521918"/>
-                  </a:lnTo>
-                  <a:lnTo>
-                    <a:pt x="6619605" y="3516162"/>
-                  </a:lnTo>
-                  <a:lnTo>
-                    <a:pt x="6542361" y="3510152"/>
-                  </a:lnTo>
-                  <a:lnTo>
-                    <a:pt x="6465118" y="3503877"/>
-                  </a:lnTo>
-                  <a:lnTo>
-                    <a:pt x="6387874" y="3497327"/>
-                  </a:lnTo>
-                  <a:lnTo>
-                    <a:pt x="6310631" y="3490487"/>
-                  </a:lnTo>
-                  <a:lnTo>
-                    <a:pt x="6233387" y="3483347"/>
-                  </a:lnTo>
-                  <a:lnTo>
-                    <a:pt x="6156144" y="3475892"/>
-                  </a:lnTo>
-                  <a:lnTo>
-                    <a:pt x="6078900" y="3468109"/>
-                  </a:lnTo>
-                  <a:lnTo>
-                    <a:pt x="6001656" y="3459984"/>
-                  </a:lnTo>
-                  <a:lnTo>
-                    <a:pt x="5924413" y="3451500"/>
-                  </a:lnTo>
-                  <a:lnTo>
-                    <a:pt x="5847169" y="3442643"/>
-                  </a:lnTo>
-                  <a:lnTo>
-                    <a:pt x="5769926" y="3433396"/>
-                  </a:lnTo>
-                  <a:lnTo>
-                    <a:pt x="5692682" y="3423741"/>
-                  </a:lnTo>
-                  <a:lnTo>
-                    <a:pt x="5615439" y="3413662"/>
-                  </a:lnTo>
-                  <a:lnTo>
-                    <a:pt x="5538195" y="3403139"/>
-                  </a:lnTo>
-                  <a:lnTo>
-                    <a:pt x="5460951" y="3392152"/>
-                  </a:lnTo>
-                  <a:lnTo>
-                    <a:pt x="5383708" y="3380681"/>
-                  </a:lnTo>
-                  <a:lnTo>
-                    <a:pt x="5306464" y="3368706"/>
-                  </a:lnTo>
-                  <a:lnTo>
-                    <a:pt x="5229221" y="3356203"/>
-                  </a:lnTo>
-                  <a:lnTo>
-                    <a:pt x="5151977" y="3343150"/>
-                  </a:lnTo>
-                  <a:lnTo>
-                    <a:pt x="5074734" y="3329521"/>
-                  </a:lnTo>
-                  <a:lnTo>
-                    <a:pt x="4997490" y="3315293"/>
-                  </a:lnTo>
-                  <a:lnTo>
-                    <a:pt x="4920246" y="3300438"/>
-                  </a:lnTo>
-                  <a:lnTo>
-                    <a:pt x="4843003" y="3284929"/>
-                  </a:lnTo>
-                  <a:lnTo>
-                    <a:pt x="4765759" y="3268737"/>
-                  </a:lnTo>
-                  <a:lnTo>
-                    <a:pt x="4688516" y="3251832"/>
-                  </a:lnTo>
-                  <a:lnTo>
-                    <a:pt x="4611272" y="3234183"/>
-                  </a:lnTo>
-                  <a:lnTo>
-                    <a:pt x="4534029" y="3215757"/>
-                  </a:lnTo>
-                  <a:lnTo>
-                    <a:pt x="4456785" y="3196519"/>
-                  </a:lnTo>
-                  <a:lnTo>
-                    <a:pt x="4379541" y="3176434"/>
-                  </a:lnTo>
-                  <a:lnTo>
-                    <a:pt x="4302298" y="3155465"/>
-                  </a:lnTo>
-                  <a:lnTo>
-                    <a:pt x="4225054" y="3133572"/>
-                  </a:lnTo>
-                  <a:lnTo>
-                    <a:pt x="4147811" y="3110715"/>
-                  </a:lnTo>
-                  <a:lnTo>
-                    <a:pt x="4070567" y="3086852"/>
-                  </a:lnTo>
-                  <a:lnTo>
-                    <a:pt x="3993324" y="3061938"/>
-                  </a:lnTo>
-                  <a:lnTo>
-                    <a:pt x="3916080" y="3035927"/>
-                  </a:lnTo>
-                  <a:lnTo>
-                    <a:pt x="3838836" y="3008770"/>
-                  </a:lnTo>
-                  <a:lnTo>
-                    <a:pt x="3761593" y="2980418"/>
-                  </a:lnTo>
-                  <a:lnTo>
-                    <a:pt x="3684349" y="2950817"/>
-                  </a:lnTo>
-                  <a:lnTo>
-                    <a:pt x="3607106" y="2919913"/>
-                  </a:lnTo>
-                  <a:lnTo>
-                    <a:pt x="3529862" y="2887648"/>
-                  </a:lnTo>
-                  <a:lnTo>
-                    <a:pt x="3452619" y="2853962"/>
-                  </a:lnTo>
-                  <a:lnTo>
-                    <a:pt x="3375375" y="2818793"/>
-                  </a:lnTo>
-                  <a:lnTo>
-                    <a:pt x="3298131" y="2782860"/>
-                  </a:lnTo>
-                  <a:lnTo>
-                    <a:pt x="3220888" y="2778359"/>
-                  </a:lnTo>
-                  <a:lnTo>
-                    <a:pt x="3143644" y="2773835"/>
-                  </a:lnTo>
-                  <a:lnTo>
-                    <a:pt x="3066401" y="2769288"/>
-                  </a:lnTo>
-                  <a:lnTo>
-                    <a:pt x="2989157" y="2764717"/>
-                  </a:lnTo>
-                  <a:lnTo>
-                    <a:pt x="2911914" y="2760122"/>
-                  </a:lnTo>
-                  <a:lnTo>
-                    <a:pt x="2834670" y="2755504"/>
-                  </a:lnTo>
-                  <a:lnTo>
-                    <a:pt x="2757426" y="2750862"/>
-                  </a:lnTo>
-                  <a:lnTo>
-                    <a:pt x="2680183" y="2746195"/>
-                  </a:lnTo>
-                  <a:lnTo>
-                    <a:pt x="2602939" y="2741505"/>
-                  </a:lnTo>
-                  <a:lnTo>
-                    <a:pt x="2525696" y="2736790"/>
-                  </a:lnTo>
-                  <a:lnTo>
-                    <a:pt x="2448452" y="2732051"/>
-                  </a:lnTo>
-                  <a:lnTo>
-                    <a:pt x="2371209" y="2727288"/>
-                  </a:lnTo>
-                  <a:lnTo>
-                    <a:pt x="2293965" y="2722500"/>
-                  </a:lnTo>
-                  <a:lnTo>
-                    <a:pt x="2216721" y="2717687"/>
-                  </a:lnTo>
-                  <a:lnTo>
-                    <a:pt x="2139478" y="2712849"/>
-                  </a:lnTo>
-                  <a:lnTo>
-                    <a:pt x="2062234" y="2707986"/>
-                  </a:lnTo>
-                  <a:lnTo>
-                    <a:pt x="1984991" y="2703098"/>
-                  </a:lnTo>
-                  <a:lnTo>
-                    <a:pt x="1907747" y="2698184"/>
-                  </a:lnTo>
-                  <a:lnTo>
-                    <a:pt x="1830504" y="2693246"/>
-                  </a:lnTo>
-                  <a:lnTo>
-                    <a:pt x="1753260" y="2688281"/>
-                  </a:lnTo>
-                  <a:lnTo>
-                    <a:pt x="1676016" y="2683291"/>
-                  </a:lnTo>
-                  <a:lnTo>
-                    <a:pt x="1598773" y="2678275"/>
-                  </a:lnTo>
-                  <a:lnTo>
-                    <a:pt x="1521529" y="2673233"/>
-                  </a:lnTo>
-                  <a:lnTo>
-                    <a:pt x="1444286" y="2668166"/>
-                  </a:lnTo>
-                  <a:lnTo>
-                    <a:pt x="1367042" y="2663071"/>
-                  </a:lnTo>
-                  <a:lnTo>
-                    <a:pt x="1289799" y="2657951"/>
-                  </a:lnTo>
-                  <a:lnTo>
-                    <a:pt x="1212555" y="2652804"/>
-                  </a:lnTo>
-                  <a:lnTo>
-                    <a:pt x="1135311" y="2647630"/>
-                  </a:lnTo>
-                  <a:lnTo>
-                    <a:pt x="1058068" y="2642430"/>
-                  </a:lnTo>
-                  <a:lnTo>
-                    <a:pt x="980824" y="2637203"/>
-                  </a:lnTo>
-                  <a:lnTo>
-                    <a:pt x="903581" y="2631948"/>
-                  </a:lnTo>
-                  <a:lnTo>
-                    <a:pt x="826337" y="2626667"/>
-                  </a:lnTo>
-                  <a:lnTo>
-                    <a:pt x="749094" y="2621358"/>
-                  </a:lnTo>
-                  <a:lnTo>
-                    <a:pt x="671850" y="2616022"/>
-                  </a:lnTo>
-                  <a:lnTo>
-                    <a:pt x="594606" y="2610658"/>
-                  </a:lnTo>
-                  <a:lnTo>
-                    <a:pt x="517363" y="2605266"/>
-                  </a:lnTo>
-                  <a:lnTo>
-                    <a:pt x="440119" y="2599846"/>
-                  </a:lnTo>
-                  <a:lnTo>
-                    <a:pt x="362876" y="2594399"/>
-                  </a:lnTo>
-                  <a:lnTo>
-                    <a:pt x="285632" y="2588923"/>
-                  </a:lnTo>
-                  <a:lnTo>
-                    <a:pt x="208389" y="2583419"/>
-                  </a:lnTo>
-                  <a:lnTo>
-                    <a:pt x="131145" y="2577886"/>
-                  </a:lnTo>
-                  <a:lnTo>
-                    <a:pt x="53901" y="2572325"/>
-                  </a:lnTo>
-                  <a:lnTo>
-                    <a:pt x="0" y="2568424"/>
+                    <a:pt x="749094" y="41641"/>
+                  </a:lnTo>
+                  <a:lnTo>
+                    <a:pt x="826337" y="186818"/>
+                  </a:lnTo>
+                  <a:lnTo>
+                    <a:pt x="903581" y="325872"/>
+                  </a:lnTo>
+                  <a:lnTo>
+                    <a:pt x="980824" y="459061"/>
+                  </a:lnTo>
+                  <a:lnTo>
+                    <a:pt x="1058068" y="586632"/>
+                  </a:lnTo>
+                  <a:lnTo>
+                    <a:pt x="1135311" y="708823"/>
+                  </a:lnTo>
+                  <a:lnTo>
+                    <a:pt x="1212555" y="825860"/>
+                  </a:lnTo>
+                  <a:lnTo>
+                    <a:pt x="1289799" y="937961"/>
+                  </a:lnTo>
+                  <a:lnTo>
+                    <a:pt x="1367042" y="1045334"/>
+                  </a:lnTo>
+                  <a:lnTo>
+                    <a:pt x="1444286" y="1148178"/>
+                  </a:lnTo>
+                  <a:lnTo>
+                    <a:pt x="1521529" y="1246685"/>
+                  </a:lnTo>
+                  <a:lnTo>
+                    <a:pt x="1598773" y="1341037"/>
+                  </a:lnTo>
+                  <a:lnTo>
+                    <a:pt x="1676016" y="1431409"/>
+                  </a:lnTo>
+                  <a:lnTo>
+                    <a:pt x="1753260" y="1517970"/>
+                  </a:lnTo>
+                  <a:lnTo>
+                    <a:pt x="1830504" y="1600880"/>
+                  </a:lnTo>
+                  <a:lnTo>
+                    <a:pt x="1907747" y="1680293"/>
+                  </a:lnTo>
+                  <a:lnTo>
+                    <a:pt x="1984991" y="1756357"/>
+                  </a:lnTo>
+                  <a:lnTo>
+                    <a:pt x="2062234" y="1829213"/>
+                  </a:lnTo>
+                  <a:lnTo>
+                    <a:pt x="2139478" y="1898995"/>
+                  </a:lnTo>
+                  <a:lnTo>
+                    <a:pt x="2216721" y="1965835"/>
+                  </a:lnTo>
+                  <a:lnTo>
+                    <a:pt x="2293965" y="2029856"/>
+                  </a:lnTo>
+                  <a:lnTo>
+                    <a:pt x="2371209" y="2091176"/>
+                  </a:lnTo>
+                  <a:lnTo>
+                    <a:pt x="2448452" y="2149910"/>
+                  </a:lnTo>
+                  <a:lnTo>
+                    <a:pt x="2525696" y="2206167"/>
+                  </a:lnTo>
+                  <a:lnTo>
+                    <a:pt x="2602939" y="2260051"/>
+                  </a:lnTo>
+                  <a:lnTo>
+                    <a:pt x="2680183" y="2311662"/>
+                  </a:lnTo>
+                  <a:lnTo>
+                    <a:pt x="2757426" y="2361097"/>
+                  </a:lnTo>
+                  <a:lnTo>
+                    <a:pt x="2834670" y="2408447"/>
+                  </a:lnTo>
+                  <a:lnTo>
+                    <a:pt x="2911914" y="2453799"/>
+                  </a:lnTo>
+                  <a:lnTo>
+                    <a:pt x="2989157" y="2497239"/>
+                  </a:lnTo>
+                  <a:lnTo>
+                    <a:pt x="3066401" y="2538847"/>
+                  </a:lnTo>
+                  <a:lnTo>
+                    <a:pt x="3143644" y="2578700"/>
+                  </a:lnTo>
+                  <a:lnTo>
+                    <a:pt x="3220888" y="2616871"/>
+                  </a:lnTo>
+                  <a:lnTo>
+                    <a:pt x="3298131" y="2653433"/>
+                  </a:lnTo>
+                  <a:lnTo>
+                    <a:pt x="3375375" y="2658452"/>
+                  </a:lnTo>
+                  <a:lnTo>
+                    <a:pt x="3452619" y="2662700"/>
+                  </a:lnTo>
+                  <a:lnTo>
+                    <a:pt x="3529862" y="2666927"/>
+                  </a:lnTo>
+                  <a:lnTo>
+                    <a:pt x="3607106" y="2671132"/>
+                  </a:lnTo>
+                  <a:lnTo>
+                    <a:pt x="3684349" y="2675315"/>
+                  </a:lnTo>
+                  <a:lnTo>
+                    <a:pt x="3761593" y="2679476"/>
+                  </a:lnTo>
+                  <a:lnTo>
+                    <a:pt x="3838836" y="2683617"/>
+                  </a:lnTo>
+                  <a:lnTo>
+                    <a:pt x="3916080" y="2687736"/>
+                  </a:lnTo>
+                  <a:lnTo>
+                    <a:pt x="3993324" y="2691833"/>
+                  </a:lnTo>
+                  <a:lnTo>
+                    <a:pt x="4070567" y="2695910"/>
+                  </a:lnTo>
+                  <a:lnTo>
+                    <a:pt x="4147811" y="2699966"/>
+                  </a:lnTo>
+                  <a:lnTo>
+                    <a:pt x="4225054" y="2704000"/>
+                  </a:lnTo>
+                  <a:lnTo>
+                    <a:pt x="4302298" y="2708014"/>
+                  </a:lnTo>
+                  <a:lnTo>
+                    <a:pt x="4379541" y="2712008"/>
+                  </a:lnTo>
+                  <a:lnTo>
+                    <a:pt x="4456785" y="2715980"/>
+                  </a:lnTo>
+                  <a:lnTo>
+                    <a:pt x="4534029" y="2719933"/>
+                  </a:lnTo>
+                  <a:lnTo>
+                    <a:pt x="4611272" y="2723865"/>
+                  </a:lnTo>
+                  <a:lnTo>
+                    <a:pt x="4688516" y="2727776"/>
+                  </a:lnTo>
+                  <a:lnTo>
+                    <a:pt x="4765759" y="2731668"/>
+                  </a:lnTo>
+                  <a:lnTo>
+                    <a:pt x="4843003" y="2735540"/>
+                  </a:lnTo>
+                  <a:lnTo>
+                    <a:pt x="4920246" y="2739391"/>
+                  </a:lnTo>
+                  <a:lnTo>
+                    <a:pt x="4997490" y="2743223"/>
+                  </a:lnTo>
+                  <a:lnTo>
+                    <a:pt x="5074734" y="2747035"/>
+                  </a:lnTo>
+                  <a:lnTo>
+                    <a:pt x="5151977" y="2750828"/>
+                  </a:lnTo>
+                  <a:lnTo>
+                    <a:pt x="5229221" y="2754600"/>
+                  </a:lnTo>
+                  <a:lnTo>
+                    <a:pt x="5306464" y="2758354"/>
+                  </a:lnTo>
+                  <a:lnTo>
+                    <a:pt x="5383708" y="2762088"/>
+                  </a:lnTo>
+                  <a:lnTo>
+                    <a:pt x="5460951" y="2765803"/>
+                  </a:lnTo>
+                  <a:lnTo>
+                    <a:pt x="5538195" y="2769499"/>
+                  </a:lnTo>
+                  <a:lnTo>
+                    <a:pt x="5615439" y="2773176"/>
+                  </a:lnTo>
+                  <a:lnTo>
+                    <a:pt x="5692682" y="2776834"/>
+                  </a:lnTo>
+                  <a:lnTo>
+                    <a:pt x="5769926" y="2780473"/>
+                  </a:lnTo>
+                  <a:lnTo>
+                    <a:pt x="5847169" y="2784093"/>
+                  </a:lnTo>
+                  <a:lnTo>
+                    <a:pt x="5924413" y="2787695"/>
+                  </a:lnTo>
+                  <a:lnTo>
+                    <a:pt x="6001656" y="2791278"/>
+                  </a:lnTo>
+                  <a:lnTo>
+                    <a:pt x="6078900" y="2794843"/>
+                  </a:lnTo>
+                  <a:lnTo>
+                    <a:pt x="6156144" y="2798389"/>
+                  </a:lnTo>
+                  <a:lnTo>
+                    <a:pt x="6233387" y="2801917"/>
+                  </a:lnTo>
+                  <a:lnTo>
+                    <a:pt x="6310631" y="2805427"/>
+                  </a:lnTo>
+                  <a:lnTo>
+                    <a:pt x="6387874" y="2808919"/>
+                  </a:lnTo>
+                  <a:lnTo>
+                    <a:pt x="6465118" y="2812393"/>
+                  </a:lnTo>
+                  <a:lnTo>
+                    <a:pt x="6542361" y="2815849"/>
+                  </a:lnTo>
+                  <a:lnTo>
+                    <a:pt x="6619605" y="2819287"/>
+                  </a:lnTo>
+                  <a:lnTo>
+                    <a:pt x="6696849" y="2822707"/>
+                  </a:lnTo>
+                  <a:lnTo>
+                    <a:pt x="6774092" y="2826110"/>
+                  </a:lnTo>
+                  <a:lnTo>
+                    <a:pt x="6851336" y="2829496"/>
+                  </a:lnTo>
+                  <a:lnTo>
+                    <a:pt x="6928579" y="2832864"/>
+                  </a:lnTo>
+                  <a:lnTo>
+                    <a:pt x="7005823" y="2836214"/>
+                  </a:lnTo>
+                  <a:lnTo>
+                    <a:pt x="7083066" y="2839548"/>
+                  </a:lnTo>
+                  <a:lnTo>
+                    <a:pt x="7160310" y="2842864"/>
+                  </a:lnTo>
+                  <a:lnTo>
+                    <a:pt x="7237554" y="2846163"/>
+                  </a:lnTo>
+                  <a:lnTo>
+                    <a:pt x="7314797" y="2849445"/>
+                  </a:lnTo>
+                  <a:lnTo>
+                    <a:pt x="7392041" y="2852710"/>
+                  </a:lnTo>
+                  <a:lnTo>
+                    <a:pt x="7392041" y="3399147"/>
+                  </a:lnTo>
+                  <a:lnTo>
+                    <a:pt x="7314797" y="3395422"/>
+                  </a:lnTo>
+                  <a:lnTo>
+                    <a:pt x="7237554" y="3391532"/>
+                  </a:lnTo>
+                  <a:lnTo>
+                    <a:pt x="7160310" y="3387472"/>
+                  </a:lnTo>
+                  <a:lnTo>
+                    <a:pt x="7083066" y="3383233"/>
+                  </a:lnTo>
+                  <a:lnTo>
+                    <a:pt x="7005823" y="3378807"/>
+                  </a:lnTo>
+                  <a:lnTo>
+                    <a:pt x="6928579" y="3374186"/>
+                  </a:lnTo>
+                  <a:lnTo>
+                    <a:pt x="6851336" y="3369361"/>
+                  </a:lnTo>
+                  <a:lnTo>
+                    <a:pt x="6774092" y="3364324"/>
+                  </a:lnTo>
+                  <a:lnTo>
+                    <a:pt x="6696849" y="3359066"/>
+                  </a:lnTo>
+                  <a:lnTo>
+                    <a:pt x="6619605" y="3353576"/>
+                  </a:lnTo>
+                  <a:lnTo>
+                    <a:pt x="6542361" y="3347844"/>
+                  </a:lnTo>
+                  <a:lnTo>
+                    <a:pt x="6465118" y="3341859"/>
+                  </a:lnTo>
+                  <a:lnTo>
+                    <a:pt x="6387874" y="3335612"/>
+                  </a:lnTo>
+                  <a:lnTo>
+                    <a:pt x="6310631" y="3329089"/>
+                  </a:lnTo>
+                  <a:lnTo>
+                    <a:pt x="6233387" y="3322278"/>
+                  </a:lnTo>
+                  <a:lnTo>
+                    <a:pt x="6156144" y="3315168"/>
+                  </a:lnTo>
+                  <a:lnTo>
+                    <a:pt x="6078900" y="3307745"/>
+                  </a:lnTo>
+                  <a:lnTo>
+                    <a:pt x="6001656" y="3299995"/>
+                  </a:lnTo>
+                  <a:lnTo>
+                    <a:pt x="5924413" y="3291904"/>
+                  </a:lnTo>
+                  <a:lnTo>
+                    <a:pt x="5847169" y="3283456"/>
+                  </a:lnTo>
+                  <a:lnTo>
+                    <a:pt x="5769926" y="3274637"/>
+                  </a:lnTo>
+                  <a:lnTo>
+                    <a:pt x="5692682" y="3265429"/>
+                  </a:lnTo>
+                  <a:lnTo>
+                    <a:pt x="5615439" y="3255815"/>
+                  </a:lnTo>
+                  <a:lnTo>
+                    <a:pt x="5538195" y="3245779"/>
+                  </a:lnTo>
+                  <a:lnTo>
+                    <a:pt x="5460951" y="3235300"/>
+                  </a:lnTo>
+                  <a:lnTo>
+                    <a:pt x="5383708" y="3224360"/>
+                  </a:lnTo>
+                  <a:lnTo>
+                    <a:pt x="5306464" y="3212938"/>
+                  </a:lnTo>
+                  <a:lnTo>
+                    <a:pt x="5229221" y="3201013"/>
+                  </a:lnTo>
+                  <a:lnTo>
+                    <a:pt x="5151977" y="3188564"/>
+                  </a:lnTo>
+                  <a:lnTo>
+                    <a:pt x="5074734" y="3175566"/>
+                  </a:lnTo>
+                  <a:lnTo>
+                    <a:pt x="4997490" y="3161995"/>
+                  </a:lnTo>
+                  <a:lnTo>
+                    <a:pt x="4920246" y="3147827"/>
+                  </a:lnTo>
+                  <a:lnTo>
+                    <a:pt x="4843003" y="3133035"/>
+                  </a:lnTo>
+                  <a:lnTo>
+                    <a:pt x="4765759" y="3117592"/>
+                  </a:lnTo>
+                  <a:lnTo>
+                    <a:pt x="4688516" y="3101469"/>
+                  </a:lnTo>
+                  <a:lnTo>
+                    <a:pt x="4611272" y="3084636"/>
+                  </a:lnTo>
+                  <a:lnTo>
+                    <a:pt x="4534029" y="3067061"/>
+                  </a:lnTo>
+                  <a:lnTo>
+                    <a:pt x="4456785" y="3048713"/>
+                  </a:lnTo>
+                  <a:lnTo>
+                    <a:pt x="4379541" y="3029557"/>
+                  </a:lnTo>
+                  <a:lnTo>
+                    <a:pt x="4302298" y="3009557"/>
+                  </a:lnTo>
+                  <a:lnTo>
+                    <a:pt x="4225054" y="2988677"/>
+                  </a:lnTo>
+                  <a:lnTo>
+                    <a:pt x="4147811" y="2966877"/>
+                  </a:lnTo>
+                  <a:lnTo>
+                    <a:pt x="4070567" y="2944117"/>
+                  </a:lnTo>
+                  <a:lnTo>
+                    <a:pt x="3993324" y="2920355"/>
+                  </a:lnTo>
+                  <a:lnTo>
+                    <a:pt x="3916080" y="2895547"/>
+                  </a:lnTo>
+                  <a:lnTo>
+                    <a:pt x="3838836" y="2869646"/>
+                  </a:lnTo>
+                  <a:lnTo>
+                    <a:pt x="3761593" y="2842605"/>
+                  </a:lnTo>
+                  <a:lnTo>
+                    <a:pt x="3684349" y="2814373"/>
+                  </a:lnTo>
+                  <a:lnTo>
+                    <a:pt x="3607106" y="2784897"/>
+                  </a:lnTo>
+                  <a:lnTo>
+                    <a:pt x="3529862" y="2754124"/>
+                  </a:lnTo>
+                  <a:lnTo>
+                    <a:pt x="3452619" y="2721996"/>
+                  </a:lnTo>
+                  <a:lnTo>
+                    <a:pt x="3375375" y="2688453"/>
+                  </a:lnTo>
+                  <a:lnTo>
+                    <a:pt x="3298131" y="2654181"/>
+                  </a:lnTo>
+                  <a:lnTo>
+                    <a:pt x="3220888" y="2649889"/>
+                  </a:lnTo>
+                  <a:lnTo>
+                    <a:pt x="3143644" y="2645574"/>
+                  </a:lnTo>
+                  <a:lnTo>
+                    <a:pt x="3066401" y="2641237"/>
+                  </a:lnTo>
+                  <a:lnTo>
+                    <a:pt x="2989157" y="2636877"/>
+                  </a:lnTo>
+                  <a:lnTo>
+                    <a:pt x="2911914" y="2632495"/>
+                  </a:lnTo>
+                  <a:lnTo>
+                    <a:pt x="2834670" y="2628090"/>
+                  </a:lnTo>
+                  <a:lnTo>
+                    <a:pt x="2757426" y="2623663"/>
+                  </a:lnTo>
+                  <a:lnTo>
+                    <a:pt x="2680183" y="2619212"/>
+                  </a:lnTo>
+                  <a:lnTo>
+                    <a:pt x="2602939" y="2614739"/>
+                  </a:lnTo>
+                  <a:lnTo>
+                    <a:pt x="2525696" y="2610242"/>
+                  </a:lnTo>
+                  <a:lnTo>
+                    <a:pt x="2448452" y="2605722"/>
+                  </a:lnTo>
+                  <a:lnTo>
+                    <a:pt x="2371209" y="2601179"/>
+                  </a:lnTo>
+                  <a:lnTo>
+                    <a:pt x="2293965" y="2596612"/>
+                  </a:lnTo>
+                  <a:lnTo>
+                    <a:pt x="2216721" y="2592022"/>
+                  </a:lnTo>
+                  <a:lnTo>
+                    <a:pt x="2139478" y="2587408"/>
+                  </a:lnTo>
+                  <a:lnTo>
+                    <a:pt x="2062234" y="2582770"/>
+                  </a:lnTo>
+                  <a:lnTo>
+                    <a:pt x="1984991" y="2578108"/>
+                  </a:lnTo>
+                  <a:lnTo>
+                    <a:pt x="1907747" y="2573421"/>
+                  </a:lnTo>
+                  <a:lnTo>
+                    <a:pt x="1830504" y="2568711"/>
+                  </a:lnTo>
+                  <a:lnTo>
+                    <a:pt x="1753260" y="2563976"/>
+                  </a:lnTo>
+                  <a:lnTo>
+                    <a:pt x="1676016" y="2559217"/>
+                  </a:lnTo>
+                  <a:lnTo>
+                    <a:pt x="1598773" y="2554433"/>
+                  </a:lnTo>
+                  <a:lnTo>
+                    <a:pt x="1521529" y="2549624"/>
+                  </a:lnTo>
+                  <a:lnTo>
+                    <a:pt x="1444286" y="2544791"/>
+                  </a:lnTo>
+                  <a:lnTo>
+                    <a:pt x="1367042" y="2539932"/>
+                  </a:lnTo>
+                  <a:lnTo>
+                    <a:pt x="1289799" y="2535048"/>
+                  </a:lnTo>
+                  <a:lnTo>
+                    <a:pt x="1212555" y="2530139"/>
+                  </a:lnTo>
+                  <a:lnTo>
+                    <a:pt x="1135311" y="2525205"/>
+                  </a:lnTo>
+                  <a:lnTo>
+                    <a:pt x="1058068" y="2520245"/>
+                  </a:lnTo>
+                  <a:lnTo>
+                    <a:pt x="980824" y="2515259"/>
+                  </a:lnTo>
+                  <a:lnTo>
+                    <a:pt x="903581" y="2510248"/>
+                  </a:lnTo>
+                  <a:lnTo>
+                    <a:pt x="826337" y="2505211"/>
+                  </a:lnTo>
+                  <a:lnTo>
+                    <a:pt x="749094" y="2500147"/>
+                  </a:lnTo>
+                  <a:lnTo>
+                    <a:pt x="671850" y="2495058"/>
+                  </a:lnTo>
+                  <a:lnTo>
+                    <a:pt x="594606" y="2489942"/>
+                  </a:lnTo>
+                  <a:lnTo>
+                    <a:pt x="517363" y="2484799"/>
+                  </a:lnTo>
+                  <a:lnTo>
+                    <a:pt x="440119" y="2479630"/>
+                  </a:lnTo>
+                  <a:lnTo>
+                    <a:pt x="362876" y="2474435"/>
+                  </a:lnTo>
+                  <a:lnTo>
+                    <a:pt x="285632" y="2469212"/>
+                  </a:lnTo>
+                  <a:lnTo>
+                    <a:pt x="208389" y="2463962"/>
+                  </a:lnTo>
+                  <a:lnTo>
+                    <a:pt x="131145" y="2458685"/>
+                  </a:lnTo>
+                  <a:lnTo>
+                    <a:pt x="53901" y="2453381"/>
+                  </a:lnTo>
+                  <a:lnTo>
+                    <a:pt x="0" y="2449661"/>
                   </a:lnTo>
                   <a:close/>
                 </a:path>
@@ -3588,276 +3588,276 @@
           </p:nvSpPr>
           <p:spPr>
             <a:xfrm>
-              <a:off x="1545390" y="1896563"/>
-              <a:ext cx="6664168" cy="2991014"/>
+              <a:off x="1545390" y="2073503"/>
+              <a:ext cx="6664168" cy="2852710"/>
             </a:xfrm>
             <a:custGeom>
               <a:avLst/>
               <a:pathLst>
-                <a:path w="6664168" h="2991014">
+                <a:path w="6664168" h="2852710">
                   <a:moveTo>
                     <a:pt x="0" y="0"/>
                   </a:moveTo>
                   <a:lnTo>
-                    <a:pt x="21221" y="43660"/>
-                  </a:lnTo>
-                  <a:lnTo>
-                    <a:pt x="98465" y="195875"/>
-                  </a:lnTo>
-                  <a:lnTo>
-                    <a:pt x="175708" y="341671"/>
-                  </a:lnTo>
-                  <a:lnTo>
-                    <a:pt x="252952" y="481317"/>
-                  </a:lnTo>
-                  <a:lnTo>
-                    <a:pt x="330196" y="615073"/>
-                  </a:lnTo>
-                  <a:lnTo>
-                    <a:pt x="407439" y="743187"/>
-                  </a:lnTo>
-                  <a:lnTo>
-                    <a:pt x="484683" y="865899"/>
-                  </a:lnTo>
-                  <a:lnTo>
-                    <a:pt x="561926" y="983435"/>
-                  </a:lnTo>
-                  <a:lnTo>
-                    <a:pt x="639170" y="1096013"/>
-                  </a:lnTo>
-                  <a:lnTo>
-                    <a:pt x="716413" y="1203843"/>
-                  </a:lnTo>
-                  <a:lnTo>
-                    <a:pt x="793657" y="1307126"/>
-                  </a:lnTo>
-                  <a:lnTo>
-                    <a:pt x="870901" y="1406052"/>
-                  </a:lnTo>
-                  <a:lnTo>
-                    <a:pt x="948144" y="1500806"/>
-                  </a:lnTo>
-                  <a:lnTo>
-                    <a:pt x="1025388" y="1591563"/>
-                  </a:lnTo>
-                  <a:lnTo>
-                    <a:pt x="1102631" y="1678493"/>
-                  </a:lnTo>
-                  <a:lnTo>
-                    <a:pt x="1179875" y="1761756"/>
-                  </a:lnTo>
-                  <a:lnTo>
-                    <a:pt x="1257118" y="1841508"/>
-                  </a:lnTo>
-                  <a:lnTo>
-                    <a:pt x="1334362" y="1917895"/>
-                  </a:lnTo>
-                  <a:lnTo>
-                    <a:pt x="1411606" y="1991061"/>
-                  </a:lnTo>
-                  <a:lnTo>
-                    <a:pt x="1488849" y="2061141"/>
-                  </a:lnTo>
-                  <a:lnTo>
-                    <a:pt x="1566093" y="2128266"/>
-                  </a:lnTo>
-                  <a:lnTo>
-                    <a:pt x="1643336" y="2192559"/>
-                  </a:lnTo>
-                  <a:lnTo>
-                    <a:pt x="1720580" y="2254141"/>
-                  </a:lnTo>
-                  <a:lnTo>
-                    <a:pt x="1797823" y="2313125"/>
-                  </a:lnTo>
-                  <a:lnTo>
-                    <a:pt x="1875067" y="2369621"/>
-                  </a:lnTo>
-                  <a:lnTo>
-                    <a:pt x="1952311" y="2423735"/>
-                  </a:lnTo>
-                  <a:lnTo>
-                    <a:pt x="2029554" y="2475566"/>
-                  </a:lnTo>
-                  <a:lnTo>
-                    <a:pt x="2106798" y="2525212"/>
-                  </a:lnTo>
-                  <a:lnTo>
-                    <a:pt x="2184041" y="2572763"/>
-                  </a:lnTo>
-                  <a:lnTo>
-                    <a:pt x="2261285" y="2618309"/>
-                  </a:lnTo>
-                  <a:lnTo>
-                    <a:pt x="2338528" y="2661934"/>
-                  </a:lnTo>
-                  <a:lnTo>
-                    <a:pt x="2415772" y="2703719"/>
-                  </a:lnTo>
-                  <a:lnTo>
-                    <a:pt x="2493016" y="2743741"/>
-                  </a:lnTo>
-                  <a:lnTo>
-                    <a:pt x="2570259" y="2782076"/>
-                  </a:lnTo>
-                  <a:lnTo>
-                    <a:pt x="2647503" y="2787337"/>
-                  </a:lnTo>
-                  <a:lnTo>
-                    <a:pt x="2724746" y="2791792"/>
-                  </a:lnTo>
-                  <a:lnTo>
-                    <a:pt x="2801990" y="2796223"/>
-                  </a:lnTo>
-                  <a:lnTo>
-                    <a:pt x="2879233" y="2800632"/>
-                  </a:lnTo>
-                  <a:lnTo>
-                    <a:pt x="2956477" y="2805018"/>
-                  </a:lnTo>
-                  <a:lnTo>
-                    <a:pt x="3033721" y="2809381"/>
-                  </a:lnTo>
-                  <a:lnTo>
-                    <a:pt x="3110964" y="2813722"/>
-                  </a:lnTo>
-                  <a:lnTo>
-                    <a:pt x="3188208" y="2818041"/>
-                  </a:lnTo>
-                  <a:lnTo>
-                    <a:pt x="3265451" y="2822337"/>
-                  </a:lnTo>
-                  <a:lnTo>
-                    <a:pt x="3342695" y="2826611"/>
-                  </a:lnTo>
-                  <a:lnTo>
-                    <a:pt x="3419938" y="2830864"/>
-                  </a:lnTo>
-                  <a:lnTo>
-                    <a:pt x="3497182" y="2835094"/>
-                  </a:lnTo>
-                  <a:lnTo>
-                    <a:pt x="3574426" y="2839303"/>
-                  </a:lnTo>
-                  <a:lnTo>
-                    <a:pt x="3651669" y="2843490"/>
-                  </a:lnTo>
-                  <a:lnTo>
-                    <a:pt x="3728913" y="2847655"/>
-                  </a:lnTo>
-                  <a:lnTo>
-                    <a:pt x="3806156" y="2851799"/>
-                  </a:lnTo>
-                  <a:lnTo>
-                    <a:pt x="3883400" y="2855921"/>
-                  </a:lnTo>
-                  <a:lnTo>
-                    <a:pt x="3960643" y="2860023"/>
-                  </a:lnTo>
-                  <a:lnTo>
-                    <a:pt x="4037887" y="2864103"/>
-                  </a:lnTo>
-                  <a:lnTo>
-                    <a:pt x="4115131" y="2868162"/>
-                  </a:lnTo>
-                  <a:lnTo>
-                    <a:pt x="4192374" y="2872201"/>
-                  </a:lnTo>
-                  <a:lnTo>
-                    <a:pt x="4269618" y="2876218"/>
-                  </a:lnTo>
-                  <a:lnTo>
-                    <a:pt x="4346861" y="2880215"/>
-                  </a:lnTo>
-                  <a:lnTo>
-                    <a:pt x="4424105" y="2884191"/>
-                  </a:lnTo>
-                  <a:lnTo>
-                    <a:pt x="4501348" y="2888147"/>
-                  </a:lnTo>
-                  <a:lnTo>
-                    <a:pt x="4578592" y="2892083"/>
-                  </a:lnTo>
-                  <a:lnTo>
-                    <a:pt x="4655836" y="2895998"/>
-                  </a:lnTo>
-                  <a:lnTo>
-                    <a:pt x="4733079" y="2899893"/>
-                  </a:lnTo>
-                  <a:lnTo>
-                    <a:pt x="4810323" y="2903768"/>
-                  </a:lnTo>
-                  <a:lnTo>
-                    <a:pt x="4887566" y="2907623"/>
-                  </a:lnTo>
-                  <a:lnTo>
-                    <a:pt x="4964810" y="2911458"/>
-                  </a:lnTo>
-                  <a:lnTo>
-                    <a:pt x="5042053" y="2915274"/>
-                  </a:lnTo>
-                  <a:lnTo>
-                    <a:pt x="5119297" y="2919070"/>
-                  </a:lnTo>
-                  <a:lnTo>
-                    <a:pt x="5196541" y="2922846"/>
-                  </a:lnTo>
-                  <a:lnTo>
-                    <a:pt x="5273784" y="2926603"/>
-                  </a:lnTo>
-                  <a:lnTo>
-                    <a:pt x="5351028" y="2930340"/>
-                  </a:lnTo>
-                  <a:lnTo>
-                    <a:pt x="5428271" y="2934059"/>
-                  </a:lnTo>
-                  <a:lnTo>
-                    <a:pt x="5505515" y="2937758"/>
-                  </a:lnTo>
-                  <a:lnTo>
-                    <a:pt x="5582758" y="2941438"/>
-                  </a:lnTo>
-                  <a:lnTo>
-                    <a:pt x="5660002" y="2945099"/>
-                  </a:lnTo>
-                  <a:lnTo>
-                    <a:pt x="5737246" y="2948741"/>
-                  </a:lnTo>
-                  <a:lnTo>
-                    <a:pt x="5814489" y="2952365"/>
-                  </a:lnTo>
-                  <a:lnTo>
-                    <a:pt x="5891733" y="2955970"/>
-                  </a:lnTo>
-                  <a:lnTo>
-                    <a:pt x="5968976" y="2959556"/>
-                  </a:lnTo>
-                  <a:lnTo>
-                    <a:pt x="6046220" y="2963124"/>
-                  </a:lnTo>
-                  <a:lnTo>
-                    <a:pt x="6123463" y="2966674"/>
-                  </a:lnTo>
-                  <a:lnTo>
-                    <a:pt x="6200707" y="2970205"/>
-                  </a:lnTo>
-                  <a:lnTo>
-                    <a:pt x="6277951" y="2973718"/>
-                  </a:lnTo>
-                  <a:lnTo>
-                    <a:pt x="6355194" y="2977213"/>
-                  </a:lnTo>
-                  <a:lnTo>
-                    <a:pt x="6432438" y="2980690"/>
-                  </a:lnTo>
-                  <a:lnTo>
-                    <a:pt x="6509681" y="2984149"/>
-                  </a:lnTo>
-                  <a:lnTo>
-                    <a:pt x="6586925" y="2987590"/>
-                  </a:lnTo>
-                  <a:lnTo>
-                    <a:pt x="6664168" y="2991014"/>
+                    <a:pt x="21221" y="41641"/>
+                  </a:lnTo>
+                  <a:lnTo>
+                    <a:pt x="98465" y="186818"/>
+                  </a:lnTo>
+                  <a:lnTo>
+                    <a:pt x="175708" y="325872"/>
+                  </a:lnTo>
+                  <a:lnTo>
+                    <a:pt x="252952" y="459061"/>
+                  </a:lnTo>
+                  <a:lnTo>
+                    <a:pt x="330196" y="586632"/>
+                  </a:lnTo>
+                  <a:lnTo>
+                    <a:pt x="407439" y="708823"/>
+                  </a:lnTo>
+                  <a:lnTo>
+                    <a:pt x="484683" y="825860"/>
+                  </a:lnTo>
+                  <a:lnTo>
+                    <a:pt x="561926" y="937961"/>
+                  </a:lnTo>
+                  <a:lnTo>
+                    <a:pt x="639170" y="1045334"/>
+                  </a:lnTo>
+                  <a:lnTo>
+                    <a:pt x="716413" y="1148178"/>
+                  </a:lnTo>
+                  <a:lnTo>
+                    <a:pt x="793657" y="1246685"/>
+                  </a:lnTo>
+                  <a:lnTo>
+                    <a:pt x="870901" y="1341037"/>
+                  </a:lnTo>
+                  <a:lnTo>
+                    <a:pt x="948144" y="1431409"/>
+                  </a:lnTo>
+                  <a:lnTo>
+                    <a:pt x="1025388" y="1517970"/>
+                  </a:lnTo>
+                  <a:lnTo>
+                    <a:pt x="1102631" y="1600880"/>
+                  </a:lnTo>
+                  <a:lnTo>
+                    <a:pt x="1179875" y="1680293"/>
+                  </a:lnTo>
+                  <a:lnTo>
+                    <a:pt x="1257118" y="1756357"/>
+                  </a:lnTo>
+                  <a:lnTo>
+                    <a:pt x="1334362" y="1829213"/>
+                  </a:lnTo>
+                  <a:lnTo>
+                    <a:pt x="1411606" y="1898995"/>
+                  </a:lnTo>
+                  <a:lnTo>
+                    <a:pt x="1488849" y="1965835"/>
+                  </a:lnTo>
+                  <a:lnTo>
+                    <a:pt x="1566093" y="2029856"/>
+                  </a:lnTo>
+                  <a:lnTo>
+                    <a:pt x="1643336" y="2091176"/>
+                  </a:lnTo>
+                  <a:lnTo>
+                    <a:pt x="1720580" y="2149910"/>
+                  </a:lnTo>
+                  <a:lnTo>
+                    <a:pt x="1797823" y="2206167"/>
+                  </a:lnTo>
+                  <a:lnTo>
+                    <a:pt x="1875067" y="2260051"/>
+                  </a:lnTo>
+                  <a:lnTo>
+                    <a:pt x="1952311" y="2311662"/>
+                  </a:lnTo>
+                  <a:lnTo>
+                    <a:pt x="2029554" y="2361097"/>
+                  </a:lnTo>
+                  <a:lnTo>
+                    <a:pt x="2106798" y="2408447"/>
+                  </a:lnTo>
+                  <a:lnTo>
+                    <a:pt x="2184041" y="2453799"/>
+                  </a:lnTo>
+                  <a:lnTo>
+                    <a:pt x="2261285" y="2497239"/>
+                  </a:lnTo>
+                  <a:lnTo>
+                    <a:pt x="2338528" y="2538847"/>
+                  </a:lnTo>
+                  <a:lnTo>
+                    <a:pt x="2415772" y="2578700"/>
+                  </a:lnTo>
+                  <a:lnTo>
+                    <a:pt x="2493016" y="2616871"/>
+                  </a:lnTo>
+                  <a:lnTo>
+                    <a:pt x="2570259" y="2653433"/>
+                  </a:lnTo>
+                  <a:lnTo>
+                    <a:pt x="2647503" y="2658452"/>
+                  </a:lnTo>
+                  <a:lnTo>
+                    <a:pt x="2724746" y="2662700"/>
+                  </a:lnTo>
+                  <a:lnTo>
+                    <a:pt x="2801990" y="2666927"/>
+                  </a:lnTo>
+                  <a:lnTo>
+                    <a:pt x="2879233" y="2671132"/>
+                  </a:lnTo>
+                  <a:lnTo>
+                    <a:pt x="2956477" y="2675315"/>
+                  </a:lnTo>
+                  <a:lnTo>
+                    <a:pt x="3033721" y="2679476"/>
+                  </a:lnTo>
+                  <a:lnTo>
+                    <a:pt x="3110964" y="2683617"/>
+                  </a:lnTo>
+                  <a:lnTo>
+                    <a:pt x="3188208" y="2687736"/>
+                  </a:lnTo>
+                  <a:lnTo>
+                    <a:pt x="3265451" y="2691833"/>
+                  </a:lnTo>
+                  <a:lnTo>
+                    <a:pt x="3342695" y="2695910"/>
+                  </a:lnTo>
+                  <a:lnTo>
+                    <a:pt x="3419938" y="2699966"/>
+                  </a:lnTo>
+                  <a:lnTo>
+                    <a:pt x="3497182" y="2704000"/>
+                  </a:lnTo>
+                  <a:lnTo>
+                    <a:pt x="3574426" y="2708014"/>
+                  </a:lnTo>
+                  <a:lnTo>
+                    <a:pt x="3651669" y="2712008"/>
+                  </a:lnTo>
+                  <a:lnTo>
+                    <a:pt x="3728913" y="2715980"/>
+                  </a:lnTo>
+                  <a:lnTo>
+                    <a:pt x="3806156" y="2719933"/>
+                  </a:lnTo>
+                  <a:lnTo>
+                    <a:pt x="3883400" y="2723865"/>
+                  </a:lnTo>
+                  <a:lnTo>
+                    <a:pt x="3960643" y="2727776"/>
+                  </a:lnTo>
+                  <a:lnTo>
+                    <a:pt x="4037887" y="2731668"/>
+                  </a:lnTo>
+                  <a:lnTo>
+                    <a:pt x="4115131" y="2735540"/>
+                  </a:lnTo>
+                  <a:lnTo>
+                    <a:pt x="4192374" y="2739391"/>
+                  </a:lnTo>
+                  <a:lnTo>
+                    <a:pt x="4269618" y="2743223"/>
+                  </a:lnTo>
+                  <a:lnTo>
+                    <a:pt x="4346861" y="2747035"/>
+                  </a:lnTo>
+                  <a:lnTo>
+                    <a:pt x="4424105" y="2750828"/>
+                  </a:lnTo>
+                  <a:lnTo>
+                    <a:pt x="4501348" y="2754600"/>
+                  </a:lnTo>
+                  <a:lnTo>
+                    <a:pt x="4578592" y="2758354"/>
+                  </a:lnTo>
+                  <a:lnTo>
+                    <a:pt x="4655836" y="2762088"/>
+                  </a:lnTo>
+                  <a:lnTo>
+                    <a:pt x="4733079" y="2765803"/>
+                  </a:lnTo>
+                  <a:lnTo>
+                    <a:pt x="4810323" y="2769499"/>
+                  </a:lnTo>
+                  <a:lnTo>
+                    <a:pt x="4887566" y="2773176"/>
+                  </a:lnTo>
+                  <a:lnTo>
+                    <a:pt x="4964810" y="2776834"/>
+                  </a:lnTo>
+                  <a:lnTo>
+                    <a:pt x="5042053" y="2780473"/>
+                  </a:lnTo>
+                  <a:lnTo>
+                    <a:pt x="5119297" y="2784093"/>
+                  </a:lnTo>
+                  <a:lnTo>
+                    <a:pt x="5196541" y="2787695"/>
+                  </a:lnTo>
+                  <a:lnTo>
+                    <a:pt x="5273784" y="2791278"/>
+                  </a:lnTo>
+                  <a:lnTo>
+                    <a:pt x="5351028" y="2794843"/>
+                  </a:lnTo>
+                  <a:lnTo>
+                    <a:pt x="5428271" y="2798389"/>
+                  </a:lnTo>
+                  <a:lnTo>
+                    <a:pt x="5505515" y="2801917"/>
+                  </a:lnTo>
+                  <a:lnTo>
+                    <a:pt x="5582758" y="2805427"/>
+                  </a:lnTo>
+                  <a:lnTo>
+                    <a:pt x="5660002" y="2808919"/>
+                  </a:lnTo>
+                  <a:lnTo>
+                    <a:pt x="5737246" y="2812393"/>
+                  </a:lnTo>
+                  <a:lnTo>
+                    <a:pt x="5814489" y="2815849"/>
+                  </a:lnTo>
+                  <a:lnTo>
+                    <a:pt x="5891733" y="2819287"/>
+                  </a:lnTo>
+                  <a:lnTo>
+                    <a:pt x="5968976" y="2822707"/>
+                  </a:lnTo>
+                  <a:lnTo>
+                    <a:pt x="6046220" y="2826110"/>
+                  </a:lnTo>
+                  <a:lnTo>
+                    <a:pt x="6123463" y="2829496"/>
+                  </a:lnTo>
+                  <a:lnTo>
+                    <a:pt x="6200707" y="2832864"/>
+                  </a:lnTo>
+                  <a:lnTo>
+                    <a:pt x="6277951" y="2836214"/>
+                  </a:lnTo>
+                  <a:lnTo>
+                    <a:pt x="6355194" y="2839548"/>
+                  </a:lnTo>
+                  <a:lnTo>
+                    <a:pt x="6432438" y="2842864"/>
+                  </a:lnTo>
+                  <a:lnTo>
+                    <a:pt x="6509681" y="2846163"/>
+                  </a:lnTo>
+                  <a:lnTo>
+                    <a:pt x="6586925" y="2849445"/>
+                  </a:lnTo>
+                  <a:lnTo>
+                    <a:pt x="6664168" y="2852710"/>
                   </a:lnTo>
                 </a:path>
               </a:pathLst>
@@ -3877,300 +3877,300 @@
           </p:nvSpPr>
           <p:spPr>
             <a:xfrm>
-              <a:off x="817517" y="4464987"/>
-              <a:ext cx="7392041" cy="995518"/>
+              <a:off x="817517" y="4523164"/>
+              <a:ext cx="7392041" cy="949486"/>
             </a:xfrm>
             <a:custGeom>
               <a:avLst/>
               <a:pathLst>
-                <a:path w="7392041" h="995518">
+                <a:path w="7392041" h="949486">
                   <a:moveTo>
-                    <a:pt x="7392041" y="995518"/>
+                    <a:pt x="7392041" y="949486"/>
                   </a:moveTo>
                   <a:lnTo>
-                    <a:pt x="7314797" y="991612"/>
-                  </a:lnTo>
-                  <a:lnTo>
-                    <a:pt x="7237554" y="987534"/>
-                  </a:lnTo>
-                  <a:lnTo>
-                    <a:pt x="7160310" y="983277"/>
-                  </a:lnTo>
-                  <a:lnTo>
-                    <a:pt x="7083066" y="978832"/>
-                  </a:lnTo>
-                  <a:lnTo>
-                    <a:pt x="7005823" y="974192"/>
-                  </a:lnTo>
-                  <a:lnTo>
-                    <a:pt x="6928579" y="969347"/>
-                  </a:lnTo>
-                  <a:lnTo>
-                    <a:pt x="6851336" y="964288"/>
-                  </a:lnTo>
-                  <a:lnTo>
-                    <a:pt x="6774092" y="959007"/>
-                  </a:lnTo>
-                  <a:lnTo>
-                    <a:pt x="6696849" y="953494"/>
-                  </a:lnTo>
-                  <a:lnTo>
-                    <a:pt x="6619605" y="947737"/>
-                  </a:lnTo>
-                  <a:lnTo>
-                    <a:pt x="6542361" y="941728"/>
-                  </a:lnTo>
-                  <a:lnTo>
-                    <a:pt x="6465118" y="935453"/>
-                  </a:lnTo>
-                  <a:lnTo>
-                    <a:pt x="6387874" y="928902"/>
-                  </a:lnTo>
-                  <a:lnTo>
-                    <a:pt x="6310631" y="922063"/>
-                  </a:lnTo>
-                  <a:lnTo>
-                    <a:pt x="6233387" y="914923"/>
-                  </a:lnTo>
-                  <a:lnTo>
-                    <a:pt x="6156144" y="907468"/>
-                  </a:lnTo>
-                  <a:lnTo>
-                    <a:pt x="6078900" y="899685"/>
-                  </a:lnTo>
-                  <a:lnTo>
-                    <a:pt x="6001656" y="891559"/>
-                  </a:lnTo>
-                  <a:lnTo>
-                    <a:pt x="5924413" y="883076"/>
-                  </a:lnTo>
-                  <a:lnTo>
-                    <a:pt x="5847169" y="874218"/>
-                  </a:lnTo>
-                  <a:lnTo>
-                    <a:pt x="5769926" y="864971"/>
-                  </a:lnTo>
-                  <a:lnTo>
-                    <a:pt x="5692682" y="855317"/>
-                  </a:lnTo>
-                  <a:lnTo>
-                    <a:pt x="5615439" y="845238"/>
-                  </a:lnTo>
-                  <a:lnTo>
-                    <a:pt x="5538195" y="834714"/>
-                  </a:lnTo>
-                  <a:lnTo>
-                    <a:pt x="5460951" y="823728"/>
-                  </a:lnTo>
-                  <a:lnTo>
-                    <a:pt x="5383708" y="812257"/>
-                  </a:lnTo>
-                  <a:lnTo>
-                    <a:pt x="5306464" y="800282"/>
-                  </a:lnTo>
-                  <a:lnTo>
-                    <a:pt x="5229221" y="787779"/>
-                  </a:lnTo>
-                  <a:lnTo>
-                    <a:pt x="5151977" y="774725"/>
-                  </a:lnTo>
-                  <a:lnTo>
-                    <a:pt x="5074734" y="761097"/>
-                  </a:lnTo>
-                  <a:lnTo>
-                    <a:pt x="4997490" y="746869"/>
-                  </a:lnTo>
-                  <a:lnTo>
-                    <a:pt x="4920246" y="732014"/>
-                  </a:lnTo>
-                  <a:lnTo>
-                    <a:pt x="4843003" y="716505"/>
-                  </a:lnTo>
-                  <a:lnTo>
-                    <a:pt x="4765759" y="700313"/>
-                  </a:lnTo>
-                  <a:lnTo>
-                    <a:pt x="4688516" y="683408"/>
-                  </a:lnTo>
-                  <a:lnTo>
-                    <a:pt x="4611272" y="665759"/>
-                  </a:lnTo>
-                  <a:lnTo>
-                    <a:pt x="4534029" y="647332"/>
-                  </a:lnTo>
-                  <a:lnTo>
-                    <a:pt x="4456785" y="628095"/>
-                  </a:lnTo>
-                  <a:lnTo>
-                    <a:pt x="4379541" y="608010"/>
-                  </a:lnTo>
-                  <a:lnTo>
-                    <a:pt x="4302298" y="587040"/>
-                  </a:lnTo>
-                  <a:lnTo>
-                    <a:pt x="4225054" y="565147"/>
-                  </a:lnTo>
-                  <a:lnTo>
-                    <a:pt x="4147811" y="542291"/>
-                  </a:lnTo>
-                  <a:lnTo>
-                    <a:pt x="4070567" y="518427"/>
-                  </a:lnTo>
-                  <a:lnTo>
-                    <a:pt x="3993324" y="493513"/>
-                  </a:lnTo>
-                  <a:lnTo>
-                    <a:pt x="3916080" y="467502"/>
-                  </a:lnTo>
-                  <a:lnTo>
-                    <a:pt x="3838836" y="440346"/>
-                  </a:lnTo>
-                  <a:lnTo>
-                    <a:pt x="3761593" y="411994"/>
-                  </a:lnTo>
-                  <a:lnTo>
-                    <a:pt x="3684349" y="382393"/>
-                  </a:lnTo>
-                  <a:lnTo>
-                    <a:pt x="3607106" y="351489"/>
-                  </a:lnTo>
-                  <a:lnTo>
-                    <a:pt x="3529862" y="319224"/>
-                  </a:lnTo>
-                  <a:lnTo>
-                    <a:pt x="3452619" y="285538"/>
-                  </a:lnTo>
-                  <a:lnTo>
-                    <a:pt x="3375375" y="250369"/>
-                  </a:lnTo>
-                  <a:lnTo>
-                    <a:pt x="3298131" y="214435"/>
-                  </a:lnTo>
-                  <a:lnTo>
-                    <a:pt x="3220888" y="209935"/>
-                  </a:lnTo>
-                  <a:lnTo>
-                    <a:pt x="3143644" y="205411"/>
-                  </a:lnTo>
-                  <a:lnTo>
-                    <a:pt x="3066401" y="200863"/>
-                  </a:lnTo>
-                  <a:lnTo>
-                    <a:pt x="2989157" y="196292"/>
-                  </a:lnTo>
-                  <a:lnTo>
-                    <a:pt x="2911914" y="191698"/>
-                  </a:lnTo>
-                  <a:lnTo>
-                    <a:pt x="2834670" y="187080"/>
-                  </a:lnTo>
-                  <a:lnTo>
-                    <a:pt x="2757426" y="182437"/>
-                  </a:lnTo>
-                  <a:lnTo>
-                    <a:pt x="2680183" y="177771"/>
-                  </a:lnTo>
-                  <a:lnTo>
-                    <a:pt x="2602939" y="173081"/>
-                  </a:lnTo>
-                  <a:lnTo>
-                    <a:pt x="2525696" y="168366"/>
-                  </a:lnTo>
-                  <a:lnTo>
-                    <a:pt x="2448452" y="163627"/>
-                  </a:lnTo>
-                  <a:lnTo>
-                    <a:pt x="2371209" y="158864"/>
-                  </a:lnTo>
-                  <a:lnTo>
-                    <a:pt x="2293965" y="154075"/>
-                  </a:lnTo>
-                  <a:lnTo>
-                    <a:pt x="2216721" y="149262"/>
-                  </a:lnTo>
-                  <a:lnTo>
-                    <a:pt x="2139478" y="144424"/>
-                  </a:lnTo>
-                  <a:lnTo>
-                    <a:pt x="2062234" y="139562"/>
-                  </a:lnTo>
-                  <a:lnTo>
-                    <a:pt x="1984991" y="134673"/>
-                  </a:lnTo>
-                  <a:lnTo>
-                    <a:pt x="1907747" y="129760"/>
-                  </a:lnTo>
-                  <a:lnTo>
-                    <a:pt x="1830504" y="124821"/>
-                  </a:lnTo>
-                  <a:lnTo>
-                    <a:pt x="1753260" y="119857"/>
-                  </a:lnTo>
-                  <a:lnTo>
-                    <a:pt x="1676016" y="114867"/>
-                  </a:lnTo>
-                  <a:lnTo>
-                    <a:pt x="1598773" y="109851"/>
-                  </a:lnTo>
-                  <a:lnTo>
-                    <a:pt x="1521529" y="104809"/>
-                  </a:lnTo>
-                  <a:lnTo>
-                    <a:pt x="1444286" y="99741"/>
-                  </a:lnTo>
-                  <a:lnTo>
-                    <a:pt x="1367042" y="94647"/>
-                  </a:lnTo>
-                  <a:lnTo>
-                    <a:pt x="1289799" y="89527"/>
-                  </a:lnTo>
-                  <a:lnTo>
-                    <a:pt x="1212555" y="84380"/>
-                  </a:lnTo>
-                  <a:lnTo>
-                    <a:pt x="1135311" y="79206"/>
-                  </a:lnTo>
-                  <a:lnTo>
-                    <a:pt x="1058068" y="74006"/>
-                  </a:lnTo>
-                  <a:lnTo>
-                    <a:pt x="980824" y="68778"/>
-                  </a:lnTo>
-                  <a:lnTo>
-                    <a:pt x="903581" y="63524"/>
-                  </a:lnTo>
-                  <a:lnTo>
-                    <a:pt x="826337" y="58242"/>
-                  </a:lnTo>
-                  <a:lnTo>
-                    <a:pt x="749094" y="52934"/>
-                  </a:lnTo>
-                  <a:lnTo>
-                    <a:pt x="671850" y="47597"/>
-                  </a:lnTo>
-                  <a:lnTo>
-                    <a:pt x="594606" y="42233"/>
-                  </a:lnTo>
-                  <a:lnTo>
-                    <a:pt x="517363" y="36842"/>
-                  </a:lnTo>
-                  <a:lnTo>
-                    <a:pt x="440119" y="31422"/>
-                  </a:lnTo>
-                  <a:lnTo>
-                    <a:pt x="362876" y="25974"/>
-                  </a:lnTo>
-                  <a:lnTo>
-                    <a:pt x="285632" y="20498"/>
-                  </a:lnTo>
-                  <a:lnTo>
-                    <a:pt x="208389" y="14994"/>
-                  </a:lnTo>
-                  <a:lnTo>
-                    <a:pt x="131145" y="9462"/>
-                  </a:lnTo>
-                  <a:lnTo>
-                    <a:pt x="53901" y="3900"/>
+                    <a:pt x="7314797" y="945760"/>
+                  </a:lnTo>
+                  <a:lnTo>
+                    <a:pt x="7237554" y="941871"/>
+                  </a:lnTo>
+                  <a:lnTo>
+                    <a:pt x="7160310" y="937811"/>
+                  </a:lnTo>
+                  <a:lnTo>
+                    <a:pt x="7083066" y="933571"/>
+                  </a:lnTo>
+                  <a:lnTo>
+                    <a:pt x="7005823" y="929145"/>
+                  </a:lnTo>
+                  <a:lnTo>
+                    <a:pt x="6928579" y="924524"/>
+                  </a:lnTo>
+                  <a:lnTo>
+                    <a:pt x="6851336" y="919700"/>
+                  </a:lnTo>
+                  <a:lnTo>
+                    <a:pt x="6774092" y="914663"/>
+                  </a:lnTo>
+                  <a:lnTo>
+                    <a:pt x="6696849" y="909404"/>
+                  </a:lnTo>
+                  <a:lnTo>
+                    <a:pt x="6619605" y="903914"/>
+                  </a:lnTo>
+                  <a:lnTo>
+                    <a:pt x="6542361" y="898182"/>
+                  </a:lnTo>
+                  <a:lnTo>
+                    <a:pt x="6465118" y="892198"/>
+                  </a:lnTo>
+                  <a:lnTo>
+                    <a:pt x="6387874" y="885950"/>
+                  </a:lnTo>
+                  <a:lnTo>
+                    <a:pt x="6310631" y="879427"/>
+                  </a:lnTo>
+                  <a:lnTo>
+                    <a:pt x="6233387" y="872617"/>
+                  </a:lnTo>
+                  <a:lnTo>
+                    <a:pt x="6156144" y="865507"/>
+                  </a:lnTo>
+                  <a:lnTo>
+                    <a:pt x="6078900" y="858084"/>
+                  </a:lnTo>
+                  <a:lnTo>
+                    <a:pt x="6001656" y="850334"/>
+                  </a:lnTo>
+                  <a:lnTo>
+                    <a:pt x="5924413" y="842243"/>
+                  </a:lnTo>
+                  <a:lnTo>
+                    <a:pt x="5847169" y="833795"/>
+                  </a:lnTo>
+                  <a:lnTo>
+                    <a:pt x="5769926" y="824975"/>
+                  </a:lnTo>
+                  <a:lnTo>
+                    <a:pt x="5692682" y="815767"/>
+                  </a:lnTo>
+                  <a:lnTo>
+                    <a:pt x="5615439" y="806154"/>
+                  </a:lnTo>
+                  <a:lnTo>
+                    <a:pt x="5538195" y="796117"/>
+                  </a:lnTo>
+                  <a:lnTo>
+                    <a:pt x="5460951" y="785639"/>
+                  </a:lnTo>
+                  <a:lnTo>
+                    <a:pt x="5383708" y="774699"/>
+                  </a:lnTo>
+                  <a:lnTo>
+                    <a:pt x="5306464" y="763277"/>
+                  </a:lnTo>
+                  <a:lnTo>
+                    <a:pt x="5229221" y="751352"/>
+                  </a:lnTo>
+                  <a:lnTo>
+                    <a:pt x="5151977" y="738902"/>
+                  </a:lnTo>
+                  <a:lnTo>
+                    <a:pt x="5074734" y="725904"/>
+                  </a:lnTo>
+                  <a:lnTo>
+                    <a:pt x="4997490" y="712334"/>
+                  </a:lnTo>
+                  <a:lnTo>
+                    <a:pt x="4920246" y="698166"/>
+                  </a:lnTo>
+                  <a:lnTo>
+                    <a:pt x="4843003" y="683374"/>
+                  </a:lnTo>
+                  <a:lnTo>
+                    <a:pt x="4765759" y="667931"/>
+                  </a:lnTo>
+                  <a:lnTo>
+                    <a:pt x="4688516" y="651808"/>
+                  </a:lnTo>
+                  <a:lnTo>
+                    <a:pt x="4611272" y="634974"/>
+                  </a:lnTo>
+                  <a:lnTo>
+                    <a:pt x="4534029" y="617400"/>
+                  </a:lnTo>
+                  <a:lnTo>
+                    <a:pt x="4456785" y="599052"/>
+                  </a:lnTo>
+                  <a:lnTo>
+                    <a:pt x="4379541" y="579895"/>
+                  </a:lnTo>
+                  <a:lnTo>
+                    <a:pt x="4302298" y="559896"/>
+                  </a:lnTo>
+                  <a:lnTo>
+                    <a:pt x="4225054" y="539015"/>
+                  </a:lnTo>
+                  <a:lnTo>
+                    <a:pt x="4147811" y="517215"/>
+                  </a:lnTo>
+                  <a:lnTo>
+                    <a:pt x="4070567" y="494456"/>
+                  </a:lnTo>
+                  <a:lnTo>
+                    <a:pt x="3993324" y="470694"/>
+                  </a:lnTo>
+                  <a:lnTo>
+                    <a:pt x="3916080" y="445885"/>
+                  </a:lnTo>
+                  <a:lnTo>
+                    <a:pt x="3838836" y="419984"/>
+                  </a:lnTo>
+                  <a:lnTo>
+                    <a:pt x="3761593" y="392943"/>
+                  </a:lnTo>
+                  <a:lnTo>
+                    <a:pt x="3684349" y="364711"/>
+                  </a:lnTo>
+                  <a:lnTo>
+                    <a:pt x="3607106" y="335236"/>
+                  </a:lnTo>
+                  <a:lnTo>
+                    <a:pt x="3529862" y="304463"/>
+                  </a:lnTo>
+                  <a:lnTo>
+                    <a:pt x="3452619" y="272335"/>
+                  </a:lnTo>
+                  <a:lnTo>
+                    <a:pt x="3375375" y="238792"/>
+                  </a:lnTo>
+                  <a:lnTo>
+                    <a:pt x="3298131" y="204520"/>
+                  </a:lnTo>
+                  <a:lnTo>
+                    <a:pt x="3220888" y="200227"/>
+                  </a:lnTo>
+                  <a:lnTo>
+                    <a:pt x="3143644" y="195913"/>
+                  </a:lnTo>
+                  <a:lnTo>
+                    <a:pt x="3066401" y="191575"/>
+                  </a:lnTo>
+                  <a:lnTo>
+                    <a:pt x="2989157" y="187216"/>
+                  </a:lnTo>
+                  <a:lnTo>
+                    <a:pt x="2911914" y="182834"/>
+                  </a:lnTo>
+                  <a:lnTo>
+                    <a:pt x="2834670" y="178429"/>
+                  </a:lnTo>
+                  <a:lnTo>
+                    <a:pt x="2757426" y="174001"/>
+                  </a:lnTo>
+                  <a:lnTo>
+                    <a:pt x="2680183" y="169551"/>
+                  </a:lnTo>
+                  <a:lnTo>
+                    <a:pt x="2602939" y="165078"/>
+                  </a:lnTo>
+                  <a:lnTo>
+                    <a:pt x="2525696" y="160581"/>
+                  </a:lnTo>
+                  <a:lnTo>
+                    <a:pt x="2448452" y="156061"/>
+                  </a:lnTo>
+                  <a:lnTo>
+                    <a:pt x="2371209" y="151518"/>
+                  </a:lnTo>
+                  <a:lnTo>
+                    <a:pt x="2293965" y="146951"/>
+                  </a:lnTo>
+                  <a:lnTo>
+                    <a:pt x="2216721" y="142360"/>
+                  </a:lnTo>
+                  <a:lnTo>
+                    <a:pt x="2139478" y="137746"/>
+                  </a:lnTo>
+                  <a:lnTo>
+                    <a:pt x="2062234" y="133108"/>
+                  </a:lnTo>
+                  <a:lnTo>
+                    <a:pt x="1984991" y="128446"/>
+                  </a:lnTo>
+                  <a:lnTo>
+                    <a:pt x="1907747" y="123760"/>
+                  </a:lnTo>
+                  <a:lnTo>
+                    <a:pt x="1830504" y="119050"/>
+                  </a:lnTo>
+                  <a:lnTo>
+                    <a:pt x="1753260" y="114315"/>
+                  </a:lnTo>
+                  <a:lnTo>
+                    <a:pt x="1676016" y="109555"/>
+                  </a:lnTo>
+                  <a:lnTo>
+                    <a:pt x="1598773" y="104771"/>
+                  </a:lnTo>
+                  <a:lnTo>
+                    <a:pt x="1521529" y="99963"/>
+                  </a:lnTo>
+                  <a:lnTo>
+                    <a:pt x="1444286" y="95129"/>
+                  </a:lnTo>
+                  <a:lnTo>
+                    <a:pt x="1367042" y="90271"/>
+                  </a:lnTo>
+                  <a:lnTo>
+                    <a:pt x="1289799" y="85387"/>
+                  </a:lnTo>
+                  <a:lnTo>
+                    <a:pt x="1212555" y="80478"/>
+                  </a:lnTo>
+                  <a:lnTo>
+                    <a:pt x="1135311" y="75544"/>
+                  </a:lnTo>
+                  <a:lnTo>
+                    <a:pt x="1058068" y="70584"/>
+                  </a:lnTo>
+                  <a:lnTo>
+                    <a:pt x="980824" y="65598"/>
+                  </a:lnTo>
+                  <a:lnTo>
+                    <a:pt x="903581" y="60587"/>
+                  </a:lnTo>
+                  <a:lnTo>
+                    <a:pt x="826337" y="55549"/>
+                  </a:lnTo>
+                  <a:lnTo>
+                    <a:pt x="749094" y="50486"/>
+                  </a:lnTo>
+                  <a:lnTo>
+                    <a:pt x="671850" y="45396"/>
+                  </a:lnTo>
+                  <a:lnTo>
+                    <a:pt x="594606" y="40280"/>
+                  </a:lnTo>
+                  <a:lnTo>
+                    <a:pt x="517363" y="35138"/>
+                  </a:lnTo>
+                  <a:lnTo>
+                    <a:pt x="440119" y="29969"/>
+                  </a:lnTo>
+                  <a:lnTo>
+                    <a:pt x="362876" y="24773"/>
+                  </a:lnTo>
+                  <a:lnTo>
+                    <a:pt x="285632" y="19551"/>
+                  </a:lnTo>
+                  <a:lnTo>
+                    <a:pt x="208389" y="14301"/>
+                  </a:lnTo>
+                  <a:lnTo>
+                    <a:pt x="131145" y="9024"/>
+                  </a:lnTo>
+                  <a:lnTo>
+                    <a:pt x="53901" y="3720"/>
                   </a:lnTo>
                   <a:lnTo>
                     <a:pt x="0" y="0"/>
@@ -4193,303 +4193,303 @@
           </p:nvSpPr>
           <p:spPr>
             <a:xfrm>
-              <a:off x="817517" y="3111270"/>
-              <a:ext cx="7392041" cy="2195682"/>
+              <a:off x="817517" y="3232042"/>
+              <a:ext cx="7392041" cy="2094155"/>
             </a:xfrm>
             <a:custGeom>
               <a:avLst/>
               <a:pathLst>
-                <a:path w="7392041" h="2195682">
+                <a:path w="7392041" h="2094155">
                   <a:moveTo>
                     <a:pt x="0" y="0"/>
                   </a:moveTo>
                   <a:lnTo>
-                    <a:pt x="53901" y="40848"/>
-                  </a:lnTo>
-                  <a:lnTo>
-                    <a:pt x="131145" y="97989"/>
-                  </a:lnTo>
-                  <a:lnTo>
-                    <a:pt x="208389" y="153768"/>
-                  </a:lnTo>
-                  <a:lnTo>
-                    <a:pt x="285632" y="208218"/>
-                  </a:lnTo>
-                  <a:lnTo>
-                    <a:pt x="362876" y="261369"/>
-                  </a:lnTo>
-                  <a:lnTo>
-                    <a:pt x="440119" y="313254"/>
-                  </a:lnTo>
-                  <a:lnTo>
-                    <a:pt x="517363" y="363902"/>
-                  </a:lnTo>
-                  <a:lnTo>
-                    <a:pt x="594606" y="413342"/>
-                  </a:lnTo>
-                  <a:lnTo>
-                    <a:pt x="671850" y="461604"/>
-                  </a:lnTo>
-                  <a:lnTo>
-                    <a:pt x="749094" y="508716"/>
-                  </a:lnTo>
-                  <a:lnTo>
-                    <a:pt x="826337" y="554704"/>
-                  </a:lnTo>
-                  <a:lnTo>
-                    <a:pt x="903581" y="599596"/>
-                  </a:lnTo>
-                  <a:lnTo>
-                    <a:pt x="980824" y="643418"/>
-                  </a:lnTo>
-                  <a:lnTo>
-                    <a:pt x="1058068" y="686196"/>
-                  </a:lnTo>
-                  <a:lnTo>
-                    <a:pt x="1135311" y="727954"/>
-                  </a:lnTo>
-                  <a:lnTo>
-                    <a:pt x="1212555" y="768716"/>
-                  </a:lnTo>
-                  <a:lnTo>
-                    <a:pt x="1289799" y="808506"/>
-                  </a:lnTo>
-                  <a:lnTo>
-                    <a:pt x="1367042" y="847349"/>
-                  </a:lnTo>
-                  <a:lnTo>
-                    <a:pt x="1444286" y="885265"/>
-                  </a:lnTo>
-                  <a:lnTo>
-                    <a:pt x="1521529" y="922277"/>
-                  </a:lnTo>
-                  <a:lnTo>
-                    <a:pt x="1598773" y="958407"/>
-                  </a:lnTo>
-                  <a:lnTo>
-                    <a:pt x="1676016" y="993676"/>
-                  </a:lnTo>
-                  <a:lnTo>
-                    <a:pt x="1753260" y="1028104"/>
-                  </a:lnTo>
-                  <a:lnTo>
-                    <a:pt x="1830504" y="1061711"/>
-                  </a:lnTo>
-                  <a:lnTo>
-                    <a:pt x="1907747" y="1094517"/>
-                  </a:lnTo>
-                  <a:lnTo>
-                    <a:pt x="1984991" y="1126542"/>
-                  </a:lnTo>
-                  <a:lnTo>
-                    <a:pt x="2062234" y="1157802"/>
-                  </a:lnTo>
-                  <a:lnTo>
-                    <a:pt x="2139478" y="1188318"/>
-                  </a:lnTo>
-                  <a:lnTo>
-                    <a:pt x="2216721" y="1218106"/>
-                  </a:lnTo>
-                  <a:lnTo>
-                    <a:pt x="2293965" y="1247184"/>
-                  </a:lnTo>
-                  <a:lnTo>
-                    <a:pt x="2371209" y="1275569"/>
-                  </a:lnTo>
-                  <a:lnTo>
-                    <a:pt x="2448452" y="1303278"/>
-                  </a:lnTo>
-                  <a:lnTo>
-                    <a:pt x="2525696" y="1330325"/>
-                  </a:lnTo>
-                  <a:lnTo>
-                    <a:pt x="2602939" y="1356728"/>
-                  </a:lnTo>
-                  <a:lnTo>
-                    <a:pt x="2680183" y="1382502"/>
-                  </a:lnTo>
-                  <a:lnTo>
-                    <a:pt x="2757426" y="1407661"/>
-                  </a:lnTo>
-                  <a:lnTo>
-                    <a:pt x="2834670" y="1432221"/>
-                  </a:lnTo>
-                  <a:lnTo>
-                    <a:pt x="2911914" y="1456195"/>
-                  </a:lnTo>
-                  <a:lnTo>
-                    <a:pt x="2989157" y="1479598"/>
-                  </a:lnTo>
-                  <a:lnTo>
-                    <a:pt x="3066401" y="1502442"/>
-                  </a:lnTo>
-                  <a:lnTo>
-                    <a:pt x="3143644" y="1524742"/>
-                  </a:lnTo>
-                  <a:lnTo>
-                    <a:pt x="3220888" y="1546511"/>
-                  </a:lnTo>
-                  <a:lnTo>
-                    <a:pt x="3298131" y="1567761"/>
-                  </a:lnTo>
-                  <a:lnTo>
-                    <a:pt x="3375375" y="1588504"/>
-                  </a:lnTo>
-                  <a:lnTo>
-                    <a:pt x="3452619" y="1608752"/>
-                  </a:lnTo>
-                  <a:lnTo>
-                    <a:pt x="3529862" y="1628518"/>
-                  </a:lnTo>
-                  <a:lnTo>
-                    <a:pt x="3607106" y="1647813"/>
-                  </a:lnTo>
-                  <a:lnTo>
-                    <a:pt x="3684349" y="1666648"/>
-                  </a:lnTo>
-                  <a:lnTo>
-                    <a:pt x="3761593" y="1685034"/>
-                  </a:lnTo>
-                  <a:lnTo>
-                    <a:pt x="3838836" y="1702981"/>
-                  </a:lnTo>
-                  <a:lnTo>
-                    <a:pt x="3916080" y="1720501"/>
-                  </a:lnTo>
-                  <a:lnTo>
-                    <a:pt x="3993324" y="1737603"/>
-                  </a:lnTo>
-                  <a:lnTo>
-                    <a:pt x="4070567" y="1754298"/>
-                  </a:lnTo>
-                  <a:lnTo>
-                    <a:pt x="4147811" y="1770594"/>
-                  </a:lnTo>
-                  <a:lnTo>
-                    <a:pt x="4225054" y="1786502"/>
-                  </a:lnTo>
-                  <a:lnTo>
-                    <a:pt x="4302298" y="1802031"/>
-                  </a:lnTo>
-                  <a:lnTo>
-                    <a:pt x="4379541" y="1817189"/>
-                  </a:lnTo>
-                  <a:lnTo>
-                    <a:pt x="4456785" y="1831987"/>
-                  </a:lnTo>
-                  <a:lnTo>
-                    <a:pt x="4534029" y="1846431"/>
-                  </a:lnTo>
-                  <a:lnTo>
-                    <a:pt x="4611272" y="1860531"/>
-                  </a:lnTo>
-                  <a:lnTo>
-                    <a:pt x="4688516" y="1874296"/>
-                  </a:lnTo>
-                  <a:lnTo>
-                    <a:pt x="4765759" y="1887732"/>
-                  </a:lnTo>
-                  <a:lnTo>
-                    <a:pt x="4843003" y="1900847"/>
-                  </a:lnTo>
-                  <a:lnTo>
-                    <a:pt x="4920246" y="1913650"/>
-                  </a:lnTo>
-                  <a:lnTo>
-                    <a:pt x="4997490" y="1926148"/>
-                  </a:lnTo>
-                  <a:lnTo>
-                    <a:pt x="5074734" y="1938348"/>
-                  </a:lnTo>
-                  <a:lnTo>
-                    <a:pt x="5151977" y="1950257"/>
-                  </a:lnTo>
-                  <a:lnTo>
-                    <a:pt x="5229221" y="1961882"/>
-                  </a:lnTo>
-                  <a:lnTo>
-                    <a:pt x="5306464" y="1973230"/>
-                  </a:lnTo>
-                  <a:lnTo>
-                    <a:pt x="5383708" y="1984308"/>
-                  </a:lnTo>
-                  <a:lnTo>
-                    <a:pt x="5460951" y="1995122"/>
-                  </a:lnTo>
-                  <a:lnTo>
-                    <a:pt x="5538195" y="2005677"/>
-                  </a:lnTo>
-                  <a:lnTo>
-                    <a:pt x="5615439" y="2015981"/>
-                  </a:lnTo>
-                  <a:lnTo>
-                    <a:pt x="5692682" y="2026040"/>
-                  </a:lnTo>
-                  <a:lnTo>
-                    <a:pt x="5769926" y="2035859"/>
-                  </a:lnTo>
-                  <a:lnTo>
-                    <a:pt x="5847169" y="2045443"/>
-                  </a:lnTo>
-                  <a:lnTo>
-                    <a:pt x="5924413" y="2054799"/>
-                  </a:lnTo>
-                  <a:lnTo>
-                    <a:pt x="6001656" y="2063933"/>
-                  </a:lnTo>
-                  <a:lnTo>
-                    <a:pt x="6078900" y="2072848"/>
-                  </a:lnTo>
-                  <a:lnTo>
-                    <a:pt x="6156144" y="2081551"/>
-                  </a:lnTo>
-                  <a:lnTo>
-                    <a:pt x="6233387" y="2090046"/>
-                  </a:lnTo>
-                  <a:lnTo>
-                    <a:pt x="6310631" y="2098339"/>
-                  </a:lnTo>
-                  <a:lnTo>
-                    <a:pt x="6387874" y="2106435"/>
-                  </a:lnTo>
-                  <a:lnTo>
-                    <a:pt x="6465118" y="2114337"/>
-                  </a:lnTo>
-                  <a:lnTo>
-                    <a:pt x="6542361" y="2122051"/>
-                  </a:lnTo>
-                  <a:lnTo>
-                    <a:pt x="6619605" y="2129581"/>
-                  </a:lnTo>
-                  <a:lnTo>
-                    <a:pt x="6696849" y="2136931"/>
-                  </a:lnTo>
-                  <a:lnTo>
-                    <a:pt x="6774092" y="2144107"/>
-                  </a:lnTo>
-                  <a:lnTo>
-                    <a:pt x="6851336" y="2151111"/>
-                  </a:lnTo>
-                  <a:lnTo>
-                    <a:pt x="6928579" y="2157948"/>
-                  </a:lnTo>
-                  <a:lnTo>
-                    <a:pt x="7005823" y="2164623"/>
-                  </a:lnTo>
-                  <a:lnTo>
-                    <a:pt x="7083066" y="2171138"/>
-                  </a:lnTo>
-                  <a:lnTo>
-                    <a:pt x="7160310" y="2177498"/>
-                  </a:lnTo>
-                  <a:lnTo>
-                    <a:pt x="7237554" y="2183706"/>
-                  </a:lnTo>
-                  <a:lnTo>
-                    <a:pt x="7314797" y="2189766"/>
-                  </a:lnTo>
-                  <a:lnTo>
-                    <a:pt x="7392041" y="2195682"/>
+                    <a:pt x="53901" y="38959"/>
+                  </a:lnTo>
+                  <a:lnTo>
+                    <a:pt x="131145" y="93458"/>
+                  </a:lnTo>
+                  <a:lnTo>
+                    <a:pt x="208389" y="146658"/>
+                  </a:lnTo>
+                  <a:lnTo>
+                    <a:pt x="285632" y="198590"/>
+                  </a:lnTo>
+                  <a:lnTo>
+                    <a:pt x="362876" y="249284"/>
+                  </a:lnTo>
+                  <a:lnTo>
+                    <a:pt x="440119" y="298769"/>
+                  </a:lnTo>
+                  <a:lnTo>
+                    <a:pt x="517363" y="347075"/>
+                  </a:lnTo>
+                  <a:lnTo>
+                    <a:pt x="594606" y="394230"/>
+                  </a:lnTo>
+                  <a:lnTo>
+                    <a:pt x="671850" y="440260"/>
+                  </a:lnTo>
+                  <a:lnTo>
+                    <a:pt x="749094" y="485193"/>
+                  </a:lnTo>
+                  <a:lnTo>
+                    <a:pt x="826337" y="529055"/>
+                  </a:lnTo>
+                  <a:lnTo>
+                    <a:pt x="903581" y="571871"/>
+                  </a:lnTo>
+                  <a:lnTo>
+                    <a:pt x="980824" y="613667"/>
+                  </a:lnTo>
+                  <a:lnTo>
+                    <a:pt x="1058068" y="654466"/>
+                  </a:lnTo>
+                  <a:lnTo>
+                    <a:pt x="1135311" y="694293"/>
+                  </a:lnTo>
+                  <a:lnTo>
+                    <a:pt x="1212555" y="733171"/>
+                  </a:lnTo>
+                  <a:lnTo>
+                    <a:pt x="1289799" y="771121"/>
+                  </a:lnTo>
+                  <a:lnTo>
+                    <a:pt x="1367042" y="808167"/>
+                  </a:lnTo>
+                  <a:lnTo>
+                    <a:pt x="1444286" y="844330"/>
+                  </a:lnTo>
+                  <a:lnTo>
+                    <a:pt x="1521529" y="879631"/>
+                  </a:lnTo>
+                  <a:lnTo>
+                    <a:pt x="1598773" y="914091"/>
+                  </a:lnTo>
+                  <a:lnTo>
+                    <a:pt x="1676016" y="947729"/>
+                  </a:lnTo>
+                  <a:lnTo>
+                    <a:pt x="1753260" y="980565"/>
+                  </a:lnTo>
+                  <a:lnTo>
+                    <a:pt x="1830504" y="1012618"/>
+                  </a:lnTo>
+                  <a:lnTo>
+                    <a:pt x="1907747" y="1043907"/>
+                  </a:lnTo>
+                  <a:lnTo>
+                    <a:pt x="1984991" y="1074451"/>
+                  </a:lnTo>
+                  <a:lnTo>
+                    <a:pt x="2062234" y="1104266"/>
+                  </a:lnTo>
+                  <a:lnTo>
+                    <a:pt x="2139478" y="1133371"/>
+                  </a:lnTo>
+                  <a:lnTo>
+                    <a:pt x="2216721" y="1161781"/>
+                  </a:lnTo>
+                  <a:lnTo>
+                    <a:pt x="2293965" y="1189515"/>
+                  </a:lnTo>
+                  <a:lnTo>
+                    <a:pt x="2371209" y="1216587"/>
+                  </a:lnTo>
+                  <a:lnTo>
+                    <a:pt x="2448452" y="1243015"/>
+                  </a:lnTo>
+                  <a:lnTo>
+                    <a:pt x="2525696" y="1268812"/>
+                  </a:lnTo>
+                  <a:lnTo>
+                    <a:pt x="2602939" y="1293994"/>
+                  </a:lnTo>
+                  <a:lnTo>
+                    <a:pt x="2680183" y="1318576"/>
+                  </a:lnTo>
+                  <a:lnTo>
+                    <a:pt x="2757426" y="1342572"/>
+                  </a:lnTo>
+                  <a:lnTo>
+                    <a:pt x="2834670" y="1365996"/>
+                  </a:lnTo>
+                  <a:lnTo>
+                    <a:pt x="2911914" y="1388861"/>
+                  </a:lnTo>
+                  <a:lnTo>
+                    <a:pt x="2989157" y="1411182"/>
+                  </a:lnTo>
+                  <a:lnTo>
+                    <a:pt x="3066401" y="1432970"/>
+                  </a:lnTo>
+                  <a:lnTo>
+                    <a:pt x="3143644" y="1454239"/>
+                  </a:lnTo>
+                  <a:lnTo>
+                    <a:pt x="3220888" y="1475001"/>
+                  </a:lnTo>
+                  <a:lnTo>
+                    <a:pt x="3298131" y="1495268"/>
+                  </a:lnTo>
+                  <a:lnTo>
+                    <a:pt x="3375375" y="1515052"/>
+                  </a:lnTo>
+                  <a:lnTo>
+                    <a:pt x="3452619" y="1534364"/>
+                  </a:lnTo>
+                  <a:lnTo>
+                    <a:pt x="3529862" y="1553216"/>
+                  </a:lnTo>
+                  <a:lnTo>
+                    <a:pt x="3607106" y="1571619"/>
+                  </a:lnTo>
+                  <a:lnTo>
+                    <a:pt x="3684349" y="1589583"/>
+                  </a:lnTo>
+                  <a:lnTo>
+                    <a:pt x="3761593" y="1607118"/>
+                  </a:lnTo>
+                  <a:lnTo>
+                    <a:pt x="3838836" y="1624236"/>
+                  </a:lnTo>
+                  <a:lnTo>
+                    <a:pt x="3916080" y="1640946"/>
+                  </a:lnTo>
+                  <a:lnTo>
+                    <a:pt x="3993324" y="1657257"/>
+                  </a:lnTo>
+                  <a:lnTo>
+                    <a:pt x="4070567" y="1673180"/>
+                  </a:lnTo>
+                  <a:lnTo>
+                    <a:pt x="4147811" y="1688722"/>
+                  </a:lnTo>
+                  <a:lnTo>
+                    <a:pt x="4225054" y="1703895"/>
+                  </a:lnTo>
+                  <a:lnTo>
+                    <a:pt x="4302298" y="1718706"/>
+                  </a:lnTo>
+                  <a:lnTo>
+                    <a:pt x="4379541" y="1733163"/>
+                  </a:lnTo>
+                  <a:lnTo>
+                    <a:pt x="4456785" y="1747276"/>
+                  </a:lnTo>
+                  <a:lnTo>
+                    <a:pt x="4534029" y="1761053"/>
+                  </a:lnTo>
+                  <a:lnTo>
+                    <a:pt x="4611272" y="1774501"/>
+                  </a:lnTo>
+                  <a:lnTo>
+                    <a:pt x="4688516" y="1787629"/>
+                  </a:lnTo>
+                  <a:lnTo>
+                    <a:pt x="4765759" y="1800443"/>
+                  </a:lnTo>
+                  <a:lnTo>
+                    <a:pt x="4843003" y="1812953"/>
+                  </a:lnTo>
+                  <a:lnTo>
+                    <a:pt x="4920246" y="1825164"/>
+                  </a:lnTo>
+                  <a:lnTo>
+                    <a:pt x="4997490" y="1837084"/>
+                  </a:lnTo>
+                  <a:lnTo>
+                    <a:pt x="5074734" y="1848719"/>
+                  </a:lnTo>
+                  <a:lnTo>
+                    <a:pt x="5151977" y="1860078"/>
+                  </a:lnTo>
+                  <a:lnTo>
+                    <a:pt x="5229221" y="1871166"/>
+                  </a:lnTo>
+                  <a:lnTo>
+                    <a:pt x="5306464" y="1881989"/>
+                  </a:lnTo>
+                  <a:lnTo>
+                    <a:pt x="5383708" y="1892554"/>
+                  </a:lnTo>
+                  <a:lnTo>
+                    <a:pt x="5460951" y="1902868"/>
+                  </a:lnTo>
+                  <a:lnTo>
+                    <a:pt x="5538195" y="1912935"/>
+                  </a:lnTo>
+                  <a:lnTo>
+                    <a:pt x="5615439" y="1922763"/>
+                  </a:lnTo>
+                  <a:lnTo>
+                    <a:pt x="5692682" y="1932357"/>
+                  </a:lnTo>
+                  <a:lnTo>
+                    <a:pt x="5769926" y="1941721"/>
+                  </a:lnTo>
+                  <a:lnTo>
+                    <a:pt x="5847169" y="1950863"/>
+                  </a:lnTo>
+                  <a:lnTo>
+                    <a:pt x="5924413" y="1959786"/>
+                  </a:lnTo>
+                  <a:lnTo>
+                    <a:pt x="6001656" y="1968497"/>
+                  </a:lnTo>
+                  <a:lnTo>
+                    <a:pt x="6078900" y="1977000"/>
+                  </a:lnTo>
+                  <a:lnTo>
+                    <a:pt x="6156144" y="1985301"/>
+                  </a:lnTo>
+                  <a:lnTo>
+                    <a:pt x="6233387" y="1993403"/>
+                  </a:lnTo>
+                  <a:lnTo>
+                    <a:pt x="6310631" y="2001313"/>
+                  </a:lnTo>
+                  <a:lnTo>
+                    <a:pt x="6387874" y="2009034"/>
+                  </a:lnTo>
+                  <a:lnTo>
+                    <a:pt x="6465118" y="2016571"/>
+                  </a:lnTo>
+                  <a:lnTo>
+                    <a:pt x="6542361" y="2023928"/>
+                  </a:lnTo>
+                  <a:lnTo>
+                    <a:pt x="6619605" y="2031110"/>
+                  </a:lnTo>
+                  <a:lnTo>
+                    <a:pt x="6696849" y="2038120"/>
+                  </a:lnTo>
+                  <a:lnTo>
+                    <a:pt x="6774092" y="2044964"/>
+                  </a:lnTo>
+                  <a:lnTo>
+                    <a:pt x="6851336" y="2051644"/>
+                  </a:lnTo>
+                  <a:lnTo>
+                    <a:pt x="6928579" y="2058165"/>
+                  </a:lnTo>
+                  <a:lnTo>
+                    <a:pt x="7005823" y="2064531"/>
+                  </a:lnTo>
+                  <a:lnTo>
+                    <a:pt x="7083066" y="2070745"/>
+                  </a:lnTo>
+                  <a:lnTo>
+                    <a:pt x="7160310" y="2076811"/>
+                  </a:lnTo>
+                  <a:lnTo>
+                    <a:pt x="7237554" y="2082732"/>
+                  </a:lnTo>
+                  <a:lnTo>
+                    <a:pt x="7314797" y="2088512"/>
+                  </a:lnTo>
+                  <a:lnTo>
+                    <a:pt x="7392041" y="2094155"/>
                   </a:lnTo>
                 </a:path>
               </a:pathLst>
@@ -4518,7 +4518,7 @@
           </p:nvSpPr>
           <p:spPr>
             <a:xfrm>
-              <a:off x="817517" y="4679530"/>
+              <a:off x="817517" y="4727786"/>
               <a:ext cx="7799693" cy="0"/>
             </a:xfrm>
             <a:custGeom>
@@ -4561,15 +4561,15 @@
           </p:nvSpPr>
           <p:spPr>
             <a:xfrm>
-              <a:off x="4117484" y="1896563"/>
-              <a:ext cx="0" cy="3826579"/>
+              <a:off x="4117484" y="2073503"/>
+              <a:ext cx="0" cy="3649639"/>
             </a:xfrm>
             <a:custGeom>
               <a:avLst/>
               <a:pathLst>
-                <a:path w="0" h="3826579">
+                <a:path w="0" h="3649639">
                   <a:moveTo>
-                    <a:pt x="0" y="3826579"/>
+                    <a:pt x="0" y="3649639"/>
                   </a:moveTo>
                   <a:lnTo>
                     <a:pt x="0" y="0"/>
@@ -4604,7 +4604,7 @@
           </p:nvSpPr>
           <p:spPr>
             <a:xfrm>
-              <a:off x="692708" y="5509156"/>
+              <a:off x="692708" y="5517199"/>
               <a:ext cx="62179" cy="80101"/>
             </a:xfrm>
             <a:prstGeom prst="rect">
@@ -4650,7 +4650,7 @@
           </p:nvSpPr>
           <p:spPr>
             <a:xfrm>
-              <a:off x="692708" y="4639479"/>
+              <a:off x="692708" y="4687735"/>
               <a:ext cx="62179" cy="80101"/>
             </a:xfrm>
             <a:prstGeom prst="rect">
@@ -4696,7 +4696,7 @@
           </p:nvSpPr>
           <p:spPr>
             <a:xfrm>
-              <a:off x="692708" y="3769802"/>
+              <a:off x="692708" y="3858272"/>
               <a:ext cx="62179" cy="80101"/>
             </a:xfrm>
             <a:prstGeom prst="rect">
@@ -4742,7 +4742,7 @@
           </p:nvSpPr>
           <p:spPr>
             <a:xfrm>
-              <a:off x="692708" y="2900125"/>
+              <a:off x="692708" y="3028808"/>
               <a:ext cx="62179" cy="80101"/>
             </a:xfrm>
             <a:prstGeom prst="rect">
@@ -4788,7 +4788,7 @@
           </p:nvSpPr>
           <p:spPr>
             <a:xfrm>
-              <a:off x="692708" y="2030448"/>
+              <a:off x="692708" y="2199345"/>
               <a:ext cx="62179" cy="80101"/>
             </a:xfrm>
             <a:prstGeom prst="rect">
@@ -5064,7 +5064,7 @@
           </p:nvSpPr>
           <p:spPr>
             <a:xfrm rot="-5400000">
-              <a:off x="68446" y="3759743"/>
+              <a:off x="68446" y="3848213"/>
               <a:ext cx="1016904" cy="100218"/>
             </a:xfrm>
             <a:prstGeom prst="rect">
@@ -5105,6 +5105,52 @@
         <p:sp>
           <p:nvSpPr>
             <p:cNvPr id="38" name="tx38"/>
+            <p:cNvSpPr/>
+            <p:nvPr/>
+          </p:nvSpPr>
+          <p:spPr>
+            <a:xfrm>
+              <a:off x="817517" y="1896563"/>
+              <a:ext cx="5626211" cy="82021"/>
+            </a:xfrm>
+            <a:prstGeom prst="rect">
+              <a:avLst/>
+            </a:prstGeom>
+            <a:noFill/>
+          </p:spPr>
+          <p:txBody>
+            <a:bodyPr lIns="0" rIns="0" tIns="0" bIns="0" anchorCtr="1" anchor="ctr" wrap="none"/>
+            <a:lstStyle/>
+            <a:p>
+              <a:pPr algn="l" marL="0" marR="0" indent="0">
+                <a:lnSpc>
+                  <a:spcPts val="900"/>
+                </a:lnSpc>
+                <a:spcBef>
+                  <a:spcPts val="0"/>
+                </a:spcBef>
+                <a:spcAft>
+                  <a:spcPts val="0"/>
+                </a:spcAft>
+              </a:pPr>
+              <a:r>
+                <a:rPr sz="900">
+                  <a:solidFill>
+                    <a:srgbClr val="404040">
+                      <a:alpha val="100000"/>
+                    </a:srgbClr>
+                  </a:solidFill>
+                  <a:latin typeface="Helvetica"/>
+                  <a:cs typeface="Helvetica"/>
+                </a:rPr>
+                <a:t>subHR per 0.1 ratio decline: 1.32 (1.06-1.64)  |  per IQR decline (Δ = 0.30): 2.27 (1.19-4.31)  |  IQR: [0.84, 1.14]</a:t>
+              </a:r>
+            </a:p>
+          </p:txBody>
+        </p:sp>
+        <p:sp>
+          <p:nvSpPr>
+            <p:cNvPr id="39" name="tx39"/>
             <p:cNvSpPr/>
             <p:nvPr/>
           </p:nvSpPr>

--- a/docs/pptx/auc3/jx-auc3-linsubhr-ratio-hosp7.pptx
+++ b/docs/pptx/auc3/jx-auc3-linsubhr-ratio-hosp7.pptx
@@ -5111,7 +5111,7 @@
           <p:spPr>
             <a:xfrm>
               <a:off x="817517" y="1896563"/>
-              <a:ext cx="5626211" cy="82021"/>
+              <a:ext cx="6169365" cy="82021"/>
             </a:xfrm>
             <a:prstGeom prst="rect">
               <a:avLst/>
@@ -5143,7 +5143,7 @@
                   <a:latin typeface="Helvetica"/>
                   <a:cs typeface="Helvetica"/>
                 </a:rPr>
-                <a:t>subHR per 0.1 ratio decline: 1.32 (1.06-1.64)  |  per IQR decline (Δ = 0.30): 2.27 (1.19-4.31)  |  IQR: [0.84, 1.14]</a:t>
+                <a:t>subHR per 0.1 ratio decline: 1.32 (1.06-1.64), p = 0.013  |  per IQR decline (Δ = 0.30): 2.27 (1.19-4.31)  |  IQR: [0.84, 1.14]</a:t>
               </a:r>
             </a:p>
           </p:txBody>

--- a/docs/pptx/auc3/jx-auc3-linsubhr-ratio-hosp7.pptx
+++ b/docs/pptx/auc3/jx-auc3-linsubhr-ratio-hosp7.pptx
@@ -2443,7 +2443,7 @@
           </p:nvSpPr>
           <p:spPr>
             <a:xfrm>
-              <a:off x="1615213" y="2073503"/>
+              <a:off x="1531834" y="2073503"/>
               <a:ext cx="0" cy="3649639"/>
             </a:xfrm>
             <a:custGeom>
@@ -2486,7 +2486,7 @@
           </p:nvSpPr>
           <p:spPr>
             <a:xfrm>
-              <a:off x="3387871" y="2073503"/>
+              <a:off x="3586410" y="2073503"/>
               <a:ext cx="0" cy="3649639"/>
             </a:xfrm>
             <a:custGeom>
@@ -2529,7 +2529,7 @@
           </p:nvSpPr>
           <p:spPr>
             <a:xfrm>
-              <a:off x="5160528" y="2073503"/>
+              <a:off x="5640985" y="2073503"/>
               <a:ext cx="0" cy="3649639"/>
             </a:xfrm>
             <a:custGeom>
@@ -2572,7 +2572,7 @@
           </p:nvSpPr>
           <p:spPr>
             <a:xfrm>
-              <a:off x="6933186" y="2073503"/>
+              <a:off x="7695561" y="2073503"/>
               <a:ext cx="0" cy="3649639"/>
             </a:xfrm>
             <a:custGeom>
@@ -2830,7 +2830,7 @@
           </p:nvSpPr>
           <p:spPr>
             <a:xfrm>
-              <a:off x="2501542" y="2073503"/>
+              <a:off x="2559122" y="2073503"/>
               <a:ext cx="0" cy="3649639"/>
             </a:xfrm>
             <a:custGeom>
@@ -2873,7 +2873,7 @@
           </p:nvSpPr>
           <p:spPr>
             <a:xfrm>
-              <a:off x="4274200" y="2073503"/>
+              <a:off x="4613698" y="2073503"/>
               <a:ext cx="0" cy="3649639"/>
             </a:xfrm>
             <a:custGeom>
@@ -2916,7 +2916,7 @@
           </p:nvSpPr>
           <p:spPr>
             <a:xfrm>
-              <a:off x="6046857" y="2073503"/>
+              <a:off x="6668273" y="2073503"/>
               <a:ext cx="0" cy="3649639"/>
             </a:xfrm>
             <a:custGeom>
@@ -2953,616 +2953,582 @@
         </p:sp>
         <p:sp>
           <p:nvSpPr>
-            <p:cNvPr id="20" name="pl20"/>
+            <p:cNvPr id="20" name="pg20"/>
             <p:cNvSpPr/>
             <p:nvPr/>
           </p:nvSpPr>
           <p:spPr>
             <a:xfrm>
-              <a:off x="7819515" y="2073503"/>
-              <a:ext cx="0" cy="3649639"/>
+              <a:off x="1172049" y="2073503"/>
+              <a:ext cx="7090630" cy="3399147"/>
             </a:xfrm>
             <a:custGeom>
               <a:avLst/>
               <a:pathLst>
-                <a:path w="0" h="3649639">
+                <a:path w="7090630" h="3399147">
                   <a:moveTo>
-                    <a:pt x="0" y="3649639"/>
+                    <a:pt x="911415" y="0"/>
                   </a:moveTo>
                   <a:lnTo>
-                    <a:pt x="0" y="0"/>
-                  </a:lnTo>
-                  <a:lnTo>
-                    <a:pt x="0" y="0"/>
-                  </a:lnTo>
-                </a:path>
-              </a:pathLst>
-            </a:custGeom>
-            <a:ln w="13550" cap="flat">
-              <a:solidFill>
-                <a:srgbClr val="EBEBEB">
-                  <a:alpha val="100000"/>
-                </a:srgbClr>
-              </a:solidFill>
-              <a:prstDash val="solid"/>
-              <a:round/>
-            </a:ln>
-          </p:spPr>
-          <p:txBody>
-            <a:bodyPr/>
-            <a:lstStyle/>
-            <a:p/>
-          </p:txBody>
-        </p:sp>
-        <p:sp>
-          <p:nvSpPr>
-            <p:cNvPr id="21" name="pg21"/>
-            <p:cNvSpPr/>
-            <p:nvPr/>
-          </p:nvSpPr>
-          <p:spPr>
-            <a:xfrm>
-              <a:off x="817517" y="2073503"/>
-              <a:ext cx="7392041" cy="3399147"/>
-            </a:xfrm>
-            <a:custGeom>
-              <a:avLst/>
-              <a:pathLst>
-                <a:path w="7392041" h="3399147">
-                  <a:moveTo>
-                    <a:pt x="727872" y="0"/>
-                  </a:moveTo>
-                  <a:lnTo>
-                    <a:pt x="749094" y="41641"/>
-                  </a:lnTo>
-                  <a:lnTo>
-                    <a:pt x="826337" y="186818"/>
-                  </a:lnTo>
-                  <a:lnTo>
-                    <a:pt x="903581" y="325872"/>
-                  </a:lnTo>
-                  <a:lnTo>
-                    <a:pt x="980824" y="459061"/>
-                  </a:lnTo>
-                  <a:lnTo>
-                    <a:pt x="1058068" y="586632"/>
-                  </a:lnTo>
-                  <a:lnTo>
-                    <a:pt x="1135311" y="708823"/>
-                  </a:lnTo>
-                  <a:lnTo>
-                    <a:pt x="1212555" y="825860"/>
-                  </a:lnTo>
-                  <a:lnTo>
-                    <a:pt x="1289799" y="937961"/>
-                  </a:lnTo>
-                  <a:lnTo>
-                    <a:pt x="1367042" y="1045334"/>
-                  </a:lnTo>
-                  <a:lnTo>
-                    <a:pt x="1444286" y="1148178"/>
-                  </a:lnTo>
-                  <a:lnTo>
-                    <a:pt x="1521529" y="1246685"/>
-                  </a:lnTo>
-                  <a:lnTo>
-                    <a:pt x="1598773" y="1341037"/>
-                  </a:lnTo>
-                  <a:lnTo>
-                    <a:pt x="1676016" y="1431409"/>
-                  </a:lnTo>
-                  <a:lnTo>
-                    <a:pt x="1753260" y="1517970"/>
-                  </a:lnTo>
-                  <a:lnTo>
-                    <a:pt x="1830504" y="1600880"/>
-                  </a:lnTo>
-                  <a:lnTo>
-                    <a:pt x="1907747" y="1680293"/>
-                  </a:lnTo>
-                  <a:lnTo>
-                    <a:pt x="1984991" y="1756357"/>
-                  </a:lnTo>
-                  <a:lnTo>
-                    <a:pt x="2062234" y="1829213"/>
-                  </a:lnTo>
-                  <a:lnTo>
-                    <a:pt x="2139478" y="1898995"/>
-                  </a:lnTo>
-                  <a:lnTo>
-                    <a:pt x="2216721" y="1965835"/>
-                  </a:lnTo>
-                  <a:lnTo>
-                    <a:pt x="2293965" y="2029856"/>
-                  </a:lnTo>
-                  <a:lnTo>
-                    <a:pt x="2371209" y="2091176"/>
-                  </a:lnTo>
-                  <a:lnTo>
-                    <a:pt x="2448452" y="2149910"/>
-                  </a:lnTo>
-                  <a:lnTo>
-                    <a:pt x="2525696" y="2206167"/>
-                  </a:lnTo>
-                  <a:lnTo>
-                    <a:pt x="2602939" y="2260051"/>
-                  </a:lnTo>
-                  <a:lnTo>
-                    <a:pt x="2680183" y="2311662"/>
-                  </a:lnTo>
-                  <a:lnTo>
-                    <a:pt x="2757426" y="2361097"/>
-                  </a:lnTo>
-                  <a:lnTo>
-                    <a:pt x="2834670" y="2408447"/>
-                  </a:lnTo>
-                  <a:lnTo>
-                    <a:pt x="2911914" y="2453799"/>
-                  </a:lnTo>
-                  <a:lnTo>
-                    <a:pt x="2989157" y="2497239"/>
-                  </a:lnTo>
-                  <a:lnTo>
-                    <a:pt x="3066401" y="2538847"/>
-                  </a:lnTo>
-                  <a:lnTo>
-                    <a:pt x="3143644" y="2578700"/>
-                  </a:lnTo>
-                  <a:lnTo>
-                    <a:pt x="3220888" y="2616871"/>
-                  </a:lnTo>
-                  <a:lnTo>
-                    <a:pt x="3298131" y="2653433"/>
-                  </a:lnTo>
-                  <a:lnTo>
-                    <a:pt x="3375375" y="2658452"/>
-                  </a:lnTo>
-                  <a:lnTo>
-                    <a:pt x="3452619" y="2662700"/>
-                  </a:lnTo>
-                  <a:lnTo>
-                    <a:pt x="3529862" y="2666927"/>
-                  </a:lnTo>
-                  <a:lnTo>
-                    <a:pt x="3607106" y="2671132"/>
-                  </a:lnTo>
-                  <a:lnTo>
-                    <a:pt x="3684349" y="2675315"/>
-                  </a:lnTo>
-                  <a:lnTo>
-                    <a:pt x="3761593" y="2679476"/>
-                  </a:lnTo>
-                  <a:lnTo>
-                    <a:pt x="3838836" y="2683617"/>
-                  </a:lnTo>
-                  <a:lnTo>
-                    <a:pt x="3916080" y="2687736"/>
-                  </a:lnTo>
-                  <a:lnTo>
-                    <a:pt x="3993324" y="2691833"/>
-                  </a:lnTo>
-                  <a:lnTo>
-                    <a:pt x="4070567" y="2695910"/>
-                  </a:lnTo>
-                  <a:lnTo>
-                    <a:pt x="4147811" y="2699966"/>
-                  </a:lnTo>
-                  <a:lnTo>
-                    <a:pt x="4225054" y="2704000"/>
-                  </a:lnTo>
-                  <a:lnTo>
-                    <a:pt x="4302298" y="2708014"/>
-                  </a:lnTo>
-                  <a:lnTo>
-                    <a:pt x="4379541" y="2712008"/>
-                  </a:lnTo>
-                  <a:lnTo>
-                    <a:pt x="4456785" y="2715980"/>
-                  </a:lnTo>
-                  <a:lnTo>
-                    <a:pt x="4534029" y="2719933"/>
-                  </a:lnTo>
-                  <a:lnTo>
-                    <a:pt x="4611272" y="2723865"/>
-                  </a:lnTo>
-                  <a:lnTo>
-                    <a:pt x="4688516" y="2727776"/>
-                  </a:lnTo>
-                  <a:lnTo>
-                    <a:pt x="4765759" y="2731668"/>
-                  </a:lnTo>
-                  <a:lnTo>
-                    <a:pt x="4843003" y="2735540"/>
-                  </a:lnTo>
-                  <a:lnTo>
-                    <a:pt x="4920246" y="2739391"/>
-                  </a:lnTo>
-                  <a:lnTo>
-                    <a:pt x="4997490" y="2743223"/>
-                  </a:lnTo>
-                  <a:lnTo>
-                    <a:pt x="5074734" y="2747035"/>
-                  </a:lnTo>
-                  <a:lnTo>
-                    <a:pt x="5151977" y="2750828"/>
-                  </a:lnTo>
-                  <a:lnTo>
-                    <a:pt x="5229221" y="2754600"/>
-                  </a:lnTo>
-                  <a:lnTo>
-                    <a:pt x="5306464" y="2758354"/>
-                  </a:lnTo>
-                  <a:lnTo>
-                    <a:pt x="5383708" y="2762088"/>
-                  </a:lnTo>
-                  <a:lnTo>
-                    <a:pt x="5460951" y="2765803"/>
-                  </a:lnTo>
-                  <a:lnTo>
-                    <a:pt x="5538195" y="2769499"/>
-                  </a:lnTo>
-                  <a:lnTo>
-                    <a:pt x="5615439" y="2773176"/>
-                  </a:lnTo>
-                  <a:lnTo>
-                    <a:pt x="5692682" y="2776834"/>
-                  </a:lnTo>
-                  <a:lnTo>
-                    <a:pt x="5769926" y="2780473"/>
-                  </a:lnTo>
-                  <a:lnTo>
-                    <a:pt x="5847169" y="2784093"/>
-                  </a:lnTo>
-                  <a:lnTo>
-                    <a:pt x="5924413" y="2787695"/>
-                  </a:lnTo>
-                  <a:lnTo>
-                    <a:pt x="6001656" y="2791278"/>
-                  </a:lnTo>
-                  <a:lnTo>
-                    <a:pt x="6078900" y="2794843"/>
-                  </a:lnTo>
-                  <a:lnTo>
-                    <a:pt x="6156144" y="2798389"/>
-                  </a:lnTo>
-                  <a:lnTo>
-                    <a:pt x="6233387" y="2801917"/>
-                  </a:lnTo>
-                  <a:lnTo>
-                    <a:pt x="6310631" y="2805427"/>
-                  </a:lnTo>
-                  <a:lnTo>
-                    <a:pt x="6387874" y="2808919"/>
-                  </a:lnTo>
-                  <a:lnTo>
-                    <a:pt x="6465118" y="2812393"/>
-                  </a:lnTo>
-                  <a:lnTo>
-                    <a:pt x="6542361" y="2815849"/>
-                  </a:lnTo>
-                  <a:lnTo>
-                    <a:pt x="6619605" y="2819287"/>
-                  </a:lnTo>
-                  <a:lnTo>
-                    <a:pt x="6696849" y="2822707"/>
-                  </a:lnTo>
-                  <a:lnTo>
-                    <a:pt x="6774092" y="2826110"/>
-                  </a:lnTo>
-                  <a:lnTo>
-                    <a:pt x="6851336" y="2829496"/>
-                  </a:lnTo>
-                  <a:lnTo>
-                    <a:pt x="6928579" y="2832864"/>
-                  </a:lnTo>
-                  <a:lnTo>
-                    <a:pt x="7005823" y="2836214"/>
-                  </a:lnTo>
-                  <a:lnTo>
-                    <a:pt x="7083066" y="2839548"/>
-                  </a:lnTo>
-                  <a:lnTo>
-                    <a:pt x="7160310" y="2842864"/>
-                  </a:lnTo>
-                  <a:lnTo>
-                    <a:pt x="7237554" y="2846163"/>
-                  </a:lnTo>
-                  <a:lnTo>
-                    <a:pt x="7314797" y="2849445"/>
-                  </a:lnTo>
-                  <a:lnTo>
-                    <a:pt x="7392041" y="2852710"/>
-                  </a:lnTo>
-                  <a:lnTo>
-                    <a:pt x="7392041" y="3399147"/>
-                  </a:lnTo>
-                  <a:lnTo>
-                    <a:pt x="7314797" y="3395422"/>
-                  </a:lnTo>
-                  <a:lnTo>
-                    <a:pt x="7237554" y="3391532"/>
-                  </a:lnTo>
-                  <a:lnTo>
-                    <a:pt x="7160310" y="3387472"/>
-                  </a:lnTo>
-                  <a:lnTo>
-                    <a:pt x="7083066" y="3383233"/>
-                  </a:lnTo>
-                  <a:lnTo>
-                    <a:pt x="7005823" y="3378807"/>
-                  </a:lnTo>
-                  <a:lnTo>
-                    <a:pt x="6928579" y="3374186"/>
-                  </a:lnTo>
-                  <a:lnTo>
-                    <a:pt x="6851336" y="3369361"/>
-                  </a:lnTo>
-                  <a:lnTo>
-                    <a:pt x="6774092" y="3364324"/>
-                  </a:lnTo>
-                  <a:lnTo>
-                    <a:pt x="6696849" y="3359066"/>
-                  </a:lnTo>
-                  <a:lnTo>
-                    <a:pt x="6619605" y="3353576"/>
-                  </a:lnTo>
-                  <a:lnTo>
-                    <a:pt x="6542361" y="3347844"/>
-                  </a:lnTo>
-                  <a:lnTo>
-                    <a:pt x="6465118" y="3341859"/>
-                  </a:lnTo>
-                  <a:lnTo>
-                    <a:pt x="6387874" y="3335612"/>
-                  </a:lnTo>
-                  <a:lnTo>
-                    <a:pt x="6310631" y="3329089"/>
-                  </a:lnTo>
-                  <a:lnTo>
-                    <a:pt x="6233387" y="3322278"/>
-                  </a:lnTo>
-                  <a:lnTo>
-                    <a:pt x="6156144" y="3315168"/>
-                  </a:lnTo>
-                  <a:lnTo>
-                    <a:pt x="6078900" y="3307745"/>
-                  </a:lnTo>
-                  <a:lnTo>
-                    <a:pt x="6001656" y="3299995"/>
-                  </a:lnTo>
-                  <a:lnTo>
-                    <a:pt x="5924413" y="3291904"/>
-                  </a:lnTo>
-                  <a:lnTo>
-                    <a:pt x="5847169" y="3283456"/>
-                  </a:lnTo>
-                  <a:lnTo>
-                    <a:pt x="5769926" y="3274637"/>
-                  </a:lnTo>
-                  <a:lnTo>
-                    <a:pt x="5692682" y="3265429"/>
-                  </a:lnTo>
-                  <a:lnTo>
-                    <a:pt x="5615439" y="3255815"/>
-                  </a:lnTo>
-                  <a:lnTo>
-                    <a:pt x="5538195" y="3245779"/>
-                  </a:lnTo>
-                  <a:lnTo>
-                    <a:pt x="5460951" y="3235300"/>
-                  </a:lnTo>
-                  <a:lnTo>
-                    <a:pt x="5383708" y="3224360"/>
-                  </a:lnTo>
-                  <a:lnTo>
-                    <a:pt x="5306464" y="3212938"/>
-                  </a:lnTo>
-                  <a:lnTo>
-                    <a:pt x="5229221" y="3201013"/>
-                  </a:lnTo>
-                  <a:lnTo>
-                    <a:pt x="5151977" y="3188564"/>
-                  </a:lnTo>
-                  <a:lnTo>
-                    <a:pt x="5074734" y="3175566"/>
-                  </a:lnTo>
-                  <a:lnTo>
-                    <a:pt x="4997490" y="3161995"/>
-                  </a:lnTo>
-                  <a:lnTo>
-                    <a:pt x="4920246" y="3147827"/>
-                  </a:lnTo>
-                  <a:lnTo>
-                    <a:pt x="4843003" y="3133035"/>
-                  </a:lnTo>
-                  <a:lnTo>
-                    <a:pt x="4765759" y="3117592"/>
-                  </a:lnTo>
-                  <a:lnTo>
-                    <a:pt x="4688516" y="3101469"/>
-                  </a:lnTo>
-                  <a:lnTo>
-                    <a:pt x="4611272" y="3084636"/>
-                  </a:lnTo>
-                  <a:lnTo>
-                    <a:pt x="4534029" y="3067061"/>
-                  </a:lnTo>
-                  <a:lnTo>
-                    <a:pt x="4456785" y="3048713"/>
-                  </a:lnTo>
-                  <a:lnTo>
-                    <a:pt x="4379541" y="3029557"/>
-                  </a:lnTo>
-                  <a:lnTo>
-                    <a:pt x="4302298" y="3009557"/>
-                  </a:lnTo>
-                  <a:lnTo>
-                    <a:pt x="4225054" y="2988677"/>
-                  </a:lnTo>
-                  <a:lnTo>
-                    <a:pt x="4147811" y="2966877"/>
-                  </a:lnTo>
-                  <a:lnTo>
-                    <a:pt x="4070567" y="2944117"/>
-                  </a:lnTo>
-                  <a:lnTo>
-                    <a:pt x="3993324" y="2920355"/>
-                  </a:lnTo>
-                  <a:lnTo>
-                    <a:pt x="3916080" y="2895547"/>
-                  </a:lnTo>
-                  <a:lnTo>
-                    <a:pt x="3838836" y="2869646"/>
-                  </a:lnTo>
-                  <a:lnTo>
-                    <a:pt x="3761593" y="2842605"/>
-                  </a:lnTo>
-                  <a:lnTo>
-                    <a:pt x="3684349" y="2814373"/>
-                  </a:lnTo>
-                  <a:lnTo>
-                    <a:pt x="3607106" y="2784897"/>
-                  </a:lnTo>
-                  <a:lnTo>
-                    <a:pt x="3529862" y="2754124"/>
-                  </a:lnTo>
-                  <a:lnTo>
-                    <a:pt x="3452619" y="2721996"/>
-                  </a:lnTo>
-                  <a:lnTo>
-                    <a:pt x="3375375" y="2688453"/>
-                  </a:lnTo>
-                  <a:lnTo>
-                    <a:pt x="3298131" y="2654181"/>
-                  </a:lnTo>
-                  <a:lnTo>
-                    <a:pt x="3220888" y="2649889"/>
-                  </a:lnTo>
-                  <a:lnTo>
-                    <a:pt x="3143644" y="2645574"/>
-                  </a:lnTo>
-                  <a:lnTo>
-                    <a:pt x="3066401" y="2641237"/>
-                  </a:lnTo>
-                  <a:lnTo>
-                    <a:pt x="2989157" y="2636877"/>
-                  </a:lnTo>
-                  <a:lnTo>
-                    <a:pt x="2911914" y="2632495"/>
-                  </a:lnTo>
-                  <a:lnTo>
-                    <a:pt x="2834670" y="2628090"/>
-                  </a:lnTo>
-                  <a:lnTo>
-                    <a:pt x="2757426" y="2623663"/>
-                  </a:lnTo>
-                  <a:lnTo>
-                    <a:pt x="2680183" y="2619212"/>
-                  </a:lnTo>
-                  <a:lnTo>
-                    <a:pt x="2602939" y="2614739"/>
-                  </a:lnTo>
-                  <a:lnTo>
-                    <a:pt x="2525696" y="2610242"/>
-                  </a:lnTo>
-                  <a:lnTo>
-                    <a:pt x="2448452" y="2605722"/>
-                  </a:lnTo>
-                  <a:lnTo>
-                    <a:pt x="2371209" y="2601179"/>
-                  </a:lnTo>
-                  <a:lnTo>
-                    <a:pt x="2293965" y="2596612"/>
-                  </a:lnTo>
-                  <a:lnTo>
-                    <a:pt x="2216721" y="2592022"/>
-                  </a:lnTo>
-                  <a:lnTo>
-                    <a:pt x="2139478" y="2587408"/>
-                  </a:lnTo>
-                  <a:lnTo>
-                    <a:pt x="2062234" y="2582770"/>
-                  </a:lnTo>
-                  <a:lnTo>
-                    <a:pt x="1984991" y="2578108"/>
-                  </a:lnTo>
-                  <a:lnTo>
-                    <a:pt x="1907747" y="2573421"/>
-                  </a:lnTo>
-                  <a:lnTo>
-                    <a:pt x="1830504" y="2568711"/>
-                  </a:lnTo>
-                  <a:lnTo>
-                    <a:pt x="1753260" y="2563976"/>
-                  </a:lnTo>
-                  <a:lnTo>
-                    <a:pt x="1676016" y="2559217"/>
-                  </a:lnTo>
-                  <a:lnTo>
-                    <a:pt x="1598773" y="2554433"/>
-                  </a:lnTo>
-                  <a:lnTo>
-                    <a:pt x="1521529" y="2549624"/>
-                  </a:lnTo>
-                  <a:lnTo>
-                    <a:pt x="1444286" y="2544791"/>
-                  </a:lnTo>
-                  <a:lnTo>
-                    <a:pt x="1367042" y="2539932"/>
-                  </a:lnTo>
-                  <a:lnTo>
-                    <a:pt x="1289799" y="2535048"/>
-                  </a:lnTo>
-                  <a:lnTo>
-                    <a:pt x="1212555" y="2530139"/>
-                  </a:lnTo>
-                  <a:lnTo>
-                    <a:pt x="1135311" y="2525205"/>
-                  </a:lnTo>
-                  <a:lnTo>
-                    <a:pt x="1058068" y="2520245"/>
-                  </a:lnTo>
-                  <a:lnTo>
-                    <a:pt x="980824" y="2515259"/>
-                  </a:lnTo>
-                  <a:lnTo>
-                    <a:pt x="903581" y="2510248"/>
-                  </a:lnTo>
-                  <a:lnTo>
-                    <a:pt x="826337" y="2505211"/>
-                  </a:lnTo>
-                  <a:lnTo>
-                    <a:pt x="749094" y="2500147"/>
-                  </a:lnTo>
-                  <a:lnTo>
-                    <a:pt x="671850" y="2495058"/>
-                  </a:lnTo>
-                  <a:lnTo>
-                    <a:pt x="594606" y="2489942"/>
-                  </a:lnTo>
-                  <a:lnTo>
-                    <a:pt x="517363" y="2484799"/>
-                  </a:lnTo>
-                  <a:lnTo>
-                    <a:pt x="440119" y="2479630"/>
-                  </a:lnTo>
-                  <a:lnTo>
-                    <a:pt x="362876" y="2474435"/>
-                  </a:lnTo>
-                  <a:lnTo>
-                    <a:pt x="285632" y="2469212"/>
-                  </a:lnTo>
-                  <a:lnTo>
-                    <a:pt x="208389" y="2463962"/>
-                  </a:lnTo>
-                  <a:lnTo>
-                    <a:pt x="131145" y="2458685"/>
-                  </a:lnTo>
-                  <a:lnTo>
-                    <a:pt x="53901" y="2453381"/>
-                  </a:lnTo>
-                  <a:lnTo>
-                    <a:pt x="0" y="2449661"/>
+                    <a:pt x="931092" y="41641"/>
+                  </a:lnTo>
+                  <a:lnTo>
+                    <a:pt x="1002715" y="186818"/>
+                  </a:lnTo>
+                  <a:lnTo>
+                    <a:pt x="1074337" y="325872"/>
+                  </a:lnTo>
+                  <a:lnTo>
+                    <a:pt x="1145960" y="459061"/>
+                  </a:lnTo>
+                  <a:lnTo>
+                    <a:pt x="1217582" y="586632"/>
+                  </a:lnTo>
+                  <a:lnTo>
+                    <a:pt x="1289205" y="708823"/>
+                  </a:lnTo>
+                  <a:lnTo>
+                    <a:pt x="1360827" y="825860"/>
+                  </a:lnTo>
+                  <a:lnTo>
+                    <a:pt x="1432450" y="937961"/>
+                  </a:lnTo>
+                  <a:lnTo>
+                    <a:pt x="1504073" y="1045334"/>
+                  </a:lnTo>
+                  <a:lnTo>
+                    <a:pt x="1575695" y="1148178"/>
+                  </a:lnTo>
+                  <a:lnTo>
+                    <a:pt x="1647318" y="1246685"/>
+                  </a:lnTo>
+                  <a:lnTo>
+                    <a:pt x="1718940" y="1341037"/>
+                  </a:lnTo>
+                  <a:lnTo>
+                    <a:pt x="1790563" y="1431409"/>
+                  </a:lnTo>
+                  <a:lnTo>
+                    <a:pt x="1862185" y="1517970"/>
+                  </a:lnTo>
+                  <a:lnTo>
+                    <a:pt x="1933808" y="1600880"/>
+                  </a:lnTo>
+                  <a:lnTo>
+                    <a:pt x="2005430" y="1680293"/>
+                  </a:lnTo>
+                  <a:lnTo>
+                    <a:pt x="2077053" y="1756357"/>
+                  </a:lnTo>
+                  <a:lnTo>
+                    <a:pt x="2148675" y="1829213"/>
+                  </a:lnTo>
+                  <a:lnTo>
+                    <a:pt x="2220298" y="1898995"/>
+                  </a:lnTo>
+                  <a:lnTo>
+                    <a:pt x="2291920" y="1965835"/>
+                  </a:lnTo>
+                  <a:lnTo>
+                    <a:pt x="2363543" y="2029856"/>
+                  </a:lnTo>
+                  <a:lnTo>
+                    <a:pt x="2435165" y="2091176"/>
+                  </a:lnTo>
+                  <a:lnTo>
+                    <a:pt x="2506788" y="2149910"/>
+                  </a:lnTo>
+                  <a:lnTo>
+                    <a:pt x="2578410" y="2206167"/>
+                  </a:lnTo>
+                  <a:lnTo>
+                    <a:pt x="2650033" y="2260051"/>
+                  </a:lnTo>
+                  <a:lnTo>
+                    <a:pt x="2721655" y="2311662"/>
+                  </a:lnTo>
+                  <a:lnTo>
+                    <a:pt x="2793278" y="2361097"/>
+                  </a:lnTo>
+                  <a:lnTo>
+                    <a:pt x="2864901" y="2408447"/>
+                  </a:lnTo>
+                  <a:lnTo>
+                    <a:pt x="2936523" y="2453799"/>
+                  </a:lnTo>
+                  <a:lnTo>
+                    <a:pt x="3008146" y="2497239"/>
+                  </a:lnTo>
+                  <a:lnTo>
+                    <a:pt x="3079768" y="2538847"/>
+                  </a:lnTo>
+                  <a:lnTo>
+                    <a:pt x="3151391" y="2578700"/>
+                  </a:lnTo>
+                  <a:lnTo>
+                    <a:pt x="3223013" y="2616871"/>
+                  </a:lnTo>
+                  <a:lnTo>
+                    <a:pt x="3294636" y="2653433"/>
+                  </a:lnTo>
+                  <a:lnTo>
+                    <a:pt x="3366258" y="2658452"/>
+                  </a:lnTo>
+                  <a:lnTo>
+                    <a:pt x="3437881" y="2662700"/>
+                  </a:lnTo>
+                  <a:lnTo>
+                    <a:pt x="3509503" y="2666927"/>
+                  </a:lnTo>
+                  <a:lnTo>
+                    <a:pt x="3581126" y="2671132"/>
+                  </a:lnTo>
+                  <a:lnTo>
+                    <a:pt x="3652748" y="2675315"/>
+                  </a:lnTo>
+                  <a:lnTo>
+                    <a:pt x="3724371" y="2679476"/>
+                  </a:lnTo>
+                  <a:lnTo>
+                    <a:pt x="3795993" y="2683617"/>
+                  </a:lnTo>
+                  <a:lnTo>
+                    <a:pt x="3867616" y="2687736"/>
+                  </a:lnTo>
+                  <a:lnTo>
+                    <a:pt x="3939238" y="2691833"/>
+                  </a:lnTo>
+                  <a:lnTo>
+                    <a:pt x="4010861" y="2695910"/>
+                  </a:lnTo>
+                  <a:lnTo>
+                    <a:pt x="4082483" y="2699966"/>
+                  </a:lnTo>
+                  <a:lnTo>
+                    <a:pt x="4154106" y="2704000"/>
+                  </a:lnTo>
+                  <a:lnTo>
+                    <a:pt x="4225729" y="2708014"/>
+                  </a:lnTo>
+                  <a:lnTo>
+                    <a:pt x="4297351" y="2712008"/>
+                  </a:lnTo>
+                  <a:lnTo>
+                    <a:pt x="4368974" y="2715980"/>
+                  </a:lnTo>
+                  <a:lnTo>
+                    <a:pt x="4440596" y="2719933"/>
+                  </a:lnTo>
+                  <a:lnTo>
+                    <a:pt x="4512219" y="2723865"/>
+                  </a:lnTo>
+                  <a:lnTo>
+                    <a:pt x="4583841" y="2727776"/>
+                  </a:lnTo>
+                  <a:lnTo>
+                    <a:pt x="4655464" y="2731668"/>
+                  </a:lnTo>
+                  <a:lnTo>
+                    <a:pt x="4727086" y="2735540"/>
+                  </a:lnTo>
+                  <a:lnTo>
+                    <a:pt x="4798709" y="2739391"/>
+                  </a:lnTo>
+                  <a:lnTo>
+                    <a:pt x="4870331" y="2743223"/>
+                  </a:lnTo>
+                  <a:lnTo>
+                    <a:pt x="4941954" y="2747035"/>
+                  </a:lnTo>
+                  <a:lnTo>
+                    <a:pt x="5013576" y="2750828"/>
+                  </a:lnTo>
+                  <a:lnTo>
+                    <a:pt x="5085199" y="2754600"/>
+                  </a:lnTo>
+                  <a:lnTo>
+                    <a:pt x="5156821" y="2758354"/>
+                  </a:lnTo>
+                  <a:lnTo>
+                    <a:pt x="5228444" y="2762088"/>
+                  </a:lnTo>
+                  <a:lnTo>
+                    <a:pt x="5300066" y="2765803"/>
+                  </a:lnTo>
+                  <a:lnTo>
+                    <a:pt x="5371689" y="2769499"/>
+                  </a:lnTo>
+                  <a:lnTo>
+                    <a:pt x="5443311" y="2773176"/>
+                  </a:lnTo>
+                  <a:lnTo>
+                    <a:pt x="5514934" y="2776834"/>
+                  </a:lnTo>
+                  <a:lnTo>
+                    <a:pt x="5586557" y="2780473"/>
+                  </a:lnTo>
+                  <a:lnTo>
+                    <a:pt x="5658179" y="2784093"/>
+                  </a:lnTo>
+                  <a:lnTo>
+                    <a:pt x="5729802" y="2787695"/>
+                  </a:lnTo>
+                  <a:lnTo>
+                    <a:pt x="5801424" y="2791278"/>
+                  </a:lnTo>
+                  <a:lnTo>
+                    <a:pt x="5873047" y="2794843"/>
+                  </a:lnTo>
+                  <a:lnTo>
+                    <a:pt x="5944669" y="2798389"/>
+                  </a:lnTo>
+                  <a:lnTo>
+                    <a:pt x="6016292" y="2801917"/>
+                  </a:lnTo>
+                  <a:lnTo>
+                    <a:pt x="6087914" y="2805427"/>
+                  </a:lnTo>
+                  <a:lnTo>
+                    <a:pt x="6159537" y="2808919"/>
+                  </a:lnTo>
+                  <a:lnTo>
+                    <a:pt x="6231159" y="2812393"/>
+                  </a:lnTo>
+                  <a:lnTo>
+                    <a:pt x="6302782" y="2815849"/>
+                  </a:lnTo>
+                  <a:lnTo>
+                    <a:pt x="6374404" y="2819287"/>
+                  </a:lnTo>
+                  <a:lnTo>
+                    <a:pt x="6446027" y="2822707"/>
+                  </a:lnTo>
+                  <a:lnTo>
+                    <a:pt x="6517649" y="2826110"/>
+                  </a:lnTo>
+                  <a:lnTo>
+                    <a:pt x="6589272" y="2829496"/>
+                  </a:lnTo>
+                  <a:lnTo>
+                    <a:pt x="6660894" y="2832864"/>
+                  </a:lnTo>
+                  <a:lnTo>
+                    <a:pt x="6732517" y="2836214"/>
+                  </a:lnTo>
+                  <a:lnTo>
+                    <a:pt x="6804139" y="2839548"/>
+                  </a:lnTo>
+                  <a:lnTo>
+                    <a:pt x="6875762" y="2842864"/>
+                  </a:lnTo>
+                  <a:lnTo>
+                    <a:pt x="6947385" y="2846163"/>
+                  </a:lnTo>
+                  <a:lnTo>
+                    <a:pt x="7019007" y="2849445"/>
+                  </a:lnTo>
+                  <a:lnTo>
+                    <a:pt x="7090630" y="2852710"/>
+                  </a:lnTo>
+                  <a:lnTo>
+                    <a:pt x="7090630" y="3399147"/>
+                  </a:lnTo>
+                  <a:lnTo>
+                    <a:pt x="7019007" y="3395422"/>
+                  </a:lnTo>
+                  <a:lnTo>
+                    <a:pt x="6947385" y="3391532"/>
+                  </a:lnTo>
+                  <a:lnTo>
+                    <a:pt x="6875762" y="3387472"/>
+                  </a:lnTo>
+                  <a:lnTo>
+                    <a:pt x="6804139" y="3383233"/>
+                  </a:lnTo>
+                  <a:lnTo>
+                    <a:pt x="6732517" y="3378807"/>
+                  </a:lnTo>
+                  <a:lnTo>
+                    <a:pt x="6660894" y="3374186"/>
+                  </a:lnTo>
+                  <a:lnTo>
+                    <a:pt x="6589272" y="3369361"/>
+                  </a:lnTo>
+                  <a:lnTo>
+                    <a:pt x="6517649" y="3364324"/>
+                  </a:lnTo>
+                  <a:lnTo>
+                    <a:pt x="6446027" y="3359066"/>
+                  </a:lnTo>
+                  <a:lnTo>
+                    <a:pt x="6374404" y="3353576"/>
+                  </a:lnTo>
+                  <a:lnTo>
+                    <a:pt x="6302782" y="3347844"/>
+                  </a:lnTo>
+                  <a:lnTo>
+                    <a:pt x="6231159" y="3341859"/>
+                  </a:lnTo>
+                  <a:lnTo>
+                    <a:pt x="6159537" y="3335612"/>
+                  </a:lnTo>
+                  <a:lnTo>
+                    <a:pt x="6087914" y="3329089"/>
+                  </a:lnTo>
+                  <a:lnTo>
+                    <a:pt x="6016292" y="3322278"/>
+                  </a:lnTo>
+                  <a:lnTo>
+                    <a:pt x="5944669" y="3315168"/>
+                  </a:lnTo>
+                  <a:lnTo>
+                    <a:pt x="5873047" y="3307745"/>
+                  </a:lnTo>
+                  <a:lnTo>
+                    <a:pt x="5801424" y="3299995"/>
+                  </a:lnTo>
+                  <a:lnTo>
+                    <a:pt x="5729802" y="3291904"/>
+                  </a:lnTo>
+                  <a:lnTo>
+                    <a:pt x="5658179" y="3283456"/>
+                  </a:lnTo>
+                  <a:lnTo>
+                    <a:pt x="5586557" y="3274637"/>
+                  </a:lnTo>
+                  <a:lnTo>
+                    <a:pt x="5514934" y="3265429"/>
+                  </a:lnTo>
+                  <a:lnTo>
+                    <a:pt x="5443311" y="3255815"/>
+                  </a:lnTo>
+                  <a:lnTo>
+                    <a:pt x="5371689" y="3245779"/>
+                  </a:lnTo>
+                  <a:lnTo>
+                    <a:pt x="5300066" y="3235300"/>
+                  </a:lnTo>
+                  <a:lnTo>
+                    <a:pt x="5228444" y="3224360"/>
+                  </a:lnTo>
+                  <a:lnTo>
+                    <a:pt x="5156821" y="3212938"/>
+                  </a:lnTo>
+                  <a:lnTo>
+                    <a:pt x="5085199" y="3201013"/>
+                  </a:lnTo>
+                  <a:lnTo>
+                    <a:pt x="5013576" y="3188564"/>
+                  </a:lnTo>
+                  <a:lnTo>
+                    <a:pt x="4941954" y="3175566"/>
+                  </a:lnTo>
+                  <a:lnTo>
+                    <a:pt x="4870331" y="3161995"/>
+                  </a:lnTo>
+                  <a:lnTo>
+                    <a:pt x="4798709" y="3147827"/>
+                  </a:lnTo>
+                  <a:lnTo>
+                    <a:pt x="4727086" y="3133035"/>
+                  </a:lnTo>
+                  <a:lnTo>
+                    <a:pt x="4655464" y="3117592"/>
+                  </a:lnTo>
+                  <a:lnTo>
+                    <a:pt x="4583841" y="3101469"/>
+                  </a:lnTo>
+                  <a:lnTo>
+                    <a:pt x="4512219" y="3084636"/>
+                  </a:lnTo>
+                  <a:lnTo>
+                    <a:pt x="4440596" y="3067061"/>
+                  </a:lnTo>
+                  <a:lnTo>
+                    <a:pt x="4368974" y="3048713"/>
+                  </a:lnTo>
+                  <a:lnTo>
+                    <a:pt x="4297351" y="3029557"/>
+                  </a:lnTo>
+                  <a:lnTo>
+                    <a:pt x="4225729" y="3009557"/>
+                  </a:lnTo>
+                  <a:lnTo>
+                    <a:pt x="4154106" y="2988677"/>
+                  </a:lnTo>
+                  <a:lnTo>
+                    <a:pt x="4082483" y="2966877"/>
+                  </a:lnTo>
+                  <a:lnTo>
+                    <a:pt x="4010861" y="2944117"/>
+                  </a:lnTo>
+                  <a:lnTo>
+                    <a:pt x="3939238" y="2920355"/>
+                  </a:lnTo>
+                  <a:lnTo>
+                    <a:pt x="3867616" y="2895547"/>
+                  </a:lnTo>
+                  <a:lnTo>
+                    <a:pt x="3795993" y="2869646"/>
+                  </a:lnTo>
+                  <a:lnTo>
+                    <a:pt x="3724371" y="2842605"/>
+                  </a:lnTo>
+                  <a:lnTo>
+                    <a:pt x="3652748" y="2814373"/>
+                  </a:lnTo>
+                  <a:lnTo>
+                    <a:pt x="3581126" y="2784897"/>
+                  </a:lnTo>
+                  <a:lnTo>
+                    <a:pt x="3509503" y="2754124"/>
+                  </a:lnTo>
+                  <a:lnTo>
+                    <a:pt x="3437881" y="2721996"/>
+                  </a:lnTo>
+                  <a:lnTo>
+                    <a:pt x="3366258" y="2688453"/>
+                  </a:lnTo>
+                  <a:lnTo>
+                    <a:pt x="3294636" y="2654181"/>
+                  </a:lnTo>
+                  <a:lnTo>
+                    <a:pt x="3223013" y="2649889"/>
+                  </a:lnTo>
+                  <a:lnTo>
+                    <a:pt x="3151391" y="2645574"/>
+                  </a:lnTo>
+                  <a:lnTo>
+                    <a:pt x="3079768" y="2641237"/>
+                  </a:lnTo>
+                  <a:lnTo>
+                    <a:pt x="3008146" y="2636877"/>
+                  </a:lnTo>
+                  <a:lnTo>
+                    <a:pt x="2936523" y="2632495"/>
+                  </a:lnTo>
+                  <a:lnTo>
+                    <a:pt x="2864901" y="2628090"/>
+                  </a:lnTo>
+                  <a:lnTo>
+                    <a:pt x="2793278" y="2623663"/>
+                  </a:lnTo>
+                  <a:lnTo>
+                    <a:pt x="2721655" y="2619212"/>
+                  </a:lnTo>
+                  <a:lnTo>
+                    <a:pt x="2650033" y="2614739"/>
+                  </a:lnTo>
+                  <a:lnTo>
+                    <a:pt x="2578410" y="2610242"/>
+                  </a:lnTo>
+                  <a:lnTo>
+                    <a:pt x="2506788" y="2605722"/>
+                  </a:lnTo>
+                  <a:lnTo>
+                    <a:pt x="2435165" y="2601179"/>
+                  </a:lnTo>
+                  <a:lnTo>
+                    <a:pt x="2363543" y="2596612"/>
+                  </a:lnTo>
+                  <a:lnTo>
+                    <a:pt x="2291920" y="2592022"/>
+                  </a:lnTo>
+                  <a:lnTo>
+                    <a:pt x="2220298" y="2587408"/>
+                  </a:lnTo>
+                  <a:lnTo>
+                    <a:pt x="2148675" y="2582770"/>
+                  </a:lnTo>
+                  <a:lnTo>
+                    <a:pt x="2077053" y="2578108"/>
+                  </a:lnTo>
+                  <a:lnTo>
+                    <a:pt x="2005430" y="2573421"/>
+                  </a:lnTo>
+                  <a:lnTo>
+                    <a:pt x="1933808" y="2568711"/>
+                  </a:lnTo>
+                  <a:lnTo>
+                    <a:pt x="1862185" y="2563976"/>
+                  </a:lnTo>
+                  <a:lnTo>
+                    <a:pt x="1790563" y="2559217"/>
+                  </a:lnTo>
+                  <a:lnTo>
+                    <a:pt x="1718940" y="2554433"/>
+                  </a:lnTo>
+                  <a:lnTo>
+                    <a:pt x="1647318" y="2549624"/>
+                  </a:lnTo>
+                  <a:lnTo>
+                    <a:pt x="1575695" y="2544791"/>
+                  </a:lnTo>
+                  <a:lnTo>
+                    <a:pt x="1504073" y="2539932"/>
+                  </a:lnTo>
+                  <a:lnTo>
+                    <a:pt x="1432450" y="2535048"/>
+                  </a:lnTo>
+                  <a:lnTo>
+                    <a:pt x="1360827" y="2530139"/>
+                  </a:lnTo>
+                  <a:lnTo>
+                    <a:pt x="1289205" y="2525205"/>
+                  </a:lnTo>
+                  <a:lnTo>
+                    <a:pt x="1217582" y="2520245"/>
+                  </a:lnTo>
+                  <a:lnTo>
+                    <a:pt x="1145960" y="2515259"/>
+                  </a:lnTo>
+                  <a:lnTo>
+                    <a:pt x="1074337" y="2510248"/>
+                  </a:lnTo>
+                  <a:lnTo>
+                    <a:pt x="1002715" y="2505211"/>
+                  </a:lnTo>
+                  <a:lnTo>
+                    <a:pt x="931092" y="2500147"/>
+                  </a:lnTo>
+                  <a:lnTo>
+                    <a:pt x="859470" y="2495058"/>
+                  </a:lnTo>
+                  <a:lnTo>
+                    <a:pt x="787847" y="2489942"/>
+                  </a:lnTo>
+                  <a:lnTo>
+                    <a:pt x="716225" y="2484799"/>
+                  </a:lnTo>
+                  <a:lnTo>
+                    <a:pt x="644602" y="2479630"/>
+                  </a:lnTo>
+                  <a:lnTo>
+                    <a:pt x="572980" y="2474435"/>
+                  </a:lnTo>
+                  <a:lnTo>
+                    <a:pt x="501357" y="2469212"/>
+                  </a:lnTo>
+                  <a:lnTo>
+                    <a:pt x="429735" y="2463962"/>
+                  </a:lnTo>
+                  <a:lnTo>
+                    <a:pt x="358112" y="2458685"/>
+                  </a:lnTo>
+                  <a:lnTo>
+                    <a:pt x="286490" y="2453381"/>
+                  </a:lnTo>
+                  <a:lnTo>
+                    <a:pt x="214867" y="2448050"/>
+                  </a:lnTo>
+                  <a:lnTo>
+                    <a:pt x="143245" y="2442691"/>
+                  </a:lnTo>
+                  <a:lnTo>
+                    <a:pt x="71622" y="2437304"/>
+                  </a:lnTo>
+                  <a:lnTo>
+                    <a:pt x="0" y="2431889"/>
                   </a:lnTo>
                   <a:close/>
                 </a:path>
@@ -3582,282 +3548,607 @@
         </p:sp>
         <p:sp>
           <p:nvSpPr>
+            <p:cNvPr id="21" name="pl21"/>
+            <p:cNvSpPr/>
+            <p:nvPr/>
+          </p:nvSpPr>
+          <p:spPr>
+            <a:xfrm>
+              <a:off x="2083464" y="2073503"/>
+              <a:ext cx="6179214" cy="2852710"/>
+            </a:xfrm>
+            <a:custGeom>
+              <a:avLst/>
+              <a:pathLst>
+                <a:path w="6179214" h="2852710">
+                  <a:moveTo>
+                    <a:pt x="0" y="0"/>
+                  </a:moveTo>
+                  <a:lnTo>
+                    <a:pt x="19677" y="41641"/>
+                  </a:lnTo>
+                  <a:lnTo>
+                    <a:pt x="91299" y="186818"/>
+                  </a:lnTo>
+                  <a:lnTo>
+                    <a:pt x="162922" y="325872"/>
+                  </a:lnTo>
+                  <a:lnTo>
+                    <a:pt x="234545" y="459061"/>
+                  </a:lnTo>
+                  <a:lnTo>
+                    <a:pt x="306167" y="586632"/>
+                  </a:lnTo>
+                  <a:lnTo>
+                    <a:pt x="377790" y="708823"/>
+                  </a:lnTo>
+                  <a:lnTo>
+                    <a:pt x="449412" y="825860"/>
+                  </a:lnTo>
+                  <a:lnTo>
+                    <a:pt x="521035" y="937961"/>
+                  </a:lnTo>
+                  <a:lnTo>
+                    <a:pt x="592657" y="1045334"/>
+                  </a:lnTo>
+                  <a:lnTo>
+                    <a:pt x="664280" y="1148178"/>
+                  </a:lnTo>
+                  <a:lnTo>
+                    <a:pt x="735902" y="1246685"/>
+                  </a:lnTo>
+                  <a:lnTo>
+                    <a:pt x="807525" y="1341037"/>
+                  </a:lnTo>
+                  <a:lnTo>
+                    <a:pt x="879147" y="1431409"/>
+                  </a:lnTo>
+                  <a:lnTo>
+                    <a:pt x="950770" y="1517970"/>
+                  </a:lnTo>
+                  <a:lnTo>
+                    <a:pt x="1022392" y="1600880"/>
+                  </a:lnTo>
+                  <a:lnTo>
+                    <a:pt x="1094015" y="1680293"/>
+                  </a:lnTo>
+                  <a:lnTo>
+                    <a:pt x="1165637" y="1756357"/>
+                  </a:lnTo>
+                  <a:lnTo>
+                    <a:pt x="1237260" y="1829213"/>
+                  </a:lnTo>
+                  <a:lnTo>
+                    <a:pt x="1308882" y="1898995"/>
+                  </a:lnTo>
+                  <a:lnTo>
+                    <a:pt x="1380505" y="1965835"/>
+                  </a:lnTo>
+                  <a:lnTo>
+                    <a:pt x="1452127" y="2029856"/>
+                  </a:lnTo>
+                  <a:lnTo>
+                    <a:pt x="1523750" y="2091176"/>
+                  </a:lnTo>
+                  <a:lnTo>
+                    <a:pt x="1595373" y="2149910"/>
+                  </a:lnTo>
+                  <a:lnTo>
+                    <a:pt x="1666995" y="2206167"/>
+                  </a:lnTo>
+                  <a:lnTo>
+                    <a:pt x="1738618" y="2260051"/>
+                  </a:lnTo>
+                  <a:lnTo>
+                    <a:pt x="1810240" y="2311662"/>
+                  </a:lnTo>
+                  <a:lnTo>
+                    <a:pt x="1881863" y="2361097"/>
+                  </a:lnTo>
+                  <a:lnTo>
+                    <a:pt x="1953485" y="2408447"/>
+                  </a:lnTo>
+                  <a:lnTo>
+                    <a:pt x="2025108" y="2453799"/>
+                  </a:lnTo>
+                  <a:lnTo>
+                    <a:pt x="2096730" y="2497239"/>
+                  </a:lnTo>
+                  <a:lnTo>
+                    <a:pt x="2168353" y="2538847"/>
+                  </a:lnTo>
+                  <a:lnTo>
+                    <a:pt x="2239975" y="2578700"/>
+                  </a:lnTo>
+                  <a:lnTo>
+                    <a:pt x="2311598" y="2616871"/>
+                  </a:lnTo>
+                  <a:lnTo>
+                    <a:pt x="2383220" y="2653433"/>
+                  </a:lnTo>
+                  <a:lnTo>
+                    <a:pt x="2454843" y="2658452"/>
+                  </a:lnTo>
+                  <a:lnTo>
+                    <a:pt x="2526465" y="2662700"/>
+                  </a:lnTo>
+                  <a:lnTo>
+                    <a:pt x="2598088" y="2666927"/>
+                  </a:lnTo>
+                  <a:lnTo>
+                    <a:pt x="2669710" y="2671132"/>
+                  </a:lnTo>
+                  <a:lnTo>
+                    <a:pt x="2741333" y="2675315"/>
+                  </a:lnTo>
+                  <a:lnTo>
+                    <a:pt x="2812955" y="2679476"/>
+                  </a:lnTo>
+                  <a:lnTo>
+                    <a:pt x="2884578" y="2683617"/>
+                  </a:lnTo>
+                  <a:lnTo>
+                    <a:pt x="2956201" y="2687736"/>
+                  </a:lnTo>
+                  <a:lnTo>
+                    <a:pt x="3027823" y="2691833"/>
+                  </a:lnTo>
+                  <a:lnTo>
+                    <a:pt x="3099446" y="2695910"/>
+                  </a:lnTo>
+                  <a:lnTo>
+                    <a:pt x="3171068" y="2699966"/>
+                  </a:lnTo>
+                  <a:lnTo>
+                    <a:pt x="3242691" y="2704000"/>
+                  </a:lnTo>
+                  <a:lnTo>
+                    <a:pt x="3314313" y="2708014"/>
+                  </a:lnTo>
+                  <a:lnTo>
+                    <a:pt x="3385936" y="2712008"/>
+                  </a:lnTo>
+                  <a:lnTo>
+                    <a:pt x="3457558" y="2715980"/>
+                  </a:lnTo>
+                  <a:lnTo>
+                    <a:pt x="3529181" y="2719933"/>
+                  </a:lnTo>
+                  <a:lnTo>
+                    <a:pt x="3600803" y="2723865"/>
+                  </a:lnTo>
+                  <a:lnTo>
+                    <a:pt x="3672426" y="2727776"/>
+                  </a:lnTo>
+                  <a:lnTo>
+                    <a:pt x="3744048" y="2731668"/>
+                  </a:lnTo>
+                  <a:lnTo>
+                    <a:pt x="3815671" y="2735540"/>
+                  </a:lnTo>
+                  <a:lnTo>
+                    <a:pt x="3887293" y="2739391"/>
+                  </a:lnTo>
+                  <a:lnTo>
+                    <a:pt x="3958916" y="2743223"/>
+                  </a:lnTo>
+                  <a:lnTo>
+                    <a:pt x="4030538" y="2747035"/>
+                  </a:lnTo>
+                  <a:lnTo>
+                    <a:pt x="4102161" y="2750828"/>
+                  </a:lnTo>
+                  <a:lnTo>
+                    <a:pt x="4173783" y="2754600"/>
+                  </a:lnTo>
+                  <a:lnTo>
+                    <a:pt x="4245406" y="2758354"/>
+                  </a:lnTo>
+                  <a:lnTo>
+                    <a:pt x="4317029" y="2762088"/>
+                  </a:lnTo>
+                  <a:lnTo>
+                    <a:pt x="4388651" y="2765803"/>
+                  </a:lnTo>
+                  <a:lnTo>
+                    <a:pt x="4460274" y="2769499"/>
+                  </a:lnTo>
+                  <a:lnTo>
+                    <a:pt x="4531896" y="2773176"/>
+                  </a:lnTo>
+                  <a:lnTo>
+                    <a:pt x="4603519" y="2776834"/>
+                  </a:lnTo>
+                  <a:lnTo>
+                    <a:pt x="4675141" y="2780473"/>
+                  </a:lnTo>
+                  <a:lnTo>
+                    <a:pt x="4746764" y="2784093"/>
+                  </a:lnTo>
+                  <a:lnTo>
+                    <a:pt x="4818386" y="2787695"/>
+                  </a:lnTo>
+                  <a:lnTo>
+                    <a:pt x="4890009" y="2791278"/>
+                  </a:lnTo>
+                  <a:lnTo>
+                    <a:pt x="4961631" y="2794843"/>
+                  </a:lnTo>
+                  <a:lnTo>
+                    <a:pt x="5033254" y="2798389"/>
+                  </a:lnTo>
+                  <a:lnTo>
+                    <a:pt x="5104876" y="2801917"/>
+                  </a:lnTo>
+                  <a:lnTo>
+                    <a:pt x="5176499" y="2805427"/>
+                  </a:lnTo>
+                  <a:lnTo>
+                    <a:pt x="5248121" y="2808919"/>
+                  </a:lnTo>
+                  <a:lnTo>
+                    <a:pt x="5319744" y="2812393"/>
+                  </a:lnTo>
+                  <a:lnTo>
+                    <a:pt x="5391366" y="2815849"/>
+                  </a:lnTo>
+                  <a:lnTo>
+                    <a:pt x="5462989" y="2819287"/>
+                  </a:lnTo>
+                  <a:lnTo>
+                    <a:pt x="5534611" y="2822707"/>
+                  </a:lnTo>
+                  <a:lnTo>
+                    <a:pt x="5606234" y="2826110"/>
+                  </a:lnTo>
+                  <a:lnTo>
+                    <a:pt x="5677857" y="2829496"/>
+                  </a:lnTo>
+                  <a:lnTo>
+                    <a:pt x="5749479" y="2832864"/>
+                  </a:lnTo>
+                  <a:lnTo>
+                    <a:pt x="5821102" y="2836214"/>
+                  </a:lnTo>
+                  <a:lnTo>
+                    <a:pt x="5892724" y="2839548"/>
+                  </a:lnTo>
+                  <a:lnTo>
+                    <a:pt x="5964347" y="2842864"/>
+                  </a:lnTo>
+                  <a:lnTo>
+                    <a:pt x="6035969" y="2846163"/>
+                  </a:lnTo>
+                  <a:lnTo>
+                    <a:pt x="6107592" y="2849445"/>
+                  </a:lnTo>
+                  <a:lnTo>
+                    <a:pt x="6179214" y="2852710"/>
+                  </a:lnTo>
+                </a:path>
+              </a:pathLst>
+            </a:custGeom>
+          </p:spPr>
+          <p:txBody>
+            <a:bodyPr/>
+            <a:lstStyle/>
+            <a:p/>
+          </p:txBody>
+        </p:sp>
+        <p:sp>
+          <p:nvSpPr>
             <p:cNvPr id="22" name="pl22"/>
             <p:cNvSpPr/>
             <p:nvPr/>
           </p:nvSpPr>
           <p:spPr>
             <a:xfrm>
-              <a:off x="1545390" y="2073503"/>
-              <a:ext cx="6664168" cy="2852710"/>
+              <a:off x="1172049" y="4505392"/>
+              <a:ext cx="7090630" cy="967258"/>
             </a:xfrm>
             <a:custGeom>
               <a:avLst/>
               <a:pathLst>
-                <a:path w="6664168" h="2852710">
+                <a:path w="7090630" h="967258">
                   <a:moveTo>
+                    <a:pt x="7090630" y="967258"/>
+                  </a:moveTo>
+                  <a:lnTo>
+                    <a:pt x="7019007" y="963532"/>
+                  </a:lnTo>
+                  <a:lnTo>
+                    <a:pt x="6947385" y="959643"/>
+                  </a:lnTo>
+                  <a:lnTo>
+                    <a:pt x="6875762" y="955583"/>
+                  </a:lnTo>
+                  <a:lnTo>
+                    <a:pt x="6804139" y="951343"/>
+                  </a:lnTo>
+                  <a:lnTo>
+                    <a:pt x="6732517" y="946917"/>
+                  </a:lnTo>
+                  <a:lnTo>
+                    <a:pt x="6660894" y="942296"/>
+                  </a:lnTo>
+                  <a:lnTo>
+                    <a:pt x="6589272" y="937472"/>
+                  </a:lnTo>
+                  <a:lnTo>
+                    <a:pt x="6517649" y="932435"/>
+                  </a:lnTo>
+                  <a:lnTo>
+                    <a:pt x="6446027" y="927176"/>
+                  </a:lnTo>
+                  <a:lnTo>
+                    <a:pt x="6374404" y="921686"/>
+                  </a:lnTo>
+                  <a:lnTo>
+                    <a:pt x="6302782" y="915954"/>
+                  </a:lnTo>
+                  <a:lnTo>
+                    <a:pt x="6231159" y="909970"/>
+                  </a:lnTo>
+                  <a:lnTo>
+                    <a:pt x="6159537" y="903722"/>
+                  </a:lnTo>
+                  <a:lnTo>
+                    <a:pt x="6087914" y="897199"/>
+                  </a:lnTo>
+                  <a:lnTo>
+                    <a:pt x="6016292" y="890389"/>
+                  </a:lnTo>
+                  <a:lnTo>
+                    <a:pt x="5944669" y="883279"/>
+                  </a:lnTo>
+                  <a:lnTo>
+                    <a:pt x="5873047" y="875856"/>
+                  </a:lnTo>
+                  <a:lnTo>
+                    <a:pt x="5801424" y="868106"/>
+                  </a:lnTo>
+                  <a:lnTo>
+                    <a:pt x="5729802" y="860014"/>
+                  </a:lnTo>
+                  <a:lnTo>
+                    <a:pt x="5658179" y="851567"/>
+                  </a:lnTo>
+                  <a:lnTo>
+                    <a:pt x="5586557" y="842747"/>
+                  </a:lnTo>
+                  <a:lnTo>
+                    <a:pt x="5514934" y="833539"/>
+                  </a:lnTo>
+                  <a:lnTo>
+                    <a:pt x="5443311" y="823926"/>
+                  </a:lnTo>
+                  <a:lnTo>
+                    <a:pt x="5371689" y="813889"/>
+                  </a:lnTo>
+                  <a:lnTo>
+                    <a:pt x="5300066" y="803411"/>
+                  </a:lnTo>
+                  <a:lnTo>
+                    <a:pt x="5228444" y="792471"/>
+                  </a:lnTo>
+                  <a:lnTo>
+                    <a:pt x="5156821" y="781049"/>
+                  </a:lnTo>
+                  <a:lnTo>
+                    <a:pt x="5085199" y="769124"/>
+                  </a:lnTo>
+                  <a:lnTo>
+                    <a:pt x="5013576" y="756674"/>
+                  </a:lnTo>
+                  <a:lnTo>
+                    <a:pt x="4941954" y="743676"/>
+                  </a:lnTo>
+                  <a:lnTo>
+                    <a:pt x="4870331" y="730106"/>
+                  </a:lnTo>
+                  <a:lnTo>
+                    <a:pt x="4798709" y="715938"/>
+                  </a:lnTo>
+                  <a:lnTo>
+                    <a:pt x="4727086" y="701146"/>
+                  </a:lnTo>
+                  <a:lnTo>
+                    <a:pt x="4655464" y="685703"/>
+                  </a:lnTo>
+                  <a:lnTo>
+                    <a:pt x="4583841" y="669579"/>
+                  </a:lnTo>
+                  <a:lnTo>
+                    <a:pt x="4512219" y="652746"/>
+                  </a:lnTo>
+                  <a:lnTo>
+                    <a:pt x="4440596" y="635172"/>
+                  </a:lnTo>
+                  <a:lnTo>
+                    <a:pt x="4368974" y="616824"/>
+                  </a:lnTo>
+                  <a:lnTo>
+                    <a:pt x="4297351" y="597667"/>
+                  </a:lnTo>
+                  <a:lnTo>
+                    <a:pt x="4225729" y="577668"/>
+                  </a:lnTo>
+                  <a:lnTo>
+                    <a:pt x="4154106" y="556787"/>
+                  </a:lnTo>
+                  <a:lnTo>
+                    <a:pt x="4082483" y="534987"/>
+                  </a:lnTo>
+                  <a:lnTo>
+                    <a:pt x="4010861" y="512228"/>
+                  </a:lnTo>
+                  <a:lnTo>
+                    <a:pt x="3939238" y="488465"/>
+                  </a:lnTo>
+                  <a:lnTo>
+                    <a:pt x="3867616" y="463657"/>
+                  </a:lnTo>
+                  <a:lnTo>
+                    <a:pt x="3795993" y="437756"/>
+                  </a:lnTo>
+                  <a:lnTo>
+                    <a:pt x="3724371" y="410715"/>
+                  </a:lnTo>
+                  <a:lnTo>
+                    <a:pt x="3652748" y="382483"/>
+                  </a:lnTo>
+                  <a:lnTo>
+                    <a:pt x="3581126" y="353008"/>
+                  </a:lnTo>
+                  <a:lnTo>
+                    <a:pt x="3509503" y="322235"/>
+                  </a:lnTo>
+                  <a:lnTo>
+                    <a:pt x="3437881" y="290107"/>
+                  </a:lnTo>
+                  <a:lnTo>
+                    <a:pt x="3366258" y="256564"/>
+                  </a:lnTo>
+                  <a:lnTo>
+                    <a:pt x="3294636" y="222292"/>
+                  </a:lnTo>
+                  <a:lnTo>
+                    <a:pt x="3223013" y="217999"/>
+                  </a:lnTo>
+                  <a:lnTo>
+                    <a:pt x="3151391" y="213684"/>
+                  </a:lnTo>
+                  <a:lnTo>
+                    <a:pt x="3079768" y="209347"/>
+                  </a:lnTo>
+                  <a:lnTo>
+                    <a:pt x="3008146" y="204988"/>
+                  </a:lnTo>
+                  <a:lnTo>
+                    <a:pt x="2936523" y="200606"/>
+                  </a:lnTo>
+                  <a:lnTo>
+                    <a:pt x="2864901" y="196201"/>
+                  </a:lnTo>
+                  <a:lnTo>
+                    <a:pt x="2793278" y="191773"/>
+                  </a:lnTo>
+                  <a:lnTo>
+                    <a:pt x="2721655" y="187323"/>
+                  </a:lnTo>
+                  <a:lnTo>
+                    <a:pt x="2650033" y="182849"/>
+                  </a:lnTo>
+                  <a:lnTo>
+                    <a:pt x="2578410" y="178353"/>
+                  </a:lnTo>
+                  <a:lnTo>
+                    <a:pt x="2506788" y="173833"/>
+                  </a:lnTo>
+                  <a:lnTo>
+                    <a:pt x="2435165" y="169290"/>
+                  </a:lnTo>
+                  <a:lnTo>
+                    <a:pt x="2363543" y="164723"/>
+                  </a:lnTo>
+                  <a:lnTo>
+                    <a:pt x="2291920" y="160132"/>
+                  </a:lnTo>
+                  <a:lnTo>
+                    <a:pt x="2220298" y="155518"/>
+                  </a:lnTo>
+                  <a:lnTo>
+                    <a:pt x="2148675" y="150880"/>
+                  </a:lnTo>
+                  <a:lnTo>
+                    <a:pt x="2077053" y="146218"/>
+                  </a:lnTo>
+                  <a:lnTo>
+                    <a:pt x="2005430" y="141532"/>
+                  </a:lnTo>
+                  <a:lnTo>
+                    <a:pt x="1933808" y="136821"/>
+                  </a:lnTo>
+                  <a:lnTo>
+                    <a:pt x="1862185" y="132087"/>
+                  </a:lnTo>
+                  <a:lnTo>
+                    <a:pt x="1790563" y="127327"/>
+                  </a:lnTo>
+                  <a:lnTo>
+                    <a:pt x="1718940" y="122543"/>
+                  </a:lnTo>
+                  <a:lnTo>
+                    <a:pt x="1647318" y="117735"/>
+                  </a:lnTo>
+                  <a:lnTo>
+                    <a:pt x="1575695" y="112901"/>
+                  </a:lnTo>
+                  <a:lnTo>
+                    <a:pt x="1504073" y="108043"/>
+                  </a:lnTo>
+                  <a:lnTo>
+                    <a:pt x="1432450" y="103159"/>
+                  </a:lnTo>
+                  <a:lnTo>
+                    <a:pt x="1360827" y="98250"/>
+                  </a:lnTo>
+                  <a:lnTo>
+                    <a:pt x="1289205" y="93315"/>
+                  </a:lnTo>
+                  <a:lnTo>
+                    <a:pt x="1217582" y="88356"/>
+                  </a:lnTo>
+                  <a:lnTo>
+                    <a:pt x="1145960" y="83370"/>
+                  </a:lnTo>
+                  <a:lnTo>
+                    <a:pt x="1074337" y="78359"/>
+                  </a:lnTo>
+                  <a:lnTo>
+                    <a:pt x="1002715" y="73321"/>
+                  </a:lnTo>
+                  <a:lnTo>
+                    <a:pt x="931092" y="68258"/>
+                  </a:lnTo>
+                  <a:lnTo>
+                    <a:pt x="859470" y="63168"/>
+                  </a:lnTo>
+                  <a:lnTo>
+                    <a:pt x="787847" y="58052"/>
+                  </a:lnTo>
+                  <a:lnTo>
+                    <a:pt x="716225" y="52910"/>
+                  </a:lnTo>
+                  <a:lnTo>
+                    <a:pt x="644602" y="47741"/>
+                  </a:lnTo>
+                  <a:lnTo>
+                    <a:pt x="572980" y="42545"/>
+                  </a:lnTo>
+                  <a:lnTo>
+                    <a:pt x="501357" y="37323"/>
+                  </a:lnTo>
+                  <a:lnTo>
+                    <a:pt x="429735" y="32073"/>
+                  </a:lnTo>
+                  <a:lnTo>
+                    <a:pt x="358112" y="26796"/>
+                  </a:lnTo>
+                  <a:lnTo>
+                    <a:pt x="286490" y="21492"/>
+                  </a:lnTo>
+                  <a:lnTo>
+                    <a:pt x="214867" y="16160"/>
+                  </a:lnTo>
+                  <a:lnTo>
+                    <a:pt x="143245" y="10801"/>
+                  </a:lnTo>
+                  <a:lnTo>
+                    <a:pt x="71622" y="5414"/>
+                  </a:lnTo>
+                  <a:lnTo>
                     <a:pt x="0" y="0"/>
-                  </a:moveTo>
-                  <a:lnTo>
-                    <a:pt x="21221" y="41641"/>
-                  </a:lnTo>
-                  <a:lnTo>
-                    <a:pt x="98465" y="186818"/>
-                  </a:lnTo>
-                  <a:lnTo>
-                    <a:pt x="175708" y="325872"/>
-                  </a:lnTo>
-                  <a:lnTo>
-                    <a:pt x="252952" y="459061"/>
-                  </a:lnTo>
-                  <a:lnTo>
-                    <a:pt x="330196" y="586632"/>
-                  </a:lnTo>
-                  <a:lnTo>
-                    <a:pt x="407439" y="708823"/>
-                  </a:lnTo>
-                  <a:lnTo>
-                    <a:pt x="484683" y="825860"/>
-                  </a:lnTo>
-                  <a:lnTo>
-                    <a:pt x="561926" y="937961"/>
-                  </a:lnTo>
-                  <a:lnTo>
-                    <a:pt x="639170" y="1045334"/>
-                  </a:lnTo>
-                  <a:lnTo>
-                    <a:pt x="716413" y="1148178"/>
-                  </a:lnTo>
-                  <a:lnTo>
-                    <a:pt x="793657" y="1246685"/>
-                  </a:lnTo>
-                  <a:lnTo>
-                    <a:pt x="870901" y="1341037"/>
-                  </a:lnTo>
-                  <a:lnTo>
-                    <a:pt x="948144" y="1431409"/>
-                  </a:lnTo>
-                  <a:lnTo>
-                    <a:pt x="1025388" y="1517970"/>
-                  </a:lnTo>
-                  <a:lnTo>
-                    <a:pt x="1102631" y="1600880"/>
-                  </a:lnTo>
-                  <a:lnTo>
-                    <a:pt x="1179875" y="1680293"/>
-                  </a:lnTo>
-                  <a:lnTo>
-                    <a:pt x="1257118" y="1756357"/>
-                  </a:lnTo>
-                  <a:lnTo>
-                    <a:pt x="1334362" y="1829213"/>
-                  </a:lnTo>
-                  <a:lnTo>
-                    <a:pt x="1411606" y="1898995"/>
-                  </a:lnTo>
-                  <a:lnTo>
-                    <a:pt x="1488849" y="1965835"/>
-                  </a:lnTo>
-                  <a:lnTo>
-                    <a:pt x="1566093" y="2029856"/>
-                  </a:lnTo>
-                  <a:lnTo>
-                    <a:pt x="1643336" y="2091176"/>
-                  </a:lnTo>
-                  <a:lnTo>
-                    <a:pt x="1720580" y="2149910"/>
-                  </a:lnTo>
-                  <a:lnTo>
-                    <a:pt x="1797823" y="2206167"/>
-                  </a:lnTo>
-                  <a:lnTo>
-                    <a:pt x="1875067" y="2260051"/>
-                  </a:lnTo>
-                  <a:lnTo>
-                    <a:pt x="1952311" y="2311662"/>
-                  </a:lnTo>
-                  <a:lnTo>
-                    <a:pt x="2029554" y="2361097"/>
-                  </a:lnTo>
-                  <a:lnTo>
-                    <a:pt x="2106798" y="2408447"/>
-                  </a:lnTo>
-                  <a:lnTo>
-                    <a:pt x="2184041" y="2453799"/>
-                  </a:lnTo>
-                  <a:lnTo>
-                    <a:pt x="2261285" y="2497239"/>
-                  </a:lnTo>
-                  <a:lnTo>
-                    <a:pt x="2338528" y="2538847"/>
-                  </a:lnTo>
-                  <a:lnTo>
-                    <a:pt x="2415772" y="2578700"/>
-                  </a:lnTo>
-                  <a:lnTo>
-                    <a:pt x="2493016" y="2616871"/>
-                  </a:lnTo>
-                  <a:lnTo>
-                    <a:pt x="2570259" y="2653433"/>
-                  </a:lnTo>
-                  <a:lnTo>
-                    <a:pt x="2647503" y="2658452"/>
-                  </a:lnTo>
-                  <a:lnTo>
-                    <a:pt x="2724746" y="2662700"/>
-                  </a:lnTo>
-                  <a:lnTo>
-                    <a:pt x="2801990" y="2666927"/>
-                  </a:lnTo>
-                  <a:lnTo>
-                    <a:pt x="2879233" y="2671132"/>
-                  </a:lnTo>
-                  <a:lnTo>
-                    <a:pt x="2956477" y="2675315"/>
-                  </a:lnTo>
-                  <a:lnTo>
-                    <a:pt x="3033721" y="2679476"/>
-                  </a:lnTo>
-                  <a:lnTo>
-                    <a:pt x="3110964" y="2683617"/>
-                  </a:lnTo>
-                  <a:lnTo>
-                    <a:pt x="3188208" y="2687736"/>
-                  </a:lnTo>
-                  <a:lnTo>
-                    <a:pt x="3265451" y="2691833"/>
-                  </a:lnTo>
-                  <a:lnTo>
-                    <a:pt x="3342695" y="2695910"/>
-                  </a:lnTo>
-                  <a:lnTo>
-                    <a:pt x="3419938" y="2699966"/>
-                  </a:lnTo>
-                  <a:lnTo>
-                    <a:pt x="3497182" y="2704000"/>
-                  </a:lnTo>
-                  <a:lnTo>
-                    <a:pt x="3574426" y="2708014"/>
-                  </a:lnTo>
-                  <a:lnTo>
-                    <a:pt x="3651669" y="2712008"/>
-                  </a:lnTo>
-                  <a:lnTo>
-                    <a:pt x="3728913" y="2715980"/>
-                  </a:lnTo>
-                  <a:lnTo>
-                    <a:pt x="3806156" y="2719933"/>
-                  </a:lnTo>
-                  <a:lnTo>
-                    <a:pt x="3883400" y="2723865"/>
-                  </a:lnTo>
-                  <a:lnTo>
-                    <a:pt x="3960643" y="2727776"/>
-                  </a:lnTo>
-                  <a:lnTo>
-                    <a:pt x="4037887" y="2731668"/>
-                  </a:lnTo>
-                  <a:lnTo>
-                    <a:pt x="4115131" y="2735540"/>
-                  </a:lnTo>
-                  <a:lnTo>
-                    <a:pt x="4192374" y="2739391"/>
-                  </a:lnTo>
-                  <a:lnTo>
-                    <a:pt x="4269618" y="2743223"/>
-                  </a:lnTo>
-                  <a:lnTo>
-                    <a:pt x="4346861" y="2747035"/>
-                  </a:lnTo>
-                  <a:lnTo>
-                    <a:pt x="4424105" y="2750828"/>
-                  </a:lnTo>
-                  <a:lnTo>
-                    <a:pt x="4501348" y="2754600"/>
-                  </a:lnTo>
-                  <a:lnTo>
-                    <a:pt x="4578592" y="2758354"/>
-                  </a:lnTo>
-                  <a:lnTo>
-                    <a:pt x="4655836" y="2762088"/>
-                  </a:lnTo>
-                  <a:lnTo>
-                    <a:pt x="4733079" y="2765803"/>
-                  </a:lnTo>
-                  <a:lnTo>
-                    <a:pt x="4810323" y="2769499"/>
-                  </a:lnTo>
-                  <a:lnTo>
-                    <a:pt x="4887566" y="2773176"/>
-                  </a:lnTo>
-                  <a:lnTo>
-                    <a:pt x="4964810" y="2776834"/>
-                  </a:lnTo>
-                  <a:lnTo>
-                    <a:pt x="5042053" y="2780473"/>
-                  </a:lnTo>
-                  <a:lnTo>
-                    <a:pt x="5119297" y="2784093"/>
-                  </a:lnTo>
-                  <a:lnTo>
-                    <a:pt x="5196541" y="2787695"/>
-                  </a:lnTo>
-                  <a:lnTo>
-                    <a:pt x="5273784" y="2791278"/>
-                  </a:lnTo>
-                  <a:lnTo>
-                    <a:pt x="5351028" y="2794843"/>
-                  </a:lnTo>
-                  <a:lnTo>
-                    <a:pt x="5428271" y="2798389"/>
-                  </a:lnTo>
-                  <a:lnTo>
-                    <a:pt x="5505515" y="2801917"/>
-                  </a:lnTo>
-                  <a:lnTo>
-                    <a:pt x="5582758" y="2805427"/>
-                  </a:lnTo>
-                  <a:lnTo>
-                    <a:pt x="5660002" y="2808919"/>
-                  </a:lnTo>
-                  <a:lnTo>
-                    <a:pt x="5737246" y="2812393"/>
-                  </a:lnTo>
-                  <a:lnTo>
-                    <a:pt x="5814489" y="2815849"/>
-                  </a:lnTo>
-                  <a:lnTo>
-                    <a:pt x="5891733" y="2819287"/>
-                  </a:lnTo>
-                  <a:lnTo>
-                    <a:pt x="5968976" y="2822707"/>
-                  </a:lnTo>
-                  <a:lnTo>
-                    <a:pt x="6046220" y="2826110"/>
-                  </a:lnTo>
-                  <a:lnTo>
-                    <a:pt x="6123463" y="2829496"/>
-                  </a:lnTo>
-                  <a:lnTo>
-                    <a:pt x="6200707" y="2832864"/>
-                  </a:lnTo>
-                  <a:lnTo>
-                    <a:pt x="6277951" y="2836214"/>
-                  </a:lnTo>
-                  <a:lnTo>
-                    <a:pt x="6355194" y="2839548"/>
-                  </a:lnTo>
-                  <a:lnTo>
-                    <a:pt x="6432438" y="2842864"/>
-                  </a:lnTo>
-                  <a:lnTo>
-                    <a:pt x="6509681" y="2846163"/>
-                  </a:lnTo>
-                  <a:lnTo>
-                    <a:pt x="6586925" y="2849445"/>
-                  </a:lnTo>
-                  <a:lnTo>
-                    <a:pt x="6664168" y="2852710"/>
                   </a:lnTo>
                 </a:path>
               </a:pathLst>
@@ -3877,619 +4168,312 @@
           </p:nvSpPr>
           <p:spPr>
             <a:xfrm>
-              <a:off x="817517" y="4523164"/>
-              <a:ext cx="7392041" cy="949486"/>
+              <a:off x="1172049" y="3039367"/>
+              <a:ext cx="7090630" cy="2286830"/>
             </a:xfrm>
             <a:custGeom>
               <a:avLst/>
               <a:pathLst>
-                <a:path w="7392041" h="949486">
-                  <a:moveTo>
-                    <a:pt x="7392041" y="949486"/>
-                  </a:moveTo>
-                  <a:lnTo>
-                    <a:pt x="7314797" y="945760"/>
-                  </a:lnTo>
-                  <a:lnTo>
-                    <a:pt x="7237554" y="941871"/>
-                  </a:lnTo>
-                  <a:lnTo>
-                    <a:pt x="7160310" y="937811"/>
-                  </a:lnTo>
-                  <a:lnTo>
-                    <a:pt x="7083066" y="933571"/>
-                  </a:lnTo>
-                  <a:lnTo>
-                    <a:pt x="7005823" y="929145"/>
-                  </a:lnTo>
-                  <a:lnTo>
-                    <a:pt x="6928579" y="924524"/>
-                  </a:lnTo>
-                  <a:lnTo>
-                    <a:pt x="6851336" y="919700"/>
-                  </a:lnTo>
-                  <a:lnTo>
-                    <a:pt x="6774092" y="914663"/>
-                  </a:lnTo>
-                  <a:lnTo>
-                    <a:pt x="6696849" y="909404"/>
-                  </a:lnTo>
-                  <a:lnTo>
-                    <a:pt x="6619605" y="903914"/>
-                  </a:lnTo>
-                  <a:lnTo>
-                    <a:pt x="6542361" y="898182"/>
-                  </a:lnTo>
-                  <a:lnTo>
-                    <a:pt x="6465118" y="892198"/>
-                  </a:lnTo>
-                  <a:lnTo>
-                    <a:pt x="6387874" y="885950"/>
-                  </a:lnTo>
-                  <a:lnTo>
-                    <a:pt x="6310631" y="879427"/>
-                  </a:lnTo>
-                  <a:lnTo>
-                    <a:pt x="6233387" y="872617"/>
-                  </a:lnTo>
-                  <a:lnTo>
-                    <a:pt x="6156144" y="865507"/>
-                  </a:lnTo>
-                  <a:lnTo>
-                    <a:pt x="6078900" y="858084"/>
-                  </a:lnTo>
-                  <a:lnTo>
-                    <a:pt x="6001656" y="850334"/>
-                  </a:lnTo>
-                  <a:lnTo>
-                    <a:pt x="5924413" y="842243"/>
-                  </a:lnTo>
-                  <a:lnTo>
-                    <a:pt x="5847169" y="833795"/>
-                  </a:lnTo>
-                  <a:lnTo>
-                    <a:pt x="5769926" y="824975"/>
-                  </a:lnTo>
-                  <a:lnTo>
-                    <a:pt x="5692682" y="815767"/>
-                  </a:lnTo>
-                  <a:lnTo>
-                    <a:pt x="5615439" y="806154"/>
-                  </a:lnTo>
-                  <a:lnTo>
-                    <a:pt x="5538195" y="796117"/>
-                  </a:lnTo>
-                  <a:lnTo>
-                    <a:pt x="5460951" y="785639"/>
-                  </a:lnTo>
-                  <a:lnTo>
-                    <a:pt x="5383708" y="774699"/>
-                  </a:lnTo>
-                  <a:lnTo>
-                    <a:pt x="5306464" y="763277"/>
-                  </a:lnTo>
-                  <a:lnTo>
-                    <a:pt x="5229221" y="751352"/>
-                  </a:lnTo>
-                  <a:lnTo>
-                    <a:pt x="5151977" y="738902"/>
-                  </a:lnTo>
-                  <a:lnTo>
-                    <a:pt x="5074734" y="725904"/>
-                  </a:lnTo>
-                  <a:lnTo>
-                    <a:pt x="4997490" y="712334"/>
-                  </a:lnTo>
-                  <a:lnTo>
-                    <a:pt x="4920246" y="698166"/>
-                  </a:lnTo>
-                  <a:lnTo>
-                    <a:pt x="4843003" y="683374"/>
-                  </a:lnTo>
-                  <a:lnTo>
-                    <a:pt x="4765759" y="667931"/>
-                  </a:lnTo>
-                  <a:lnTo>
-                    <a:pt x="4688516" y="651808"/>
-                  </a:lnTo>
-                  <a:lnTo>
-                    <a:pt x="4611272" y="634974"/>
-                  </a:lnTo>
-                  <a:lnTo>
-                    <a:pt x="4534029" y="617400"/>
-                  </a:lnTo>
-                  <a:lnTo>
-                    <a:pt x="4456785" y="599052"/>
-                  </a:lnTo>
-                  <a:lnTo>
-                    <a:pt x="4379541" y="579895"/>
-                  </a:lnTo>
-                  <a:lnTo>
-                    <a:pt x="4302298" y="559896"/>
-                  </a:lnTo>
-                  <a:lnTo>
-                    <a:pt x="4225054" y="539015"/>
-                  </a:lnTo>
-                  <a:lnTo>
-                    <a:pt x="4147811" y="517215"/>
-                  </a:lnTo>
-                  <a:lnTo>
-                    <a:pt x="4070567" y="494456"/>
-                  </a:lnTo>
-                  <a:lnTo>
-                    <a:pt x="3993324" y="470694"/>
-                  </a:lnTo>
-                  <a:lnTo>
-                    <a:pt x="3916080" y="445885"/>
-                  </a:lnTo>
-                  <a:lnTo>
-                    <a:pt x="3838836" y="419984"/>
-                  </a:lnTo>
-                  <a:lnTo>
-                    <a:pt x="3761593" y="392943"/>
-                  </a:lnTo>
-                  <a:lnTo>
-                    <a:pt x="3684349" y="364711"/>
-                  </a:lnTo>
-                  <a:lnTo>
-                    <a:pt x="3607106" y="335236"/>
-                  </a:lnTo>
-                  <a:lnTo>
-                    <a:pt x="3529862" y="304463"/>
-                  </a:lnTo>
-                  <a:lnTo>
-                    <a:pt x="3452619" y="272335"/>
-                  </a:lnTo>
-                  <a:lnTo>
-                    <a:pt x="3375375" y="238792"/>
-                  </a:lnTo>
-                  <a:lnTo>
-                    <a:pt x="3298131" y="204520"/>
-                  </a:lnTo>
-                  <a:lnTo>
-                    <a:pt x="3220888" y="200227"/>
-                  </a:lnTo>
-                  <a:lnTo>
-                    <a:pt x="3143644" y="195913"/>
-                  </a:lnTo>
-                  <a:lnTo>
-                    <a:pt x="3066401" y="191575"/>
-                  </a:lnTo>
-                  <a:lnTo>
-                    <a:pt x="2989157" y="187216"/>
-                  </a:lnTo>
-                  <a:lnTo>
-                    <a:pt x="2911914" y="182834"/>
-                  </a:lnTo>
-                  <a:lnTo>
-                    <a:pt x="2834670" y="178429"/>
-                  </a:lnTo>
-                  <a:lnTo>
-                    <a:pt x="2757426" y="174001"/>
-                  </a:lnTo>
-                  <a:lnTo>
-                    <a:pt x="2680183" y="169551"/>
-                  </a:lnTo>
-                  <a:lnTo>
-                    <a:pt x="2602939" y="165078"/>
-                  </a:lnTo>
-                  <a:lnTo>
-                    <a:pt x="2525696" y="160581"/>
-                  </a:lnTo>
-                  <a:lnTo>
-                    <a:pt x="2448452" y="156061"/>
-                  </a:lnTo>
-                  <a:lnTo>
-                    <a:pt x="2371209" y="151518"/>
-                  </a:lnTo>
-                  <a:lnTo>
-                    <a:pt x="2293965" y="146951"/>
-                  </a:lnTo>
-                  <a:lnTo>
-                    <a:pt x="2216721" y="142360"/>
-                  </a:lnTo>
-                  <a:lnTo>
-                    <a:pt x="2139478" y="137746"/>
-                  </a:lnTo>
-                  <a:lnTo>
-                    <a:pt x="2062234" y="133108"/>
-                  </a:lnTo>
-                  <a:lnTo>
-                    <a:pt x="1984991" y="128446"/>
-                  </a:lnTo>
-                  <a:lnTo>
-                    <a:pt x="1907747" y="123760"/>
-                  </a:lnTo>
-                  <a:lnTo>
-                    <a:pt x="1830504" y="119050"/>
-                  </a:lnTo>
-                  <a:lnTo>
-                    <a:pt x="1753260" y="114315"/>
-                  </a:lnTo>
-                  <a:lnTo>
-                    <a:pt x="1676016" y="109555"/>
-                  </a:lnTo>
-                  <a:lnTo>
-                    <a:pt x="1598773" y="104771"/>
-                  </a:lnTo>
-                  <a:lnTo>
-                    <a:pt x="1521529" y="99963"/>
-                  </a:lnTo>
-                  <a:lnTo>
-                    <a:pt x="1444286" y="95129"/>
-                  </a:lnTo>
-                  <a:lnTo>
-                    <a:pt x="1367042" y="90271"/>
-                  </a:lnTo>
-                  <a:lnTo>
-                    <a:pt x="1289799" y="85387"/>
-                  </a:lnTo>
-                  <a:lnTo>
-                    <a:pt x="1212555" y="80478"/>
-                  </a:lnTo>
-                  <a:lnTo>
-                    <a:pt x="1135311" y="75544"/>
-                  </a:lnTo>
-                  <a:lnTo>
-                    <a:pt x="1058068" y="70584"/>
-                  </a:lnTo>
-                  <a:lnTo>
-                    <a:pt x="980824" y="65598"/>
-                  </a:lnTo>
-                  <a:lnTo>
-                    <a:pt x="903581" y="60587"/>
-                  </a:lnTo>
-                  <a:lnTo>
-                    <a:pt x="826337" y="55549"/>
-                  </a:lnTo>
-                  <a:lnTo>
-                    <a:pt x="749094" y="50486"/>
-                  </a:lnTo>
-                  <a:lnTo>
-                    <a:pt x="671850" y="45396"/>
-                  </a:lnTo>
-                  <a:lnTo>
-                    <a:pt x="594606" y="40280"/>
-                  </a:lnTo>
-                  <a:lnTo>
-                    <a:pt x="517363" y="35138"/>
-                  </a:lnTo>
-                  <a:lnTo>
-                    <a:pt x="440119" y="29969"/>
-                  </a:lnTo>
-                  <a:lnTo>
-                    <a:pt x="362876" y="24773"/>
-                  </a:lnTo>
-                  <a:lnTo>
-                    <a:pt x="285632" y="19551"/>
-                  </a:lnTo>
-                  <a:lnTo>
-                    <a:pt x="208389" y="14301"/>
-                  </a:lnTo>
-                  <a:lnTo>
-                    <a:pt x="131145" y="9024"/>
-                  </a:lnTo>
-                  <a:lnTo>
-                    <a:pt x="53901" y="3720"/>
-                  </a:lnTo>
-                  <a:lnTo>
-                    <a:pt x="0" y="0"/>
-                  </a:lnTo>
-                </a:path>
-              </a:pathLst>
-            </a:custGeom>
-          </p:spPr>
-          <p:txBody>
-            <a:bodyPr/>
-            <a:lstStyle/>
-            <a:p/>
-          </p:txBody>
-        </p:sp>
-        <p:sp>
-          <p:nvSpPr>
-            <p:cNvPr id="24" name="pl24"/>
-            <p:cNvSpPr/>
-            <p:nvPr/>
-          </p:nvSpPr>
-          <p:spPr>
-            <a:xfrm>
-              <a:off x="817517" y="3232042"/>
-              <a:ext cx="7392041" cy="2094155"/>
-            </a:xfrm>
-            <a:custGeom>
-              <a:avLst/>
-              <a:pathLst>
-                <a:path w="7392041" h="2094155">
+                <a:path w="7090630" h="2286830">
                   <a:moveTo>
                     <a:pt x="0" y="0"/>
                   </a:moveTo>
                   <a:lnTo>
-                    <a:pt x="53901" y="38959"/>
-                  </a:lnTo>
-                  <a:lnTo>
-                    <a:pt x="131145" y="93458"/>
-                  </a:lnTo>
-                  <a:lnTo>
-                    <a:pt x="208389" y="146658"/>
-                  </a:lnTo>
-                  <a:lnTo>
-                    <a:pt x="285632" y="198590"/>
-                  </a:lnTo>
-                  <a:lnTo>
-                    <a:pt x="362876" y="249284"/>
-                  </a:lnTo>
-                  <a:lnTo>
-                    <a:pt x="440119" y="298769"/>
-                  </a:lnTo>
-                  <a:lnTo>
-                    <a:pt x="517363" y="347075"/>
-                  </a:lnTo>
-                  <a:lnTo>
-                    <a:pt x="594606" y="394230"/>
-                  </a:lnTo>
-                  <a:lnTo>
-                    <a:pt x="671850" y="440260"/>
-                  </a:lnTo>
-                  <a:lnTo>
-                    <a:pt x="749094" y="485193"/>
-                  </a:lnTo>
-                  <a:lnTo>
-                    <a:pt x="826337" y="529055"/>
-                  </a:lnTo>
-                  <a:lnTo>
-                    <a:pt x="903581" y="571871"/>
-                  </a:lnTo>
-                  <a:lnTo>
-                    <a:pt x="980824" y="613667"/>
-                  </a:lnTo>
-                  <a:lnTo>
-                    <a:pt x="1058068" y="654466"/>
-                  </a:lnTo>
-                  <a:lnTo>
-                    <a:pt x="1135311" y="694293"/>
-                  </a:lnTo>
-                  <a:lnTo>
-                    <a:pt x="1212555" y="733171"/>
-                  </a:lnTo>
-                  <a:lnTo>
-                    <a:pt x="1289799" y="771121"/>
-                  </a:lnTo>
-                  <a:lnTo>
-                    <a:pt x="1367042" y="808167"/>
-                  </a:lnTo>
-                  <a:lnTo>
-                    <a:pt x="1444286" y="844330"/>
-                  </a:lnTo>
-                  <a:lnTo>
-                    <a:pt x="1521529" y="879631"/>
-                  </a:lnTo>
-                  <a:lnTo>
-                    <a:pt x="1598773" y="914091"/>
-                  </a:lnTo>
-                  <a:lnTo>
-                    <a:pt x="1676016" y="947729"/>
-                  </a:lnTo>
-                  <a:lnTo>
-                    <a:pt x="1753260" y="980565"/>
-                  </a:lnTo>
-                  <a:lnTo>
-                    <a:pt x="1830504" y="1012618"/>
-                  </a:lnTo>
-                  <a:lnTo>
-                    <a:pt x="1907747" y="1043907"/>
-                  </a:lnTo>
-                  <a:lnTo>
-                    <a:pt x="1984991" y="1074451"/>
-                  </a:lnTo>
-                  <a:lnTo>
-                    <a:pt x="2062234" y="1104266"/>
-                  </a:lnTo>
-                  <a:lnTo>
-                    <a:pt x="2139478" y="1133371"/>
-                  </a:lnTo>
-                  <a:lnTo>
-                    <a:pt x="2216721" y="1161781"/>
-                  </a:lnTo>
-                  <a:lnTo>
-                    <a:pt x="2293965" y="1189515"/>
-                  </a:lnTo>
-                  <a:lnTo>
-                    <a:pt x="2371209" y="1216587"/>
-                  </a:lnTo>
-                  <a:lnTo>
-                    <a:pt x="2448452" y="1243015"/>
-                  </a:lnTo>
-                  <a:lnTo>
-                    <a:pt x="2525696" y="1268812"/>
-                  </a:lnTo>
-                  <a:lnTo>
-                    <a:pt x="2602939" y="1293994"/>
-                  </a:lnTo>
-                  <a:lnTo>
-                    <a:pt x="2680183" y="1318576"/>
-                  </a:lnTo>
-                  <a:lnTo>
-                    <a:pt x="2757426" y="1342572"/>
-                  </a:lnTo>
-                  <a:lnTo>
-                    <a:pt x="2834670" y="1365996"/>
-                  </a:lnTo>
-                  <a:lnTo>
-                    <a:pt x="2911914" y="1388861"/>
-                  </a:lnTo>
-                  <a:lnTo>
-                    <a:pt x="2989157" y="1411182"/>
-                  </a:lnTo>
-                  <a:lnTo>
-                    <a:pt x="3066401" y="1432970"/>
-                  </a:lnTo>
-                  <a:lnTo>
-                    <a:pt x="3143644" y="1454239"/>
-                  </a:lnTo>
-                  <a:lnTo>
-                    <a:pt x="3220888" y="1475001"/>
-                  </a:lnTo>
-                  <a:lnTo>
-                    <a:pt x="3298131" y="1495268"/>
-                  </a:lnTo>
-                  <a:lnTo>
-                    <a:pt x="3375375" y="1515052"/>
-                  </a:lnTo>
-                  <a:lnTo>
-                    <a:pt x="3452619" y="1534364"/>
-                  </a:lnTo>
-                  <a:lnTo>
-                    <a:pt x="3529862" y="1553216"/>
-                  </a:lnTo>
-                  <a:lnTo>
-                    <a:pt x="3607106" y="1571619"/>
-                  </a:lnTo>
-                  <a:lnTo>
-                    <a:pt x="3684349" y="1589583"/>
-                  </a:lnTo>
-                  <a:lnTo>
-                    <a:pt x="3761593" y="1607118"/>
-                  </a:lnTo>
-                  <a:lnTo>
-                    <a:pt x="3838836" y="1624236"/>
-                  </a:lnTo>
-                  <a:lnTo>
-                    <a:pt x="3916080" y="1640946"/>
-                  </a:lnTo>
-                  <a:lnTo>
-                    <a:pt x="3993324" y="1657257"/>
-                  </a:lnTo>
-                  <a:lnTo>
-                    <a:pt x="4070567" y="1673180"/>
-                  </a:lnTo>
-                  <a:lnTo>
-                    <a:pt x="4147811" y="1688722"/>
-                  </a:lnTo>
-                  <a:lnTo>
-                    <a:pt x="4225054" y="1703895"/>
-                  </a:lnTo>
-                  <a:lnTo>
-                    <a:pt x="4302298" y="1718706"/>
-                  </a:lnTo>
-                  <a:lnTo>
-                    <a:pt x="4379541" y="1733163"/>
-                  </a:lnTo>
-                  <a:lnTo>
-                    <a:pt x="4456785" y="1747276"/>
-                  </a:lnTo>
-                  <a:lnTo>
-                    <a:pt x="4534029" y="1761053"/>
-                  </a:lnTo>
-                  <a:lnTo>
-                    <a:pt x="4611272" y="1774501"/>
-                  </a:lnTo>
-                  <a:lnTo>
-                    <a:pt x="4688516" y="1787629"/>
-                  </a:lnTo>
-                  <a:lnTo>
-                    <a:pt x="4765759" y="1800443"/>
-                  </a:lnTo>
-                  <a:lnTo>
-                    <a:pt x="4843003" y="1812953"/>
-                  </a:lnTo>
-                  <a:lnTo>
-                    <a:pt x="4920246" y="1825164"/>
-                  </a:lnTo>
-                  <a:lnTo>
-                    <a:pt x="4997490" y="1837084"/>
-                  </a:lnTo>
-                  <a:lnTo>
-                    <a:pt x="5074734" y="1848719"/>
-                  </a:lnTo>
-                  <a:lnTo>
-                    <a:pt x="5151977" y="1860078"/>
-                  </a:lnTo>
-                  <a:lnTo>
-                    <a:pt x="5229221" y="1871166"/>
-                  </a:lnTo>
-                  <a:lnTo>
-                    <a:pt x="5306464" y="1881989"/>
-                  </a:lnTo>
-                  <a:lnTo>
-                    <a:pt x="5383708" y="1892554"/>
-                  </a:lnTo>
-                  <a:lnTo>
-                    <a:pt x="5460951" y="1902868"/>
-                  </a:lnTo>
-                  <a:lnTo>
-                    <a:pt x="5538195" y="1912935"/>
-                  </a:lnTo>
-                  <a:lnTo>
-                    <a:pt x="5615439" y="1922763"/>
-                  </a:lnTo>
-                  <a:lnTo>
-                    <a:pt x="5692682" y="1932357"/>
-                  </a:lnTo>
-                  <a:lnTo>
-                    <a:pt x="5769926" y="1941721"/>
-                  </a:lnTo>
-                  <a:lnTo>
-                    <a:pt x="5847169" y="1950863"/>
-                  </a:lnTo>
-                  <a:lnTo>
-                    <a:pt x="5924413" y="1959786"/>
-                  </a:lnTo>
-                  <a:lnTo>
-                    <a:pt x="6001656" y="1968497"/>
-                  </a:lnTo>
-                  <a:lnTo>
-                    <a:pt x="6078900" y="1977000"/>
-                  </a:lnTo>
-                  <a:lnTo>
-                    <a:pt x="6156144" y="1985301"/>
-                  </a:lnTo>
-                  <a:lnTo>
-                    <a:pt x="6233387" y="1993403"/>
-                  </a:lnTo>
-                  <a:lnTo>
-                    <a:pt x="6310631" y="2001313"/>
-                  </a:lnTo>
-                  <a:lnTo>
-                    <a:pt x="6387874" y="2009034"/>
-                  </a:lnTo>
-                  <a:lnTo>
-                    <a:pt x="6465118" y="2016571"/>
-                  </a:lnTo>
-                  <a:lnTo>
-                    <a:pt x="6542361" y="2023928"/>
-                  </a:lnTo>
-                  <a:lnTo>
-                    <a:pt x="6619605" y="2031110"/>
-                  </a:lnTo>
-                  <a:lnTo>
-                    <a:pt x="6696849" y="2038120"/>
-                  </a:lnTo>
-                  <a:lnTo>
-                    <a:pt x="6774092" y="2044964"/>
-                  </a:lnTo>
-                  <a:lnTo>
-                    <a:pt x="6851336" y="2051644"/>
-                  </a:lnTo>
-                  <a:lnTo>
-                    <a:pt x="6928579" y="2058165"/>
-                  </a:lnTo>
-                  <a:lnTo>
-                    <a:pt x="7005823" y="2064531"/>
-                  </a:lnTo>
-                  <a:lnTo>
-                    <a:pt x="7083066" y="2070745"/>
-                  </a:lnTo>
-                  <a:lnTo>
-                    <a:pt x="7160310" y="2076811"/>
-                  </a:lnTo>
-                  <a:lnTo>
-                    <a:pt x="7237554" y="2082732"/>
-                  </a:lnTo>
-                  <a:lnTo>
-                    <a:pt x="7314797" y="2088512"/>
-                  </a:lnTo>
-                  <a:lnTo>
-                    <a:pt x="7392041" y="2094155"/>
+                    <a:pt x="71622" y="60020"/>
+                  </a:lnTo>
+                  <a:lnTo>
+                    <a:pt x="143245" y="118610"/>
+                  </a:lnTo>
+                  <a:lnTo>
+                    <a:pt x="214867" y="175804"/>
+                  </a:lnTo>
+                  <a:lnTo>
+                    <a:pt x="286490" y="231634"/>
+                  </a:lnTo>
+                  <a:lnTo>
+                    <a:pt x="358112" y="286133"/>
+                  </a:lnTo>
+                  <a:lnTo>
+                    <a:pt x="429735" y="339333"/>
+                  </a:lnTo>
+                  <a:lnTo>
+                    <a:pt x="501357" y="391265"/>
+                  </a:lnTo>
+                  <a:lnTo>
+                    <a:pt x="572980" y="441959"/>
+                  </a:lnTo>
+                  <a:lnTo>
+                    <a:pt x="644602" y="491445"/>
+                  </a:lnTo>
+                  <a:lnTo>
+                    <a:pt x="716225" y="539751"/>
+                  </a:lnTo>
+                  <a:lnTo>
+                    <a:pt x="787847" y="586905"/>
+                  </a:lnTo>
+                  <a:lnTo>
+                    <a:pt x="859470" y="632935"/>
+                  </a:lnTo>
+                  <a:lnTo>
+                    <a:pt x="931092" y="677868"/>
+                  </a:lnTo>
+                  <a:lnTo>
+                    <a:pt x="1002715" y="721730"/>
+                  </a:lnTo>
+                  <a:lnTo>
+                    <a:pt x="1074337" y="764547"/>
+                  </a:lnTo>
+                  <a:lnTo>
+                    <a:pt x="1145960" y="806342"/>
+                  </a:lnTo>
+                  <a:lnTo>
+                    <a:pt x="1217582" y="847142"/>
+                  </a:lnTo>
+                  <a:lnTo>
+                    <a:pt x="1289205" y="886969"/>
+                  </a:lnTo>
+                  <a:lnTo>
+                    <a:pt x="1360827" y="925846"/>
+                  </a:lnTo>
+                  <a:lnTo>
+                    <a:pt x="1432450" y="963797"/>
+                  </a:lnTo>
+                  <a:lnTo>
+                    <a:pt x="1504073" y="1000843"/>
+                  </a:lnTo>
+                  <a:lnTo>
+                    <a:pt x="1575695" y="1037006"/>
+                  </a:lnTo>
+                  <a:lnTo>
+                    <a:pt x="1647318" y="1072307"/>
+                  </a:lnTo>
+                  <a:lnTo>
+                    <a:pt x="1718940" y="1106766"/>
+                  </a:lnTo>
+                  <a:lnTo>
+                    <a:pt x="1790563" y="1140404"/>
+                  </a:lnTo>
+                  <a:lnTo>
+                    <a:pt x="1862185" y="1173240"/>
+                  </a:lnTo>
+                  <a:lnTo>
+                    <a:pt x="1933808" y="1205293"/>
+                  </a:lnTo>
+                  <a:lnTo>
+                    <a:pt x="2005430" y="1236583"/>
+                  </a:lnTo>
+                  <a:lnTo>
+                    <a:pt x="2077053" y="1267126"/>
+                  </a:lnTo>
+                  <a:lnTo>
+                    <a:pt x="2148675" y="1296941"/>
+                  </a:lnTo>
+                  <a:lnTo>
+                    <a:pt x="2220298" y="1326046"/>
+                  </a:lnTo>
+                  <a:lnTo>
+                    <a:pt x="2291920" y="1354457"/>
+                  </a:lnTo>
+                  <a:lnTo>
+                    <a:pt x="2363543" y="1382190"/>
+                  </a:lnTo>
+                  <a:lnTo>
+                    <a:pt x="2435165" y="1409263"/>
+                  </a:lnTo>
+                  <a:lnTo>
+                    <a:pt x="2506788" y="1435690"/>
+                  </a:lnTo>
+                  <a:lnTo>
+                    <a:pt x="2578410" y="1461487"/>
+                  </a:lnTo>
+                  <a:lnTo>
+                    <a:pt x="2650033" y="1486669"/>
+                  </a:lnTo>
+                  <a:lnTo>
+                    <a:pt x="2721655" y="1511251"/>
+                  </a:lnTo>
+                  <a:lnTo>
+                    <a:pt x="2793278" y="1535247"/>
+                  </a:lnTo>
+                  <a:lnTo>
+                    <a:pt x="2864901" y="1558671"/>
+                  </a:lnTo>
+                  <a:lnTo>
+                    <a:pt x="2936523" y="1581536"/>
+                  </a:lnTo>
+                  <a:lnTo>
+                    <a:pt x="3008146" y="1603857"/>
+                  </a:lnTo>
+                  <a:lnTo>
+                    <a:pt x="3079768" y="1625645"/>
+                  </a:lnTo>
+                  <a:lnTo>
+                    <a:pt x="3151391" y="1646914"/>
+                  </a:lnTo>
+                  <a:lnTo>
+                    <a:pt x="3223013" y="1667676"/>
+                  </a:lnTo>
+                  <a:lnTo>
+                    <a:pt x="3294636" y="1687943"/>
+                  </a:lnTo>
+                  <a:lnTo>
+                    <a:pt x="3366258" y="1707727"/>
+                  </a:lnTo>
+                  <a:lnTo>
+                    <a:pt x="3437881" y="1727040"/>
+                  </a:lnTo>
+                  <a:lnTo>
+                    <a:pt x="3509503" y="1745892"/>
+                  </a:lnTo>
+                  <a:lnTo>
+                    <a:pt x="3581126" y="1764294"/>
+                  </a:lnTo>
+                  <a:lnTo>
+                    <a:pt x="3652748" y="1782258"/>
+                  </a:lnTo>
+                  <a:lnTo>
+                    <a:pt x="3724371" y="1799794"/>
+                  </a:lnTo>
+                  <a:lnTo>
+                    <a:pt x="3795993" y="1816911"/>
+                  </a:lnTo>
+                  <a:lnTo>
+                    <a:pt x="3867616" y="1833621"/>
+                  </a:lnTo>
+                  <a:lnTo>
+                    <a:pt x="3939238" y="1849932"/>
+                  </a:lnTo>
+                  <a:lnTo>
+                    <a:pt x="4010861" y="1865855"/>
+                  </a:lnTo>
+                  <a:lnTo>
+                    <a:pt x="4082483" y="1881398"/>
+                  </a:lnTo>
+                  <a:lnTo>
+                    <a:pt x="4154106" y="1896570"/>
+                  </a:lnTo>
+                  <a:lnTo>
+                    <a:pt x="4225729" y="1911381"/>
+                  </a:lnTo>
+                  <a:lnTo>
+                    <a:pt x="4297351" y="1925839"/>
+                  </a:lnTo>
+                  <a:lnTo>
+                    <a:pt x="4368974" y="1939952"/>
+                  </a:lnTo>
+                  <a:lnTo>
+                    <a:pt x="4440596" y="1953728"/>
+                  </a:lnTo>
+                  <a:lnTo>
+                    <a:pt x="4512219" y="1967176"/>
+                  </a:lnTo>
+                  <a:lnTo>
+                    <a:pt x="4583841" y="1980304"/>
+                  </a:lnTo>
+                  <a:lnTo>
+                    <a:pt x="4655464" y="1993119"/>
+                  </a:lnTo>
+                  <a:lnTo>
+                    <a:pt x="4727086" y="2005628"/>
+                  </a:lnTo>
+                  <a:lnTo>
+                    <a:pt x="4798709" y="2017839"/>
+                  </a:lnTo>
+                  <a:lnTo>
+                    <a:pt x="4870331" y="2029759"/>
+                  </a:lnTo>
+                  <a:lnTo>
+                    <a:pt x="4941954" y="2041395"/>
+                  </a:lnTo>
+                  <a:lnTo>
+                    <a:pt x="5013576" y="2052753"/>
+                  </a:lnTo>
+                  <a:lnTo>
+                    <a:pt x="5085199" y="2063841"/>
+                  </a:lnTo>
+                  <a:lnTo>
+                    <a:pt x="5156821" y="2074664"/>
+                  </a:lnTo>
+                  <a:lnTo>
+                    <a:pt x="5228444" y="2085230"/>
+                  </a:lnTo>
+                  <a:lnTo>
+                    <a:pt x="5300066" y="2095543"/>
+                  </a:lnTo>
+                  <a:lnTo>
+                    <a:pt x="5371689" y="2105611"/>
+                  </a:lnTo>
+                  <a:lnTo>
+                    <a:pt x="5443311" y="2115438"/>
+                  </a:lnTo>
+                  <a:lnTo>
+                    <a:pt x="5514934" y="2125032"/>
+                  </a:lnTo>
+                  <a:lnTo>
+                    <a:pt x="5586557" y="2134396"/>
+                  </a:lnTo>
+                  <a:lnTo>
+                    <a:pt x="5658179" y="2143538"/>
+                  </a:lnTo>
+                  <a:lnTo>
+                    <a:pt x="5729802" y="2152462"/>
+                  </a:lnTo>
+                  <a:lnTo>
+                    <a:pt x="5801424" y="2161172"/>
+                  </a:lnTo>
+                  <a:lnTo>
+                    <a:pt x="5873047" y="2169676"/>
+                  </a:lnTo>
+                  <a:lnTo>
+                    <a:pt x="5944669" y="2177976"/>
+                  </a:lnTo>
+                  <a:lnTo>
+                    <a:pt x="6016292" y="2186079"/>
+                  </a:lnTo>
+                  <a:lnTo>
+                    <a:pt x="6087914" y="2193988"/>
+                  </a:lnTo>
+                  <a:lnTo>
+                    <a:pt x="6159537" y="2201709"/>
+                  </a:lnTo>
+                  <a:lnTo>
+                    <a:pt x="6231159" y="2209246"/>
+                  </a:lnTo>
+                  <a:lnTo>
+                    <a:pt x="6302782" y="2216603"/>
+                  </a:lnTo>
+                  <a:lnTo>
+                    <a:pt x="6374404" y="2223785"/>
+                  </a:lnTo>
+                  <a:lnTo>
+                    <a:pt x="6446027" y="2230796"/>
+                  </a:lnTo>
+                  <a:lnTo>
+                    <a:pt x="6517649" y="2237639"/>
+                  </a:lnTo>
+                  <a:lnTo>
+                    <a:pt x="6589272" y="2244320"/>
+                  </a:lnTo>
+                  <a:lnTo>
+                    <a:pt x="6660894" y="2250841"/>
+                  </a:lnTo>
+                  <a:lnTo>
+                    <a:pt x="6732517" y="2257206"/>
+                  </a:lnTo>
+                  <a:lnTo>
+                    <a:pt x="6804139" y="2263420"/>
+                  </a:lnTo>
+                  <a:lnTo>
+                    <a:pt x="6875762" y="2269486"/>
+                  </a:lnTo>
+                  <a:lnTo>
+                    <a:pt x="6947385" y="2275407"/>
+                  </a:lnTo>
+                  <a:lnTo>
+                    <a:pt x="7019007" y="2281187"/>
+                  </a:lnTo>
+                  <a:lnTo>
+                    <a:pt x="7090630" y="2286830"/>
                   </a:lnTo>
                 </a:path>
               </a:pathLst>
@@ -4512,7 +4496,7 @@
         </p:sp>
         <p:sp>
           <p:nvSpPr>
-            <p:cNvPr id="25" name="pl25"/>
+            <p:cNvPr id="24" name="pl24"/>
             <p:cNvSpPr/>
             <p:nvPr/>
           </p:nvSpPr>
@@ -4555,13 +4539,13 @@
         </p:sp>
         <p:sp>
           <p:nvSpPr>
-            <p:cNvPr id="26" name="pl26"/>
+            <p:cNvPr id="25" name="pl25"/>
             <p:cNvSpPr/>
             <p:nvPr/>
           </p:nvSpPr>
           <p:spPr>
             <a:xfrm>
-              <a:off x="4117484" y="2073503"/>
+              <a:off x="4468386" y="2073503"/>
               <a:ext cx="0" cy="3649639"/>
             </a:xfrm>
             <a:custGeom>
@@ -4598,7 +4582,7 @@
         </p:sp>
         <p:sp>
           <p:nvSpPr>
-            <p:cNvPr id="27" name="tx27"/>
+            <p:cNvPr id="26" name="tx26"/>
             <p:cNvSpPr/>
             <p:nvPr/>
           </p:nvSpPr>
@@ -4644,7 +4628,7 @@
         </p:sp>
         <p:sp>
           <p:nvSpPr>
-            <p:cNvPr id="28" name="tx28"/>
+            <p:cNvPr id="27" name="tx27"/>
             <p:cNvSpPr/>
             <p:nvPr/>
           </p:nvSpPr>
@@ -4690,7 +4674,7 @@
         </p:sp>
         <p:sp>
           <p:nvSpPr>
-            <p:cNvPr id="29" name="tx29"/>
+            <p:cNvPr id="28" name="tx28"/>
             <p:cNvSpPr/>
             <p:nvPr/>
           </p:nvSpPr>
@@ -4736,7 +4720,7 @@
         </p:sp>
         <p:sp>
           <p:nvSpPr>
-            <p:cNvPr id="30" name="tx30"/>
+            <p:cNvPr id="29" name="tx29"/>
             <p:cNvSpPr/>
             <p:nvPr/>
           </p:nvSpPr>
@@ -4782,7 +4766,7 @@
         </p:sp>
         <p:sp>
           <p:nvSpPr>
-            <p:cNvPr id="31" name="tx31"/>
+            <p:cNvPr id="30" name="tx30"/>
             <p:cNvSpPr/>
             <p:nvPr/>
           </p:nvSpPr>
@@ -4828,14 +4812,14 @@
         </p:sp>
         <p:sp>
           <p:nvSpPr>
-            <p:cNvPr id="32" name="tx32"/>
+            <p:cNvPr id="31" name="tx31"/>
             <p:cNvSpPr/>
             <p:nvPr/>
           </p:nvSpPr>
           <p:spPr>
             <a:xfrm>
-              <a:off x="2423864" y="5785772"/>
-              <a:ext cx="155356" cy="80101"/>
+              <a:off x="2478335" y="5785772"/>
+              <a:ext cx="161574" cy="80101"/>
             </a:xfrm>
             <a:prstGeom prst="rect">
               <a:avLst/>
@@ -4867,21 +4851,21 @@
                   <a:latin typeface="Helvetica"/>
                   <a:cs typeface="Helvetica"/>
                 </a:rPr>
-                <a:t>0.8</a:t>
+                <a:t>-25</a:t>
               </a:r>
             </a:p>
           </p:txBody>
         </p:sp>
         <p:sp>
           <p:nvSpPr>
-            <p:cNvPr id="33" name="tx33"/>
+            <p:cNvPr id="32" name="tx32"/>
             <p:cNvSpPr/>
             <p:nvPr/>
           </p:nvSpPr>
           <p:spPr>
             <a:xfrm>
-              <a:off x="4196521" y="5785772"/>
-              <a:ext cx="155356" cy="80101"/>
+              <a:off x="4582608" y="5785772"/>
+              <a:ext cx="62179" cy="80101"/>
             </a:xfrm>
             <a:prstGeom prst="rect">
               <a:avLst/>
@@ -4913,21 +4897,21 @@
                   <a:latin typeface="Helvetica"/>
                   <a:cs typeface="Helvetica"/>
                 </a:rPr>
-                <a:t>1.0</a:t>
+                <a:t>0</a:t>
               </a:r>
             </a:p>
           </p:txBody>
         </p:sp>
         <p:sp>
           <p:nvSpPr>
-            <p:cNvPr id="34" name="tx34"/>
+            <p:cNvPr id="33" name="tx33"/>
             <p:cNvSpPr/>
             <p:nvPr/>
           </p:nvSpPr>
           <p:spPr>
             <a:xfrm>
-              <a:off x="5969179" y="5785772"/>
-              <a:ext cx="155356" cy="80101"/>
+              <a:off x="6606094" y="5785772"/>
+              <a:ext cx="124358" cy="80101"/>
             </a:xfrm>
             <a:prstGeom prst="rect">
               <a:avLst/>
@@ -4959,67 +4943,21 @@
                   <a:latin typeface="Helvetica"/>
                   <a:cs typeface="Helvetica"/>
                 </a:rPr>
-                <a:t>1.2</a:t>
+                <a:t>25</a:t>
               </a:r>
             </a:p>
           </p:txBody>
         </p:sp>
         <p:sp>
           <p:nvSpPr>
-            <p:cNvPr id="35" name="tx35"/>
+            <p:cNvPr id="34" name="tx34"/>
             <p:cNvSpPr/>
             <p:nvPr/>
           </p:nvSpPr>
           <p:spPr>
             <a:xfrm>
-              <a:off x="7741836" y="5785772"/>
-              <a:ext cx="155356" cy="80101"/>
-            </a:xfrm>
-            <a:prstGeom prst="rect">
-              <a:avLst/>
-            </a:prstGeom>
-            <a:noFill/>
-          </p:spPr>
-          <p:txBody>
-            <a:bodyPr lIns="0" rIns="0" tIns="0" bIns="0" anchorCtr="1" anchor="ctr" wrap="none"/>
-            <a:lstStyle/>
-            <a:p>
-              <a:pPr algn="l" marL="0" marR="0" indent="0">
-                <a:lnSpc>
-                  <a:spcPts val="880"/>
-                </a:lnSpc>
-                <a:spcBef>
-                  <a:spcPts val="0"/>
-                </a:spcBef>
-                <a:spcAft>
-                  <a:spcPts val="0"/>
-                </a:spcAft>
-              </a:pPr>
-              <a:r>
-                <a:rPr sz="880">
-                  <a:solidFill>
-                    <a:srgbClr val="4D4D4D">
-                      <a:alpha val="100000"/>
-                    </a:srgbClr>
-                  </a:solidFill>
-                  <a:latin typeface="Helvetica"/>
-                  <a:cs typeface="Helvetica"/>
-                </a:rPr>
-                <a:t>1.4</a:t>
-              </a:r>
-            </a:p>
-          </p:txBody>
-        </p:sp>
-        <p:sp>
-          <p:nvSpPr>
-            <p:cNvPr id="36" name="tx36"/>
-            <p:cNvSpPr/>
-            <p:nvPr/>
-          </p:nvSpPr>
-          <p:spPr>
-            <a:xfrm>
-              <a:off x="3879271" y="5925448"/>
-              <a:ext cx="1676186" cy="100218"/>
+              <a:off x="2928340" y="5925448"/>
+              <a:ext cx="3578047" cy="100218"/>
             </a:xfrm>
             <a:prstGeom prst="rect">
               <a:avLst/>
@@ -5051,14 +4989,14 @@
                   <a:latin typeface="Helvetica"/>
                   <a:cs typeface="Helvetica"/>
                 </a:rPr>
-                <a:t>CKD-EPI Cr-Cys / CG ratio</a:t>
+                <a:t>eGFR difference (%): 100 × (CKD-EPI Cr-Cys − CG) / CG</a:t>
               </a:r>
             </a:p>
           </p:txBody>
         </p:sp>
         <p:sp>
           <p:nvSpPr>
-            <p:cNvPr id="37" name="tx37"/>
+            <p:cNvPr id="35" name="tx35"/>
             <p:cNvSpPr/>
             <p:nvPr/>
           </p:nvSpPr>
@@ -5104,14 +5042,14 @@
         </p:sp>
         <p:sp>
           <p:nvSpPr>
-            <p:cNvPr id="38" name="tx38"/>
+            <p:cNvPr id="36" name="tx36"/>
             <p:cNvSpPr/>
             <p:nvPr/>
           </p:nvSpPr>
           <p:spPr>
             <a:xfrm>
               <a:off x="817517" y="1896563"/>
-              <a:ext cx="6169365" cy="82021"/>
+              <a:ext cx="6321612" cy="82021"/>
             </a:xfrm>
             <a:prstGeom prst="rect">
               <a:avLst/>
@@ -5143,14 +5081,14 @@
                   <a:latin typeface="Helvetica"/>
                   <a:cs typeface="Helvetica"/>
                 </a:rPr>
-                <a:t>subHR per 0.1 ratio decline: 1.32 (1.06-1.64), p = 0.013  |  per IQR decline (Δ = 0.30): 2.27 (1.19-4.31)  |  IQR: [0.84, 1.14]</a:t>
+                <a:t>subHR per 10 % decline: 1.32 (1.06-1.64), p = 0.013  |  per IQR decline (Δ = 29.5 %): 2.27 (1.19-4.31)  |  IQR: [-15.6, 13.9] %</a:t>
               </a:r>
             </a:p>
           </p:txBody>
         </p:sp>
         <p:sp>
           <p:nvSpPr>
-            <p:cNvPr id="39" name="tx39"/>
+            <p:cNvPr id="37" name="tx37"/>
             <p:cNvSpPr/>
             <p:nvPr/>
           </p:nvSpPr>

--- a/docs/pptx/auc3/jx-auc3-linsubhr-ratio-hosp7.pptx
+++ b/docs/pptx/auc3/jx-auc3-linsubhr-ratio-hosp7.pptx
@@ -2265,34 +2265,26 @@
         </p:sp>
         <p:sp>
           <p:nvSpPr>
-            <p:cNvPr id="4" name="pl4"/>
+            <p:cNvPr id="4" name="rc4"/>
             <p:cNvSpPr/>
             <p:nvPr/>
           </p:nvSpPr>
           <p:spPr>
             <a:xfrm>
-              <a:off x="817517" y="5142518"/>
-              <a:ext cx="7799693" cy="0"/>
+              <a:off x="457200" y="1600200"/>
+              <a:ext cx="8229600" cy="4525962"/>
             </a:xfrm>
-            <a:custGeom>
+            <a:prstGeom prst="rect">
               <a:avLst/>
-              <a:pathLst>
-                <a:path w="7799693" h="0">
-                  <a:moveTo>
-                    <a:pt x="0" y="0"/>
-                  </a:moveTo>
-                  <a:lnTo>
-                    <a:pt x="7799693" y="0"/>
-                  </a:lnTo>
-                  <a:lnTo>
-                    <a:pt x="7799693" y="0"/>
-                  </a:lnTo>
-                </a:path>
-              </a:pathLst>
-            </a:custGeom>
-            <a:ln w="6775" cap="flat">
+            </a:prstGeom>
+            <a:solidFill>
+              <a:srgbClr val="FFFFFF">
+                <a:alpha val="100000"/>
+              </a:srgbClr>
+            </a:solidFill>
+            <a:ln w="13550" cap="rnd">
               <a:solidFill>
-                <a:srgbClr val="EBEBEB">
+                <a:srgbClr val="FFFFFF">
                   <a:alpha val="100000"/>
                 </a:srgbClr>
               </a:solidFill>
@@ -2314,21 +2306,21 @@
           </p:nvSpPr>
           <p:spPr>
             <a:xfrm>
-              <a:off x="817517" y="4313054"/>
-              <a:ext cx="7799693" cy="0"/>
+              <a:off x="887106" y="3250627"/>
+              <a:ext cx="7660515" cy="0"/>
             </a:xfrm>
             <a:custGeom>
               <a:avLst/>
               <a:pathLst>
-                <a:path w="7799693" h="0">
+                <a:path w="7660515" h="0">
                   <a:moveTo>
                     <a:pt x="0" y="0"/>
                   </a:moveTo>
                   <a:lnTo>
-                    <a:pt x="7799693" y="0"/>
-                  </a:lnTo>
-                  <a:lnTo>
-                    <a:pt x="7799693" y="0"/>
+                    <a:pt x="7660515" y="0"/>
+                  </a:lnTo>
+                  <a:lnTo>
+                    <a:pt x="7660515" y="0"/>
                   </a:lnTo>
                 </a:path>
               </a:pathLst>
@@ -2357,21 +2349,21 @@
           </p:nvSpPr>
           <p:spPr>
             <a:xfrm>
-              <a:off x="817517" y="3483591"/>
-              <a:ext cx="7799693" cy="0"/>
+              <a:off x="887106" y="2951293"/>
+              <a:ext cx="7660515" cy="0"/>
             </a:xfrm>
             <a:custGeom>
               <a:avLst/>
               <a:pathLst>
-                <a:path w="7799693" h="0">
+                <a:path w="7660515" h="0">
                   <a:moveTo>
                     <a:pt x="0" y="0"/>
                   </a:moveTo>
                   <a:lnTo>
-                    <a:pt x="7799693" y="0"/>
-                  </a:lnTo>
-                  <a:lnTo>
-                    <a:pt x="7799693" y="0"/>
+                    <a:pt x="7660515" y="0"/>
+                  </a:lnTo>
+                  <a:lnTo>
+                    <a:pt x="7660515" y="0"/>
                   </a:lnTo>
                 </a:path>
               </a:pathLst>
@@ -2400,21 +2392,21 @@
           </p:nvSpPr>
           <p:spPr>
             <a:xfrm>
-              <a:off x="817517" y="2654127"/>
-              <a:ext cx="7799693" cy="0"/>
+              <a:off x="887106" y="2651959"/>
+              <a:ext cx="7660515" cy="0"/>
             </a:xfrm>
             <a:custGeom>
               <a:avLst/>
               <a:pathLst>
-                <a:path w="7799693" h="0">
+                <a:path w="7660515" h="0">
                   <a:moveTo>
                     <a:pt x="0" y="0"/>
                   </a:moveTo>
                   <a:lnTo>
-                    <a:pt x="7799693" y="0"/>
-                  </a:lnTo>
-                  <a:lnTo>
-                    <a:pt x="7799693" y="0"/>
+                    <a:pt x="7660515" y="0"/>
+                  </a:lnTo>
+                  <a:lnTo>
+                    <a:pt x="7660515" y="0"/>
                   </a:lnTo>
                 </a:path>
               </a:pathLst>
@@ -2443,21 +2435,21 @@
           </p:nvSpPr>
           <p:spPr>
             <a:xfrm>
-              <a:off x="1531834" y="2073503"/>
-              <a:ext cx="0" cy="3649639"/>
+              <a:off x="887106" y="2352625"/>
+              <a:ext cx="7660515" cy="0"/>
             </a:xfrm>
             <a:custGeom>
               <a:avLst/>
               <a:pathLst>
-                <a:path w="0" h="3649639">
+                <a:path w="7660515" h="0">
                   <a:moveTo>
-                    <a:pt x="0" y="3649639"/>
+                    <a:pt x="0" y="0"/>
                   </a:moveTo>
                   <a:lnTo>
-                    <a:pt x="0" y="0"/>
-                  </a:lnTo>
-                  <a:lnTo>
-                    <a:pt x="0" y="0"/>
+                    <a:pt x="7660515" y="0"/>
+                  </a:lnTo>
+                  <a:lnTo>
+                    <a:pt x="7660515" y="0"/>
                   </a:lnTo>
                 </a:path>
               </a:pathLst>
@@ -2486,15 +2478,15 @@
           </p:nvSpPr>
           <p:spPr>
             <a:xfrm>
-              <a:off x="3586410" y="2073503"/>
-              <a:ext cx="0" cy="3649639"/>
+              <a:off x="1588677" y="2143092"/>
+              <a:ext cx="0" cy="1317069"/>
             </a:xfrm>
             <a:custGeom>
               <a:avLst/>
               <a:pathLst>
-                <a:path w="0" h="3649639">
+                <a:path w="0" h="1317069">
                   <a:moveTo>
-                    <a:pt x="0" y="3649639"/>
+                    <a:pt x="0" y="1317069"/>
                   </a:moveTo>
                   <a:lnTo>
                     <a:pt x="0" y="0"/>
@@ -2529,15 +2521,15 @@
           </p:nvSpPr>
           <p:spPr>
             <a:xfrm>
-              <a:off x="5640985" y="2073503"/>
-              <a:ext cx="0" cy="3649639"/>
+              <a:off x="3606590" y="2143092"/>
+              <a:ext cx="0" cy="1317069"/>
             </a:xfrm>
             <a:custGeom>
               <a:avLst/>
               <a:pathLst>
-                <a:path w="0" h="3649639">
+                <a:path w="0" h="1317069">
                   <a:moveTo>
-                    <a:pt x="0" y="3649639"/>
+                    <a:pt x="0" y="1317069"/>
                   </a:moveTo>
                   <a:lnTo>
                     <a:pt x="0" y="0"/>
@@ -2572,15 +2564,15 @@
           </p:nvSpPr>
           <p:spPr>
             <a:xfrm>
-              <a:off x="7695561" y="2073503"/>
-              <a:ext cx="0" cy="3649639"/>
+              <a:off x="5624504" y="2143092"/>
+              <a:ext cx="0" cy="1317069"/>
             </a:xfrm>
             <a:custGeom>
               <a:avLst/>
               <a:pathLst>
-                <a:path w="0" h="3649639">
+                <a:path w="0" h="1317069">
                   <a:moveTo>
-                    <a:pt x="0" y="3649639"/>
+                    <a:pt x="0" y="1317069"/>
                   </a:moveTo>
                   <a:lnTo>
                     <a:pt x="0" y="0"/>
@@ -2615,26 +2607,26 @@
           </p:nvSpPr>
           <p:spPr>
             <a:xfrm>
-              <a:off x="817517" y="5557249"/>
-              <a:ext cx="7799693" cy="0"/>
+              <a:off x="7642418" y="2143092"/>
+              <a:ext cx="0" cy="1317069"/>
             </a:xfrm>
             <a:custGeom>
               <a:avLst/>
               <a:pathLst>
-                <a:path w="7799693" h="0">
+                <a:path w="0" h="1317069">
                   <a:moveTo>
+                    <a:pt x="0" y="1317069"/>
+                  </a:moveTo>
+                  <a:lnTo>
                     <a:pt x="0" y="0"/>
-                  </a:moveTo>
-                  <a:lnTo>
-                    <a:pt x="7799693" y="0"/>
-                  </a:lnTo>
-                  <a:lnTo>
-                    <a:pt x="7799693" y="0"/>
+                  </a:lnTo>
+                  <a:lnTo>
+                    <a:pt x="0" y="0"/>
                   </a:lnTo>
                 </a:path>
               </a:pathLst>
             </a:custGeom>
-            <a:ln w="13550" cap="flat">
+            <a:ln w="6775" cap="flat">
               <a:solidFill>
                 <a:srgbClr val="EBEBEB">
                   <a:alpha val="100000"/>
@@ -2658,21 +2650,21 @@
           </p:nvSpPr>
           <p:spPr>
             <a:xfrm>
-              <a:off x="817517" y="4727786"/>
-              <a:ext cx="7799693" cy="0"/>
+              <a:off x="887106" y="3400294"/>
+              <a:ext cx="7660515" cy="0"/>
             </a:xfrm>
             <a:custGeom>
               <a:avLst/>
               <a:pathLst>
-                <a:path w="7799693" h="0">
+                <a:path w="7660515" h="0">
                   <a:moveTo>
                     <a:pt x="0" y="0"/>
                   </a:moveTo>
                   <a:lnTo>
-                    <a:pt x="7799693" y="0"/>
-                  </a:lnTo>
-                  <a:lnTo>
-                    <a:pt x="7799693" y="0"/>
+                    <a:pt x="7660515" y="0"/>
+                  </a:lnTo>
+                  <a:lnTo>
+                    <a:pt x="7660515" y="0"/>
                   </a:lnTo>
                 </a:path>
               </a:pathLst>
@@ -2701,21 +2693,21 @@
           </p:nvSpPr>
           <p:spPr>
             <a:xfrm>
-              <a:off x="817517" y="3898322"/>
-              <a:ext cx="7799693" cy="0"/>
+              <a:off x="887106" y="3100960"/>
+              <a:ext cx="7660515" cy="0"/>
             </a:xfrm>
             <a:custGeom>
               <a:avLst/>
               <a:pathLst>
-                <a:path w="7799693" h="0">
+                <a:path w="7660515" h="0">
                   <a:moveTo>
                     <a:pt x="0" y="0"/>
                   </a:moveTo>
                   <a:lnTo>
-                    <a:pt x="7799693" y="0"/>
-                  </a:lnTo>
-                  <a:lnTo>
-                    <a:pt x="7799693" y="0"/>
+                    <a:pt x="7660515" y="0"/>
+                  </a:lnTo>
+                  <a:lnTo>
+                    <a:pt x="7660515" y="0"/>
                   </a:lnTo>
                 </a:path>
               </a:pathLst>
@@ -2744,21 +2736,21 @@
           </p:nvSpPr>
           <p:spPr>
             <a:xfrm>
-              <a:off x="817517" y="3068859"/>
-              <a:ext cx="7799693" cy="0"/>
+              <a:off x="887106" y="2801626"/>
+              <a:ext cx="7660515" cy="0"/>
             </a:xfrm>
             <a:custGeom>
               <a:avLst/>
               <a:pathLst>
-                <a:path w="7799693" h="0">
+                <a:path w="7660515" h="0">
                   <a:moveTo>
                     <a:pt x="0" y="0"/>
                   </a:moveTo>
                   <a:lnTo>
-                    <a:pt x="7799693" y="0"/>
-                  </a:lnTo>
-                  <a:lnTo>
-                    <a:pt x="7799693" y="0"/>
+                    <a:pt x="7660515" y="0"/>
+                  </a:lnTo>
+                  <a:lnTo>
+                    <a:pt x="7660515" y="0"/>
                   </a:lnTo>
                 </a:path>
               </a:pathLst>
@@ -2787,21 +2779,21 @@
           </p:nvSpPr>
           <p:spPr>
             <a:xfrm>
-              <a:off x="817517" y="2239395"/>
-              <a:ext cx="7799693" cy="0"/>
+              <a:off x="887106" y="2502292"/>
+              <a:ext cx="7660515" cy="0"/>
             </a:xfrm>
             <a:custGeom>
               <a:avLst/>
               <a:pathLst>
-                <a:path w="7799693" h="0">
+                <a:path w="7660515" h="0">
                   <a:moveTo>
                     <a:pt x="0" y="0"/>
                   </a:moveTo>
                   <a:lnTo>
-                    <a:pt x="7799693" y="0"/>
-                  </a:lnTo>
-                  <a:lnTo>
-                    <a:pt x="7799693" y="0"/>
+                    <a:pt x="7660515" y="0"/>
+                  </a:lnTo>
+                  <a:lnTo>
+                    <a:pt x="7660515" y="0"/>
                   </a:lnTo>
                 </a:path>
               </a:pathLst>
@@ -2830,21 +2822,21 @@
           </p:nvSpPr>
           <p:spPr>
             <a:xfrm>
-              <a:off x="2559122" y="2073503"/>
-              <a:ext cx="0" cy="3649639"/>
+              <a:off x="887106" y="2202958"/>
+              <a:ext cx="7660515" cy="0"/>
             </a:xfrm>
             <a:custGeom>
               <a:avLst/>
               <a:pathLst>
-                <a:path w="0" h="3649639">
+                <a:path w="7660515" h="0">
                   <a:moveTo>
-                    <a:pt x="0" y="3649639"/>
+                    <a:pt x="0" y="0"/>
                   </a:moveTo>
                   <a:lnTo>
-                    <a:pt x="0" y="0"/>
-                  </a:lnTo>
-                  <a:lnTo>
-                    <a:pt x="0" y="0"/>
+                    <a:pt x="7660515" y="0"/>
+                  </a:lnTo>
+                  <a:lnTo>
+                    <a:pt x="7660515" y="0"/>
                   </a:lnTo>
                 </a:path>
               </a:pathLst>
@@ -2873,15 +2865,15 @@
           </p:nvSpPr>
           <p:spPr>
             <a:xfrm>
-              <a:off x="4613698" y="2073503"/>
-              <a:ext cx="0" cy="3649639"/>
+              <a:off x="2597634" y="2143092"/>
+              <a:ext cx="0" cy="1317069"/>
             </a:xfrm>
             <a:custGeom>
               <a:avLst/>
               <a:pathLst>
-                <a:path w="0" h="3649639">
+                <a:path w="0" h="1317069">
                   <a:moveTo>
-                    <a:pt x="0" y="3649639"/>
+                    <a:pt x="0" y="1317069"/>
                   </a:moveTo>
                   <a:lnTo>
                     <a:pt x="0" y="0"/>
@@ -2916,15 +2908,15 @@
           </p:nvSpPr>
           <p:spPr>
             <a:xfrm>
-              <a:off x="6668273" y="2073503"/>
-              <a:ext cx="0" cy="3649639"/>
+              <a:off x="4615547" y="2143092"/>
+              <a:ext cx="0" cy="1317069"/>
             </a:xfrm>
             <a:custGeom>
               <a:avLst/>
               <a:pathLst>
-                <a:path w="0" h="3649639">
+                <a:path w="0" h="1317069">
                   <a:moveTo>
-                    <a:pt x="0" y="3649639"/>
+                    <a:pt x="0" y="1317069"/>
                   </a:moveTo>
                   <a:lnTo>
                     <a:pt x="0" y="0"/>
@@ -2953,582 +2945,625 @@
         </p:sp>
         <p:sp>
           <p:nvSpPr>
-            <p:cNvPr id="20" name="pg20"/>
+            <p:cNvPr id="20" name="pl20"/>
             <p:cNvSpPr/>
             <p:nvPr/>
           </p:nvSpPr>
           <p:spPr>
             <a:xfrm>
-              <a:off x="1172049" y="2073503"/>
-              <a:ext cx="7090630" cy="3399147"/>
+              <a:off x="6633461" y="2143092"/>
+              <a:ext cx="0" cy="1317069"/>
             </a:xfrm>
             <a:custGeom>
               <a:avLst/>
               <a:pathLst>
-                <a:path w="7090630" h="3399147">
+                <a:path w="0" h="1317069">
                   <a:moveTo>
-                    <a:pt x="911415" y="0"/>
+                    <a:pt x="0" y="1317069"/>
                   </a:moveTo>
                   <a:lnTo>
-                    <a:pt x="931092" y="41641"/>
-                  </a:lnTo>
-                  <a:lnTo>
-                    <a:pt x="1002715" y="186818"/>
-                  </a:lnTo>
-                  <a:lnTo>
-                    <a:pt x="1074337" y="325872"/>
-                  </a:lnTo>
-                  <a:lnTo>
-                    <a:pt x="1145960" y="459061"/>
-                  </a:lnTo>
-                  <a:lnTo>
-                    <a:pt x="1217582" y="586632"/>
-                  </a:lnTo>
-                  <a:lnTo>
-                    <a:pt x="1289205" y="708823"/>
-                  </a:lnTo>
-                  <a:lnTo>
-                    <a:pt x="1360827" y="825860"/>
-                  </a:lnTo>
-                  <a:lnTo>
-                    <a:pt x="1432450" y="937961"/>
-                  </a:lnTo>
-                  <a:lnTo>
-                    <a:pt x="1504073" y="1045334"/>
-                  </a:lnTo>
-                  <a:lnTo>
-                    <a:pt x="1575695" y="1148178"/>
-                  </a:lnTo>
-                  <a:lnTo>
-                    <a:pt x="1647318" y="1246685"/>
-                  </a:lnTo>
-                  <a:lnTo>
-                    <a:pt x="1718940" y="1341037"/>
-                  </a:lnTo>
-                  <a:lnTo>
-                    <a:pt x="1790563" y="1431409"/>
-                  </a:lnTo>
-                  <a:lnTo>
-                    <a:pt x="1862185" y="1517970"/>
-                  </a:lnTo>
-                  <a:lnTo>
-                    <a:pt x="1933808" y="1600880"/>
-                  </a:lnTo>
-                  <a:lnTo>
-                    <a:pt x="2005430" y="1680293"/>
-                  </a:lnTo>
-                  <a:lnTo>
-                    <a:pt x="2077053" y="1756357"/>
-                  </a:lnTo>
-                  <a:lnTo>
-                    <a:pt x="2148675" y="1829213"/>
-                  </a:lnTo>
-                  <a:lnTo>
-                    <a:pt x="2220298" y="1898995"/>
-                  </a:lnTo>
-                  <a:lnTo>
-                    <a:pt x="2291920" y="1965835"/>
-                  </a:lnTo>
-                  <a:lnTo>
-                    <a:pt x="2363543" y="2029856"/>
-                  </a:lnTo>
-                  <a:lnTo>
-                    <a:pt x="2435165" y="2091176"/>
-                  </a:lnTo>
-                  <a:lnTo>
-                    <a:pt x="2506788" y="2149910"/>
-                  </a:lnTo>
-                  <a:lnTo>
-                    <a:pt x="2578410" y="2206167"/>
-                  </a:lnTo>
-                  <a:lnTo>
-                    <a:pt x="2650033" y="2260051"/>
-                  </a:lnTo>
-                  <a:lnTo>
-                    <a:pt x="2721655" y="2311662"/>
-                  </a:lnTo>
-                  <a:lnTo>
-                    <a:pt x="2793278" y="2361097"/>
-                  </a:lnTo>
-                  <a:lnTo>
-                    <a:pt x="2864901" y="2408447"/>
-                  </a:lnTo>
-                  <a:lnTo>
-                    <a:pt x="2936523" y="2453799"/>
-                  </a:lnTo>
-                  <a:lnTo>
-                    <a:pt x="3008146" y="2497239"/>
-                  </a:lnTo>
-                  <a:lnTo>
-                    <a:pt x="3079768" y="2538847"/>
-                  </a:lnTo>
-                  <a:lnTo>
-                    <a:pt x="3151391" y="2578700"/>
-                  </a:lnTo>
-                  <a:lnTo>
-                    <a:pt x="3223013" y="2616871"/>
-                  </a:lnTo>
-                  <a:lnTo>
-                    <a:pt x="3294636" y="2653433"/>
-                  </a:lnTo>
-                  <a:lnTo>
-                    <a:pt x="3366258" y="2658452"/>
-                  </a:lnTo>
-                  <a:lnTo>
-                    <a:pt x="3437881" y="2662700"/>
-                  </a:lnTo>
-                  <a:lnTo>
-                    <a:pt x="3509503" y="2666927"/>
-                  </a:lnTo>
-                  <a:lnTo>
-                    <a:pt x="3581126" y="2671132"/>
-                  </a:lnTo>
-                  <a:lnTo>
-                    <a:pt x="3652748" y="2675315"/>
-                  </a:lnTo>
-                  <a:lnTo>
-                    <a:pt x="3724371" y="2679476"/>
-                  </a:lnTo>
-                  <a:lnTo>
-                    <a:pt x="3795993" y="2683617"/>
-                  </a:lnTo>
-                  <a:lnTo>
-                    <a:pt x="3867616" y="2687736"/>
-                  </a:lnTo>
-                  <a:lnTo>
-                    <a:pt x="3939238" y="2691833"/>
-                  </a:lnTo>
-                  <a:lnTo>
-                    <a:pt x="4010861" y="2695910"/>
-                  </a:lnTo>
-                  <a:lnTo>
-                    <a:pt x="4082483" y="2699966"/>
-                  </a:lnTo>
-                  <a:lnTo>
-                    <a:pt x="4154106" y="2704000"/>
-                  </a:lnTo>
-                  <a:lnTo>
-                    <a:pt x="4225729" y="2708014"/>
-                  </a:lnTo>
-                  <a:lnTo>
-                    <a:pt x="4297351" y="2712008"/>
-                  </a:lnTo>
-                  <a:lnTo>
-                    <a:pt x="4368974" y="2715980"/>
-                  </a:lnTo>
-                  <a:lnTo>
-                    <a:pt x="4440596" y="2719933"/>
-                  </a:lnTo>
-                  <a:lnTo>
-                    <a:pt x="4512219" y="2723865"/>
-                  </a:lnTo>
-                  <a:lnTo>
-                    <a:pt x="4583841" y="2727776"/>
-                  </a:lnTo>
-                  <a:lnTo>
-                    <a:pt x="4655464" y="2731668"/>
-                  </a:lnTo>
-                  <a:lnTo>
-                    <a:pt x="4727086" y="2735540"/>
-                  </a:lnTo>
-                  <a:lnTo>
-                    <a:pt x="4798709" y="2739391"/>
-                  </a:lnTo>
-                  <a:lnTo>
-                    <a:pt x="4870331" y="2743223"/>
-                  </a:lnTo>
-                  <a:lnTo>
-                    <a:pt x="4941954" y="2747035"/>
-                  </a:lnTo>
-                  <a:lnTo>
-                    <a:pt x="5013576" y="2750828"/>
-                  </a:lnTo>
-                  <a:lnTo>
-                    <a:pt x="5085199" y="2754600"/>
-                  </a:lnTo>
-                  <a:lnTo>
-                    <a:pt x="5156821" y="2758354"/>
-                  </a:lnTo>
-                  <a:lnTo>
-                    <a:pt x="5228444" y="2762088"/>
-                  </a:lnTo>
-                  <a:lnTo>
-                    <a:pt x="5300066" y="2765803"/>
-                  </a:lnTo>
-                  <a:lnTo>
-                    <a:pt x="5371689" y="2769499"/>
-                  </a:lnTo>
-                  <a:lnTo>
-                    <a:pt x="5443311" y="2773176"/>
-                  </a:lnTo>
-                  <a:lnTo>
-                    <a:pt x="5514934" y="2776834"/>
-                  </a:lnTo>
-                  <a:lnTo>
-                    <a:pt x="5586557" y="2780473"/>
-                  </a:lnTo>
-                  <a:lnTo>
-                    <a:pt x="5658179" y="2784093"/>
-                  </a:lnTo>
-                  <a:lnTo>
-                    <a:pt x="5729802" y="2787695"/>
-                  </a:lnTo>
-                  <a:lnTo>
-                    <a:pt x="5801424" y="2791278"/>
-                  </a:lnTo>
-                  <a:lnTo>
-                    <a:pt x="5873047" y="2794843"/>
-                  </a:lnTo>
-                  <a:lnTo>
-                    <a:pt x="5944669" y="2798389"/>
-                  </a:lnTo>
-                  <a:lnTo>
-                    <a:pt x="6016292" y="2801917"/>
-                  </a:lnTo>
-                  <a:lnTo>
-                    <a:pt x="6087914" y="2805427"/>
-                  </a:lnTo>
-                  <a:lnTo>
-                    <a:pt x="6159537" y="2808919"/>
-                  </a:lnTo>
-                  <a:lnTo>
-                    <a:pt x="6231159" y="2812393"/>
-                  </a:lnTo>
-                  <a:lnTo>
-                    <a:pt x="6302782" y="2815849"/>
-                  </a:lnTo>
-                  <a:lnTo>
-                    <a:pt x="6374404" y="2819287"/>
-                  </a:lnTo>
-                  <a:lnTo>
-                    <a:pt x="6446027" y="2822707"/>
-                  </a:lnTo>
-                  <a:lnTo>
-                    <a:pt x="6517649" y="2826110"/>
-                  </a:lnTo>
-                  <a:lnTo>
-                    <a:pt x="6589272" y="2829496"/>
-                  </a:lnTo>
-                  <a:lnTo>
-                    <a:pt x="6660894" y="2832864"/>
-                  </a:lnTo>
-                  <a:lnTo>
-                    <a:pt x="6732517" y="2836214"/>
-                  </a:lnTo>
-                  <a:lnTo>
-                    <a:pt x="6804139" y="2839548"/>
-                  </a:lnTo>
-                  <a:lnTo>
-                    <a:pt x="6875762" y="2842864"/>
-                  </a:lnTo>
-                  <a:lnTo>
-                    <a:pt x="6947385" y="2846163"/>
-                  </a:lnTo>
-                  <a:lnTo>
-                    <a:pt x="7019007" y="2849445"/>
-                  </a:lnTo>
-                  <a:lnTo>
-                    <a:pt x="7090630" y="2852710"/>
-                  </a:lnTo>
-                  <a:lnTo>
-                    <a:pt x="7090630" y="3399147"/>
-                  </a:lnTo>
-                  <a:lnTo>
-                    <a:pt x="7019007" y="3395422"/>
-                  </a:lnTo>
-                  <a:lnTo>
-                    <a:pt x="6947385" y="3391532"/>
-                  </a:lnTo>
-                  <a:lnTo>
-                    <a:pt x="6875762" y="3387472"/>
-                  </a:lnTo>
-                  <a:lnTo>
-                    <a:pt x="6804139" y="3383233"/>
-                  </a:lnTo>
-                  <a:lnTo>
-                    <a:pt x="6732517" y="3378807"/>
-                  </a:lnTo>
-                  <a:lnTo>
-                    <a:pt x="6660894" y="3374186"/>
-                  </a:lnTo>
-                  <a:lnTo>
-                    <a:pt x="6589272" y="3369361"/>
-                  </a:lnTo>
-                  <a:lnTo>
-                    <a:pt x="6517649" y="3364324"/>
-                  </a:lnTo>
-                  <a:lnTo>
-                    <a:pt x="6446027" y="3359066"/>
-                  </a:lnTo>
-                  <a:lnTo>
-                    <a:pt x="6374404" y="3353576"/>
-                  </a:lnTo>
-                  <a:lnTo>
-                    <a:pt x="6302782" y="3347844"/>
-                  </a:lnTo>
-                  <a:lnTo>
-                    <a:pt x="6231159" y="3341859"/>
-                  </a:lnTo>
-                  <a:lnTo>
-                    <a:pt x="6159537" y="3335612"/>
-                  </a:lnTo>
-                  <a:lnTo>
-                    <a:pt x="6087914" y="3329089"/>
-                  </a:lnTo>
-                  <a:lnTo>
-                    <a:pt x="6016292" y="3322278"/>
-                  </a:lnTo>
-                  <a:lnTo>
-                    <a:pt x="5944669" y="3315168"/>
-                  </a:lnTo>
-                  <a:lnTo>
-                    <a:pt x="5873047" y="3307745"/>
-                  </a:lnTo>
-                  <a:lnTo>
-                    <a:pt x="5801424" y="3299995"/>
-                  </a:lnTo>
-                  <a:lnTo>
-                    <a:pt x="5729802" y="3291904"/>
-                  </a:lnTo>
-                  <a:lnTo>
-                    <a:pt x="5658179" y="3283456"/>
-                  </a:lnTo>
-                  <a:lnTo>
-                    <a:pt x="5586557" y="3274637"/>
-                  </a:lnTo>
-                  <a:lnTo>
-                    <a:pt x="5514934" y="3265429"/>
-                  </a:lnTo>
-                  <a:lnTo>
-                    <a:pt x="5443311" y="3255815"/>
-                  </a:lnTo>
-                  <a:lnTo>
-                    <a:pt x="5371689" y="3245779"/>
-                  </a:lnTo>
-                  <a:lnTo>
-                    <a:pt x="5300066" y="3235300"/>
-                  </a:lnTo>
-                  <a:lnTo>
-                    <a:pt x="5228444" y="3224360"/>
-                  </a:lnTo>
-                  <a:lnTo>
-                    <a:pt x="5156821" y="3212938"/>
-                  </a:lnTo>
-                  <a:lnTo>
-                    <a:pt x="5085199" y="3201013"/>
-                  </a:lnTo>
-                  <a:lnTo>
-                    <a:pt x="5013576" y="3188564"/>
-                  </a:lnTo>
-                  <a:lnTo>
-                    <a:pt x="4941954" y="3175566"/>
-                  </a:lnTo>
-                  <a:lnTo>
-                    <a:pt x="4870331" y="3161995"/>
-                  </a:lnTo>
-                  <a:lnTo>
-                    <a:pt x="4798709" y="3147827"/>
-                  </a:lnTo>
-                  <a:lnTo>
-                    <a:pt x="4727086" y="3133035"/>
-                  </a:lnTo>
-                  <a:lnTo>
-                    <a:pt x="4655464" y="3117592"/>
-                  </a:lnTo>
-                  <a:lnTo>
-                    <a:pt x="4583841" y="3101469"/>
-                  </a:lnTo>
-                  <a:lnTo>
-                    <a:pt x="4512219" y="3084636"/>
-                  </a:lnTo>
-                  <a:lnTo>
-                    <a:pt x="4440596" y="3067061"/>
-                  </a:lnTo>
-                  <a:lnTo>
-                    <a:pt x="4368974" y="3048713"/>
-                  </a:lnTo>
-                  <a:lnTo>
-                    <a:pt x="4297351" y="3029557"/>
-                  </a:lnTo>
-                  <a:lnTo>
-                    <a:pt x="4225729" y="3009557"/>
-                  </a:lnTo>
-                  <a:lnTo>
-                    <a:pt x="4154106" y="2988677"/>
-                  </a:lnTo>
-                  <a:lnTo>
-                    <a:pt x="4082483" y="2966877"/>
-                  </a:lnTo>
-                  <a:lnTo>
-                    <a:pt x="4010861" y="2944117"/>
-                  </a:lnTo>
-                  <a:lnTo>
-                    <a:pt x="3939238" y="2920355"/>
-                  </a:lnTo>
-                  <a:lnTo>
-                    <a:pt x="3867616" y="2895547"/>
-                  </a:lnTo>
-                  <a:lnTo>
-                    <a:pt x="3795993" y="2869646"/>
-                  </a:lnTo>
-                  <a:lnTo>
-                    <a:pt x="3724371" y="2842605"/>
-                  </a:lnTo>
-                  <a:lnTo>
-                    <a:pt x="3652748" y="2814373"/>
-                  </a:lnTo>
-                  <a:lnTo>
-                    <a:pt x="3581126" y="2784897"/>
-                  </a:lnTo>
-                  <a:lnTo>
-                    <a:pt x="3509503" y="2754124"/>
-                  </a:lnTo>
-                  <a:lnTo>
-                    <a:pt x="3437881" y="2721996"/>
-                  </a:lnTo>
-                  <a:lnTo>
-                    <a:pt x="3366258" y="2688453"/>
-                  </a:lnTo>
-                  <a:lnTo>
-                    <a:pt x="3294636" y="2654181"/>
-                  </a:lnTo>
-                  <a:lnTo>
-                    <a:pt x="3223013" y="2649889"/>
-                  </a:lnTo>
-                  <a:lnTo>
-                    <a:pt x="3151391" y="2645574"/>
-                  </a:lnTo>
-                  <a:lnTo>
-                    <a:pt x="3079768" y="2641237"/>
-                  </a:lnTo>
-                  <a:lnTo>
-                    <a:pt x="3008146" y="2636877"/>
-                  </a:lnTo>
-                  <a:lnTo>
-                    <a:pt x="2936523" y="2632495"/>
-                  </a:lnTo>
-                  <a:lnTo>
-                    <a:pt x="2864901" y="2628090"/>
-                  </a:lnTo>
-                  <a:lnTo>
-                    <a:pt x="2793278" y="2623663"/>
-                  </a:lnTo>
-                  <a:lnTo>
-                    <a:pt x="2721655" y="2619212"/>
-                  </a:lnTo>
-                  <a:lnTo>
-                    <a:pt x="2650033" y="2614739"/>
-                  </a:lnTo>
-                  <a:lnTo>
-                    <a:pt x="2578410" y="2610242"/>
-                  </a:lnTo>
-                  <a:lnTo>
-                    <a:pt x="2506788" y="2605722"/>
-                  </a:lnTo>
-                  <a:lnTo>
-                    <a:pt x="2435165" y="2601179"/>
-                  </a:lnTo>
-                  <a:lnTo>
-                    <a:pt x="2363543" y="2596612"/>
-                  </a:lnTo>
-                  <a:lnTo>
-                    <a:pt x="2291920" y="2592022"/>
-                  </a:lnTo>
-                  <a:lnTo>
-                    <a:pt x="2220298" y="2587408"/>
-                  </a:lnTo>
-                  <a:lnTo>
-                    <a:pt x="2148675" y="2582770"/>
-                  </a:lnTo>
-                  <a:lnTo>
-                    <a:pt x="2077053" y="2578108"/>
-                  </a:lnTo>
-                  <a:lnTo>
-                    <a:pt x="2005430" y="2573421"/>
-                  </a:lnTo>
-                  <a:lnTo>
-                    <a:pt x="1933808" y="2568711"/>
-                  </a:lnTo>
-                  <a:lnTo>
-                    <a:pt x="1862185" y="2563976"/>
-                  </a:lnTo>
-                  <a:lnTo>
-                    <a:pt x="1790563" y="2559217"/>
-                  </a:lnTo>
-                  <a:lnTo>
-                    <a:pt x="1718940" y="2554433"/>
-                  </a:lnTo>
-                  <a:lnTo>
-                    <a:pt x="1647318" y="2549624"/>
-                  </a:lnTo>
-                  <a:lnTo>
-                    <a:pt x="1575695" y="2544791"/>
-                  </a:lnTo>
-                  <a:lnTo>
-                    <a:pt x="1504073" y="2539932"/>
-                  </a:lnTo>
-                  <a:lnTo>
-                    <a:pt x="1432450" y="2535048"/>
-                  </a:lnTo>
-                  <a:lnTo>
-                    <a:pt x="1360827" y="2530139"/>
-                  </a:lnTo>
-                  <a:lnTo>
-                    <a:pt x="1289205" y="2525205"/>
-                  </a:lnTo>
-                  <a:lnTo>
-                    <a:pt x="1217582" y="2520245"/>
-                  </a:lnTo>
-                  <a:lnTo>
-                    <a:pt x="1145960" y="2515259"/>
-                  </a:lnTo>
-                  <a:lnTo>
-                    <a:pt x="1074337" y="2510248"/>
-                  </a:lnTo>
-                  <a:lnTo>
-                    <a:pt x="1002715" y="2505211"/>
-                  </a:lnTo>
-                  <a:lnTo>
-                    <a:pt x="931092" y="2500147"/>
-                  </a:lnTo>
-                  <a:lnTo>
-                    <a:pt x="859470" y="2495058"/>
-                  </a:lnTo>
-                  <a:lnTo>
-                    <a:pt x="787847" y="2489942"/>
-                  </a:lnTo>
-                  <a:lnTo>
-                    <a:pt x="716225" y="2484799"/>
-                  </a:lnTo>
-                  <a:lnTo>
-                    <a:pt x="644602" y="2479630"/>
-                  </a:lnTo>
-                  <a:lnTo>
-                    <a:pt x="572980" y="2474435"/>
-                  </a:lnTo>
-                  <a:lnTo>
-                    <a:pt x="501357" y="2469212"/>
-                  </a:lnTo>
-                  <a:lnTo>
-                    <a:pt x="429735" y="2463962"/>
-                  </a:lnTo>
-                  <a:lnTo>
-                    <a:pt x="358112" y="2458685"/>
-                  </a:lnTo>
-                  <a:lnTo>
-                    <a:pt x="286490" y="2453381"/>
-                  </a:lnTo>
-                  <a:lnTo>
-                    <a:pt x="214867" y="2448050"/>
-                  </a:lnTo>
-                  <a:lnTo>
-                    <a:pt x="143245" y="2442691"/>
-                  </a:lnTo>
-                  <a:lnTo>
-                    <a:pt x="71622" y="2437304"/>
-                  </a:lnTo>
-                  <a:lnTo>
-                    <a:pt x="0" y="2431889"/>
+                    <a:pt x="0" y="0"/>
+                  </a:lnTo>
+                  <a:lnTo>
+                    <a:pt x="0" y="0"/>
+                  </a:lnTo>
+                </a:path>
+              </a:pathLst>
+            </a:custGeom>
+            <a:ln w="13550" cap="flat">
+              <a:solidFill>
+                <a:srgbClr val="EBEBEB">
+                  <a:alpha val="100000"/>
+                </a:srgbClr>
+              </a:solidFill>
+              <a:prstDash val="solid"/>
+              <a:round/>
+            </a:ln>
+          </p:spPr>
+          <p:txBody>
+            <a:bodyPr/>
+            <a:lstStyle/>
+            <a:p/>
+          </p:txBody>
+        </p:sp>
+        <p:sp>
+          <p:nvSpPr>
+            <p:cNvPr id="21" name="pg21"/>
+            <p:cNvSpPr/>
+            <p:nvPr/>
+          </p:nvSpPr>
+          <p:spPr>
+            <a:xfrm>
+              <a:off x="1235312" y="2143092"/>
+              <a:ext cx="6964104" cy="1226672"/>
+            </a:xfrm>
+            <a:custGeom>
+              <a:avLst/>
+              <a:pathLst>
+                <a:path w="6964104" h="1226672">
+                  <a:moveTo>
+                    <a:pt x="895152" y="0"/>
+                  </a:moveTo>
+                  <a:lnTo>
+                    <a:pt x="914478" y="15027"/>
+                  </a:lnTo>
+                  <a:lnTo>
+                    <a:pt x="984822" y="67418"/>
+                  </a:lnTo>
+                  <a:lnTo>
+                    <a:pt x="1055167" y="117599"/>
+                  </a:lnTo>
+                  <a:lnTo>
+                    <a:pt x="1125511" y="165664"/>
+                  </a:lnTo>
+                  <a:lnTo>
+                    <a:pt x="1195856" y="211701"/>
+                  </a:lnTo>
+                  <a:lnTo>
+                    <a:pt x="1266200" y="255797"/>
+                  </a:lnTo>
+                  <a:lnTo>
+                    <a:pt x="1336545" y="298033"/>
+                  </a:lnTo>
+                  <a:lnTo>
+                    <a:pt x="1406889" y="338488"/>
+                  </a:lnTo>
+                  <a:lnTo>
+                    <a:pt x="1477234" y="377236"/>
+                  </a:lnTo>
+                  <a:lnTo>
+                    <a:pt x="1547578" y="414350"/>
+                  </a:lnTo>
+                  <a:lnTo>
+                    <a:pt x="1617923" y="449899"/>
+                  </a:lnTo>
+                  <a:lnTo>
+                    <a:pt x="1688267" y="483948"/>
+                  </a:lnTo>
+                  <a:lnTo>
+                    <a:pt x="1758612" y="516562"/>
+                  </a:lnTo>
+                  <a:lnTo>
+                    <a:pt x="1828956" y="547799"/>
+                  </a:lnTo>
+                  <a:lnTo>
+                    <a:pt x="1899301" y="577720"/>
+                  </a:lnTo>
+                  <a:lnTo>
+                    <a:pt x="1969645" y="606378"/>
+                  </a:lnTo>
+                  <a:lnTo>
+                    <a:pt x="2039990" y="633828"/>
+                  </a:lnTo>
+                  <a:lnTo>
+                    <a:pt x="2110334" y="660119"/>
+                  </a:lnTo>
+                  <a:lnTo>
+                    <a:pt x="2180679" y="685302"/>
+                  </a:lnTo>
+                  <a:lnTo>
+                    <a:pt x="2251023" y="709423"/>
+                  </a:lnTo>
+                  <a:lnTo>
+                    <a:pt x="2321368" y="732527"/>
+                  </a:lnTo>
+                  <a:lnTo>
+                    <a:pt x="2391712" y="754656"/>
+                  </a:lnTo>
+                  <a:lnTo>
+                    <a:pt x="2462057" y="775852"/>
+                  </a:lnTo>
+                  <a:lnTo>
+                    <a:pt x="2532401" y="796153"/>
+                  </a:lnTo>
+                  <a:lnTo>
+                    <a:pt x="2602746" y="815599"/>
+                  </a:lnTo>
+                  <a:lnTo>
+                    <a:pt x="2673090" y="834224"/>
+                  </a:lnTo>
+                  <a:lnTo>
+                    <a:pt x="2743435" y="852064"/>
+                  </a:lnTo>
+                  <a:lnTo>
+                    <a:pt x="2813779" y="869151"/>
+                  </a:lnTo>
+                  <a:lnTo>
+                    <a:pt x="2884124" y="885518"/>
+                  </a:lnTo>
+                  <a:lnTo>
+                    <a:pt x="2954468" y="901195"/>
+                  </a:lnTo>
+                  <a:lnTo>
+                    <a:pt x="3024813" y="916210"/>
+                  </a:lnTo>
+                  <a:lnTo>
+                    <a:pt x="3095157" y="930592"/>
+                  </a:lnTo>
+                  <a:lnTo>
+                    <a:pt x="3165502" y="944367"/>
+                  </a:lnTo>
+                  <a:lnTo>
+                    <a:pt x="3235846" y="957561"/>
+                  </a:lnTo>
+                  <a:lnTo>
+                    <a:pt x="3306191" y="959372"/>
+                  </a:lnTo>
+                  <a:lnTo>
+                    <a:pt x="3376535" y="960905"/>
+                  </a:lnTo>
+                  <a:lnTo>
+                    <a:pt x="3446880" y="962431"/>
+                  </a:lnTo>
+                  <a:lnTo>
+                    <a:pt x="3517224" y="963948"/>
+                  </a:lnTo>
+                  <a:lnTo>
+                    <a:pt x="3587569" y="965458"/>
+                  </a:lnTo>
+                  <a:lnTo>
+                    <a:pt x="3657913" y="966960"/>
+                  </a:lnTo>
+                  <a:lnTo>
+                    <a:pt x="3728257" y="968454"/>
+                  </a:lnTo>
+                  <a:lnTo>
+                    <a:pt x="3798602" y="969940"/>
+                  </a:lnTo>
+                  <a:lnTo>
+                    <a:pt x="3868946" y="971419"/>
+                  </a:lnTo>
+                  <a:lnTo>
+                    <a:pt x="3939291" y="972890"/>
+                  </a:lnTo>
+                  <a:lnTo>
+                    <a:pt x="4009635" y="974354"/>
+                  </a:lnTo>
+                  <a:lnTo>
+                    <a:pt x="4079980" y="975810"/>
+                  </a:lnTo>
+                  <a:lnTo>
+                    <a:pt x="4150324" y="977258"/>
+                  </a:lnTo>
+                  <a:lnTo>
+                    <a:pt x="4220669" y="978699"/>
+                  </a:lnTo>
+                  <a:lnTo>
+                    <a:pt x="4291013" y="980133"/>
+                  </a:lnTo>
+                  <a:lnTo>
+                    <a:pt x="4361358" y="981559"/>
+                  </a:lnTo>
+                  <a:lnTo>
+                    <a:pt x="4431702" y="982978"/>
+                  </a:lnTo>
+                  <a:lnTo>
+                    <a:pt x="4502047" y="984390"/>
+                  </a:lnTo>
+                  <a:lnTo>
+                    <a:pt x="4572391" y="985794"/>
+                  </a:lnTo>
+                  <a:lnTo>
+                    <a:pt x="4642736" y="987192"/>
+                  </a:lnTo>
+                  <a:lnTo>
+                    <a:pt x="4713080" y="988582"/>
+                  </a:lnTo>
+                  <a:lnTo>
+                    <a:pt x="4783425" y="989964"/>
+                  </a:lnTo>
+                  <a:lnTo>
+                    <a:pt x="4853769" y="991340"/>
+                  </a:lnTo>
+                  <a:lnTo>
+                    <a:pt x="4924114" y="992709"/>
+                  </a:lnTo>
+                  <a:lnTo>
+                    <a:pt x="4994458" y="994070"/>
+                  </a:lnTo>
+                  <a:lnTo>
+                    <a:pt x="5064803" y="995425"/>
+                  </a:lnTo>
+                  <a:lnTo>
+                    <a:pt x="5135147" y="996772"/>
+                  </a:lnTo>
+                  <a:lnTo>
+                    <a:pt x="5205492" y="998113"/>
+                  </a:lnTo>
+                  <a:lnTo>
+                    <a:pt x="5275836" y="999447"/>
+                  </a:lnTo>
+                  <a:lnTo>
+                    <a:pt x="5346181" y="1000774"/>
+                  </a:lnTo>
+                  <a:lnTo>
+                    <a:pt x="5416525" y="1002094"/>
+                  </a:lnTo>
+                  <a:lnTo>
+                    <a:pt x="5486870" y="1003407"/>
+                  </a:lnTo>
+                  <a:lnTo>
+                    <a:pt x="5557214" y="1004713"/>
+                  </a:lnTo>
+                  <a:lnTo>
+                    <a:pt x="5627559" y="1006013"/>
+                  </a:lnTo>
+                  <a:lnTo>
+                    <a:pt x="5697903" y="1007306"/>
+                  </a:lnTo>
+                  <a:lnTo>
+                    <a:pt x="5768248" y="1008593"/>
+                  </a:lnTo>
+                  <a:lnTo>
+                    <a:pt x="5838592" y="1009872"/>
+                  </a:lnTo>
+                  <a:lnTo>
+                    <a:pt x="5908937" y="1011146"/>
+                  </a:lnTo>
+                  <a:lnTo>
+                    <a:pt x="5979281" y="1012412"/>
+                  </a:lnTo>
+                  <a:lnTo>
+                    <a:pt x="6049626" y="1013672"/>
+                  </a:lnTo>
+                  <a:lnTo>
+                    <a:pt x="6119970" y="1014926"/>
+                  </a:lnTo>
+                  <a:lnTo>
+                    <a:pt x="6190315" y="1016173"/>
+                  </a:lnTo>
+                  <a:lnTo>
+                    <a:pt x="6260659" y="1017414"/>
+                  </a:lnTo>
+                  <a:lnTo>
+                    <a:pt x="6331004" y="1018648"/>
+                  </a:lnTo>
+                  <a:lnTo>
+                    <a:pt x="6401348" y="1019876"/>
+                  </a:lnTo>
+                  <a:lnTo>
+                    <a:pt x="6471693" y="1021098"/>
+                  </a:lnTo>
+                  <a:lnTo>
+                    <a:pt x="6542037" y="1022314"/>
+                  </a:lnTo>
+                  <a:lnTo>
+                    <a:pt x="6612382" y="1023523"/>
+                  </a:lnTo>
+                  <a:lnTo>
+                    <a:pt x="6682726" y="1024726"/>
+                  </a:lnTo>
+                  <a:lnTo>
+                    <a:pt x="6753071" y="1025922"/>
+                  </a:lnTo>
+                  <a:lnTo>
+                    <a:pt x="6823415" y="1027113"/>
+                  </a:lnTo>
+                  <a:lnTo>
+                    <a:pt x="6893760" y="1028297"/>
+                  </a:lnTo>
+                  <a:lnTo>
+                    <a:pt x="6964104" y="1029476"/>
+                  </a:lnTo>
+                  <a:lnTo>
+                    <a:pt x="6964104" y="1226672"/>
+                  </a:lnTo>
+                  <a:lnTo>
+                    <a:pt x="6893760" y="1225328"/>
+                  </a:lnTo>
+                  <a:lnTo>
+                    <a:pt x="6823415" y="1223924"/>
+                  </a:lnTo>
+                  <a:lnTo>
+                    <a:pt x="6753071" y="1222459"/>
+                  </a:lnTo>
+                  <a:lnTo>
+                    <a:pt x="6682726" y="1220929"/>
+                  </a:lnTo>
+                  <a:lnTo>
+                    <a:pt x="6612382" y="1219331"/>
+                  </a:lnTo>
+                  <a:lnTo>
+                    <a:pt x="6542037" y="1217664"/>
+                  </a:lnTo>
+                  <a:lnTo>
+                    <a:pt x="6471693" y="1215923"/>
+                  </a:lnTo>
+                  <a:lnTo>
+                    <a:pt x="6401348" y="1214105"/>
+                  </a:lnTo>
+                  <a:lnTo>
+                    <a:pt x="6331004" y="1212208"/>
+                  </a:lnTo>
+                  <a:lnTo>
+                    <a:pt x="6260659" y="1210226"/>
+                  </a:lnTo>
+                  <a:lnTo>
+                    <a:pt x="6190315" y="1208158"/>
+                  </a:lnTo>
+                  <a:lnTo>
+                    <a:pt x="6119970" y="1205998"/>
+                  </a:lnTo>
+                  <a:lnTo>
+                    <a:pt x="6049626" y="1203743"/>
+                  </a:lnTo>
+                  <a:lnTo>
+                    <a:pt x="5979281" y="1201389"/>
+                  </a:lnTo>
+                  <a:lnTo>
+                    <a:pt x="5908937" y="1198932"/>
+                  </a:lnTo>
+                  <a:lnTo>
+                    <a:pt x="5838592" y="1196366"/>
+                  </a:lnTo>
+                  <a:lnTo>
+                    <a:pt x="5768248" y="1193687"/>
+                  </a:lnTo>
+                  <a:lnTo>
+                    <a:pt x="5697903" y="1190890"/>
+                  </a:lnTo>
+                  <a:lnTo>
+                    <a:pt x="5627559" y="1187970"/>
+                  </a:lnTo>
+                  <a:lnTo>
+                    <a:pt x="5557214" y="1184922"/>
+                  </a:lnTo>
+                  <a:lnTo>
+                    <a:pt x="5486870" y="1181739"/>
+                  </a:lnTo>
+                  <a:lnTo>
+                    <a:pt x="5416525" y="1178416"/>
+                  </a:lnTo>
+                  <a:lnTo>
+                    <a:pt x="5346181" y="1174947"/>
+                  </a:lnTo>
+                  <a:lnTo>
+                    <a:pt x="5275836" y="1171325"/>
+                  </a:lnTo>
+                  <a:lnTo>
+                    <a:pt x="5205492" y="1167543"/>
+                  </a:lnTo>
+                  <a:lnTo>
+                    <a:pt x="5135147" y="1163595"/>
+                  </a:lnTo>
+                  <a:lnTo>
+                    <a:pt x="5064803" y="1159473"/>
+                  </a:lnTo>
+                  <a:lnTo>
+                    <a:pt x="4994458" y="1155170"/>
+                  </a:lnTo>
+                  <a:lnTo>
+                    <a:pt x="4924114" y="1150677"/>
+                  </a:lnTo>
+                  <a:lnTo>
+                    <a:pt x="4853769" y="1145987"/>
+                  </a:lnTo>
+                  <a:lnTo>
+                    <a:pt x="4783425" y="1141089"/>
+                  </a:lnTo>
+                  <a:lnTo>
+                    <a:pt x="4713080" y="1135976"/>
+                  </a:lnTo>
+                  <a:lnTo>
+                    <a:pt x="4642736" y="1130638"/>
+                  </a:lnTo>
+                  <a:lnTo>
+                    <a:pt x="4572391" y="1125065"/>
+                  </a:lnTo>
+                  <a:lnTo>
+                    <a:pt x="4502047" y="1119247"/>
+                  </a:lnTo>
+                  <a:lnTo>
+                    <a:pt x="4431702" y="1113172"/>
+                  </a:lnTo>
+                  <a:lnTo>
+                    <a:pt x="4361358" y="1106830"/>
+                  </a:lnTo>
+                  <a:lnTo>
+                    <a:pt x="4291013" y="1100208"/>
+                  </a:lnTo>
+                  <a:lnTo>
+                    <a:pt x="4220669" y="1093295"/>
+                  </a:lnTo>
+                  <a:lnTo>
+                    <a:pt x="4150324" y="1086078"/>
+                  </a:lnTo>
+                  <a:lnTo>
+                    <a:pt x="4079980" y="1078543"/>
+                  </a:lnTo>
+                  <a:lnTo>
+                    <a:pt x="4009635" y="1070676"/>
+                  </a:lnTo>
+                  <a:lnTo>
+                    <a:pt x="3939291" y="1062462"/>
+                  </a:lnTo>
+                  <a:lnTo>
+                    <a:pt x="3868946" y="1053887"/>
+                  </a:lnTo>
+                  <a:lnTo>
+                    <a:pt x="3798602" y="1044934"/>
+                  </a:lnTo>
+                  <a:lnTo>
+                    <a:pt x="3728257" y="1035587"/>
+                  </a:lnTo>
+                  <a:lnTo>
+                    <a:pt x="3657913" y="1025829"/>
+                  </a:lnTo>
+                  <a:lnTo>
+                    <a:pt x="3587569" y="1015641"/>
+                  </a:lnTo>
+                  <a:lnTo>
+                    <a:pt x="3517224" y="1005004"/>
+                  </a:lnTo>
+                  <a:lnTo>
+                    <a:pt x="3446880" y="993898"/>
+                  </a:lnTo>
+                  <a:lnTo>
+                    <a:pt x="3376535" y="982304"/>
+                  </a:lnTo>
+                  <a:lnTo>
+                    <a:pt x="3306191" y="970199"/>
+                  </a:lnTo>
+                  <a:lnTo>
+                    <a:pt x="3235846" y="957831"/>
+                  </a:lnTo>
+                  <a:lnTo>
+                    <a:pt x="3165502" y="956282"/>
+                  </a:lnTo>
+                  <a:lnTo>
+                    <a:pt x="3095157" y="954725"/>
+                  </a:lnTo>
+                  <a:lnTo>
+                    <a:pt x="3024813" y="953160"/>
+                  </a:lnTo>
+                  <a:lnTo>
+                    <a:pt x="2954468" y="951587"/>
+                  </a:lnTo>
+                  <a:lnTo>
+                    <a:pt x="2884124" y="950005"/>
+                  </a:lnTo>
+                  <a:lnTo>
+                    <a:pt x="2813779" y="948416"/>
+                  </a:lnTo>
+                  <a:lnTo>
+                    <a:pt x="2743435" y="946818"/>
+                  </a:lnTo>
+                  <a:lnTo>
+                    <a:pt x="2673090" y="945212"/>
+                  </a:lnTo>
+                  <a:lnTo>
+                    <a:pt x="2602746" y="943597"/>
+                  </a:lnTo>
+                  <a:lnTo>
+                    <a:pt x="2532401" y="941975"/>
+                  </a:lnTo>
+                  <a:lnTo>
+                    <a:pt x="2462057" y="940344"/>
+                  </a:lnTo>
+                  <a:lnTo>
+                    <a:pt x="2391712" y="938704"/>
+                  </a:lnTo>
+                  <a:lnTo>
+                    <a:pt x="2321368" y="937056"/>
+                  </a:lnTo>
+                  <a:lnTo>
+                    <a:pt x="2251023" y="935399"/>
+                  </a:lnTo>
+                  <a:lnTo>
+                    <a:pt x="2180679" y="933734"/>
+                  </a:lnTo>
+                  <a:lnTo>
+                    <a:pt x="2110334" y="932060"/>
+                  </a:lnTo>
+                  <a:lnTo>
+                    <a:pt x="2039990" y="930378"/>
+                  </a:lnTo>
+                  <a:lnTo>
+                    <a:pt x="1969645" y="928687"/>
+                  </a:lnTo>
+                  <a:lnTo>
+                    <a:pt x="1899301" y="926987"/>
+                  </a:lnTo>
+                  <a:lnTo>
+                    <a:pt x="1828956" y="925278"/>
+                  </a:lnTo>
+                  <a:lnTo>
+                    <a:pt x="1758612" y="923561"/>
+                  </a:lnTo>
+                  <a:lnTo>
+                    <a:pt x="1688267" y="921834"/>
+                  </a:lnTo>
+                  <a:lnTo>
+                    <a:pt x="1617923" y="920099"/>
+                  </a:lnTo>
+                  <a:lnTo>
+                    <a:pt x="1547578" y="918355"/>
+                  </a:lnTo>
+                  <a:lnTo>
+                    <a:pt x="1477234" y="916601"/>
+                  </a:lnTo>
+                  <a:lnTo>
+                    <a:pt x="1406889" y="914839"/>
+                  </a:lnTo>
+                  <a:lnTo>
+                    <a:pt x="1336545" y="913067"/>
+                  </a:lnTo>
+                  <a:lnTo>
+                    <a:pt x="1266200" y="911287"/>
+                  </a:lnTo>
+                  <a:lnTo>
+                    <a:pt x="1195856" y="909497"/>
+                  </a:lnTo>
+                  <a:lnTo>
+                    <a:pt x="1125511" y="907698"/>
+                  </a:lnTo>
+                  <a:lnTo>
+                    <a:pt x="1055167" y="905889"/>
+                  </a:lnTo>
+                  <a:lnTo>
+                    <a:pt x="984822" y="904071"/>
+                  </a:lnTo>
+                  <a:lnTo>
+                    <a:pt x="914478" y="902244"/>
+                  </a:lnTo>
+                  <a:lnTo>
+                    <a:pt x="844133" y="900407"/>
+                  </a:lnTo>
+                  <a:lnTo>
+                    <a:pt x="773789" y="898561"/>
+                  </a:lnTo>
+                  <a:lnTo>
+                    <a:pt x="703444" y="896705"/>
+                  </a:lnTo>
+                  <a:lnTo>
+                    <a:pt x="633100" y="894840"/>
+                  </a:lnTo>
+                  <a:lnTo>
+                    <a:pt x="562755" y="892965"/>
+                  </a:lnTo>
+                  <a:lnTo>
+                    <a:pt x="492411" y="891080"/>
+                  </a:lnTo>
+                  <a:lnTo>
+                    <a:pt x="422066" y="889186"/>
+                  </a:lnTo>
+                  <a:lnTo>
+                    <a:pt x="351722" y="887281"/>
+                  </a:lnTo>
+                  <a:lnTo>
+                    <a:pt x="281377" y="885367"/>
+                  </a:lnTo>
+                  <a:lnTo>
+                    <a:pt x="211033" y="883443"/>
+                  </a:lnTo>
+                  <a:lnTo>
+                    <a:pt x="140688" y="881509"/>
+                  </a:lnTo>
+                  <a:lnTo>
+                    <a:pt x="70344" y="879565"/>
+                  </a:lnTo>
+                  <a:lnTo>
+                    <a:pt x="0" y="877611"/>
                   </a:lnTo>
                   <a:close/>
                 </a:path>
@@ -3548,607 +3583,282 @@
         </p:sp>
         <p:sp>
           <p:nvSpPr>
-            <p:cNvPr id="21" name="pl21"/>
-            <p:cNvSpPr/>
-            <p:nvPr/>
-          </p:nvSpPr>
-          <p:spPr>
-            <a:xfrm>
-              <a:off x="2083464" y="2073503"/>
-              <a:ext cx="6179214" cy="2852710"/>
-            </a:xfrm>
-            <a:custGeom>
-              <a:avLst/>
-              <a:pathLst>
-                <a:path w="6179214" h="2852710">
-                  <a:moveTo>
-                    <a:pt x="0" y="0"/>
-                  </a:moveTo>
-                  <a:lnTo>
-                    <a:pt x="19677" y="41641"/>
-                  </a:lnTo>
-                  <a:lnTo>
-                    <a:pt x="91299" y="186818"/>
-                  </a:lnTo>
-                  <a:lnTo>
-                    <a:pt x="162922" y="325872"/>
-                  </a:lnTo>
-                  <a:lnTo>
-                    <a:pt x="234545" y="459061"/>
-                  </a:lnTo>
-                  <a:lnTo>
-                    <a:pt x="306167" y="586632"/>
-                  </a:lnTo>
-                  <a:lnTo>
-                    <a:pt x="377790" y="708823"/>
-                  </a:lnTo>
-                  <a:lnTo>
-                    <a:pt x="449412" y="825860"/>
-                  </a:lnTo>
-                  <a:lnTo>
-                    <a:pt x="521035" y="937961"/>
-                  </a:lnTo>
-                  <a:lnTo>
-                    <a:pt x="592657" y="1045334"/>
-                  </a:lnTo>
-                  <a:lnTo>
-                    <a:pt x="664280" y="1148178"/>
-                  </a:lnTo>
-                  <a:lnTo>
-                    <a:pt x="735902" y="1246685"/>
-                  </a:lnTo>
-                  <a:lnTo>
-                    <a:pt x="807525" y="1341037"/>
-                  </a:lnTo>
-                  <a:lnTo>
-                    <a:pt x="879147" y="1431409"/>
-                  </a:lnTo>
-                  <a:lnTo>
-                    <a:pt x="950770" y="1517970"/>
-                  </a:lnTo>
-                  <a:lnTo>
-                    <a:pt x="1022392" y="1600880"/>
-                  </a:lnTo>
-                  <a:lnTo>
-                    <a:pt x="1094015" y="1680293"/>
-                  </a:lnTo>
-                  <a:lnTo>
-                    <a:pt x="1165637" y="1756357"/>
-                  </a:lnTo>
-                  <a:lnTo>
-                    <a:pt x="1237260" y="1829213"/>
-                  </a:lnTo>
-                  <a:lnTo>
-                    <a:pt x="1308882" y="1898995"/>
-                  </a:lnTo>
-                  <a:lnTo>
-                    <a:pt x="1380505" y="1965835"/>
-                  </a:lnTo>
-                  <a:lnTo>
-                    <a:pt x="1452127" y="2029856"/>
-                  </a:lnTo>
-                  <a:lnTo>
-                    <a:pt x="1523750" y="2091176"/>
-                  </a:lnTo>
-                  <a:lnTo>
-                    <a:pt x="1595373" y="2149910"/>
-                  </a:lnTo>
-                  <a:lnTo>
-                    <a:pt x="1666995" y="2206167"/>
-                  </a:lnTo>
-                  <a:lnTo>
-                    <a:pt x="1738618" y="2260051"/>
-                  </a:lnTo>
-                  <a:lnTo>
-                    <a:pt x="1810240" y="2311662"/>
-                  </a:lnTo>
-                  <a:lnTo>
-                    <a:pt x="1881863" y="2361097"/>
-                  </a:lnTo>
-                  <a:lnTo>
-                    <a:pt x="1953485" y="2408447"/>
-                  </a:lnTo>
-                  <a:lnTo>
-                    <a:pt x="2025108" y="2453799"/>
-                  </a:lnTo>
-                  <a:lnTo>
-                    <a:pt x="2096730" y="2497239"/>
-                  </a:lnTo>
-                  <a:lnTo>
-                    <a:pt x="2168353" y="2538847"/>
-                  </a:lnTo>
-                  <a:lnTo>
-                    <a:pt x="2239975" y="2578700"/>
-                  </a:lnTo>
-                  <a:lnTo>
-                    <a:pt x="2311598" y="2616871"/>
-                  </a:lnTo>
-                  <a:lnTo>
-                    <a:pt x="2383220" y="2653433"/>
-                  </a:lnTo>
-                  <a:lnTo>
-                    <a:pt x="2454843" y="2658452"/>
-                  </a:lnTo>
-                  <a:lnTo>
-                    <a:pt x="2526465" y="2662700"/>
-                  </a:lnTo>
-                  <a:lnTo>
-                    <a:pt x="2598088" y="2666927"/>
-                  </a:lnTo>
-                  <a:lnTo>
-                    <a:pt x="2669710" y="2671132"/>
-                  </a:lnTo>
-                  <a:lnTo>
-                    <a:pt x="2741333" y="2675315"/>
-                  </a:lnTo>
-                  <a:lnTo>
-                    <a:pt x="2812955" y="2679476"/>
-                  </a:lnTo>
-                  <a:lnTo>
-                    <a:pt x="2884578" y="2683617"/>
-                  </a:lnTo>
-                  <a:lnTo>
-                    <a:pt x="2956201" y="2687736"/>
-                  </a:lnTo>
-                  <a:lnTo>
-                    <a:pt x="3027823" y="2691833"/>
-                  </a:lnTo>
-                  <a:lnTo>
-                    <a:pt x="3099446" y="2695910"/>
-                  </a:lnTo>
-                  <a:lnTo>
-                    <a:pt x="3171068" y="2699966"/>
-                  </a:lnTo>
-                  <a:lnTo>
-                    <a:pt x="3242691" y="2704000"/>
-                  </a:lnTo>
-                  <a:lnTo>
-                    <a:pt x="3314313" y="2708014"/>
-                  </a:lnTo>
-                  <a:lnTo>
-                    <a:pt x="3385936" y="2712008"/>
-                  </a:lnTo>
-                  <a:lnTo>
-                    <a:pt x="3457558" y="2715980"/>
-                  </a:lnTo>
-                  <a:lnTo>
-                    <a:pt x="3529181" y="2719933"/>
-                  </a:lnTo>
-                  <a:lnTo>
-                    <a:pt x="3600803" y="2723865"/>
-                  </a:lnTo>
-                  <a:lnTo>
-                    <a:pt x="3672426" y="2727776"/>
-                  </a:lnTo>
-                  <a:lnTo>
-                    <a:pt x="3744048" y="2731668"/>
-                  </a:lnTo>
-                  <a:lnTo>
-                    <a:pt x="3815671" y="2735540"/>
-                  </a:lnTo>
-                  <a:lnTo>
-                    <a:pt x="3887293" y="2739391"/>
-                  </a:lnTo>
-                  <a:lnTo>
-                    <a:pt x="3958916" y="2743223"/>
-                  </a:lnTo>
-                  <a:lnTo>
-                    <a:pt x="4030538" y="2747035"/>
-                  </a:lnTo>
-                  <a:lnTo>
-                    <a:pt x="4102161" y="2750828"/>
-                  </a:lnTo>
-                  <a:lnTo>
-                    <a:pt x="4173783" y="2754600"/>
-                  </a:lnTo>
-                  <a:lnTo>
-                    <a:pt x="4245406" y="2758354"/>
-                  </a:lnTo>
-                  <a:lnTo>
-                    <a:pt x="4317029" y="2762088"/>
-                  </a:lnTo>
-                  <a:lnTo>
-                    <a:pt x="4388651" y="2765803"/>
-                  </a:lnTo>
-                  <a:lnTo>
-                    <a:pt x="4460274" y="2769499"/>
-                  </a:lnTo>
-                  <a:lnTo>
-                    <a:pt x="4531896" y="2773176"/>
-                  </a:lnTo>
-                  <a:lnTo>
-                    <a:pt x="4603519" y="2776834"/>
-                  </a:lnTo>
-                  <a:lnTo>
-                    <a:pt x="4675141" y="2780473"/>
-                  </a:lnTo>
-                  <a:lnTo>
-                    <a:pt x="4746764" y="2784093"/>
-                  </a:lnTo>
-                  <a:lnTo>
-                    <a:pt x="4818386" y="2787695"/>
-                  </a:lnTo>
-                  <a:lnTo>
-                    <a:pt x="4890009" y="2791278"/>
-                  </a:lnTo>
-                  <a:lnTo>
-                    <a:pt x="4961631" y="2794843"/>
-                  </a:lnTo>
-                  <a:lnTo>
-                    <a:pt x="5033254" y="2798389"/>
-                  </a:lnTo>
-                  <a:lnTo>
-                    <a:pt x="5104876" y="2801917"/>
-                  </a:lnTo>
-                  <a:lnTo>
-                    <a:pt x="5176499" y="2805427"/>
-                  </a:lnTo>
-                  <a:lnTo>
-                    <a:pt x="5248121" y="2808919"/>
-                  </a:lnTo>
-                  <a:lnTo>
-                    <a:pt x="5319744" y="2812393"/>
-                  </a:lnTo>
-                  <a:lnTo>
-                    <a:pt x="5391366" y="2815849"/>
-                  </a:lnTo>
-                  <a:lnTo>
-                    <a:pt x="5462989" y="2819287"/>
-                  </a:lnTo>
-                  <a:lnTo>
-                    <a:pt x="5534611" y="2822707"/>
-                  </a:lnTo>
-                  <a:lnTo>
-                    <a:pt x="5606234" y="2826110"/>
-                  </a:lnTo>
-                  <a:lnTo>
-                    <a:pt x="5677857" y="2829496"/>
-                  </a:lnTo>
-                  <a:lnTo>
-                    <a:pt x="5749479" y="2832864"/>
-                  </a:lnTo>
-                  <a:lnTo>
-                    <a:pt x="5821102" y="2836214"/>
-                  </a:lnTo>
-                  <a:lnTo>
-                    <a:pt x="5892724" y="2839548"/>
-                  </a:lnTo>
-                  <a:lnTo>
-                    <a:pt x="5964347" y="2842864"/>
-                  </a:lnTo>
-                  <a:lnTo>
-                    <a:pt x="6035969" y="2846163"/>
-                  </a:lnTo>
-                  <a:lnTo>
-                    <a:pt x="6107592" y="2849445"/>
-                  </a:lnTo>
-                  <a:lnTo>
-                    <a:pt x="6179214" y="2852710"/>
-                  </a:lnTo>
-                </a:path>
-              </a:pathLst>
-            </a:custGeom>
-          </p:spPr>
-          <p:txBody>
-            <a:bodyPr/>
-            <a:lstStyle/>
-            <a:p/>
-          </p:txBody>
-        </p:sp>
-        <p:sp>
-          <p:nvSpPr>
             <p:cNvPr id="22" name="pl22"/>
             <p:cNvSpPr/>
             <p:nvPr/>
           </p:nvSpPr>
           <p:spPr>
             <a:xfrm>
-              <a:off x="1172049" y="4505392"/>
-              <a:ext cx="7090630" cy="967258"/>
+              <a:off x="2130464" y="2143092"/>
+              <a:ext cx="6068952" cy="1029476"/>
             </a:xfrm>
             <a:custGeom>
               <a:avLst/>
               <a:pathLst>
-                <a:path w="7090630" h="967258">
+                <a:path w="6068952" h="1029476">
                   <a:moveTo>
-                    <a:pt x="7090630" y="967258"/>
+                    <a:pt x="0" y="0"/>
                   </a:moveTo>
                   <a:lnTo>
-                    <a:pt x="7019007" y="963532"/>
-                  </a:lnTo>
-                  <a:lnTo>
-                    <a:pt x="6947385" y="959643"/>
-                  </a:lnTo>
-                  <a:lnTo>
-                    <a:pt x="6875762" y="955583"/>
-                  </a:lnTo>
-                  <a:lnTo>
-                    <a:pt x="6804139" y="951343"/>
-                  </a:lnTo>
-                  <a:lnTo>
-                    <a:pt x="6732517" y="946917"/>
-                  </a:lnTo>
-                  <a:lnTo>
-                    <a:pt x="6660894" y="942296"/>
-                  </a:lnTo>
-                  <a:lnTo>
-                    <a:pt x="6589272" y="937472"/>
-                  </a:lnTo>
-                  <a:lnTo>
-                    <a:pt x="6517649" y="932435"/>
-                  </a:lnTo>
-                  <a:lnTo>
-                    <a:pt x="6446027" y="927176"/>
-                  </a:lnTo>
-                  <a:lnTo>
-                    <a:pt x="6374404" y="921686"/>
-                  </a:lnTo>
-                  <a:lnTo>
-                    <a:pt x="6302782" y="915954"/>
-                  </a:lnTo>
-                  <a:lnTo>
-                    <a:pt x="6231159" y="909970"/>
-                  </a:lnTo>
-                  <a:lnTo>
-                    <a:pt x="6159537" y="903722"/>
-                  </a:lnTo>
-                  <a:lnTo>
-                    <a:pt x="6087914" y="897199"/>
-                  </a:lnTo>
-                  <a:lnTo>
-                    <a:pt x="6016292" y="890389"/>
-                  </a:lnTo>
-                  <a:lnTo>
-                    <a:pt x="5944669" y="883279"/>
-                  </a:lnTo>
-                  <a:lnTo>
-                    <a:pt x="5873047" y="875856"/>
-                  </a:lnTo>
-                  <a:lnTo>
-                    <a:pt x="5801424" y="868106"/>
-                  </a:lnTo>
-                  <a:lnTo>
-                    <a:pt x="5729802" y="860014"/>
-                  </a:lnTo>
-                  <a:lnTo>
-                    <a:pt x="5658179" y="851567"/>
-                  </a:lnTo>
-                  <a:lnTo>
-                    <a:pt x="5586557" y="842747"/>
-                  </a:lnTo>
-                  <a:lnTo>
-                    <a:pt x="5514934" y="833539"/>
-                  </a:lnTo>
-                  <a:lnTo>
-                    <a:pt x="5443311" y="823926"/>
-                  </a:lnTo>
-                  <a:lnTo>
-                    <a:pt x="5371689" y="813889"/>
-                  </a:lnTo>
-                  <a:lnTo>
-                    <a:pt x="5300066" y="803411"/>
-                  </a:lnTo>
-                  <a:lnTo>
-                    <a:pt x="5228444" y="792471"/>
-                  </a:lnTo>
-                  <a:lnTo>
-                    <a:pt x="5156821" y="781049"/>
-                  </a:lnTo>
-                  <a:lnTo>
-                    <a:pt x="5085199" y="769124"/>
-                  </a:lnTo>
-                  <a:lnTo>
-                    <a:pt x="5013576" y="756674"/>
-                  </a:lnTo>
-                  <a:lnTo>
-                    <a:pt x="4941954" y="743676"/>
-                  </a:lnTo>
-                  <a:lnTo>
-                    <a:pt x="4870331" y="730106"/>
-                  </a:lnTo>
-                  <a:lnTo>
-                    <a:pt x="4798709" y="715938"/>
-                  </a:lnTo>
-                  <a:lnTo>
-                    <a:pt x="4727086" y="701146"/>
-                  </a:lnTo>
-                  <a:lnTo>
-                    <a:pt x="4655464" y="685703"/>
-                  </a:lnTo>
-                  <a:lnTo>
-                    <a:pt x="4583841" y="669579"/>
-                  </a:lnTo>
-                  <a:lnTo>
-                    <a:pt x="4512219" y="652746"/>
-                  </a:lnTo>
-                  <a:lnTo>
-                    <a:pt x="4440596" y="635172"/>
-                  </a:lnTo>
-                  <a:lnTo>
-                    <a:pt x="4368974" y="616824"/>
-                  </a:lnTo>
-                  <a:lnTo>
-                    <a:pt x="4297351" y="597667"/>
-                  </a:lnTo>
-                  <a:lnTo>
-                    <a:pt x="4225729" y="577668"/>
-                  </a:lnTo>
-                  <a:lnTo>
-                    <a:pt x="4154106" y="556787"/>
-                  </a:lnTo>
-                  <a:lnTo>
-                    <a:pt x="4082483" y="534987"/>
-                  </a:lnTo>
-                  <a:lnTo>
-                    <a:pt x="4010861" y="512228"/>
-                  </a:lnTo>
-                  <a:lnTo>
-                    <a:pt x="3939238" y="488465"/>
-                  </a:lnTo>
-                  <a:lnTo>
-                    <a:pt x="3867616" y="463657"/>
-                  </a:lnTo>
-                  <a:lnTo>
-                    <a:pt x="3795993" y="437756"/>
-                  </a:lnTo>
-                  <a:lnTo>
-                    <a:pt x="3724371" y="410715"/>
-                  </a:lnTo>
-                  <a:lnTo>
-                    <a:pt x="3652748" y="382483"/>
-                  </a:lnTo>
-                  <a:lnTo>
-                    <a:pt x="3581126" y="353008"/>
-                  </a:lnTo>
-                  <a:lnTo>
-                    <a:pt x="3509503" y="322235"/>
-                  </a:lnTo>
-                  <a:lnTo>
-                    <a:pt x="3437881" y="290107"/>
-                  </a:lnTo>
-                  <a:lnTo>
-                    <a:pt x="3366258" y="256564"/>
-                  </a:lnTo>
-                  <a:lnTo>
-                    <a:pt x="3294636" y="222292"/>
-                  </a:lnTo>
-                  <a:lnTo>
-                    <a:pt x="3223013" y="217999"/>
-                  </a:lnTo>
-                  <a:lnTo>
-                    <a:pt x="3151391" y="213684"/>
-                  </a:lnTo>
-                  <a:lnTo>
-                    <a:pt x="3079768" y="209347"/>
-                  </a:lnTo>
-                  <a:lnTo>
-                    <a:pt x="3008146" y="204988"/>
-                  </a:lnTo>
-                  <a:lnTo>
-                    <a:pt x="2936523" y="200606"/>
-                  </a:lnTo>
-                  <a:lnTo>
-                    <a:pt x="2864901" y="196201"/>
-                  </a:lnTo>
-                  <a:lnTo>
-                    <a:pt x="2793278" y="191773"/>
-                  </a:lnTo>
-                  <a:lnTo>
-                    <a:pt x="2721655" y="187323"/>
-                  </a:lnTo>
-                  <a:lnTo>
-                    <a:pt x="2650033" y="182849"/>
-                  </a:lnTo>
-                  <a:lnTo>
-                    <a:pt x="2578410" y="178353"/>
-                  </a:lnTo>
-                  <a:lnTo>
-                    <a:pt x="2506788" y="173833"/>
-                  </a:lnTo>
-                  <a:lnTo>
-                    <a:pt x="2435165" y="169290"/>
-                  </a:lnTo>
-                  <a:lnTo>
-                    <a:pt x="2363543" y="164723"/>
-                  </a:lnTo>
-                  <a:lnTo>
-                    <a:pt x="2291920" y="160132"/>
-                  </a:lnTo>
-                  <a:lnTo>
-                    <a:pt x="2220298" y="155518"/>
-                  </a:lnTo>
-                  <a:lnTo>
-                    <a:pt x="2148675" y="150880"/>
-                  </a:lnTo>
-                  <a:lnTo>
-                    <a:pt x="2077053" y="146218"/>
-                  </a:lnTo>
-                  <a:lnTo>
-                    <a:pt x="2005430" y="141532"/>
-                  </a:lnTo>
-                  <a:lnTo>
-                    <a:pt x="1933808" y="136821"/>
-                  </a:lnTo>
-                  <a:lnTo>
-                    <a:pt x="1862185" y="132087"/>
-                  </a:lnTo>
-                  <a:lnTo>
-                    <a:pt x="1790563" y="127327"/>
-                  </a:lnTo>
-                  <a:lnTo>
-                    <a:pt x="1718940" y="122543"/>
-                  </a:lnTo>
-                  <a:lnTo>
-                    <a:pt x="1647318" y="117735"/>
-                  </a:lnTo>
-                  <a:lnTo>
-                    <a:pt x="1575695" y="112901"/>
-                  </a:lnTo>
-                  <a:lnTo>
-                    <a:pt x="1504073" y="108043"/>
-                  </a:lnTo>
-                  <a:lnTo>
-                    <a:pt x="1432450" y="103159"/>
-                  </a:lnTo>
-                  <a:lnTo>
-                    <a:pt x="1360827" y="98250"/>
-                  </a:lnTo>
-                  <a:lnTo>
-                    <a:pt x="1289205" y="93315"/>
-                  </a:lnTo>
-                  <a:lnTo>
-                    <a:pt x="1217582" y="88356"/>
-                  </a:lnTo>
-                  <a:lnTo>
-                    <a:pt x="1145960" y="83370"/>
-                  </a:lnTo>
-                  <a:lnTo>
-                    <a:pt x="1074337" y="78359"/>
-                  </a:lnTo>
-                  <a:lnTo>
-                    <a:pt x="1002715" y="73321"/>
-                  </a:lnTo>
-                  <a:lnTo>
-                    <a:pt x="931092" y="68258"/>
-                  </a:lnTo>
-                  <a:lnTo>
-                    <a:pt x="859470" y="63168"/>
-                  </a:lnTo>
-                  <a:lnTo>
-                    <a:pt x="787847" y="58052"/>
-                  </a:lnTo>
-                  <a:lnTo>
-                    <a:pt x="716225" y="52910"/>
-                  </a:lnTo>
-                  <a:lnTo>
-                    <a:pt x="644602" y="47741"/>
-                  </a:lnTo>
-                  <a:lnTo>
-                    <a:pt x="572980" y="42545"/>
-                  </a:lnTo>
-                  <a:lnTo>
-                    <a:pt x="501357" y="37323"/>
-                  </a:lnTo>
-                  <a:lnTo>
-                    <a:pt x="429735" y="32073"/>
-                  </a:lnTo>
-                  <a:lnTo>
-                    <a:pt x="358112" y="26796"/>
-                  </a:lnTo>
-                  <a:lnTo>
-                    <a:pt x="286490" y="21492"/>
-                  </a:lnTo>
-                  <a:lnTo>
-                    <a:pt x="214867" y="16160"/>
-                  </a:lnTo>
-                  <a:lnTo>
-                    <a:pt x="143245" y="10801"/>
-                  </a:lnTo>
-                  <a:lnTo>
-                    <a:pt x="71622" y="5414"/>
-                  </a:lnTo>
-                  <a:lnTo>
-                    <a:pt x="0" y="0"/>
+                    <a:pt x="19326" y="15027"/>
+                  </a:lnTo>
+                  <a:lnTo>
+                    <a:pt x="89670" y="67418"/>
+                  </a:lnTo>
+                  <a:lnTo>
+                    <a:pt x="160015" y="117599"/>
+                  </a:lnTo>
+                  <a:lnTo>
+                    <a:pt x="230359" y="165664"/>
+                  </a:lnTo>
+                  <a:lnTo>
+                    <a:pt x="300704" y="211701"/>
+                  </a:lnTo>
+                  <a:lnTo>
+                    <a:pt x="371048" y="255797"/>
+                  </a:lnTo>
+                  <a:lnTo>
+                    <a:pt x="441393" y="298033"/>
+                  </a:lnTo>
+                  <a:lnTo>
+                    <a:pt x="511737" y="338488"/>
+                  </a:lnTo>
+                  <a:lnTo>
+                    <a:pt x="582082" y="377236"/>
+                  </a:lnTo>
+                  <a:lnTo>
+                    <a:pt x="652426" y="414350"/>
+                  </a:lnTo>
+                  <a:lnTo>
+                    <a:pt x="722771" y="449899"/>
+                  </a:lnTo>
+                  <a:lnTo>
+                    <a:pt x="793115" y="483948"/>
+                  </a:lnTo>
+                  <a:lnTo>
+                    <a:pt x="863460" y="516562"/>
+                  </a:lnTo>
+                  <a:lnTo>
+                    <a:pt x="933804" y="547799"/>
+                  </a:lnTo>
+                  <a:lnTo>
+                    <a:pt x="1004149" y="577720"/>
+                  </a:lnTo>
+                  <a:lnTo>
+                    <a:pt x="1074493" y="606378"/>
+                  </a:lnTo>
+                  <a:lnTo>
+                    <a:pt x="1144838" y="633828"/>
+                  </a:lnTo>
+                  <a:lnTo>
+                    <a:pt x="1215182" y="660119"/>
+                  </a:lnTo>
+                  <a:lnTo>
+                    <a:pt x="1285527" y="685302"/>
+                  </a:lnTo>
+                  <a:lnTo>
+                    <a:pt x="1355871" y="709423"/>
+                  </a:lnTo>
+                  <a:lnTo>
+                    <a:pt x="1426216" y="732527"/>
+                  </a:lnTo>
+                  <a:lnTo>
+                    <a:pt x="1496560" y="754656"/>
+                  </a:lnTo>
+                  <a:lnTo>
+                    <a:pt x="1566905" y="775852"/>
+                  </a:lnTo>
+                  <a:lnTo>
+                    <a:pt x="1637249" y="796153"/>
+                  </a:lnTo>
+                  <a:lnTo>
+                    <a:pt x="1707594" y="815599"/>
+                  </a:lnTo>
+                  <a:lnTo>
+                    <a:pt x="1777938" y="834224"/>
+                  </a:lnTo>
+                  <a:lnTo>
+                    <a:pt x="1848283" y="852064"/>
+                  </a:lnTo>
+                  <a:lnTo>
+                    <a:pt x="1918627" y="869151"/>
+                  </a:lnTo>
+                  <a:lnTo>
+                    <a:pt x="1988972" y="885518"/>
+                  </a:lnTo>
+                  <a:lnTo>
+                    <a:pt x="2059316" y="901195"/>
+                  </a:lnTo>
+                  <a:lnTo>
+                    <a:pt x="2129661" y="916210"/>
+                  </a:lnTo>
+                  <a:lnTo>
+                    <a:pt x="2200005" y="930592"/>
+                  </a:lnTo>
+                  <a:lnTo>
+                    <a:pt x="2270350" y="944367"/>
+                  </a:lnTo>
+                  <a:lnTo>
+                    <a:pt x="2340694" y="957561"/>
+                  </a:lnTo>
+                  <a:lnTo>
+                    <a:pt x="2411038" y="959372"/>
+                  </a:lnTo>
+                  <a:lnTo>
+                    <a:pt x="2481383" y="960905"/>
+                  </a:lnTo>
+                  <a:lnTo>
+                    <a:pt x="2551727" y="962431"/>
+                  </a:lnTo>
+                  <a:lnTo>
+                    <a:pt x="2622072" y="963948"/>
+                  </a:lnTo>
+                  <a:lnTo>
+                    <a:pt x="2692416" y="965458"/>
+                  </a:lnTo>
+                  <a:lnTo>
+                    <a:pt x="2762761" y="966960"/>
+                  </a:lnTo>
+                  <a:lnTo>
+                    <a:pt x="2833105" y="968454"/>
+                  </a:lnTo>
+                  <a:lnTo>
+                    <a:pt x="2903450" y="969940"/>
+                  </a:lnTo>
+                  <a:lnTo>
+                    <a:pt x="2973794" y="971419"/>
+                  </a:lnTo>
+                  <a:lnTo>
+                    <a:pt x="3044139" y="972890"/>
+                  </a:lnTo>
+                  <a:lnTo>
+                    <a:pt x="3114483" y="974354"/>
+                  </a:lnTo>
+                  <a:lnTo>
+                    <a:pt x="3184828" y="975810"/>
+                  </a:lnTo>
+                  <a:lnTo>
+                    <a:pt x="3255172" y="977258"/>
+                  </a:lnTo>
+                  <a:lnTo>
+                    <a:pt x="3325517" y="978699"/>
+                  </a:lnTo>
+                  <a:lnTo>
+                    <a:pt x="3395861" y="980133"/>
+                  </a:lnTo>
+                  <a:lnTo>
+                    <a:pt x="3466206" y="981559"/>
+                  </a:lnTo>
+                  <a:lnTo>
+                    <a:pt x="3536550" y="982978"/>
+                  </a:lnTo>
+                  <a:lnTo>
+                    <a:pt x="3606895" y="984390"/>
+                  </a:lnTo>
+                  <a:lnTo>
+                    <a:pt x="3677239" y="985794"/>
+                  </a:lnTo>
+                  <a:lnTo>
+                    <a:pt x="3747584" y="987192"/>
+                  </a:lnTo>
+                  <a:lnTo>
+                    <a:pt x="3817928" y="988582"/>
+                  </a:lnTo>
+                  <a:lnTo>
+                    <a:pt x="3888273" y="989964"/>
+                  </a:lnTo>
+                  <a:lnTo>
+                    <a:pt x="3958617" y="991340"/>
+                  </a:lnTo>
+                  <a:lnTo>
+                    <a:pt x="4028962" y="992709"/>
+                  </a:lnTo>
+                  <a:lnTo>
+                    <a:pt x="4099306" y="994070"/>
+                  </a:lnTo>
+                  <a:lnTo>
+                    <a:pt x="4169651" y="995425"/>
+                  </a:lnTo>
+                  <a:lnTo>
+                    <a:pt x="4239995" y="996772"/>
+                  </a:lnTo>
+                  <a:lnTo>
+                    <a:pt x="4310340" y="998113"/>
+                  </a:lnTo>
+                  <a:lnTo>
+                    <a:pt x="4380684" y="999447"/>
+                  </a:lnTo>
+                  <a:lnTo>
+                    <a:pt x="4451029" y="1000774"/>
+                  </a:lnTo>
+                  <a:lnTo>
+                    <a:pt x="4521373" y="1002094"/>
+                  </a:lnTo>
+                  <a:lnTo>
+                    <a:pt x="4591718" y="1003407"/>
+                  </a:lnTo>
+                  <a:lnTo>
+                    <a:pt x="4662062" y="1004713"/>
+                  </a:lnTo>
+                  <a:lnTo>
+                    <a:pt x="4732407" y="1006013"/>
+                  </a:lnTo>
+                  <a:lnTo>
+                    <a:pt x="4802751" y="1007306"/>
+                  </a:lnTo>
+                  <a:lnTo>
+                    <a:pt x="4873096" y="1008593"/>
+                  </a:lnTo>
+                  <a:lnTo>
+                    <a:pt x="4943440" y="1009872"/>
+                  </a:lnTo>
+                  <a:lnTo>
+                    <a:pt x="5013785" y="1011146"/>
+                  </a:lnTo>
+                  <a:lnTo>
+                    <a:pt x="5084129" y="1012412"/>
+                  </a:lnTo>
+                  <a:lnTo>
+                    <a:pt x="5154474" y="1013672"/>
+                  </a:lnTo>
+                  <a:lnTo>
+                    <a:pt x="5224818" y="1014926"/>
+                  </a:lnTo>
+                  <a:lnTo>
+                    <a:pt x="5295163" y="1016173"/>
+                  </a:lnTo>
+                  <a:lnTo>
+                    <a:pt x="5365507" y="1017414"/>
+                  </a:lnTo>
+                  <a:lnTo>
+                    <a:pt x="5435852" y="1018648"/>
+                  </a:lnTo>
+                  <a:lnTo>
+                    <a:pt x="5506196" y="1019876"/>
+                  </a:lnTo>
+                  <a:lnTo>
+                    <a:pt x="5576541" y="1021098"/>
+                  </a:lnTo>
+                  <a:lnTo>
+                    <a:pt x="5646885" y="1022314"/>
+                  </a:lnTo>
+                  <a:lnTo>
+                    <a:pt x="5717230" y="1023523"/>
+                  </a:lnTo>
+                  <a:lnTo>
+                    <a:pt x="5787574" y="1024726"/>
+                  </a:lnTo>
+                  <a:lnTo>
+                    <a:pt x="5857919" y="1025922"/>
+                  </a:lnTo>
+                  <a:lnTo>
+                    <a:pt x="5928263" y="1027113"/>
+                  </a:lnTo>
+                  <a:lnTo>
+                    <a:pt x="5998608" y="1028297"/>
+                  </a:lnTo>
+                  <a:lnTo>
+                    <a:pt x="6068952" y="1029476"/>
                   </a:lnTo>
                 </a:path>
               </a:pathLst>
@@ -4168,312 +3878,637 @@
           </p:nvSpPr>
           <p:spPr>
             <a:xfrm>
-              <a:off x="1172049" y="3039367"/>
-              <a:ext cx="7090630" cy="2286830"/>
+              <a:off x="1235312" y="3020703"/>
+              <a:ext cx="6964104" cy="349060"/>
             </a:xfrm>
             <a:custGeom>
               <a:avLst/>
               <a:pathLst>
-                <a:path w="7090630" h="2286830">
+                <a:path w="6964104" h="349060">
+                  <a:moveTo>
+                    <a:pt x="6964104" y="349060"/>
+                  </a:moveTo>
+                  <a:lnTo>
+                    <a:pt x="6893760" y="347716"/>
+                  </a:lnTo>
+                  <a:lnTo>
+                    <a:pt x="6823415" y="346312"/>
+                  </a:lnTo>
+                  <a:lnTo>
+                    <a:pt x="6753071" y="344847"/>
+                  </a:lnTo>
+                  <a:lnTo>
+                    <a:pt x="6682726" y="343317"/>
+                  </a:lnTo>
+                  <a:lnTo>
+                    <a:pt x="6612382" y="341720"/>
+                  </a:lnTo>
+                  <a:lnTo>
+                    <a:pt x="6542037" y="340052"/>
+                  </a:lnTo>
+                  <a:lnTo>
+                    <a:pt x="6471693" y="338311"/>
+                  </a:lnTo>
+                  <a:lnTo>
+                    <a:pt x="6401348" y="336494"/>
+                  </a:lnTo>
+                  <a:lnTo>
+                    <a:pt x="6331004" y="334596"/>
+                  </a:lnTo>
+                  <a:lnTo>
+                    <a:pt x="6260659" y="332615"/>
+                  </a:lnTo>
+                  <a:lnTo>
+                    <a:pt x="6190315" y="330546"/>
+                  </a:lnTo>
+                  <a:lnTo>
+                    <a:pt x="6119970" y="328386"/>
+                  </a:lnTo>
+                  <a:lnTo>
+                    <a:pt x="6049626" y="326132"/>
+                  </a:lnTo>
+                  <a:lnTo>
+                    <a:pt x="5979281" y="323778"/>
+                  </a:lnTo>
+                  <a:lnTo>
+                    <a:pt x="5908937" y="321320"/>
+                  </a:lnTo>
+                  <a:lnTo>
+                    <a:pt x="5838592" y="318754"/>
+                  </a:lnTo>
+                  <a:lnTo>
+                    <a:pt x="5768248" y="316075"/>
+                  </a:lnTo>
+                  <a:lnTo>
+                    <a:pt x="5697903" y="313279"/>
+                  </a:lnTo>
+                  <a:lnTo>
+                    <a:pt x="5627559" y="310359"/>
+                  </a:lnTo>
+                  <a:lnTo>
+                    <a:pt x="5557214" y="307310"/>
+                  </a:lnTo>
+                  <a:lnTo>
+                    <a:pt x="5486870" y="304127"/>
+                  </a:lnTo>
+                  <a:lnTo>
+                    <a:pt x="5416525" y="300804"/>
+                  </a:lnTo>
+                  <a:lnTo>
+                    <a:pt x="5346181" y="297335"/>
+                  </a:lnTo>
+                  <a:lnTo>
+                    <a:pt x="5275836" y="293713"/>
+                  </a:lnTo>
+                  <a:lnTo>
+                    <a:pt x="5205492" y="289932"/>
+                  </a:lnTo>
+                  <a:lnTo>
+                    <a:pt x="5135147" y="285984"/>
+                  </a:lnTo>
+                  <a:lnTo>
+                    <a:pt x="5064803" y="281862"/>
+                  </a:lnTo>
+                  <a:lnTo>
+                    <a:pt x="4994458" y="277558"/>
+                  </a:lnTo>
+                  <a:lnTo>
+                    <a:pt x="4924114" y="273066"/>
+                  </a:lnTo>
+                  <a:lnTo>
+                    <a:pt x="4853769" y="268375"/>
+                  </a:lnTo>
+                  <a:lnTo>
+                    <a:pt x="4783425" y="263478"/>
+                  </a:lnTo>
+                  <a:lnTo>
+                    <a:pt x="4713080" y="258365"/>
+                  </a:lnTo>
+                  <a:lnTo>
+                    <a:pt x="4642736" y="253027"/>
+                  </a:lnTo>
+                  <a:lnTo>
+                    <a:pt x="4572391" y="247454"/>
+                  </a:lnTo>
+                  <a:lnTo>
+                    <a:pt x="4502047" y="241635"/>
+                  </a:lnTo>
+                  <a:lnTo>
+                    <a:pt x="4431702" y="235560"/>
+                  </a:lnTo>
+                  <a:lnTo>
+                    <a:pt x="4361358" y="229218"/>
+                  </a:lnTo>
+                  <a:lnTo>
+                    <a:pt x="4291013" y="222597"/>
+                  </a:lnTo>
+                  <a:lnTo>
+                    <a:pt x="4220669" y="215684"/>
+                  </a:lnTo>
+                  <a:lnTo>
+                    <a:pt x="4150324" y="208466"/>
+                  </a:lnTo>
+                  <a:lnTo>
+                    <a:pt x="4079980" y="200931"/>
+                  </a:lnTo>
+                  <a:lnTo>
+                    <a:pt x="4009635" y="193064"/>
+                  </a:lnTo>
+                  <a:lnTo>
+                    <a:pt x="3939291" y="184851"/>
+                  </a:lnTo>
+                  <a:lnTo>
+                    <a:pt x="3868946" y="176275"/>
+                  </a:lnTo>
+                  <a:lnTo>
+                    <a:pt x="3798602" y="167323"/>
+                  </a:lnTo>
+                  <a:lnTo>
+                    <a:pt x="3728257" y="157976"/>
+                  </a:lnTo>
+                  <a:lnTo>
+                    <a:pt x="3657913" y="148217"/>
+                  </a:lnTo>
+                  <a:lnTo>
+                    <a:pt x="3587569" y="138029"/>
+                  </a:lnTo>
+                  <a:lnTo>
+                    <a:pt x="3517224" y="127392"/>
+                  </a:lnTo>
+                  <a:lnTo>
+                    <a:pt x="3446880" y="116287"/>
+                  </a:lnTo>
+                  <a:lnTo>
+                    <a:pt x="3376535" y="104692"/>
+                  </a:lnTo>
+                  <a:lnTo>
+                    <a:pt x="3306191" y="92588"/>
+                  </a:lnTo>
+                  <a:lnTo>
+                    <a:pt x="3235846" y="80220"/>
+                  </a:lnTo>
+                  <a:lnTo>
+                    <a:pt x="3165502" y="78670"/>
+                  </a:lnTo>
+                  <a:lnTo>
+                    <a:pt x="3095157" y="77113"/>
+                  </a:lnTo>
+                  <a:lnTo>
+                    <a:pt x="3024813" y="75548"/>
+                  </a:lnTo>
+                  <a:lnTo>
+                    <a:pt x="2954468" y="73975"/>
+                  </a:lnTo>
+                  <a:lnTo>
+                    <a:pt x="2884124" y="72394"/>
+                  </a:lnTo>
+                  <a:lnTo>
+                    <a:pt x="2813779" y="70804"/>
+                  </a:lnTo>
+                  <a:lnTo>
+                    <a:pt x="2743435" y="69206"/>
+                  </a:lnTo>
+                  <a:lnTo>
+                    <a:pt x="2673090" y="67600"/>
+                  </a:lnTo>
+                  <a:lnTo>
+                    <a:pt x="2602746" y="65986"/>
+                  </a:lnTo>
+                  <a:lnTo>
+                    <a:pt x="2532401" y="64363"/>
+                  </a:lnTo>
+                  <a:lnTo>
+                    <a:pt x="2462057" y="62732"/>
+                  </a:lnTo>
+                  <a:lnTo>
+                    <a:pt x="2391712" y="61092"/>
+                  </a:lnTo>
+                  <a:lnTo>
+                    <a:pt x="2321368" y="59444"/>
+                  </a:lnTo>
+                  <a:lnTo>
+                    <a:pt x="2251023" y="57788"/>
+                  </a:lnTo>
+                  <a:lnTo>
+                    <a:pt x="2180679" y="56123"/>
+                  </a:lnTo>
+                  <a:lnTo>
+                    <a:pt x="2110334" y="54449"/>
+                  </a:lnTo>
+                  <a:lnTo>
+                    <a:pt x="2039990" y="52766"/>
+                  </a:lnTo>
+                  <a:lnTo>
+                    <a:pt x="1969645" y="51075"/>
+                  </a:lnTo>
+                  <a:lnTo>
+                    <a:pt x="1899301" y="49375"/>
+                  </a:lnTo>
+                  <a:lnTo>
+                    <a:pt x="1828956" y="47667"/>
+                  </a:lnTo>
+                  <a:lnTo>
+                    <a:pt x="1758612" y="45949"/>
+                  </a:lnTo>
+                  <a:lnTo>
+                    <a:pt x="1688267" y="44223"/>
+                  </a:lnTo>
+                  <a:lnTo>
+                    <a:pt x="1617923" y="42487"/>
+                  </a:lnTo>
+                  <a:lnTo>
+                    <a:pt x="1547578" y="40743"/>
+                  </a:lnTo>
+                  <a:lnTo>
+                    <a:pt x="1477234" y="38990"/>
+                  </a:lnTo>
+                  <a:lnTo>
+                    <a:pt x="1406889" y="37227"/>
+                  </a:lnTo>
+                  <a:lnTo>
+                    <a:pt x="1336545" y="35456"/>
+                  </a:lnTo>
+                  <a:lnTo>
+                    <a:pt x="1266200" y="33675"/>
+                  </a:lnTo>
+                  <a:lnTo>
+                    <a:pt x="1195856" y="31885"/>
+                  </a:lnTo>
+                  <a:lnTo>
+                    <a:pt x="1125511" y="30086"/>
+                  </a:lnTo>
+                  <a:lnTo>
+                    <a:pt x="1055167" y="28277"/>
+                  </a:lnTo>
+                  <a:lnTo>
+                    <a:pt x="984822" y="26460"/>
+                  </a:lnTo>
+                  <a:lnTo>
+                    <a:pt x="914478" y="24632"/>
+                  </a:lnTo>
+                  <a:lnTo>
+                    <a:pt x="844133" y="22796"/>
+                  </a:lnTo>
+                  <a:lnTo>
+                    <a:pt x="773789" y="20949"/>
+                  </a:lnTo>
+                  <a:lnTo>
+                    <a:pt x="703444" y="19094"/>
+                  </a:lnTo>
+                  <a:lnTo>
+                    <a:pt x="633100" y="17228"/>
+                  </a:lnTo>
+                  <a:lnTo>
+                    <a:pt x="562755" y="15353"/>
+                  </a:lnTo>
+                  <a:lnTo>
+                    <a:pt x="492411" y="13469"/>
+                  </a:lnTo>
+                  <a:lnTo>
+                    <a:pt x="422066" y="11574"/>
+                  </a:lnTo>
+                  <a:lnTo>
+                    <a:pt x="351722" y="9670"/>
+                  </a:lnTo>
+                  <a:lnTo>
+                    <a:pt x="281377" y="7756"/>
+                  </a:lnTo>
+                  <a:lnTo>
+                    <a:pt x="211033" y="5832"/>
+                  </a:lnTo>
+                  <a:lnTo>
+                    <a:pt x="140688" y="3898"/>
+                  </a:lnTo>
+                  <a:lnTo>
+                    <a:pt x="70344" y="1954"/>
+                  </a:lnTo>
+                  <a:lnTo>
+                    <a:pt x="0" y="0"/>
+                  </a:lnTo>
+                </a:path>
+              </a:pathLst>
+            </a:custGeom>
+          </p:spPr>
+          <p:txBody>
+            <a:bodyPr/>
+            <a:lstStyle/>
+            <a:p/>
+          </p:txBody>
+        </p:sp>
+        <p:sp>
+          <p:nvSpPr>
+            <p:cNvPr id="24" name="pl24"/>
+            <p:cNvSpPr/>
+            <p:nvPr/>
+          </p:nvSpPr>
+          <p:spPr>
+            <a:xfrm>
+              <a:off x="1235312" y="2491649"/>
+              <a:ext cx="6964104" cy="825263"/>
+            </a:xfrm>
+            <a:custGeom>
+              <a:avLst/>
+              <a:pathLst>
+                <a:path w="6964104" h="825263">
                   <a:moveTo>
                     <a:pt x="0" y="0"/>
                   </a:moveTo>
                   <a:lnTo>
-                    <a:pt x="71622" y="60020"/>
-                  </a:lnTo>
-                  <a:lnTo>
-                    <a:pt x="143245" y="118610"/>
-                  </a:lnTo>
-                  <a:lnTo>
-                    <a:pt x="214867" y="175804"/>
-                  </a:lnTo>
-                  <a:lnTo>
-                    <a:pt x="286490" y="231634"/>
-                  </a:lnTo>
-                  <a:lnTo>
-                    <a:pt x="358112" y="286133"/>
-                  </a:lnTo>
-                  <a:lnTo>
-                    <a:pt x="429735" y="339333"/>
-                  </a:lnTo>
-                  <a:lnTo>
-                    <a:pt x="501357" y="391265"/>
-                  </a:lnTo>
-                  <a:lnTo>
-                    <a:pt x="572980" y="441959"/>
-                  </a:lnTo>
-                  <a:lnTo>
-                    <a:pt x="644602" y="491445"/>
-                  </a:lnTo>
-                  <a:lnTo>
-                    <a:pt x="716225" y="539751"/>
-                  </a:lnTo>
-                  <a:lnTo>
-                    <a:pt x="787847" y="586905"/>
-                  </a:lnTo>
-                  <a:lnTo>
-                    <a:pt x="859470" y="632935"/>
-                  </a:lnTo>
-                  <a:lnTo>
-                    <a:pt x="931092" y="677868"/>
-                  </a:lnTo>
-                  <a:lnTo>
-                    <a:pt x="1002715" y="721730"/>
-                  </a:lnTo>
-                  <a:lnTo>
-                    <a:pt x="1074337" y="764547"/>
-                  </a:lnTo>
-                  <a:lnTo>
-                    <a:pt x="1145960" y="806342"/>
-                  </a:lnTo>
-                  <a:lnTo>
-                    <a:pt x="1217582" y="847142"/>
-                  </a:lnTo>
-                  <a:lnTo>
-                    <a:pt x="1289205" y="886969"/>
-                  </a:lnTo>
-                  <a:lnTo>
-                    <a:pt x="1360827" y="925846"/>
-                  </a:lnTo>
-                  <a:lnTo>
-                    <a:pt x="1432450" y="963797"/>
-                  </a:lnTo>
-                  <a:lnTo>
-                    <a:pt x="1504073" y="1000843"/>
-                  </a:lnTo>
-                  <a:lnTo>
-                    <a:pt x="1575695" y="1037006"/>
-                  </a:lnTo>
-                  <a:lnTo>
-                    <a:pt x="1647318" y="1072307"/>
-                  </a:lnTo>
-                  <a:lnTo>
-                    <a:pt x="1718940" y="1106766"/>
-                  </a:lnTo>
-                  <a:lnTo>
-                    <a:pt x="1790563" y="1140404"/>
-                  </a:lnTo>
-                  <a:lnTo>
-                    <a:pt x="1862185" y="1173240"/>
-                  </a:lnTo>
-                  <a:lnTo>
-                    <a:pt x="1933808" y="1205293"/>
-                  </a:lnTo>
-                  <a:lnTo>
-                    <a:pt x="2005430" y="1236583"/>
-                  </a:lnTo>
-                  <a:lnTo>
-                    <a:pt x="2077053" y="1267126"/>
-                  </a:lnTo>
-                  <a:lnTo>
-                    <a:pt x="2148675" y="1296941"/>
-                  </a:lnTo>
-                  <a:lnTo>
-                    <a:pt x="2220298" y="1326046"/>
-                  </a:lnTo>
-                  <a:lnTo>
-                    <a:pt x="2291920" y="1354457"/>
-                  </a:lnTo>
-                  <a:lnTo>
-                    <a:pt x="2363543" y="1382190"/>
-                  </a:lnTo>
-                  <a:lnTo>
-                    <a:pt x="2435165" y="1409263"/>
-                  </a:lnTo>
-                  <a:lnTo>
-                    <a:pt x="2506788" y="1435690"/>
-                  </a:lnTo>
-                  <a:lnTo>
-                    <a:pt x="2578410" y="1461487"/>
-                  </a:lnTo>
-                  <a:lnTo>
-                    <a:pt x="2650033" y="1486669"/>
-                  </a:lnTo>
-                  <a:lnTo>
-                    <a:pt x="2721655" y="1511251"/>
-                  </a:lnTo>
-                  <a:lnTo>
-                    <a:pt x="2793278" y="1535247"/>
-                  </a:lnTo>
-                  <a:lnTo>
-                    <a:pt x="2864901" y="1558671"/>
-                  </a:lnTo>
-                  <a:lnTo>
-                    <a:pt x="2936523" y="1581536"/>
-                  </a:lnTo>
-                  <a:lnTo>
-                    <a:pt x="3008146" y="1603857"/>
-                  </a:lnTo>
-                  <a:lnTo>
-                    <a:pt x="3079768" y="1625645"/>
-                  </a:lnTo>
-                  <a:lnTo>
-                    <a:pt x="3151391" y="1646914"/>
-                  </a:lnTo>
-                  <a:lnTo>
-                    <a:pt x="3223013" y="1667676"/>
-                  </a:lnTo>
-                  <a:lnTo>
-                    <a:pt x="3294636" y="1687943"/>
-                  </a:lnTo>
-                  <a:lnTo>
-                    <a:pt x="3366258" y="1707727"/>
-                  </a:lnTo>
-                  <a:lnTo>
-                    <a:pt x="3437881" y="1727040"/>
-                  </a:lnTo>
-                  <a:lnTo>
-                    <a:pt x="3509503" y="1745892"/>
-                  </a:lnTo>
-                  <a:lnTo>
-                    <a:pt x="3581126" y="1764294"/>
-                  </a:lnTo>
-                  <a:lnTo>
-                    <a:pt x="3652748" y="1782258"/>
-                  </a:lnTo>
-                  <a:lnTo>
-                    <a:pt x="3724371" y="1799794"/>
-                  </a:lnTo>
-                  <a:lnTo>
-                    <a:pt x="3795993" y="1816911"/>
-                  </a:lnTo>
-                  <a:lnTo>
-                    <a:pt x="3867616" y="1833621"/>
-                  </a:lnTo>
-                  <a:lnTo>
-                    <a:pt x="3939238" y="1849932"/>
-                  </a:lnTo>
-                  <a:lnTo>
-                    <a:pt x="4010861" y="1865855"/>
-                  </a:lnTo>
-                  <a:lnTo>
-                    <a:pt x="4082483" y="1881398"/>
-                  </a:lnTo>
-                  <a:lnTo>
-                    <a:pt x="4154106" y="1896570"/>
-                  </a:lnTo>
-                  <a:lnTo>
-                    <a:pt x="4225729" y="1911381"/>
-                  </a:lnTo>
-                  <a:lnTo>
-                    <a:pt x="4297351" y="1925839"/>
-                  </a:lnTo>
-                  <a:lnTo>
-                    <a:pt x="4368974" y="1939952"/>
-                  </a:lnTo>
-                  <a:lnTo>
-                    <a:pt x="4440596" y="1953728"/>
-                  </a:lnTo>
-                  <a:lnTo>
-                    <a:pt x="4512219" y="1967176"/>
-                  </a:lnTo>
-                  <a:lnTo>
-                    <a:pt x="4583841" y="1980304"/>
-                  </a:lnTo>
-                  <a:lnTo>
-                    <a:pt x="4655464" y="1993119"/>
-                  </a:lnTo>
-                  <a:lnTo>
-                    <a:pt x="4727086" y="2005628"/>
-                  </a:lnTo>
-                  <a:lnTo>
-                    <a:pt x="4798709" y="2017839"/>
-                  </a:lnTo>
-                  <a:lnTo>
-                    <a:pt x="4870331" y="2029759"/>
-                  </a:lnTo>
-                  <a:lnTo>
-                    <a:pt x="4941954" y="2041395"/>
-                  </a:lnTo>
-                  <a:lnTo>
-                    <a:pt x="5013576" y="2052753"/>
-                  </a:lnTo>
-                  <a:lnTo>
-                    <a:pt x="5085199" y="2063841"/>
-                  </a:lnTo>
-                  <a:lnTo>
-                    <a:pt x="5156821" y="2074664"/>
-                  </a:lnTo>
-                  <a:lnTo>
-                    <a:pt x="5228444" y="2085230"/>
-                  </a:lnTo>
-                  <a:lnTo>
-                    <a:pt x="5300066" y="2095543"/>
-                  </a:lnTo>
-                  <a:lnTo>
-                    <a:pt x="5371689" y="2105611"/>
-                  </a:lnTo>
-                  <a:lnTo>
-                    <a:pt x="5443311" y="2115438"/>
-                  </a:lnTo>
-                  <a:lnTo>
-                    <a:pt x="5514934" y="2125032"/>
-                  </a:lnTo>
-                  <a:lnTo>
-                    <a:pt x="5586557" y="2134396"/>
-                  </a:lnTo>
-                  <a:lnTo>
-                    <a:pt x="5658179" y="2143538"/>
-                  </a:lnTo>
-                  <a:lnTo>
-                    <a:pt x="5729802" y="2152462"/>
-                  </a:lnTo>
-                  <a:lnTo>
-                    <a:pt x="5801424" y="2161172"/>
-                  </a:lnTo>
-                  <a:lnTo>
-                    <a:pt x="5873047" y="2169676"/>
-                  </a:lnTo>
-                  <a:lnTo>
-                    <a:pt x="5944669" y="2177976"/>
-                  </a:lnTo>
-                  <a:lnTo>
-                    <a:pt x="6016292" y="2186079"/>
-                  </a:lnTo>
-                  <a:lnTo>
-                    <a:pt x="6087914" y="2193988"/>
-                  </a:lnTo>
-                  <a:lnTo>
-                    <a:pt x="6159537" y="2201709"/>
-                  </a:lnTo>
-                  <a:lnTo>
-                    <a:pt x="6231159" y="2209246"/>
-                  </a:lnTo>
-                  <a:lnTo>
-                    <a:pt x="6302782" y="2216603"/>
-                  </a:lnTo>
-                  <a:lnTo>
-                    <a:pt x="6374404" y="2223785"/>
-                  </a:lnTo>
-                  <a:lnTo>
-                    <a:pt x="6446027" y="2230796"/>
-                  </a:lnTo>
-                  <a:lnTo>
-                    <a:pt x="6517649" y="2237639"/>
-                  </a:lnTo>
-                  <a:lnTo>
-                    <a:pt x="6589272" y="2244320"/>
-                  </a:lnTo>
-                  <a:lnTo>
-                    <a:pt x="6660894" y="2250841"/>
-                  </a:lnTo>
-                  <a:lnTo>
-                    <a:pt x="6732517" y="2257206"/>
-                  </a:lnTo>
-                  <a:lnTo>
-                    <a:pt x="6804139" y="2263420"/>
-                  </a:lnTo>
-                  <a:lnTo>
-                    <a:pt x="6875762" y="2269486"/>
-                  </a:lnTo>
-                  <a:lnTo>
-                    <a:pt x="6947385" y="2275407"/>
-                  </a:lnTo>
-                  <a:lnTo>
-                    <a:pt x="7019007" y="2281187"/>
-                  </a:lnTo>
-                  <a:lnTo>
-                    <a:pt x="7090630" y="2286830"/>
+                    <a:pt x="70344" y="21660"/>
+                  </a:lnTo>
+                  <a:lnTo>
+                    <a:pt x="140688" y="42803"/>
+                  </a:lnTo>
+                  <a:lnTo>
+                    <a:pt x="211033" y="63443"/>
+                  </a:lnTo>
+                  <a:lnTo>
+                    <a:pt x="281377" y="83591"/>
+                  </a:lnTo>
+                  <a:lnTo>
+                    <a:pt x="351722" y="103258"/>
+                  </a:lnTo>
+                  <a:lnTo>
+                    <a:pt x="422066" y="122457"/>
+                  </a:lnTo>
+                  <a:lnTo>
+                    <a:pt x="492411" y="141198"/>
+                  </a:lnTo>
+                  <a:lnTo>
+                    <a:pt x="562755" y="159492"/>
+                  </a:lnTo>
+                  <a:lnTo>
+                    <a:pt x="633100" y="177350"/>
+                  </a:lnTo>
+                  <a:lnTo>
+                    <a:pt x="703444" y="194783"/>
+                  </a:lnTo>
+                  <a:lnTo>
+                    <a:pt x="773789" y="211800"/>
+                  </a:lnTo>
+                  <a:lnTo>
+                    <a:pt x="844133" y="228411"/>
+                  </a:lnTo>
+                  <a:lnTo>
+                    <a:pt x="914478" y="244626"/>
+                  </a:lnTo>
+                  <a:lnTo>
+                    <a:pt x="984822" y="260455"/>
+                  </a:lnTo>
+                  <a:lnTo>
+                    <a:pt x="1055167" y="275907"/>
+                  </a:lnTo>
+                  <a:lnTo>
+                    <a:pt x="1125511" y="290990"/>
+                  </a:lnTo>
+                  <a:lnTo>
+                    <a:pt x="1195856" y="305713"/>
+                  </a:lnTo>
+                  <a:lnTo>
+                    <a:pt x="1266200" y="320086"/>
+                  </a:lnTo>
+                  <a:lnTo>
+                    <a:pt x="1336545" y="334116"/>
+                  </a:lnTo>
+                  <a:lnTo>
+                    <a:pt x="1406889" y="347811"/>
+                  </a:lnTo>
+                  <a:lnTo>
+                    <a:pt x="1477234" y="361180"/>
+                  </a:lnTo>
+                  <a:lnTo>
+                    <a:pt x="1547578" y="374231"/>
+                  </a:lnTo>
+                  <a:lnTo>
+                    <a:pt x="1617923" y="386970"/>
+                  </a:lnTo>
+                  <a:lnTo>
+                    <a:pt x="1688267" y="399405"/>
+                  </a:lnTo>
+                  <a:lnTo>
+                    <a:pt x="1758612" y="411545"/>
+                  </a:lnTo>
+                  <a:lnTo>
+                    <a:pt x="1828956" y="423394"/>
+                  </a:lnTo>
+                  <a:lnTo>
+                    <a:pt x="1899301" y="434962"/>
+                  </a:lnTo>
+                  <a:lnTo>
+                    <a:pt x="1969645" y="446253"/>
+                  </a:lnTo>
+                  <a:lnTo>
+                    <a:pt x="2039990" y="457276"/>
+                  </a:lnTo>
+                  <a:lnTo>
+                    <a:pt x="2110334" y="468035"/>
+                  </a:lnTo>
+                  <a:lnTo>
+                    <a:pt x="2180679" y="478538"/>
+                  </a:lnTo>
+                  <a:lnTo>
+                    <a:pt x="2251023" y="488791"/>
+                  </a:lnTo>
+                  <a:lnTo>
+                    <a:pt x="2321368" y="498800"/>
+                  </a:lnTo>
+                  <a:lnTo>
+                    <a:pt x="2391712" y="508569"/>
+                  </a:lnTo>
+                  <a:lnTo>
+                    <a:pt x="2462057" y="518106"/>
+                  </a:lnTo>
+                  <a:lnTo>
+                    <a:pt x="2532401" y="527416"/>
+                  </a:lnTo>
+                  <a:lnTo>
+                    <a:pt x="2602746" y="536504"/>
+                  </a:lnTo>
+                  <a:lnTo>
+                    <a:pt x="2673090" y="545375"/>
+                  </a:lnTo>
+                  <a:lnTo>
+                    <a:pt x="2743435" y="554034"/>
+                  </a:lnTo>
+                  <a:lnTo>
+                    <a:pt x="2813779" y="562487"/>
+                  </a:lnTo>
+                  <a:lnTo>
+                    <a:pt x="2884124" y="570739"/>
+                  </a:lnTo>
+                  <a:lnTo>
+                    <a:pt x="2954468" y="578794"/>
+                  </a:lnTo>
+                  <a:lnTo>
+                    <a:pt x="3024813" y="586657"/>
+                  </a:lnTo>
+                  <a:lnTo>
+                    <a:pt x="3095157" y="594332"/>
+                  </a:lnTo>
+                  <a:lnTo>
+                    <a:pt x="3165502" y="601825"/>
+                  </a:lnTo>
+                  <a:lnTo>
+                    <a:pt x="3235846" y="609139"/>
+                  </a:lnTo>
+                  <a:lnTo>
+                    <a:pt x="3306191" y="616278"/>
+                  </a:lnTo>
+                  <a:lnTo>
+                    <a:pt x="3376535" y="623248"/>
+                  </a:lnTo>
+                  <a:lnTo>
+                    <a:pt x="3446880" y="630051"/>
+                  </a:lnTo>
+                  <a:lnTo>
+                    <a:pt x="3517224" y="636692"/>
+                  </a:lnTo>
+                  <a:lnTo>
+                    <a:pt x="3587569" y="643175"/>
+                  </a:lnTo>
+                  <a:lnTo>
+                    <a:pt x="3657913" y="649503"/>
+                  </a:lnTo>
+                  <a:lnTo>
+                    <a:pt x="3728257" y="655680"/>
+                  </a:lnTo>
+                  <a:lnTo>
+                    <a:pt x="3798602" y="661710"/>
+                  </a:lnTo>
+                  <a:lnTo>
+                    <a:pt x="3868946" y="667597"/>
+                  </a:lnTo>
+                  <a:lnTo>
+                    <a:pt x="3939291" y="673343"/>
+                  </a:lnTo>
+                  <a:lnTo>
+                    <a:pt x="4009635" y="678952"/>
+                  </a:lnTo>
+                  <a:lnTo>
+                    <a:pt x="4079980" y="684427"/>
+                  </a:lnTo>
+                  <a:lnTo>
+                    <a:pt x="4150324" y="689772"/>
+                  </a:lnTo>
+                  <a:lnTo>
+                    <a:pt x="4220669" y="694990"/>
+                  </a:lnTo>
+                  <a:lnTo>
+                    <a:pt x="4291013" y="700083"/>
+                  </a:lnTo>
+                  <a:lnTo>
+                    <a:pt x="4361358" y="705054"/>
+                  </a:lnTo>
+                  <a:lnTo>
+                    <a:pt x="4431702" y="709907"/>
+                  </a:lnTo>
+                  <a:lnTo>
+                    <a:pt x="4502047" y="714645"/>
+                  </a:lnTo>
+                  <a:lnTo>
+                    <a:pt x="4572391" y="719269"/>
+                  </a:lnTo>
+                  <a:lnTo>
+                    <a:pt x="4642736" y="723784"/>
+                  </a:lnTo>
+                  <a:lnTo>
+                    <a:pt x="4713080" y="728190"/>
+                  </a:lnTo>
+                  <a:lnTo>
+                    <a:pt x="4783425" y="732492"/>
+                  </a:lnTo>
+                  <a:lnTo>
+                    <a:pt x="4853769" y="736691"/>
+                  </a:lnTo>
+                  <a:lnTo>
+                    <a:pt x="4924114" y="740790"/>
+                  </a:lnTo>
+                  <a:lnTo>
+                    <a:pt x="4994458" y="744791"/>
+                  </a:lnTo>
+                  <a:lnTo>
+                    <a:pt x="5064803" y="748697"/>
+                  </a:lnTo>
+                  <a:lnTo>
+                    <a:pt x="5135147" y="752510"/>
+                  </a:lnTo>
+                  <a:lnTo>
+                    <a:pt x="5205492" y="756232"/>
+                  </a:lnTo>
+                  <a:lnTo>
+                    <a:pt x="5275836" y="759865"/>
+                  </a:lnTo>
+                  <a:lnTo>
+                    <a:pt x="5346181" y="763412"/>
+                  </a:lnTo>
+                  <a:lnTo>
+                    <a:pt x="5416525" y="766874"/>
+                  </a:lnTo>
+                  <a:lnTo>
+                    <a:pt x="5486870" y="770253"/>
+                  </a:lnTo>
+                  <a:lnTo>
+                    <a:pt x="5557214" y="773552"/>
+                  </a:lnTo>
+                  <a:lnTo>
+                    <a:pt x="5627559" y="776772"/>
+                  </a:lnTo>
+                  <a:lnTo>
+                    <a:pt x="5697903" y="779916"/>
+                  </a:lnTo>
+                  <a:lnTo>
+                    <a:pt x="5768248" y="782985"/>
+                  </a:lnTo>
+                  <a:lnTo>
+                    <a:pt x="5838592" y="785980"/>
+                  </a:lnTo>
+                  <a:lnTo>
+                    <a:pt x="5908937" y="788904"/>
+                  </a:lnTo>
+                  <a:lnTo>
+                    <a:pt x="5979281" y="791758"/>
+                  </a:lnTo>
+                  <a:lnTo>
+                    <a:pt x="6049626" y="794545"/>
+                  </a:lnTo>
+                  <a:lnTo>
+                    <a:pt x="6119970" y="797265"/>
+                  </a:lnTo>
+                  <a:lnTo>
+                    <a:pt x="6190315" y="799920"/>
+                  </a:lnTo>
+                  <a:lnTo>
+                    <a:pt x="6260659" y="802511"/>
+                  </a:lnTo>
+                  <a:lnTo>
+                    <a:pt x="6331004" y="805041"/>
+                  </a:lnTo>
+                  <a:lnTo>
+                    <a:pt x="6401348" y="807511"/>
+                  </a:lnTo>
+                  <a:lnTo>
+                    <a:pt x="6471693" y="809922"/>
+                  </a:lnTo>
+                  <a:lnTo>
+                    <a:pt x="6542037" y="812275"/>
+                  </a:lnTo>
+                  <a:lnTo>
+                    <a:pt x="6612382" y="814572"/>
+                  </a:lnTo>
+                  <a:lnTo>
+                    <a:pt x="6682726" y="816815"/>
+                  </a:lnTo>
+                  <a:lnTo>
+                    <a:pt x="6753071" y="819004"/>
+                  </a:lnTo>
+                  <a:lnTo>
+                    <a:pt x="6823415" y="821141"/>
+                  </a:lnTo>
+                  <a:lnTo>
+                    <a:pt x="6893760" y="823227"/>
+                  </a:lnTo>
+                  <a:lnTo>
+                    <a:pt x="6964104" y="825263"/>
                   </a:lnTo>
                 </a:path>
               </a:pathLst>
@@ -4496,27 +4531,27 @@
         </p:sp>
         <p:sp>
           <p:nvSpPr>
-            <p:cNvPr id="24" name="pl24"/>
+            <p:cNvPr id="25" name="pl25"/>
             <p:cNvSpPr/>
             <p:nvPr/>
           </p:nvSpPr>
           <p:spPr>
             <a:xfrm>
-              <a:off x="817517" y="4727786"/>
-              <a:ext cx="7799693" cy="0"/>
+              <a:off x="887106" y="3100960"/>
+              <a:ext cx="7660515" cy="0"/>
             </a:xfrm>
             <a:custGeom>
               <a:avLst/>
               <a:pathLst>
-                <a:path w="7799693" h="0">
+                <a:path w="7660515" h="0">
                   <a:moveTo>
                     <a:pt x="0" y="0"/>
                   </a:moveTo>
                   <a:lnTo>
-                    <a:pt x="7799693" y="0"/>
-                  </a:lnTo>
-                  <a:lnTo>
-                    <a:pt x="7799693" y="0"/>
+                    <a:pt x="7660515" y="0"/>
+                  </a:lnTo>
+                  <a:lnTo>
+                    <a:pt x="7660515" y="0"/>
                   </a:lnTo>
                 </a:path>
               </a:pathLst>
@@ -4539,21 +4574,21 @@
         </p:sp>
         <p:sp>
           <p:nvSpPr>
-            <p:cNvPr id="25" name="pl25"/>
+            <p:cNvPr id="26" name="pl26"/>
             <p:cNvSpPr/>
             <p:nvPr/>
           </p:nvSpPr>
           <p:spPr>
             <a:xfrm>
-              <a:off x="4468386" y="2073503"/>
-              <a:ext cx="0" cy="3649639"/>
+              <a:off x="4472829" y="2143092"/>
+              <a:ext cx="0" cy="1317069"/>
             </a:xfrm>
             <a:custGeom>
               <a:avLst/>
               <a:pathLst>
-                <a:path w="0" h="3649639">
+                <a:path w="0" h="1317069">
                   <a:moveTo>
-                    <a:pt x="0" y="3649639"/>
+                    <a:pt x="0" y="1317069"/>
                   </a:moveTo>
                   <a:lnTo>
                     <a:pt x="0" y="0"/>
@@ -4582,13 +4617,13 @@
         </p:sp>
         <p:sp>
           <p:nvSpPr>
-            <p:cNvPr id="26" name="tx26"/>
+            <p:cNvPr id="27" name="tx27"/>
             <p:cNvSpPr/>
             <p:nvPr/>
           </p:nvSpPr>
           <p:spPr>
             <a:xfrm>
-              <a:off x="692708" y="5517199"/>
+              <a:off x="762297" y="3360243"/>
               <a:ext cx="62179" cy="80101"/>
             </a:xfrm>
             <a:prstGeom prst="rect">
@@ -4628,13 +4663,13 @@
         </p:sp>
         <p:sp>
           <p:nvSpPr>
-            <p:cNvPr id="27" name="tx27"/>
+            <p:cNvPr id="28" name="tx28"/>
             <p:cNvSpPr/>
             <p:nvPr/>
           </p:nvSpPr>
           <p:spPr>
             <a:xfrm>
-              <a:off x="692708" y="4687735"/>
+              <a:off x="762297" y="3060909"/>
               <a:ext cx="62179" cy="80101"/>
             </a:xfrm>
             <a:prstGeom prst="rect">
@@ -4674,13 +4709,13 @@
         </p:sp>
         <p:sp>
           <p:nvSpPr>
-            <p:cNvPr id="28" name="tx28"/>
+            <p:cNvPr id="29" name="tx29"/>
             <p:cNvSpPr/>
             <p:nvPr/>
           </p:nvSpPr>
           <p:spPr>
             <a:xfrm>
-              <a:off x="692708" y="3858272"/>
+              <a:off x="762297" y="2761575"/>
               <a:ext cx="62179" cy="80101"/>
             </a:xfrm>
             <a:prstGeom prst="rect">
@@ -4720,13 +4755,13 @@
         </p:sp>
         <p:sp>
           <p:nvSpPr>
-            <p:cNvPr id="29" name="tx29"/>
+            <p:cNvPr id="30" name="tx30"/>
             <p:cNvSpPr/>
             <p:nvPr/>
           </p:nvSpPr>
           <p:spPr>
             <a:xfrm>
-              <a:off x="692708" y="3028808"/>
+              <a:off x="762297" y="2462242"/>
               <a:ext cx="62179" cy="80101"/>
             </a:xfrm>
             <a:prstGeom prst="rect">
@@ -4766,13 +4801,13 @@
         </p:sp>
         <p:sp>
           <p:nvSpPr>
-            <p:cNvPr id="30" name="tx30"/>
+            <p:cNvPr id="31" name="tx31"/>
             <p:cNvSpPr/>
             <p:nvPr/>
           </p:nvSpPr>
           <p:spPr>
             <a:xfrm>
-              <a:off x="692708" y="2199345"/>
+              <a:off x="762297" y="2162908"/>
               <a:ext cx="62179" cy="80101"/>
             </a:xfrm>
             <a:prstGeom prst="rect">
@@ -4812,13 +4847,13 @@
         </p:sp>
         <p:sp>
           <p:nvSpPr>
-            <p:cNvPr id="31" name="tx31"/>
+            <p:cNvPr id="32" name="tx32"/>
             <p:cNvSpPr/>
             <p:nvPr/>
           </p:nvSpPr>
           <p:spPr>
             <a:xfrm>
-              <a:off x="2478335" y="5785772"/>
+              <a:off x="2516846" y="3522791"/>
               <a:ext cx="161574" cy="80101"/>
             </a:xfrm>
             <a:prstGeom prst="rect">
@@ -4858,13 +4893,13 @@
         </p:sp>
         <p:sp>
           <p:nvSpPr>
-            <p:cNvPr id="32" name="tx32"/>
+            <p:cNvPr id="33" name="tx33"/>
             <p:cNvSpPr/>
             <p:nvPr/>
           </p:nvSpPr>
           <p:spPr>
             <a:xfrm>
-              <a:off x="4582608" y="5785772"/>
+              <a:off x="4584458" y="3522791"/>
               <a:ext cx="62179" cy="80101"/>
             </a:xfrm>
             <a:prstGeom prst="rect">
@@ -4904,13 +4939,13 @@
         </p:sp>
         <p:sp>
           <p:nvSpPr>
-            <p:cNvPr id="33" name="tx33"/>
+            <p:cNvPr id="34" name="tx34"/>
             <p:cNvSpPr/>
             <p:nvPr/>
           </p:nvSpPr>
           <p:spPr>
             <a:xfrm>
-              <a:off x="6606094" y="5785772"/>
+              <a:off x="6571282" y="3522791"/>
               <a:ext cx="124358" cy="80101"/>
             </a:xfrm>
             <a:prstGeom prst="rect">
@@ -4950,13 +4985,13 @@
         </p:sp>
         <p:sp>
           <p:nvSpPr>
-            <p:cNvPr id="34" name="tx34"/>
+            <p:cNvPr id="35" name="tx35"/>
             <p:cNvSpPr/>
             <p:nvPr/>
           </p:nvSpPr>
           <p:spPr>
             <a:xfrm>
-              <a:off x="2928340" y="5925448"/>
+              <a:off x="2928340" y="3662467"/>
               <a:ext cx="3578047" cy="100218"/>
             </a:xfrm>
             <a:prstGeom prst="rect">
@@ -4996,13 +5031,13 @@
         </p:sp>
         <p:sp>
           <p:nvSpPr>
-            <p:cNvPr id="35" name="tx35"/>
+            <p:cNvPr id="36" name="tx36"/>
             <p:cNvSpPr/>
             <p:nvPr/>
           </p:nvSpPr>
           <p:spPr>
             <a:xfrm rot="-5400000">
-              <a:off x="68446" y="3848213"/>
+              <a:off x="138035" y="2751517"/>
               <a:ext cx="1016904" cy="100218"/>
             </a:xfrm>
             <a:prstGeom prst="rect">
@@ -5042,13 +5077,13 @@
         </p:sp>
         <p:sp>
           <p:nvSpPr>
-            <p:cNvPr id="36" name="tx36"/>
+            <p:cNvPr id="37" name="tx37"/>
             <p:cNvSpPr/>
             <p:nvPr/>
           </p:nvSpPr>
           <p:spPr>
             <a:xfrm>
-              <a:off x="817517" y="1896563"/>
+              <a:off x="887106" y="1966152"/>
               <a:ext cx="6321612" cy="82021"/>
             </a:xfrm>
             <a:prstGeom prst="rect">
@@ -5088,13 +5123,3674 @@
         </p:sp>
         <p:sp>
           <p:nvSpPr>
-            <p:cNvPr id="37" name="tx37"/>
+            <p:cNvPr id="38" name="tx38"/>
             <p:cNvSpPr/>
             <p:nvPr/>
           </p:nvSpPr>
           <p:spPr>
             <a:xfrm>
-              <a:off x="817517" y="1669789"/>
+              <a:off x="887106" y="1739378"/>
+              <a:ext cx="2875970" cy="120152"/>
+            </a:xfrm>
+            <a:prstGeom prst="rect">
+              <a:avLst/>
+            </a:prstGeom>
+            <a:noFill/>
+          </p:spPr>
+          <p:txBody>
+            <a:bodyPr lIns="0" rIns="0" tIns="0" bIns="0" anchorCtr="1" anchor="ctr" wrap="none"/>
+            <a:lstStyle/>
+            <a:p>
+              <a:pPr algn="l" marL="0" marR="0" indent="0">
+                <a:lnSpc>
+                  <a:spcPts val="1320"/>
+                </a:lnSpc>
+                <a:spcBef>
+                  <a:spcPts val="0"/>
+                </a:spcBef>
+                <a:spcAft>
+                  <a:spcPts val="0"/>
+                </a:spcAft>
+              </a:pPr>
+              <a:r>
+                <a:rPr sz="1320">
+                  <a:solidFill>
+                    <a:srgbClr val="000000">
+                      <a:alpha val="100000"/>
+                    </a:srgbClr>
+                  </a:solidFill>
+                  <a:latin typeface="Helvetica"/>
+                  <a:cs typeface="Helvetica"/>
+                </a:rPr>
+                <a:t>Infection/Sepsis (Carboplatin AUC ≥ 3)</a:t>
+              </a:r>
+            </a:p>
+          </p:txBody>
+        </p:sp>
+        <p:sp>
+          <p:nvSpPr>
+            <p:cNvPr id="39" name="pl39"/>
+            <p:cNvSpPr/>
+            <p:nvPr/>
+          </p:nvSpPr>
+          <p:spPr>
+            <a:xfrm>
+              <a:off x="887106" y="5444019"/>
+              <a:ext cx="7660515" cy="0"/>
+            </a:xfrm>
+            <a:custGeom>
+              <a:avLst/>
+              <a:pathLst>
+                <a:path w="7660515" h="0">
+                  <a:moveTo>
+                    <a:pt x="0" y="0"/>
+                  </a:moveTo>
+                  <a:lnTo>
+                    <a:pt x="7660515" y="0"/>
+                  </a:lnTo>
+                  <a:lnTo>
+                    <a:pt x="7660515" y="0"/>
+                  </a:lnTo>
+                </a:path>
+              </a:pathLst>
+            </a:custGeom>
+            <a:ln w="6775" cap="flat">
+              <a:solidFill>
+                <a:srgbClr val="EBEBEB">
+                  <a:alpha val="100000"/>
+                </a:srgbClr>
+              </a:solidFill>
+              <a:prstDash val="solid"/>
+              <a:round/>
+            </a:ln>
+          </p:spPr>
+          <p:txBody>
+            <a:bodyPr/>
+            <a:lstStyle/>
+            <a:p/>
+          </p:txBody>
+        </p:sp>
+        <p:sp>
+          <p:nvSpPr>
+            <p:cNvPr id="40" name="pl40"/>
+            <p:cNvSpPr/>
+            <p:nvPr/>
+          </p:nvSpPr>
+          <p:spPr>
+            <a:xfrm>
+              <a:off x="887106" y="5144686"/>
+              <a:ext cx="7660515" cy="0"/>
+            </a:xfrm>
+            <a:custGeom>
+              <a:avLst/>
+              <a:pathLst>
+                <a:path w="7660515" h="0">
+                  <a:moveTo>
+                    <a:pt x="0" y="0"/>
+                  </a:moveTo>
+                  <a:lnTo>
+                    <a:pt x="7660515" y="0"/>
+                  </a:lnTo>
+                  <a:lnTo>
+                    <a:pt x="7660515" y="0"/>
+                  </a:lnTo>
+                </a:path>
+              </a:pathLst>
+            </a:custGeom>
+            <a:ln w="6775" cap="flat">
+              <a:solidFill>
+                <a:srgbClr val="EBEBEB">
+                  <a:alpha val="100000"/>
+                </a:srgbClr>
+              </a:solidFill>
+              <a:prstDash val="solid"/>
+              <a:round/>
+            </a:ln>
+          </p:spPr>
+          <p:txBody>
+            <a:bodyPr/>
+            <a:lstStyle/>
+            <a:p/>
+          </p:txBody>
+        </p:sp>
+        <p:sp>
+          <p:nvSpPr>
+            <p:cNvPr id="41" name="pl41"/>
+            <p:cNvSpPr/>
+            <p:nvPr/>
+          </p:nvSpPr>
+          <p:spPr>
+            <a:xfrm>
+              <a:off x="887106" y="4845352"/>
+              <a:ext cx="7660515" cy="0"/>
+            </a:xfrm>
+            <a:custGeom>
+              <a:avLst/>
+              <a:pathLst>
+                <a:path w="7660515" h="0">
+                  <a:moveTo>
+                    <a:pt x="0" y="0"/>
+                  </a:moveTo>
+                  <a:lnTo>
+                    <a:pt x="7660515" y="0"/>
+                  </a:lnTo>
+                  <a:lnTo>
+                    <a:pt x="7660515" y="0"/>
+                  </a:lnTo>
+                </a:path>
+              </a:pathLst>
+            </a:custGeom>
+            <a:ln w="6775" cap="flat">
+              <a:solidFill>
+                <a:srgbClr val="EBEBEB">
+                  <a:alpha val="100000"/>
+                </a:srgbClr>
+              </a:solidFill>
+              <a:prstDash val="solid"/>
+              <a:round/>
+            </a:ln>
+          </p:spPr>
+          <p:txBody>
+            <a:bodyPr/>
+            <a:lstStyle/>
+            <a:p/>
+          </p:txBody>
+        </p:sp>
+        <p:sp>
+          <p:nvSpPr>
+            <p:cNvPr id="42" name="pl42"/>
+            <p:cNvSpPr/>
+            <p:nvPr/>
+          </p:nvSpPr>
+          <p:spPr>
+            <a:xfrm>
+              <a:off x="887106" y="4546018"/>
+              <a:ext cx="7660515" cy="0"/>
+            </a:xfrm>
+            <a:custGeom>
+              <a:avLst/>
+              <a:pathLst>
+                <a:path w="7660515" h="0">
+                  <a:moveTo>
+                    <a:pt x="0" y="0"/>
+                  </a:moveTo>
+                  <a:lnTo>
+                    <a:pt x="7660515" y="0"/>
+                  </a:lnTo>
+                  <a:lnTo>
+                    <a:pt x="7660515" y="0"/>
+                  </a:lnTo>
+                </a:path>
+              </a:pathLst>
+            </a:custGeom>
+            <a:ln w="6775" cap="flat">
+              <a:solidFill>
+                <a:srgbClr val="EBEBEB">
+                  <a:alpha val="100000"/>
+                </a:srgbClr>
+              </a:solidFill>
+              <a:prstDash val="solid"/>
+              <a:round/>
+            </a:ln>
+          </p:spPr>
+          <p:txBody>
+            <a:bodyPr/>
+            <a:lstStyle/>
+            <a:p/>
+          </p:txBody>
+        </p:sp>
+        <p:sp>
+          <p:nvSpPr>
+            <p:cNvPr id="43" name="pl43"/>
+            <p:cNvSpPr/>
+            <p:nvPr/>
+          </p:nvSpPr>
+          <p:spPr>
+            <a:xfrm>
+              <a:off x="983303" y="4336484"/>
+              <a:ext cx="0" cy="1317069"/>
+            </a:xfrm>
+            <a:custGeom>
+              <a:avLst/>
+              <a:pathLst>
+                <a:path w="0" h="1317069">
+                  <a:moveTo>
+                    <a:pt x="0" y="1317069"/>
+                  </a:moveTo>
+                  <a:lnTo>
+                    <a:pt x="0" y="0"/>
+                  </a:lnTo>
+                  <a:lnTo>
+                    <a:pt x="0" y="0"/>
+                  </a:lnTo>
+                </a:path>
+              </a:pathLst>
+            </a:custGeom>
+            <a:ln w="6775" cap="flat">
+              <a:solidFill>
+                <a:srgbClr val="EBEBEB">
+                  <a:alpha val="100000"/>
+                </a:srgbClr>
+              </a:solidFill>
+              <a:prstDash val="solid"/>
+              <a:round/>
+            </a:ln>
+          </p:spPr>
+          <p:txBody>
+            <a:bodyPr/>
+            <a:lstStyle/>
+            <a:p/>
+          </p:txBody>
+        </p:sp>
+        <p:sp>
+          <p:nvSpPr>
+            <p:cNvPr id="44" name="pl44"/>
+            <p:cNvSpPr/>
+            <p:nvPr/>
+          </p:nvSpPr>
+          <p:spPr>
+            <a:xfrm>
+              <a:off x="1790468" y="4336484"/>
+              <a:ext cx="0" cy="1317069"/>
+            </a:xfrm>
+            <a:custGeom>
+              <a:avLst/>
+              <a:pathLst>
+                <a:path w="0" h="1317069">
+                  <a:moveTo>
+                    <a:pt x="0" y="1317069"/>
+                  </a:moveTo>
+                  <a:lnTo>
+                    <a:pt x="0" y="0"/>
+                  </a:lnTo>
+                  <a:lnTo>
+                    <a:pt x="0" y="0"/>
+                  </a:lnTo>
+                </a:path>
+              </a:pathLst>
+            </a:custGeom>
+            <a:ln w="6775" cap="flat">
+              <a:solidFill>
+                <a:srgbClr val="EBEBEB">
+                  <a:alpha val="100000"/>
+                </a:srgbClr>
+              </a:solidFill>
+              <a:prstDash val="solid"/>
+              <a:round/>
+            </a:ln>
+          </p:spPr>
+          <p:txBody>
+            <a:bodyPr/>
+            <a:lstStyle/>
+            <a:p/>
+          </p:txBody>
+        </p:sp>
+        <p:sp>
+          <p:nvSpPr>
+            <p:cNvPr id="45" name="pl45"/>
+            <p:cNvSpPr/>
+            <p:nvPr/>
+          </p:nvSpPr>
+          <p:spPr>
+            <a:xfrm>
+              <a:off x="2597634" y="4336484"/>
+              <a:ext cx="0" cy="1317069"/>
+            </a:xfrm>
+            <a:custGeom>
+              <a:avLst/>
+              <a:pathLst>
+                <a:path w="0" h="1317069">
+                  <a:moveTo>
+                    <a:pt x="0" y="1317069"/>
+                  </a:moveTo>
+                  <a:lnTo>
+                    <a:pt x="0" y="0"/>
+                  </a:lnTo>
+                  <a:lnTo>
+                    <a:pt x="0" y="0"/>
+                  </a:lnTo>
+                </a:path>
+              </a:pathLst>
+            </a:custGeom>
+            <a:ln w="6775" cap="flat">
+              <a:solidFill>
+                <a:srgbClr val="EBEBEB">
+                  <a:alpha val="100000"/>
+                </a:srgbClr>
+              </a:solidFill>
+              <a:prstDash val="solid"/>
+              <a:round/>
+            </a:ln>
+          </p:spPr>
+          <p:txBody>
+            <a:bodyPr/>
+            <a:lstStyle/>
+            <a:p/>
+          </p:txBody>
+        </p:sp>
+        <p:sp>
+          <p:nvSpPr>
+            <p:cNvPr id="46" name="pl46"/>
+            <p:cNvSpPr/>
+            <p:nvPr/>
+          </p:nvSpPr>
+          <p:spPr>
+            <a:xfrm>
+              <a:off x="3404799" y="4336484"/>
+              <a:ext cx="0" cy="1317069"/>
+            </a:xfrm>
+            <a:custGeom>
+              <a:avLst/>
+              <a:pathLst>
+                <a:path w="0" h="1317069">
+                  <a:moveTo>
+                    <a:pt x="0" y="1317069"/>
+                  </a:moveTo>
+                  <a:lnTo>
+                    <a:pt x="0" y="0"/>
+                  </a:lnTo>
+                  <a:lnTo>
+                    <a:pt x="0" y="0"/>
+                  </a:lnTo>
+                </a:path>
+              </a:pathLst>
+            </a:custGeom>
+            <a:ln w="6775" cap="flat">
+              <a:solidFill>
+                <a:srgbClr val="EBEBEB">
+                  <a:alpha val="100000"/>
+                </a:srgbClr>
+              </a:solidFill>
+              <a:prstDash val="solid"/>
+              <a:round/>
+            </a:ln>
+          </p:spPr>
+          <p:txBody>
+            <a:bodyPr/>
+            <a:lstStyle/>
+            <a:p/>
+          </p:txBody>
+        </p:sp>
+        <p:sp>
+          <p:nvSpPr>
+            <p:cNvPr id="47" name="pl47"/>
+            <p:cNvSpPr/>
+            <p:nvPr/>
+          </p:nvSpPr>
+          <p:spPr>
+            <a:xfrm>
+              <a:off x="4211965" y="4336484"/>
+              <a:ext cx="0" cy="1317069"/>
+            </a:xfrm>
+            <a:custGeom>
+              <a:avLst/>
+              <a:pathLst>
+                <a:path w="0" h="1317069">
+                  <a:moveTo>
+                    <a:pt x="0" y="1317069"/>
+                  </a:moveTo>
+                  <a:lnTo>
+                    <a:pt x="0" y="0"/>
+                  </a:lnTo>
+                  <a:lnTo>
+                    <a:pt x="0" y="0"/>
+                  </a:lnTo>
+                </a:path>
+              </a:pathLst>
+            </a:custGeom>
+            <a:ln w="6775" cap="flat">
+              <a:solidFill>
+                <a:srgbClr val="EBEBEB">
+                  <a:alpha val="100000"/>
+                </a:srgbClr>
+              </a:solidFill>
+              <a:prstDash val="solid"/>
+              <a:round/>
+            </a:ln>
+          </p:spPr>
+          <p:txBody>
+            <a:bodyPr/>
+            <a:lstStyle/>
+            <a:p/>
+          </p:txBody>
+        </p:sp>
+        <p:sp>
+          <p:nvSpPr>
+            <p:cNvPr id="48" name="pl48"/>
+            <p:cNvSpPr/>
+            <p:nvPr/>
+          </p:nvSpPr>
+          <p:spPr>
+            <a:xfrm>
+              <a:off x="5019130" y="4336484"/>
+              <a:ext cx="0" cy="1317069"/>
+            </a:xfrm>
+            <a:custGeom>
+              <a:avLst/>
+              <a:pathLst>
+                <a:path w="0" h="1317069">
+                  <a:moveTo>
+                    <a:pt x="0" y="1317069"/>
+                  </a:moveTo>
+                  <a:lnTo>
+                    <a:pt x="0" y="0"/>
+                  </a:lnTo>
+                  <a:lnTo>
+                    <a:pt x="0" y="0"/>
+                  </a:lnTo>
+                </a:path>
+              </a:pathLst>
+            </a:custGeom>
+            <a:ln w="6775" cap="flat">
+              <a:solidFill>
+                <a:srgbClr val="EBEBEB">
+                  <a:alpha val="100000"/>
+                </a:srgbClr>
+              </a:solidFill>
+              <a:prstDash val="solid"/>
+              <a:round/>
+            </a:ln>
+          </p:spPr>
+          <p:txBody>
+            <a:bodyPr/>
+            <a:lstStyle/>
+            <a:p/>
+          </p:txBody>
+        </p:sp>
+        <p:sp>
+          <p:nvSpPr>
+            <p:cNvPr id="49" name="pl49"/>
+            <p:cNvSpPr/>
+            <p:nvPr/>
+          </p:nvSpPr>
+          <p:spPr>
+            <a:xfrm>
+              <a:off x="5826296" y="4336484"/>
+              <a:ext cx="0" cy="1317069"/>
+            </a:xfrm>
+            <a:custGeom>
+              <a:avLst/>
+              <a:pathLst>
+                <a:path w="0" h="1317069">
+                  <a:moveTo>
+                    <a:pt x="0" y="1317069"/>
+                  </a:moveTo>
+                  <a:lnTo>
+                    <a:pt x="0" y="0"/>
+                  </a:lnTo>
+                  <a:lnTo>
+                    <a:pt x="0" y="0"/>
+                  </a:lnTo>
+                </a:path>
+              </a:pathLst>
+            </a:custGeom>
+            <a:ln w="6775" cap="flat">
+              <a:solidFill>
+                <a:srgbClr val="EBEBEB">
+                  <a:alpha val="100000"/>
+                </a:srgbClr>
+              </a:solidFill>
+              <a:prstDash val="solid"/>
+              <a:round/>
+            </a:ln>
+          </p:spPr>
+          <p:txBody>
+            <a:bodyPr/>
+            <a:lstStyle/>
+            <a:p/>
+          </p:txBody>
+        </p:sp>
+        <p:sp>
+          <p:nvSpPr>
+            <p:cNvPr id="50" name="pl50"/>
+            <p:cNvSpPr/>
+            <p:nvPr/>
+          </p:nvSpPr>
+          <p:spPr>
+            <a:xfrm>
+              <a:off x="6633461" y="4336484"/>
+              <a:ext cx="0" cy="1317069"/>
+            </a:xfrm>
+            <a:custGeom>
+              <a:avLst/>
+              <a:pathLst>
+                <a:path w="0" h="1317069">
+                  <a:moveTo>
+                    <a:pt x="0" y="1317069"/>
+                  </a:moveTo>
+                  <a:lnTo>
+                    <a:pt x="0" y="0"/>
+                  </a:lnTo>
+                  <a:lnTo>
+                    <a:pt x="0" y="0"/>
+                  </a:lnTo>
+                </a:path>
+              </a:pathLst>
+            </a:custGeom>
+            <a:ln w="6775" cap="flat">
+              <a:solidFill>
+                <a:srgbClr val="EBEBEB">
+                  <a:alpha val="100000"/>
+                </a:srgbClr>
+              </a:solidFill>
+              <a:prstDash val="solid"/>
+              <a:round/>
+            </a:ln>
+          </p:spPr>
+          <p:txBody>
+            <a:bodyPr/>
+            <a:lstStyle/>
+            <a:p/>
+          </p:txBody>
+        </p:sp>
+        <p:sp>
+          <p:nvSpPr>
+            <p:cNvPr id="51" name="pl51"/>
+            <p:cNvSpPr/>
+            <p:nvPr/>
+          </p:nvSpPr>
+          <p:spPr>
+            <a:xfrm>
+              <a:off x="7440627" y="4336484"/>
+              <a:ext cx="0" cy="1317069"/>
+            </a:xfrm>
+            <a:custGeom>
+              <a:avLst/>
+              <a:pathLst>
+                <a:path w="0" h="1317069">
+                  <a:moveTo>
+                    <a:pt x="0" y="1317069"/>
+                  </a:moveTo>
+                  <a:lnTo>
+                    <a:pt x="0" y="0"/>
+                  </a:lnTo>
+                  <a:lnTo>
+                    <a:pt x="0" y="0"/>
+                  </a:lnTo>
+                </a:path>
+              </a:pathLst>
+            </a:custGeom>
+            <a:ln w="6775" cap="flat">
+              <a:solidFill>
+                <a:srgbClr val="EBEBEB">
+                  <a:alpha val="100000"/>
+                </a:srgbClr>
+              </a:solidFill>
+              <a:prstDash val="solid"/>
+              <a:round/>
+            </a:ln>
+          </p:spPr>
+          <p:txBody>
+            <a:bodyPr/>
+            <a:lstStyle/>
+            <a:p/>
+          </p:txBody>
+        </p:sp>
+        <p:sp>
+          <p:nvSpPr>
+            <p:cNvPr id="52" name="pl52"/>
+            <p:cNvSpPr/>
+            <p:nvPr/>
+          </p:nvSpPr>
+          <p:spPr>
+            <a:xfrm>
+              <a:off x="8247792" y="4336484"/>
+              <a:ext cx="0" cy="1317069"/>
+            </a:xfrm>
+            <a:custGeom>
+              <a:avLst/>
+              <a:pathLst>
+                <a:path w="0" h="1317069">
+                  <a:moveTo>
+                    <a:pt x="0" y="1317069"/>
+                  </a:moveTo>
+                  <a:lnTo>
+                    <a:pt x="0" y="0"/>
+                  </a:lnTo>
+                  <a:lnTo>
+                    <a:pt x="0" y="0"/>
+                  </a:lnTo>
+                </a:path>
+              </a:pathLst>
+            </a:custGeom>
+            <a:ln w="6775" cap="flat">
+              <a:solidFill>
+                <a:srgbClr val="EBEBEB">
+                  <a:alpha val="100000"/>
+                </a:srgbClr>
+              </a:solidFill>
+              <a:prstDash val="solid"/>
+              <a:round/>
+            </a:ln>
+          </p:spPr>
+          <p:txBody>
+            <a:bodyPr/>
+            <a:lstStyle/>
+            <a:p/>
+          </p:txBody>
+        </p:sp>
+        <p:sp>
+          <p:nvSpPr>
+            <p:cNvPr id="53" name="pl53"/>
+            <p:cNvSpPr/>
+            <p:nvPr/>
+          </p:nvSpPr>
+          <p:spPr>
+            <a:xfrm>
+              <a:off x="887106" y="5593686"/>
+              <a:ext cx="7660515" cy="0"/>
+            </a:xfrm>
+            <a:custGeom>
+              <a:avLst/>
+              <a:pathLst>
+                <a:path w="7660515" h="0">
+                  <a:moveTo>
+                    <a:pt x="0" y="0"/>
+                  </a:moveTo>
+                  <a:lnTo>
+                    <a:pt x="7660515" y="0"/>
+                  </a:lnTo>
+                  <a:lnTo>
+                    <a:pt x="7660515" y="0"/>
+                  </a:lnTo>
+                </a:path>
+              </a:pathLst>
+            </a:custGeom>
+            <a:ln w="13550" cap="flat">
+              <a:solidFill>
+                <a:srgbClr val="EBEBEB">
+                  <a:alpha val="100000"/>
+                </a:srgbClr>
+              </a:solidFill>
+              <a:prstDash val="solid"/>
+              <a:round/>
+            </a:ln>
+          </p:spPr>
+          <p:txBody>
+            <a:bodyPr/>
+            <a:lstStyle/>
+            <a:p/>
+          </p:txBody>
+        </p:sp>
+        <p:sp>
+          <p:nvSpPr>
+            <p:cNvPr id="54" name="pl54"/>
+            <p:cNvSpPr/>
+            <p:nvPr/>
+          </p:nvSpPr>
+          <p:spPr>
+            <a:xfrm>
+              <a:off x="887106" y="5294352"/>
+              <a:ext cx="7660515" cy="0"/>
+            </a:xfrm>
+            <a:custGeom>
+              <a:avLst/>
+              <a:pathLst>
+                <a:path w="7660515" h="0">
+                  <a:moveTo>
+                    <a:pt x="0" y="0"/>
+                  </a:moveTo>
+                  <a:lnTo>
+                    <a:pt x="7660515" y="0"/>
+                  </a:lnTo>
+                  <a:lnTo>
+                    <a:pt x="7660515" y="0"/>
+                  </a:lnTo>
+                </a:path>
+              </a:pathLst>
+            </a:custGeom>
+            <a:ln w="13550" cap="flat">
+              <a:solidFill>
+                <a:srgbClr val="EBEBEB">
+                  <a:alpha val="100000"/>
+                </a:srgbClr>
+              </a:solidFill>
+              <a:prstDash val="solid"/>
+              <a:round/>
+            </a:ln>
+          </p:spPr>
+          <p:txBody>
+            <a:bodyPr/>
+            <a:lstStyle/>
+            <a:p/>
+          </p:txBody>
+        </p:sp>
+        <p:sp>
+          <p:nvSpPr>
+            <p:cNvPr id="55" name="pl55"/>
+            <p:cNvSpPr/>
+            <p:nvPr/>
+          </p:nvSpPr>
+          <p:spPr>
+            <a:xfrm>
+              <a:off x="887106" y="4995019"/>
+              <a:ext cx="7660515" cy="0"/>
+            </a:xfrm>
+            <a:custGeom>
+              <a:avLst/>
+              <a:pathLst>
+                <a:path w="7660515" h="0">
+                  <a:moveTo>
+                    <a:pt x="0" y="0"/>
+                  </a:moveTo>
+                  <a:lnTo>
+                    <a:pt x="7660515" y="0"/>
+                  </a:lnTo>
+                  <a:lnTo>
+                    <a:pt x="7660515" y="0"/>
+                  </a:lnTo>
+                </a:path>
+              </a:pathLst>
+            </a:custGeom>
+            <a:ln w="13550" cap="flat">
+              <a:solidFill>
+                <a:srgbClr val="EBEBEB">
+                  <a:alpha val="100000"/>
+                </a:srgbClr>
+              </a:solidFill>
+              <a:prstDash val="solid"/>
+              <a:round/>
+            </a:ln>
+          </p:spPr>
+          <p:txBody>
+            <a:bodyPr/>
+            <a:lstStyle/>
+            <a:p/>
+          </p:txBody>
+        </p:sp>
+        <p:sp>
+          <p:nvSpPr>
+            <p:cNvPr id="56" name="pl56"/>
+            <p:cNvSpPr/>
+            <p:nvPr/>
+          </p:nvSpPr>
+          <p:spPr>
+            <a:xfrm>
+              <a:off x="887106" y="4695685"/>
+              <a:ext cx="7660515" cy="0"/>
+            </a:xfrm>
+            <a:custGeom>
+              <a:avLst/>
+              <a:pathLst>
+                <a:path w="7660515" h="0">
+                  <a:moveTo>
+                    <a:pt x="0" y="0"/>
+                  </a:moveTo>
+                  <a:lnTo>
+                    <a:pt x="7660515" y="0"/>
+                  </a:lnTo>
+                  <a:lnTo>
+                    <a:pt x="7660515" y="0"/>
+                  </a:lnTo>
+                </a:path>
+              </a:pathLst>
+            </a:custGeom>
+            <a:ln w="13550" cap="flat">
+              <a:solidFill>
+                <a:srgbClr val="EBEBEB">
+                  <a:alpha val="100000"/>
+                </a:srgbClr>
+              </a:solidFill>
+              <a:prstDash val="solid"/>
+              <a:round/>
+            </a:ln>
+          </p:spPr>
+          <p:txBody>
+            <a:bodyPr/>
+            <a:lstStyle/>
+            <a:p/>
+          </p:txBody>
+        </p:sp>
+        <p:sp>
+          <p:nvSpPr>
+            <p:cNvPr id="57" name="pl57"/>
+            <p:cNvSpPr/>
+            <p:nvPr/>
+          </p:nvSpPr>
+          <p:spPr>
+            <a:xfrm>
+              <a:off x="887106" y="4396351"/>
+              <a:ext cx="7660515" cy="0"/>
+            </a:xfrm>
+            <a:custGeom>
+              <a:avLst/>
+              <a:pathLst>
+                <a:path w="7660515" h="0">
+                  <a:moveTo>
+                    <a:pt x="0" y="0"/>
+                  </a:moveTo>
+                  <a:lnTo>
+                    <a:pt x="7660515" y="0"/>
+                  </a:lnTo>
+                  <a:lnTo>
+                    <a:pt x="7660515" y="0"/>
+                  </a:lnTo>
+                </a:path>
+              </a:pathLst>
+            </a:custGeom>
+            <a:ln w="13550" cap="flat">
+              <a:solidFill>
+                <a:srgbClr val="EBEBEB">
+                  <a:alpha val="100000"/>
+                </a:srgbClr>
+              </a:solidFill>
+              <a:prstDash val="solid"/>
+              <a:round/>
+            </a:ln>
+          </p:spPr>
+          <p:txBody>
+            <a:bodyPr/>
+            <a:lstStyle/>
+            <a:p/>
+          </p:txBody>
+        </p:sp>
+        <p:sp>
+          <p:nvSpPr>
+            <p:cNvPr id="58" name="pl58"/>
+            <p:cNvSpPr/>
+            <p:nvPr/>
+          </p:nvSpPr>
+          <p:spPr>
+            <a:xfrm>
+              <a:off x="1386885" y="4336484"/>
+              <a:ext cx="0" cy="1317069"/>
+            </a:xfrm>
+            <a:custGeom>
+              <a:avLst/>
+              <a:pathLst>
+                <a:path w="0" h="1317069">
+                  <a:moveTo>
+                    <a:pt x="0" y="1317069"/>
+                  </a:moveTo>
+                  <a:lnTo>
+                    <a:pt x="0" y="0"/>
+                  </a:lnTo>
+                  <a:lnTo>
+                    <a:pt x="0" y="0"/>
+                  </a:lnTo>
+                </a:path>
+              </a:pathLst>
+            </a:custGeom>
+            <a:ln w="13550" cap="flat">
+              <a:solidFill>
+                <a:srgbClr val="EBEBEB">
+                  <a:alpha val="100000"/>
+                </a:srgbClr>
+              </a:solidFill>
+              <a:prstDash val="solid"/>
+              <a:round/>
+            </a:ln>
+          </p:spPr>
+          <p:txBody>
+            <a:bodyPr/>
+            <a:lstStyle/>
+            <a:p/>
+          </p:txBody>
+        </p:sp>
+        <p:sp>
+          <p:nvSpPr>
+            <p:cNvPr id="59" name="pl59"/>
+            <p:cNvSpPr/>
+            <p:nvPr/>
+          </p:nvSpPr>
+          <p:spPr>
+            <a:xfrm>
+              <a:off x="2194051" y="4336484"/>
+              <a:ext cx="0" cy="1317069"/>
+            </a:xfrm>
+            <a:custGeom>
+              <a:avLst/>
+              <a:pathLst>
+                <a:path w="0" h="1317069">
+                  <a:moveTo>
+                    <a:pt x="0" y="1317069"/>
+                  </a:moveTo>
+                  <a:lnTo>
+                    <a:pt x="0" y="0"/>
+                  </a:lnTo>
+                  <a:lnTo>
+                    <a:pt x="0" y="0"/>
+                  </a:lnTo>
+                </a:path>
+              </a:pathLst>
+            </a:custGeom>
+            <a:ln w="13550" cap="flat">
+              <a:solidFill>
+                <a:srgbClr val="EBEBEB">
+                  <a:alpha val="100000"/>
+                </a:srgbClr>
+              </a:solidFill>
+              <a:prstDash val="solid"/>
+              <a:round/>
+            </a:ln>
+          </p:spPr>
+          <p:txBody>
+            <a:bodyPr/>
+            <a:lstStyle/>
+            <a:p/>
+          </p:txBody>
+        </p:sp>
+        <p:sp>
+          <p:nvSpPr>
+            <p:cNvPr id="60" name="pl60"/>
+            <p:cNvSpPr/>
+            <p:nvPr/>
+          </p:nvSpPr>
+          <p:spPr>
+            <a:xfrm>
+              <a:off x="3001216" y="4336484"/>
+              <a:ext cx="0" cy="1317069"/>
+            </a:xfrm>
+            <a:custGeom>
+              <a:avLst/>
+              <a:pathLst>
+                <a:path w="0" h="1317069">
+                  <a:moveTo>
+                    <a:pt x="0" y="1317069"/>
+                  </a:moveTo>
+                  <a:lnTo>
+                    <a:pt x="0" y="0"/>
+                  </a:lnTo>
+                  <a:lnTo>
+                    <a:pt x="0" y="0"/>
+                  </a:lnTo>
+                </a:path>
+              </a:pathLst>
+            </a:custGeom>
+            <a:ln w="13550" cap="flat">
+              <a:solidFill>
+                <a:srgbClr val="EBEBEB">
+                  <a:alpha val="100000"/>
+                </a:srgbClr>
+              </a:solidFill>
+              <a:prstDash val="solid"/>
+              <a:round/>
+            </a:ln>
+          </p:spPr>
+          <p:txBody>
+            <a:bodyPr/>
+            <a:lstStyle/>
+            <a:p/>
+          </p:txBody>
+        </p:sp>
+        <p:sp>
+          <p:nvSpPr>
+            <p:cNvPr id="61" name="pl61"/>
+            <p:cNvSpPr/>
+            <p:nvPr/>
+          </p:nvSpPr>
+          <p:spPr>
+            <a:xfrm>
+              <a:off x="3808382" y="4336484"/>
+              <a:ext cx="0" cy="1317069"/>
+            </a:xfrm>
+            <a:custGeom>
+              <a:avLst/>
+              <a:pathLst>
+                <a:path w="0" h="1317069">
+                  <a:moveTo>
+                    <a:pt x="0" y="1317069"/>
+                  </a:moveTo>
+                  <a:lnTo>
+                    <a:pt x="0" y="0"/>
+                  </a:lnTo>
+                  <a:lnTo>
+                    <a:pt x="0" y="0"/>
+                  </a:lnTo>
+                </a:path>
+              </a:pathLst>
+            </a:custGeom>
+            <a:ln w="13550" cap="flat">
+              <a:solidFill>
+                <a:srgbClr val="EBEBEB">
+                  <a:alpha val="100000"/>
+                </a:srgbClr>
+              </a:solidFill>
+              <a:prstDash val="solid"/>
+              <a:round/>
+            </a:ln>
+          </p:spPr>
+          <p:txBody>
+            <a:bodyPr/>
+            <a:lstStyle/>
+            <a:p/>
+          </p:txBody>
+        </p:sp>
+        <p:sp>
+          <p:nvSpPr>
+            <p:cNvPr id="62" name="pl62"/>
+            <p:cNvSpPr/>
+            <p:nvPr/>
+          </p:nvSpPr>
+          <p:spPr>
+            <a:xfrm>
+              <a:off x="4615547" y="4336484"/>
+              <a:ext cx="0" cy="1317069"/>
+            </a:xfrm>
+            <a:custGeom>
+              <a:avLst/>
+              <a:pathLst>
+                <a:path w="0" h="1317069">
+                  <a:moveTo>
+                    <a:pt x="0" y="1317069"/>
+                  </a:moveTo>
+                  <a:lnTo>
+                    <a:pt x="0" y="0"/>
+                  </a:lnTo>
+                  <a:lnTo>
+                    <a:pt x="0" y="0"/>
+                  </a:lnTo>
+                </a:path>
+              </a:pathLst>
+            </a:custGeom>
+            <a:ln w="13550" cap="flat">
+              <a:solidFill>
+                <a:srgbClr val="EBEBEB">
+                  <a:alpha val="100000"/>
+                </a:srgbClr>
+              </a:solidFill>
+              <a:prstDash val="solid"/>
+              <a:round/>
+            </a:ln>
+          </p:spPr>
+          <p:txBody>
+            <a:bodyPr/>
+            <a:lstStyle/>
+            <a:p/>
+          </p:txBody>
+        </p:sp>
+        <p:sp>
+          <p:nvSpPr>
+            <p:cNvPr id="63" name="pl63"/>
+            <p:cNvSpPr/>
+            <p:nvPr/>
+          </p:nvSpPr>
+          <p:spPr>
+            <a:xfrm>
+              <a:off x="5422713" y="4336484"/>
+              <a:ext cx="0" cy="1317069"/>
+            </a:xfrm>
+            <a:custGeom>
+              <a:avLst/>
+              <a:pathLst>
+                <a:path w="0" h="1317069">
+                  <a:moveTo>
+                    <a:pt x="0" y="1317069"/>
+                  </a:moveTo>
+                  <a:lnTo>
+                    <a:pt x="0" y="0"/>
+                  </a:lnTo>
+                  <a:lnTo>
+                    <a:pt x="0" y="0"/>
+                  </a:lnTo>
+                </a:path>
+              </a:pathLst>
+            </a:custGeom>
+            <a:ln w="13550" cap="flat">
+              <a:solidFill>
+                <a:srgbClr val="EBEBEB">
+                  <a:alpha val="100000"/>
+                </a:srgbClr>
+              </a:solidFill>
+              <a:prstDash val="solid"/>
+              <a:round/>
+            </a:ln>
+          </p:spPr>
+          <p:txBody>
+            <a:bodyPr/>
+            <a:lstStyle/>
+            <a:p/>
+          </p:txBody>
+        </p:sp>
+        <p:sp>
+          <p:nvSpPr>
+            <p:cNvPr id="64" name="pl64"/>
+            <p:cNvSpPr/>
+            <p:nvPr/>
+          </p:nvSpPr>
+          <p:spPr>
+            <a:xfrm>
+              <a:off x="6229878" y="4336484"/>
+              <a:ext cx="0" cy="1317069"/>
+            </a:xfrm>
+            <a:custGeom>
+              <a:avLst/>
+              <a:pathLst>
+                <a:path w="0" h="1317069">
+                  <a:moveTo>
+                    <a:pt x="0" y="1317069"/>
+                  </a:moveTo>
+                  <a:lnTo>
+                    <a:pt x="0" y="0"/>
+                  </a:lnTo>
+                  <a:lnTo>
+                    <a:pt x="0" y="0"/>
+                  </a:lnTo>
+                </a:path>
+              </a:pathLst>
+            </a:custGeom>
+            <a:ln w="13550" cap="flat">
+              <a:solidFill>
+                <a:srgbClr val="EBEBEB">
+                  <a:alpha val="100000"/>
+                </a:srgbClr>
+              </a:solidFill>
+              <a:prstDash val="solid"/>
+              <a:round/>
+            </a:ln>
+          </p:spPr>
+          <p:txBody>
+            <a:bodyPr/>
+            <a:lstStyle/>
+            <a:p/>
+          </p:txBody>
+        </p:sp>
+        <p:sp>
+          <p:nvSpPr>
+            <p:cNvPr id="65" name="pl65"/>
+            <p:cNvSpPr/>
+            <p:nvPr/>
+          </p:nvSpPr>
+          <p:spPr>
+            <a:xfrm>
+              <a:off x="7037044" y="4336484"/>
+              <a:ext cx="0" cy="1317069"/>
+            </a:xfrm>
+            <a:custGeom>
+              <a:avLst/>
+              <a:pathLst>
+                <a:path w="0" h="1317069">
+                  <a:moveTo>
+                    <a:pt x="0" y="1317069"/>
+                  </a:moveTo>
+                  <a:lnTo>
+                    <a:pt x="0" y="0"/>
+                  </a:lnTo>
+                  <a:lnTo>
+                    <a:pt x="0" y="0"/>
+                  </a:lnTo>
+                </a:path>
+              </a:pathLst>
+            </a:custGeom>
+            <a:ln w="13550" cap="flat">
+              <a:solidFill>
+                <a:srgbClr val="EBEBEB">
+                  <a:alpha val="100000"/>
+                </a:srgbClr>
+              </a:solidFill>
+              <a:prstDash val="solid"/>
+              <a:round/>
+            </a:ln>
+          </p:spPr>
+          <p:txBody>
+            <a:bodyPr/>
+            <a:lstStyle/>
+            <a:p/>
+          </p:txBody>
+        </p:sp>
+        <p:sp>
+          <p:nvSpPr>
+            <p:cNvPr id="66" name="pl66"/>
+            <p:cNvSpPr/>
+            <p:nvPr/>
+          </p:nvSpPr>
+          <p:spPr>
+            <a:xfrm>
+              <a:off x="7844209" y="4336484"/>
+              <a:ext cx="0" cy="1317069"/>
+            </a:xfrm>
+            <a:custGeom>
+              <a:avLst/>
+              <a:pathLst>
+                <a:path w="0" h="1317069">
+                  <a:moveTo>
+                    <a:pt x="0" y="1317069"/>
+                  </a:moveTo>
+                  <a:lnTo>
+                    <a:pt x="0" y="0"/>
+                  </a:lnTo>
+                  <a:lnTo>
+                    <a:pt x="0" y="0"/>
+                  </a:lnTo>
+                </a:path>
+              </a:pathLst>
+            </a:custGeom>
+            <a:ln w="13550" cap="flat">
+              <a:solidFill>
+                <a:srgbClr val="EBEBEB">
+                  <a:alpha val="100000"/>
+                </a:srgbClr>
+              </a:solidFill>
+              <a:prstDash val="solid"/>
+              <a:round/>
+            </a:ln>
+          </p:spPr>
+          <p:txBody>
+            <a:bodyPr/>
+            <a:lstStyle/>
+            <a:p/>
+          </p:txBody>
+        </p:sp>
+        <p:sp>
+          <p:nvSpPr>
+            <p:cNvPr id="67" name="pg67"/>
+            <p:cNvSpPr/>
+            <p:nvPr/>
+          </p:nvSpPr>
+          <p:spPr>
+            <a:xfrm>
+              <a:off x="1235312" y="4336484"/>
+              <a:ext cx="6964104" cy="1226672"/>
+            </a:xfrm>
+            <a:custGeom>
+              <a:avLst/>
+              <a:pathLst>
+                <a:path w="6964104" h="1226672">
+                  <a:moveTo>
+                    <a:pt x="895152" y="0"/>
+                  </a:moveTo>
+                  <a:lnTo>
+                    <a:pt x="914478" y="15027"/>
+                  </a:lnTo>
+                  <a:lnTo>
+                    <a:pt x="984822" y="67418"/>
+                  </a:lnTo>
+                  <a:lnTo>
+                    <a:pt x="1055167" y="117599"/>
+                  </a:lnTo>
+                  <a:lnTo>
+                    <a:pt x="1125511" y="165664"/>
+                  </a:lnTo>
+                  <a:lnTo>
+                    <a:pt x="1195856" y="211701"/>
+                  </a:lnTo>
+                  <a:lnTo>
+                    <a:pt x="1266200" y="255797"/>
+                  </a:lnTo>
+                  <a:lnTo>
+                    <a:pt x="1336545" y="298033"/>
+                  </a:lnTo>
+                  <a:lnTo>
+                    <a:pt x="1406889" y="338488"/>
+                  </a:lnTo>
+                  <a:lnTo>
+                    <a:pt x="1477234" y="377236"/>
+                  </a:lnTo>
+                  <a:lnTo>
+                    <a:pt x="1547578" y="414350"/>
+                  </a:lnTo>
+                  <a:lnTo>
+                    <a:pt x="1617923" y="449899"/>
+                  </a:lnTo>
+                  <a:lnTo>
+                    <a:pt x="1688267" y="483948"/>
+                  </a:lnTo>
+                  <a:lnTo>
+                    <a:pt x="1758612" y="516562"/>
+                  </a:lnTo>
+                  <a:lnTo>
+                    <a:pt x="1828956" y="547799"/>
+                  </a:lnTo>
+                  <a:lnTo>
+                    <a:pt x="1899301" y="577720"/>
+                  </a:lnTo>
+                  <a:lnTo>
+                    <a:pt x="1969645" y="606378"/>
+                  </a:lnTo>
+                  <a:lnTo>
+                    <a:pt x="2039990" y="633828"/>
+                  </a:lnTo>
+                  <a:lnTo>
+                    <a:pt x="2110334" y="660119"/>
+                  </a:lnTo>
+                  <a:lnTo>
+                    <a:pt x="2180679" y="685302"/>
+                  </a:lnTo>
+                  <a:lnTo>
+                    <a:pt x="2251023" y="709423"/>
+                  </a:lnTo>
+                  <a:lnTo>
+                    <a:pt x="2321368" y="732527"/>
+                  </a:lnTo>
+                  <a:lnTo>
+                    <a:pt x="2391712" y="754656"/>
+                  </a:lnTo>
+                  <a:lnTo>
+                    <a:pt x="2462057" y="775852"/>
+                  </a:lnTo>
+                  <a:lnTo>
+                    <a:pt x="2532401" y="796153"/>
+                  </a:lnTo>
+                  <a:lnTo>
+                    <a:pt x="2602746" y="815599"/>
+                  </a:lnTo>
+                  <a:lnTo>
+                    <a:pt x="2673090" y="834224"/>
+                  </a:lnTo>
+                  <a:lnTo>
+                    <a:pt x="2743435" y="852064"/>
+                  </a:lnTo>
+                  <a:lnTo>
+                    <a:pt x="2813779" y="869151"/>
+                  </a:lnTo>
+                  <a:lnTo>
+                    <a:pt x="2884124" y="885518"/>
+                  </a:lnTo>
+                  <a:lnTo>
+                    <a:pt x="2954468" y="901195"/>
+                  </a:lnTo>
+                  <a:lnTo>
+                    <a:pt x="3024813" y="916210"/>
+                  </a:lnTo>
+                  <a:lnTo>
+                    <a:pt x="3095157" y="930592"/>
+                  </a:lnTo>
+                  <a:lnTo>
+                    <a:pt x="3165502" y="944367"/>
+                  </a:lnTo>
+                  <a:lnTo>
+                    <a:pt x="3235846" y="957561"/>
+                  </a:lnTo>
+                  <a:lnTo>
+                    <a:pt x="3306191" y="959372"/>
+                  </a:lnTo>
+                  <a:lnTo>
+                    <a:pt x="3376535" y="960905"/>
+                  </a:lnTo>
+                  <a:lnTo>
+                    <a:pt x="3446880" y="962431"/>
+                  </a:lnTo>
+                  <a:lnTo>
+                    <a:pt x="3517224" y="963948"/>
+                  </a:lnTo>
+                  <a:lnTo>
+                    <a:pt x="3587569" y="965458"/>
+                  </a:lnTo>
+                  <a:lnTo>
+                    <a:pt x="3657913" y="966960"/>
+                  </a:lnTo>
+                  <a:lnTo>
+                    <a:pt x="3728257" y="968454"/>
+                  </a:lnTo>
+                  <a:lnTo>
+                    <a:pt x="3798602" y="969940"/>
+                  </a:lnTo>
+                  <a:lnTo>
+                    <a:pt x="3868946" y="971419"/>
+                  </a:lnTo>
+                  <a:lnTo>
+                    <a:pt x="3939291" y="972890"/>
+                  </a:lnTo>
+                  <a:lnTo>
+                    <a:pt x="4009635" y="974354"/>
+                  </a:lnTo>
+                  <a:lnTo>
+                    <a:pt x="4079980" y="975810"/>
+                  </a:lnTo>
+                  <a:lnTo>
+                    <a:pt x="4150324" y="977258"/>
+                  </a:lnTo>
+                  <a:lnTo>
+                    <a:pt x="4220669" y="978699"/>
+                  </a:lnTo>
+                  <a:lnTo>
+                    <a:pt x="4291013" y="980133"/>
+                  </a:lnTo>
+                  <a:lnTo>
+                    <a:pt x="4361358" y="981559"/>
+                  </a:lnTo>
+                  <a:lnTo>
+                    <a:pt x="4431702" y="982978"/>
+                  </a:lnTo>
+                  <a:lnTo>
+                    <a:pt x="4502047" y="984390"/>
+                  </a:lnTo>
+                  <a:lnTo>
+                    <a:pt x="4572391" y="985794"/>
+                  </a:lnTo>
+                  <a:lnTo>
+                    <a:pt x="4642736" y="987192"/>
+                  </a:lnTo>
+                  <a:lnTo>
+                    <a:pt x="4713080" y="988582"/>
+                  </a:lnTo>
+                  <a:lnTo>
+                    <a:pt x="4783425" y="989964"/>
+                  </a:lnTo>
+                  <a:lnTo>
+                    <a:pt x="4853769" y="991340"/>
+                  </a:lnTo>
+                  <a:lnTo>
+                    <a:pt x="4924114" y="992709"/>
+                  </a:lnTo>
+                  <a:lnTo>
+                    <a:pt x="4994458" y="994070"/>
+                  </a:lnTo>
+                  <a:lnTo>
+                    <a:pt x="5064803" y="995425"/>
+                  </a:lnTo>
+                  <a:lnTo>
+                    <a:pt x="5135147" y="996772"/>
+                  </a:lnTo>
+                  <a:lnTo>
+                    <a:pt x="5205492" y="998113"/>
+                  </a:lnTo>
+                  <a:lnTo>
+                    <a:pt x="5275836" y="999447"/>
+                  </a:lnTo>
+                  <a:lnTo>
+                    <a:pt x="5346181" y="1000774"/>
+                  </a:lnTo>
+                  <a:lnTo>
+                    <a:pt x="5416525" y="1002094"/>
+                  </a:lnTo>
+                  <a:lnTo>
+                    <a:pt x="5486870" y="1003407"/>
+                  </a:lnTo>
+                  <a:lnTo>
+                    <a:pt x="5557214" y="1004713"/>
+                  </a:lnTo>
+                  <a:lnTo>
+                    <a:pt x="5627559" y="1006013"/>
+                  </a:lnTo>
+                  <a:lnTo>
+                    <a:pt x="5697903" y="1007306"/>
+                  </a:lnTo>
+                  <a:lnTo>
+                    <a:pt x="5768248" y="1008593"/>
+                  </a:lnTo>
+                  <a:lnTo>
+                    <a:pt x="5838592" y="1009872"/>
+                  </a:lnTo>
+                  <a:lnTo>
+                    <a:pt x="5908937" y="1011146"/>
+                  </a:lnTo>
+                  <a:lnTo>
+                    <a:pt x="5979281" y="1012412"/>
+                  </a:lnTo>
+                  <a:lnTo>
+                    <a:pt x="6049626" y="1013672"/>
+                  </a:lnTo>
+                  <a:lnTo>
+                    <a:pt x="6119970" y="1014926"/>
+                  </a:lnTo>
+                  <a:lnTo>
+                    <a:pt x="6190315" y="1016173"/>
+                  </a:lnTo>
+                  <a:lnTo>
+                    <a:pt x="6260659" y="1017414"/>
+                  </a:lnTo>
+                  <a:lnTo>
+                    <a:pt x="6331004" y="1018648"/>
+                  </a:lnTo>
+                  <a:lnTo>
+                    <a:pt x="6401348" y="1019876"/>
+                  </a:lnTo>
+                  <a:lnTo>
+                    <a:pt x="6471693" y="1021098"/>
+                  </a:lnTo>
+                  <a:lnTo>
+                    <a:pt x="6542037" y="1022314"/>
+                  </a:lnTo>
+                  <a:lnTo>
+                    <a:pt x="6612382" y="1023523"/>
+                  </a:lnTo>
+                  <a:lnTo>
+                    <a:pt x="6682726" y="1024726"/>
+                  </a:lnTo>
+                  <a:lnTo>
+                    <a:pt x="6753071" y="1025922"/>
+                  </a:lnTo>
+                  <a:lnTo>
+                    <a:pt x="6823415" y="1027113"/>
+                  </a:lnTo>
+                  <a:lnTo>
+                    <a:pt x="6893760" y="1028297"/>
+                  </a:lnTo>
+                  <a:lnTo>
+                    <a:pt x="6964104" y="1029476"/>
+                  </a:lnTo>
+                  <a:lnTo>
+                    <a:pt x="6964104" y="1226672"/>
+                  </a:lnTo>
+                  <a:lnTo>
+                    <a:pt x="6893760" y="1225328"/>
+                  </a:lnTo>
+                  <a:lnTo>
+                    <a:pt x="6823415" y="1223924"/>
+                  </a:lnTo>
+                  <a:lnTo>
+                    <a:pt x="6753071" y="1222459"/>
+                  </a:lnTo>
+                  <a:lnTo>
+                    <a:pt x="6682726" y="1220929"/>
+                  </a:lnTo>
+                  <a:lnTo>
+                    <a:pt x="6612382" y="1219331"/>
+                  </a:lnTo>
+                  <a:lnTo>
+                    <a:pt x="6542037" y="1217664"/>
+                  </a:lnTo>
+                  <a:lnTo>
+                    <a:pt x="6471693" y="1215923"/>
+                  </a:lnTo>
+                  <a:lnTo>
+                    <a:pt x="6401348" y="1214105"/>
+                  </a:lnTo>
+                  <a:lnTo>
+                    <a:pt x="6331004" y="1212208"/>
+                  </a:lnTo>
+                  <a:lnTo>
+                    <a:pt x="6260659" y="1210226"/>
+                  </a:lnTo>
+                  <a:lnTo>
+                    <a:pt x="6190315" y="1208158"/>
+                  </a:lnTo>
+                  <a:lnTo>
+                    <a:pt x="6119970" y="1205998"/>
+                  </a:lnTo>
+                  <a:lnTo>
+                    <a:pt x="6049626" y="1203743"/>
+                  </a:lnTo>
+                  <a:lnTo>
+                    <a:pt x="5979281" y="1201389"/>
+                  </a:lnTo>
+                  <a:lnTo>
+                    <a:pt x="5908937" y="1198932"/>
+                  </a:lnTo>
+                  <a:lnTo>
+                    <a:pt x="5838592" y="1196366"/>
+                  </a:lnTo>
+                  <a:lnTo>
+                    <a:pt x="5768248" y="1193687"/>
+                  </a:lnTo>
+                  <a:lnTo>
+                    <a:pt x="5697903" y="1190890"/>
+                  </a:lnTo>
+                  <a:lnTo>
+                    <a:pt x="5627559" y="1187970"/>
+                  </a:lnTo>
+                  <a:lnTo>
+                    <a:pt x="5557214" y="1184922"/>
+                  </a:lnTo>
+                  <a:lnTo>
+                    <a:pt x="5486870" y="1181739"/>
+                  </a:lnTo>
+                  <a:lnTo>
+                    <a:pt x="5416525" y="1178416"/>
+                  </a:lnTo>
+                  <a:lnTo>
+                    <a:pt x="5346181" y="1174947"/>
+                  </a:lnTo>
+                  <a:lnTo>
+                    <a:pt x="5275836" y="1171325"/>
+                  </a:lnTo>
+                  <a:lnTo>
+                    <a:pt x="5205492" y="1167543"/>
+                  </a:lnTo>
+                  <a:lnTo>
+                    <a:pt x="5135147" y="1163595"/>
+                  </a:lnTo>
+                  <a:lnTo>
+                    <a:pt x="5064803" y="1159473"/>
+                  </a:lnTo>
+                  <a:lnTo>
+                    <a:pt x="4994458" y="1155170"/>
+                  </a:lnTo>
+                  <a:lnTo>
+                    <a:pt x="4924114" y="1150677"/>
+                  </a:lnTo>
+                  <a:lnTo>
+                    <a:pt x="4853769" y="1145987"/>
+                  </a:lnTo>
+                  <a:lnTo>
+                    <a:pt x="4783425" y="1141089"/>
+                  </a:lnTo>
+                  <a:lnTo>
+                    <a:pt x="4713080" y="1135976"/>
+                  </a:lnTo>
+                  <a:lnTo>
+                    <a:pt x="4642736" y="1130638"/>
+                  </a:lnTo>
+                  <a:lnTo>
+                    <a:pt x="4572391" y="1125065"/>
+                  </a:lnTo>
+                  <a:lnTo>
+                    <a:pt x="4502047" y="1119247"/>
+                  </a:lnTo>
+                  <a:lnTo>
+                    <a:pt x="4431702" y="1113172"/>
+                  </a:lnTo>
+                  <a:lnTo>
+                    <a:pt x="4361358" y="1106830"/>
+                  </a:lnTo>
+                  <a:lnTo>
+                    <a:pt x="4291013" y="1100208"/>
+                  </a:lnTo>
+                  <a:lnTo>
+                    <a:pt x="4220669" y="1093295"/>
+                  </a:lnTo>
+                  <a:lnTo>
+                    <a:pt x="4150324" y="1086078"/>
+                  </a:lnTo>
+                  <a:lnTo>
+                    <a:pt x="4079980" y="1078543"/>
+                  </a:lnTo>
+                  <a:lnTo>
+                    <a:pt x="4009635" y="1070676"/>
+                  </a:lnTo>
+                  <a:lnTo>
+                    <a:pt x="3939291" y="1062462"/>
+                  </a:lnTo>
+                  <a:lnTo>
+                    <a:pt x="3868946" y="1053887"/>
+                  </a:lnTo>
+                  <a:lnTo>
+                    <a:pt x="3798602" y="1044934"/>
+                  </a:lnTo>
+                  <a:lnTo>
+                    <a:pt x="3728257" y="1035587"/>
+                  </a:lnTo>
+                  <a:lnTo>
+                    <a:pt x="3657913" y="1025829"/>
+                  </a:lnTo>
+                  <a:lnTo>
+                    <a:pt x="3587569" y="1015641"/>
+                  </a:lnTo>
+                  <a:lnTo>
+                    <a:pt x="3517224" y="1005004"/>
+                  </a:lnTo>
+                  <a:lnTo>
+                    <a:pt x="3446880" y="993898"/>
+                  </a:lnTo>
+                  <a:lnTo>
+                    <a:pt x="3376535" y="982304"/>
+                  </a:lnTo>
+                  <a:lnTo>
+                    <a:pt x="3306191" y="970199"/>
+                  </a:lnTo>
+                  <a:lnTo>
+                    <a:pt x="3235846" y="957831"/>
+                  </a:lnTo>
+                  <a:lnTo>
+                    <a:pt x="3165502" y="956282"/>
+                  </a:lnTo>
+                  <a:lnTo>
+                    <a:pt x="3095157" y="954725"/>
+                  </a:lnTo>
+                  <a:lnTo>
+                    <a:pt x="3024813" y="953160"/>
+                  </a:lnTo>
+                  <a:lnTo>
+                    <a:pt x="2954468" y="951587"/>
+                  </a:lnTo>
+                  <a:lnTo>
+                    <a:pt x="2884124" y="950005"/>
+                  </a:lnTo>
+                  <a:lnTo>
+                    <a:pt x="2813779" y="948416"/>
+                  </a:lnTo>
+                  <a:lnTo>
+                    <a:pt x="2743435" y="946818"/>
+                  </a:lnTo>
+                  <a:lnTo>
+                    <a:pt x="2673090" y="945212"/>
+                  </a:lnTo>
+                  <a:lnTo>
+                    <a:pt x="2602746" y="943597"/>
+                  </a:lnTo>
+                  <a:lnTo>
+                    <a:pt x="2532401" y="941975"/>
+                  </a:lnTo>
+                  <a:lnTo>
+                    <a:pt x="2462057" y="940344"/>
+                  </a:lnTo>
+                  <a:lnTo>
+                    <a:pt x="2391712" y="938704"/>
+                  </a:lnTo>
+                  <a:lnTo>
+                    <a:pt x="2321368" y="937056"/>
+                  </a:lnTo>
+                  <a:lnTo>
+                    <a:pt x="2251023" y="935399"/>
+                  </a:lnTo>
+                  <a:lnTo>
+                    <a:pt x="2180679" y="933734"/>
+                  </a:lnTo>
+                  <a:lnTo>
+                    <a:pt x="2110334" y="932060"/>
+                  </a:lnTo>
+                  <a:lnTo>
+                    <a:pt x="2039990" y="930378"/>
+                  </a:lnTo>
+                  <a:lnTo>
+                    <a:pt x="1969645" y="928687"/>
+                  </a:lnTo>
+                  <a:lnTo>
+                    <a:pt x="1899301" y="926987"/>
+                  </a:lnTo>
+                  <a:lnTo>
+                    <a:pt x="1828956" y="925278"/>
+                  </a:lnTo>
+                  <a:lnTo>
+                    <a:pt x="1758612" y="923561"/>
+                  </a:lnTo>
+                  <a:lnTo>
+                    <a:pt x="1688267" y="921834"/>
+                  </a:lnTo>
+                  <a:lnTo>
+                    <a:pt x="1617923" y="920099"/>
+                  </a:lnTo>
+                  <a:lnTo>
+                    <a:pt x="1547578" y="918355"/>
+                  </a:lnTo>
+                  <a:lnTo>
+                    <a:pt x="1477234" y="916601"/>
+                  </a:lnTo>
+                  <a:lnTo>
+                    <a:pt x="1406889" y="914839"/>
+                  </a:lnTo>
+                  <a:lnTo>
+                    <a:pt x="1336545" y="913067"/>
+                  </a:lnTo>
+                  <a:lnTo>
+                    <a:pt x="1266200" y="911287"/>
+                  </a:lnTo>
+                  <a:lnTo>
+                    <a:pt x="1195856" y="909497"/>
+                  </a:lnTo>
+                  <a:lnTo>
+                    <a:pt x="1125511" y="907698"/>
+                  </a:lnTo>
+                  <a:lnTo>
+                    <a:pt x="1055167" y="905889"/>
+                  </a:lnTo>
+                  <a:lnTo>
+                    <a:pt x="984822" y="904071"/>
+                  </a:lnTo>
+                  <a:lnTo>
+                    <a:pt x="914478" y="902244"/>
+                  </a:lnTo>
+                  <a:lnTo>
+                    <a:pt x="844133" y="900407"/>
+                  </a:lnTo>
+                  <a:lnTo>
+                    <a:pt x="773789" y="898561"/>
+                  </a:lnTo>
+                  <a:lnTo>
+                    <a:pt x="703444" y="896705"/>
+                  </a:lnTo>
+                  <a:lnTo>
+                    <a:pt x="633100" y="894840"/>
+                  </a:lnTo>
+                  <a:lnTo>
+                    <a:pt x="562755" y="892965"/>
+                  </a:lnTo>
+                  <a:lnTo>
+                    <a:pt x="492411" y="891080"/>
+                  </a:lnTo>
+                  <a:lnTo>
+                    <a:pt x="422066" y="889186"/>
+                  </a:lnTo>
+                  <a:lnTo>
+                    <a:pt x="351722" y="887281"/>
+                  </a:lnTo>
+                  <a:lnTo>
+                    <a:pt x="281377" y="885367"/>
+                  </a:lnTo>
+                  <a:lnTo>
+                    <a:pt x="211033" y="883443"/>
+                  </a:lnTo>
+                  <a:lnTo>
+                    <a:pt x="140688" y="881509"/>
+                  </a:lnTo>
+                  <a:lnTo>
+                    <a:pt x="70344" y="879565"/>
+                  </a:lnTo>
+                  <a:lnTo>
+                    <a:pt x="0" y="877611"/>
+                  </a:lnTo>
+                  <a:close/>
+                </a:path>
+              </a:pathLst>
+            </a:custGeom>
+            <a:solidFill>
+              <a:srgbClr val="FF8C00">
+                <a:alpha val="20000"/>
+              </a:srgbClr>
+            </a:solidFill>
+          </p:spPr>
+          <p:txBody>
+            <a:bodyPr/>
+            <a:lstStyle/>
+            <a:p/>
+          </p:txBody>
+        </p:sp>
+        <p:sp>
+          <p:nvSpPr>
+            <p:cNvPr id="68" name="pl68"/>
+            <p:cNvSpPr/>
+            <p:nvPr/>
+          </p:nvSpPr>
+          <p:spPr>
+            <a:xfrm>
+              <a:off x="2130464" y="4336484"/>
+              <a:ext cx="6068952" cy="1029476"/>
+            </a:xfrm>
+            <a:custGeom>
+              <a:avLst/>
+              <a:pathLst>
+                <a:path w="6068952" h="1029476">
+                  <a:moveTo>
+                    <a:pt x="0" y="0"/>
+                  </a:moveTo>
+                  <a:lnTo>
+                    <a:pt x="19326" y="15027"/>
+                  </a:lnTo>
+                  <a:lnTo>
+                    <a:pt x="89670" y="67418"/>
+                  </a:lnTo>
+                  <a:lnTo>
+                    <a:pt x="160015" y="117599"/>
+                  </a:lnTo>
+                  <a:lnTo>
+                    <a:pt x="230359" y="165664"/>
+                  </a:lnTo>
+                  <a:lnTo>
+                    <a:pt x="300704" y="211701"/>
+                  </a:lnTo>
+                  <a:lnTo>
+                    <a:pt x="371048" y="255797"/>
+                  </a:lnTo>
+                  <a:lnTo>
+                    <a:pt x="441393" y="298033"/>
+                  </a:lnTo>
+                  <a:lnTo>
+                    <a:pt x="511737" y="338488"/>
+                  </a:lnTo>
+                  <a:lnTo>
+                    <a:pt x="582082" y="377236"/>
+                  </a:lnTo>
+                  <a:lnTo>
+                    <a:pt x="652426" y="414350"/>
+                  </a:lnTo>
+                  <a:lnTo>
+                    <a:pt x="722771" y="449899"/>
+                  </a:lnTo>
+                  <a:lnTo>
+                    <a:pt x="793115" y="483948"/>
+                  </a:lnTo>
+                  <a:lnTo>
+                    <a:pt x="863460" y="516562"/>
+                  </a:lnTo>
+                  <a:lnTo>
+                    <a:pt x="933804" y="547799"/>
+                  </a:lnTo>
+                  <a:lnTo>
+                    <a:pt x="1004149" y="577720"/>
+                  </a:lnTo>
+                  <a:lnTo>
+                    <a:pt x="1074493" y="606378"/>
+                  </a:lnTo>
+                  <a:lnTo>
+                    <a:pt x="1144838" y="633828"/>
+                  </a:lnTo>
+                  <a:lnTo>
+                    <a:pt x="1215182" y="660119"/>
+                  </a:lnTo>
+                  <a:lnTo>
+                    <a:pt x="1285527" y="685302"/>
+                  </a:lnTo>
+                  <a:lnTo>
+                    <a:pt x="1355871" y="709423"/>
+                  </a:lnTo>
+                  <a:lnTo>
+                    <a:pt x="1426216" y="732527"/>
+                  </a:lnTo>
+                  <a:lnTo>
+                    <a:pt x="1496560" y="754656"/>
+                  </a:lnTo>
+                  <a:lnTo>
+                    <a:pt x="1566905" y="775852"/>
+                  </a:lnTo>
+                  <a:lnTo>
+                    <a:pt x="1637249" y="796153"/>
+                  </a:lnTo>
+                  <a:lnTo>
+                    <a:pt x="1707594" y="815599"/>
+                  </a:lnTo>
+                  <a:lnTo>
+                    <a:pt x="1777938" y="834224"/>
+                  </a:lnTo>
+                  <a:lnTo>
+                    <a:pt x="1848283" y="852064"/>
+                  </a:lnTo>
+                  <a:lnTo>
+                    <a:pt x="1918627" y="869151"/>
+                  </a:lnTo>
+                  <a:lnTo>
+                    <a:pt x="1988972" y="885518"/>
+                  </a:lnTo>
+                  <a:lnTo>
+                    <a:pt x="2059316" y="901195"/>
+                  </a:lnTo>
+                  <a:lnTo>
+                    <a:pt x="2129661" y="916210"/>
+                  </a:lnTo>
+                  <a:lnTo>
+                    <a:pt x="2200005" y="930592"/>
+                  </a:lnTo>
+                  <a:lnTo>
+                    <a:pt x="2270350" y="944367"/>
+                  </a:lnTo>
+                  <a:lnTo>
+                    <a:pt x="2340694" y="957561"/>
+                  </a:lnTo>
+                  <a:lnTo>
+                    <a:pt x="2411038" y="959372"/>
+                  </a:lnTo>
+                  <a:lnTo>
+                    <a:pt x="2481383" y="960905"/>
+                  </a:lnTo>
+                  <a:lnTo>
+                    <a:pt x="2551727" y="962431"/>
+                  </a:lnTo>
+                  <a:lnTo>
+                    <a:pt x="2622072" y="963948"/>
+                  </a:lnTo>
+                  <a:lnTo>
+                    <a:pt x="2692416" y="965458"/>
+                  </a:lnTo>
+                  <a:lnTo>
+                    <a:pt x="2762761" y="966960"/>
+                  </a:lnTo>
+                  <a:lnTo>
+                    <a:pt x="2833105" y="968454"/>
+                  </a:lnTo>
+                  <a:lnTo>
+                    <a:pt x="2903450" y="969940"/>
+                  </a:lnTo>
+                  <a:lnTo>
+                    <a:pt x="2973794" y="971419"/>
+                  </a:lnTo>
+                  <a:lnTo>
+                    <a:pt x="3044139" y="972890"/>
+                  </a:lnTo>
+                  <a:lnTo>
+                    <a:pt x="3114483" y="974354"/>
+                  </a:lnTo>
+                  <a:lnTo>
+                    <a:pt x="3184828" y="975810"/>
+                  </a:lnTo>
+                  <a:lnTo>
+                    <a:pt x="3255172" y="977258"/>
+                  </a:lnTo>
+                  <a:lnTo>
+                    <a:pt x="3325517" y="978699"/>
+                  </a:lnTo>
+                  <a:lnTo>
+                    <a:pt x="3395861" y="980133"/>
+                  </a:lnTo>
+                  <a:lnTo>
+                    <a:pt x="3466206" y="981559"/>
+                  </a:lnTo>
+                  <a:lnTo>
+                    <a:pt x="3536550" y="982978"/>
+                  </a:lnTo>
+                  <a:lnTo>
+                    <a:pt x="3606895" y="984390"/>
+                  </a:lnTo>
+                  <a:lnTo>
+                    <a:pt x="3677239" y="985794"/>
+                  </a:lnTo>
+                  <a:lnTo>
+                    <a:pt x="3747584" y="987192"/>
+                  </a:lnTo>
+                  <a:lnTo>
+                    <a:pt x="3817928" y="988582"/>
+                  </a:lnTo>
+                  <a:lnTo>
+                    <a:pt x="3888273" y="989964"/>
+                  </a:lnTo>
+                  <a:lnTo>
+                    <a:pt x="3958617" y="991340"/>
+                  </a:lnTo>
+                  <a:lnTo>
+                    <a:pt x="4028962" y="992709"/>
+                  </a:lnTo>
+                  <a:lnTo>
+                    <a:pt x="4099306" y="994070"/>
+                  </a:lnTo>
+                  <a:lnTo>
+                    <a:pt x="4169651" y="995425"/>
+                  </a:lnTo>
+                  <a:lnTo>
+                    <a:pt x="4239995" y="996772"/>
+                  </a:lnTo>
+                  <a:lnTo>
+                    <a:pt x="4310340" y="998113"/>
+                  </a:lnTo>
+                  <a:lnTo>
+                    <a:pt x="4380684" y="999447"/>
+                  </a:lnTo>
+                  <a:lnTo>
+                    <a:pt x="4451029" y="1000774"/>
+                  </a:lnTo>
+                  <a:lnTo>
+                    <a:pt x="4521373" y="1002094"/>
+                  </a:lnTo>
+                  <a:lnTo>
+                    <a:pt x="4591718" y="1003407"/>
+                  </a:lnTo>
+                  <a:lnTo>
+                    <a:pt x="4662062" y="1004713"/>
+                  </a:lnTo>
+                  <a:lnTo>
+                    <a:pt x="4732407" y="1006013"/>
+                  </a:lnTo>
+                  <a:lnTo>
+                    <a:pt x="4802751" y="1007306"/>
+                  </a:lnTo>
+                  <a:lnTo>
+                    <a:pt x="4873096" y="1008593"/>
+                  </a:lnTo>
+                  <a:lnTo>
+                    <a:pt x="4943440" y="1009872"/>
+                  </a:lnTo>
+                  <a:lnTo>
+                    <a:pt x="5013785" y="1011146"/>
+                  </a:lnTo>
+                  <a:lnTo>
+                    <a:pt x="5084129" y="1012412"/>
+                  </a:lnTo>
+                  <a:lnTo>
+                    <a:pt x="5154474" y="1013672"/>
+                  </a:lnTo>
+                  <a:lnTo>
+                    <a:pt x="5224818" y="1014926"/>
+                  </a:lnTo>
+                  <a:lnTo>
+                    <a:pt x="5295163" y="1016173"/>
+                  </a:lnTo>
+                  <a:lnTo>
+                    <a:pt x="5365507" y="1017414"/>
+                  </a:lnTo>
+                  <a:lnTo>
+                    <a:pt x="5435852" y="1018648"/>
+                  </a:lnTo>
+                  <a:lnTo>
+                    <a:pt x="5506196" y="1019876"/>
+                  </a:lnTo>
+                  <a:lnTo>
+                    <a:pt x="5576541" y="1021098"/>
+                  </a:lnTo>
+                  <a:lnTo>
+                    <a:pt x="5646885" y="1022314"/>
+                  </a:lnTo>
+                  <a:lnTo>
+                    <a:pt x="5717230" y="1023523"/>
+                  </a:lnTo>
+                  <a:lnTo>
+                    <a:pt x="5787574" y="1024726"/>
+                  </a:lnTo>
+                  <a:lnTo>
+                    <a:pt x="5857919" y="1025922"/>
+                  </a:lnTo>
+                  <a:lnTo>
+                    <a:pt x="5928263" y="1027113"/>
+                  </a:lnTo>
+                  <a:lnTo>
+                    <a:pt x="5998608" y="1028297"/>
+                  </a:lnTo>
+                  <a:lnTo>
+                    <a:pt x="6068952" y="1029476"/>
+                  </a:lnTo>
+                </a:path>
+              </a:pathLst>
+            </a:custGeom>
+          </p:spPr>
+          <p:txBody>
+            <a:bodyPr/>
+            <a:lstStyle/>
+            <a:p/>
+          </p:txBody>
+        </p:sp>
+        <p:sp>
+          <p:nvSpPr>
+            <p:cNvPr id="69" name="pl69"/>
+            <p:cNvSpPr/>
+            <p:nvPr/>
+          </p:nvSpPr>
+          <p:spPr>
+            <a:xfrm>
+              <a:off x="1235312" y="5214096"/>
+              <a:ext cx="6964104" cy="349060"/>
+            </a:xfrm>
+            <a:custGeom>
+              <a:avLst/>
+              <a:pathLst>
+                <a:path w="6964104" h="349060">
+                  <a:moveTo>
+                    <a:pt x="6964104" y="349060"/>
+                  </a:moveTo>
+                  <a:lnTo>
+                    <a:pt x="6893760" y="347716"/>
+                  </a:lnTo>
+                  <a:lnTo>
+                    <a:pt x="6823415" y="346312"/>
+                  </a:lnTo>
+                  <a:lnTo>
+                    <a:pt x="6753071" y="344847"/>
+                  </a:lnTo>
+                  <a:lnTo>
+                    <a:pt x="6682726" y="343317"/>
+                  </a:lnTo>
+                  <a:lnTo>
+                    <a:pt x="6612382" y="341720"/>
+                  </a:lnTo>
+                  <a:lnTo>
+                    <a:pt x="6542037" y="340052"/>
+                  </a:lnTo>
+                  <a:lnTo>
+                    <a:pt x="6471693" y="338311"/>
+                  </a:lnTo>
+                  <a:lnTo>
+                    <a:pt x="6401348" y="336494"/>
+                  </a:lnTo>
+                  <a:lnTo>
+                    <a:pt x="6331004" y="334596"/>
+                  </a:lnTo>
+                  <a:lnTo>
+                    <a:pt x="6260659" y="332615"/>
+                  </a:lnTo>
+                  <a:lnTo>
+                    <a:pt x="6190315" y="330546"/>
+                  </a:lnTo>
+                  <a:lnTo>
+                    <a:pt x="6119970" y="328386"/>
+                  </a:lnTo>
+                  <a:lnTo>
+                    <a:pt x="6049626" y="326132"/>
+                  </a:lnTo>
+                  <a:lnTo>
+                    <a:pt x="5979281" y="323778"/>
+                  </a:lnTo>
+                  <a:lnTo>
+                    <a:pt x="5908937" y="321320"/>
+                  </a:lnTo>
+                  <a:lnTo>
+                    <a:pt x="5838592" y="318754"/>
+                  </a:lnTo>
+                  <a:lnTo>
+                    <a:pt x="5768248" y="316075"/>
+                  </a:lnTo>
+                  <a:lnTo>
+                    <a:pt x="5697903" y="313279"/>
+                  </a:lnTo>
+                  <a:lnTo>
+                    <a:pt x="5627559" y="310359"/>
+                  </a:lnTo>
+                  <a:lnTo>
+                    <a:pt x="5557214" y="307310"/>
+                  </a:lnTo>
+                  <a:lnTo>
+                    <a:pt x="5486870" y="304127"/>
+                  </a:lnTo>
+                  <a:lnTo>
+                    <a:pt x="5416525" y="300804"/>
+                  </a:lnTo>
+                  <a:lnTo>
+                    <a:pt x="5346181" y="297335"/>
+                  </a:lnTo>
+                  <a:lnTo>
+                    <a:pt x="5275836" y="293713"/>
+                  </a:lnTo>
+                  <a:lnTo>
+                    <a:pt x="5205492" y="289932"/>
+                  </a:lnTo>
+                  <a:lnTo>
+                    <a:pt x="5135147" y="285984"/>
+                  </a:lnTo>
+                  <a:lnTo>
+                    <a:pt x="5064803" y="281862"/>
+                  </a:lnTo>
+                  <a:lnTo>
+                    <a:pt x="4994458" y="277558"/>
+                  </a:lnTo>
+                  <a:lnTo>
+                    <a:pt x="4924114" y="273066"/>
+                  </a:lnTo>
+                  <a:lnTo>
+                    <a:pt x="4853769" y="268375"/>
+                  </a:lnTo>
+                  <a:lnTo>
+                    <a:pt x="4783425" y="263478"/>
+                  </a:lnTo>
+                  <a:lnTo>
+                    <a:pt x="4713080" y="258365"/>
+                  </a:lnTo>
+                  <a:lnTo>
+                    <a:pt x="4642736" y="253027"/>
+                  </a:lnTo>
+                  <a:lnTo>
+                    <a:pt x="4572391" y="247454"/>
+                  </a:lnTo>
+                  <a:lnTo>
+                    <a:pt x="4502047" y="241635"/>
+                  </a:lnTo>
+                  <a:lnTo>
+                    <a:pt x="4431702" y="235560"/>
+                  </a:lnTo>
+                  <a:lnTo>
+                    <a:pt x="4361358" y="229218"/>
+                  </a:lnTo>
+                  <a:lnTo>
+                    <a:pt x="4291013" y="222597"/>
+                  </a:lnTo>
+                  <a:lnTo>
+                    <a:pt x="4220669" y="215684"/>
+                  </a:lnTo>
+                  <a:lnTo>
+                    <a:pt x="4150324" y="208466"/>
+                  </a:lnTo>
+                  <a:lnTo>
+                    <a:pt x="4079980" y="200931"/>
+                  </a:lnTo>
+                  <a:lnTo>
+                    <a:pt x="4009635" y="193064"/>
+                  </a:lnTo>
+                  <a:lnTo>
+                    <a:pt x="3939291" y="184851"/>
+                  </a:lnTo>
+                  <a:lnTo>
+                    <a:pt x="3868946" y="176275"/>
+                  </a:lnTo>
+                  <a:lnTo>
+                    <a:pt x="3798602" y="167323"/>
+                  </a:lnTo>
+                  <a:lnTo>
+                    <a:pt x="3728257" y="157976"/>
+                  </a:lnTo>
+                  <a:lnTo>
+                    <a:pt x="3657913" y="148217"/>
+                  </a:lnTo>
+                  <a:lnTo>
+                    <a:pt x="3587569" y="138029"/>
+                  </a:lnTo>
+                  <a:lnTo>
+                    <a:pt x="3517224" y="127392"/>
+                  </a:lnTo>
+                  <a:lnTo>
+                    <a:pt x="3446880" y="116287"/>
+                  </a:lnTo>
+                  <a:lnTo>
+                    <a:pt x="3376535" y="104692"/>
+                  </a:lnTo>
+                  <a:lnTo>
+                    <a:pt x="3306191" y="92588"/>
+                  </a:lnTo>
+                  <a:lnTo>
+                    <a:pt x="3235846" y="80220"/>
+                  </a:lnTo>
+                  <a:lnTo>
+                    <a:pt x="3165502" y="78670"/>
+                  </a:lnTo>
+                  <a:lnTo>
+                    <a:pt x="3095157" y="77113"/>
+                  </a:lnTo>
+                  <a:lnTo>
+                    <a:pt x="3024813" y="75548"/>
+                  </a:lnTo>
+                  <a:lnTo>
+                    <a:pt x="2954468" y="73975"/>
+                  </a:lnTo>
+                  <a:lnTo>
+                    <a:pt x="2884124" y="72394"/>
+                  </a:lnTo>
+                  <a:lnTo>
+                    <a:pt x="2813779" y="70804"/>
+                  </a:lnTo>
+                  <a:lnTo>
+                    <a:pt x="2743435" y="69206"/>
+                  </a:lnTo>
+                  <a:lnTo>
+                    <a:pt x="2673090" y="67600"/>
+                  </a:lnTo>
+                  <a:lnTo>
+                    <a:pt x="2602746" y="65986"/>
+                  </a:lnTo>
+                  <a:lnTo>
+                    <a:pt x="2532401" y="64363"/>
+                  </a:lnTo>
+                  <a:lnTo>
+                    <a:pt x="2462057" y="62732"/>
+                  </a:lnTo>
+                  <a:lnTo>
+                    <a:pt x="2391712" y="61092"/>
+                  </a:lnTo>
+                  <a:lnTo>
+                    <a:pt x="2321368" y="59444"/>
+                  </a:lnTo>
+                  <a:lnTo>
+                    <a:pt x="2251023" y="57788"/>
+                  </a:lnTo>
+                  <a:lnTo>
+                    <a:pt x="2180679" y="56123"/>
+                  </a:lnTo>
+                  <a:lnTo>
+                    <a:pt x="2110334" y="54449"/>
+                  </a:lnTo>
+                  <a:lnTo>
+                    <a:pt x="2039990" y="52766"/>
+                  </a:lnTo>
+                  <a:lnTo>
+                    <a:pt x="1969645" y="51075"/>
+                  </a:lnTo>
+                  <a:lnTo>
+                    <a:pt x="1899301" y="49375"/>
+                  </a:lnTo>
+                  <a:lnTo>
+                    <a:pt x="1828956" y="47667"/>
+                  </a:lnTo>
+                  <a:lnTo>
+                    <a:pt x="1758612" y="45949"/>
+                  </a:lnTo>
+                  <a:lnTo>
+                    <a:pt x="1688267" y="44223"/>
+                  </a:lnTo>
+                  <a:lnTo>
+                    <a:pt x="1617923" y="42487"/>
+                  </a:lnTo>
+                  <a:lnTo>
+                    <a:pt x="1547578" y="40743"/>
+                  </a:lnTo>
+                  <a:lnTo>
+                    <a:pt x="1477234" y="38990"/>
+                  </a:lnTo>
+                  <a:lnTo>
+                    <a:pt x="1406889" y="37227"/>
+                  </a:lnTo>
+                  <a:lnTo>
+                    <a:pt x="1336545" y="35456"/>
+                  </a:lnTo>
+                  <a:lnTo>
+                    <a:pt x="1266200" y="33675"/>
+                  </a:lnTo>
+                  <a:lnTo>
+                    <a:pt x="1195856" y="31885"/>
+                  </a:lnTo>
+                  <a:lnTo>
+                    <a:pt x="1125511" y="30086"/>
+                  </a:lnTo>
+                  <a:lnTo>
+                    <a:pt x="1055167" y="28277"/>
+                  </a:lnTo>
+                  <a:lnTo>
+                    <a:pt x="984822" y="26460"/>
+                  </a:lnTo>
+                  <a:lnTo>
+                    <a:pt x="914478" y="24632"/>
+                  </a:lnTo>
+                  <a:lnTo>
+                    <a:pt x="844133" y="22796"/>
+                  </a:lnTo>
+                  <a:lnTo>
+                    <a:pt x="773789" y="20949"/>
+                  </a:lnTo>
+                  <a:lnTo>
+                    <a:pt x="703444" y="19094"/>
+                  </a:lnTo>
+                  <a:lnTo>
+                    <a:pt x="633100" y="17228"/>
+                  </a:lnTo>
+                  <a:lnTo>
+                    <a:pt x="562755" y="15353"/>
+                  </a:lnTo>
+                  <a:lnTo>
+                    <a:pt x="492411" y="13469"/>
+                  </a:lnTo>
+                  <a:lnTo>
+                    <a:pt x="422066" y="11574"/>
+                  </a:lnTo>
+                  <a:lnTo>
+                    <a:pt x="351722" y="9670"/>
+                  </a:lnTo>
+                  <a:lnTo>
+                    <a:pt x="281377" y="7756"/>
+                  </a:lnTo>
+                  <a:lnTo>
+                    <a:pt x="211033" y="5832"/>
+                  </a:lnTo>
+                  <a:lnTo>
+                    <a:pt x="140688" y="3898"/>
+                  </a:lnTo>
+                  <a:lnTo>
+                    <a:pt x="70344" y="1954"/>
+                  </a:lnTo>
+                  <a:lnTo>
+                    <a:pt x="0" y="0"/>
+                  </a:lnTo>
+                </a:path>
+              </a:pathLst>
+            </a:custGeom>
+          </p:spPr>
+          <p:txBody>
+            <a:bodyPr/>
+            <a:lstStyle/>
+            <a:p/>
+          </p:txBody>
+        </p:sp>
+        <p:sp>
+          <p:nvSpPr>
+            <p:cNvPr id="70" name="pl70"/>
+            <p:cNvSpPr/>
+            <p:nvPr/>
+          </p:nvSpPr>
+          <p:spPr>
+            <a:xfrm>
+              <a:off x="1235312" y="4685042"/>
+              <a:ext cx="6964104" cy="825263"/>
+            </a:xfrm>
+            <a:custGeom>
+              <a:avLst/>
+              <a:pathLst>
+                <a:path w="6964104" h="825263">
+                  <a:moveTo>
+                    <a:pt x="0" y="0"/>
+                  </a:moveTo>
+                  <a:lnTo>
+                    <a:pt x="70344" y="21660"/>
+                  </a:lnTo>
+                  <a:lnTo>
+                    <a:pt x="140688" y="42803"/>
+                  </a:lnTo>
+                  <a:lnTo>
+                    <a:pt x="211033" y="63443"/>
+                  </a:lnTo>
+                  <a:lnTo>
+                    <a:pt x="281377" y="83591"/>
+                  </a:lnTo>
+                  <a:lnTo>
+                    <a:pt x="351722" y="103258"/>
+                  </a:lnTo>
+                  <a:lnTo>
+                    <a:pt x="422066" y="122457"/>
+                  </a:lnTo>
+                  <a:lnTo>
+                    <a:pt x="492411" y="141198"/>
+                  </a:lnTo>
+                  <a:lnTo>
+                    <a:pt x="562755" y="159492"/>
+                  </a:lnTo>
+                  <a:lnTo>
+                    <a:pt x="633100" y="177350"/>
+                  </a:lnTo>
+                  <a:lnTo>
+                    <a:pt x="703444" y="194783"/>
+                  </a:lnTo>
+                  <a:lnTo>
+                    <a:pt x="773789" y="211800"/>
+                  </a:lnTo>
+                  <a:lnTo>
+                    <a:pt x="844133" y="228411"/>
+                  </a:lnTo>
+                  <a:lnTo>
+                    <a:pt x="914478" y="244626"/>
+                  </a:lnTo>
+                  <a:lnTo>
+                    <a:pt x="984822" y="260455"/>
+                  </a:lnTo>
+                  <a:lnTo>
+                    <a:pt x="1055167" y="275907"/>
+                  </a:lnTo>
+                  <a:lnTo>
+                    <a:pt x="1125511" y="290990"/>
+                  </a:lnTo>
+                  <a:lnTo>
+                    <a:pt x="1195856" y="305713"/>
+                  </a:lnTo>
+                  <a:lnTo>
+                    <a:pt x="1266200" y="320086"/>
+                  </a:lnTo>
+                  <a:lnTo>
+                    <a:pt x="1336545" y="334116"/>
+                  </a:lnTo>
+                  <a:lnTo>
+                    <a:pt x="1406889" y="347811"/>
+                  </a:lnTo>
+                  <a:lnTo>
+                    <a:pt x="1477234" y="361180"/>
+                  </a:lnTo>
+                  <a:lnTo>
+                    <a:pt x="1547578" y="374231"/>
+                  </a:lnTo>
+                  <a:lnTo>
+                    <a:pt x="1617923" y="386970"/>
+                  </a:lnTo>
+                  <a:lnTo>
+                    <a:pt x="1688267" y="399405"/>
+                  </a:lnTo>
+                  <a:lnTo>
+                    <a:pt x="1758612" y="411545"/>
+                  </a:lnTo>
+                  <a:lnTo>
+                    <a:pt x="1828956" y="423394"/>
+                  </a:lnTo>
+                  <a:lnTo>
+                    <a:pt x="1899301" y="434962"/>
+                  </a:lnTo>
+                  <a:lnTo>
+                    <a:pt x="1969645" y="446253"/>
+                  </a:lnTo>
+                  <a:lnTo>
+                    <a:pt x="2039990" y="457276"/>
+                  </a:lnTo>
+                  <a:lnTo>
+                    <a:pt x="2110334" y="468035"/>
+                  </a:lnTo>
+                  <a:lnTo>
+                    <a:pt x="2180679" y="478538"/>
+                  </a:lnTo>
+                  <a:lnTo>
+                    <a:pt x="2251023" y="488791"/>
+                  </a:lnTo>
+                  <a:lnTo>
+                    <a:pt x="2321368" y="498800"/>
+                  </a:lnTo>
+                  <a:lnTo>
+                    <a:pt x="2391712" y="508569"/>
+                  </a:lnTo>
+                  <a:lnTo>
+                    <a:pt x="2462057" y="518106"/>
+                  </a:lnTo>
+                  <a:lnTo>
+                    <a:pt x="2532401" y="527416"/>
+                  </a:lnTo>
+                  <a:lnTo>
+                    <a:pt x="2602746" y="536504"/>
+                  </a:lnTo>
+                  <a:lnTo>
+                    <a:pt x="2673090" y="545375"/>
+                  </a:lnTo>
+                  <a:lnTo>
+                    <a:pt x="2743435" y="554034"/>
+                  </a:lnTo>
+                  <a:lnTo>
+                    <a:pt x="2813779" y="562487"/>
+                  </a:lnTo>
+                  <a:lnTo>
+                    <a:pt x="2884124" y="570739"/>
+                  </a:lnTo>
+                  <a:lnTo>
+                    <a:pt x="2954468" y="578794"/>
+                  </a:lnTo>
+                  <a:lnTo>
+                    <a:pt x="3024813" y="586657"/>
+                  </a:lnTo>
+                  <a:lnTo>
+                    <a:pt x="3095157" y="594332"/>
+                  </a:lnTo>
+                  <a:lnTo>
+                    <a:pt x="3165502" y="601825"/>
+                  </a:lnTo>
+                  <a:lnTo>
+                    <a:pt x="3235846" y="609139"/>
+                  </a:lnTo>
+                  <a:lnTo>
+                    <a:pt x="3306191" y="616278"/>
+                  </a:lnTo>
+                  <a:lnTo>
+                    <a:pt x="3376535" y="623248"/>
+                  </a:lnTo>
+                  <a:lnTo>
+                    <a:pt x="3446880" y="630051"/>
+                  </a:lnTo>
+                  <a:lnTo>
+                    <a:pt x="3517224" y="636692"/>
+                  </a:lnTo>
+                  <a:lnTo>
+                    <a:pt x="3587569" y="643175"/>
+                  </a:lnTo>
+                  <a:lnTo>
+                    <a:pt x="3657913" y="649503"/>
+                  </a:lnTo>
+                  <a:lnTo>
+                    <a:pt x="3728257" y="655680"/>
+                  </a:lnTo>
+                  <a:lnTo>
+                    <a:pt x="3798602" y="661710"/>
+                  </a:lnTo>
+                  <a:lnTo>
+                    <a:pt x="3868946" y="667597"/>
+                  </a:lnTo>
+                  <a:lnTo>
+                    <a:pt x="3939291" y="673343"/>
+                  </a:lnTo>
+                  <a:lnTo>
+                    <a:pt x="4009635" y="678952"/>
+                  </a:lnTo>
+                  <a:lnTo>
+                    <a:pt x="4079980" y="684427"/>
+                  </a:lnTo>
+                  <a:lnTo>
+                    <a:pt x="4150324" y="689772"/>
+                  </a:lnTo>
+                  <a:lnTo>
+                    <a:pt x="4220669" y="694990"/>
+                  </a:lnTo>
+                  <a:lnTo>
+                    <a:pt x="4291013" y="700083"/>
+                  </a:lnTo>
+                  <a:lnTo>
+                    <a:pt x="4361358" y="705054"/>
+                  </a:lnTo>
+                  <a:lnTo>
+                    <a:pt x="4431702" y="709907"/>
+                  </a:lnTo>
+                  <a:lnTo>
+                    <a:pt x="4502047" y="714645"/>
+                  </a:lnTo>
+                  <a:lnTo>
+                    <a:pt x="4572391" y="719269"/>
+                  </a:lnTo>
+                  <a:lnTo>
+                    <a:pt x="4642736" y="723784"/>
+                  </a:lnTo>
+                  <a:lnTo>
+                    <a:pt x="4713080" y="728190"/>
+                  </a:lnTo>
+                  <a:lnTo>
+                    <a:pt x="4783425" y="732492"/>
+                  </a:lnTo>
+                  <a:lnTo>
+                    <a:pt x="4853769" y="736691"/>
+                  </a:lnTo>
+                  <a:lnTo>
+                    <a:pt x="4924114" y="740790"/>
+                  </a:lnTo>
+                  <a:lnTo>
+                    <a:pt x="4994458" y="744791"/>
+                  </a:lnTo>
+                  <a:lnTo>
+                    <a:pt x="5064803" y="748697"/>
+                  </a:lnTo>
+                  <a:lnTo>
+                    <a:pt x="5135147" y="752510"/>
+                  </a:lnTo>
+                  <a:lnTo>
+                    <a:pt x="5205492" y="756232"/>
+                  </a:lnTo>
+                  <a:lnTo>
+                    <a:pt x="5275836" y="759865"/>
+                  </a:lnTo>
+                  <a:lnTo>
+                    <a:pt x="5346181" y="763412"/>
+                  </a:lnTo>
+                  <a:lnTo>
+                    <a:pt x="5416525" y="766874"/>
+                  </a:lnTo>
+                  <a:lnTo>
+                    <a:pt x="5486870" y="770253"/>
+                  </a:lnTo>
+                  <a:lnTo>
+                    <a:pt x="5557214" y="773552"/>
+                  </a:lnTo>
+                  <a:lnTo>
+                    <a:pt x="5627559" y="776772"/>
+                  </a:lnTo>
+                  <a:lnTo>
+                    <a:pt x="5697903" y="779916"/>
+                  </a:lnTo>
+                  <a:lnTo>
+                    <a:pt x="5768248" y="782985"/>
+                  </a:lnTo>
+                  <a:lnTo>
+                    <a:pt x="5838592" y="785980"/>
+                  </a:lnTo>
+                  <a:lnTo>
+                    <a:pt x="5908937" y="788904"/>
+                  </a:lnTo>
+                  <a:lnTo>
+                    <a:pt x="5979281" y="791758"/>
+                  </a:lnTo>
+                  <a:lnTo>
+                    <a:pt x="6049626" y="794545"/>
+                  </a:lnTo>
+                  <a:lnTo>
+                    <a:pt x="6119970" y="797265"/>
+                  </a:lnTo>
+                  <a:lnTo>
+                    <a:pt x="6190315" y="799920"/>
+                  </a:lnTo>
+                  <a:lnTo>
+                    <a:pt x="6260659" y="802511"/>
+                  </a:lnTo>
+                  <a:lnTo>
+                    <a:pt x="6331004" y="805041"/>
+                  </a:lnTo>
+                  <a:lnTo>
+                    <a:pt x="6401348" y="807511"/>
+                  </a:lnTo>
+                  <a:lnTo>
+                    <a:pt x="6471693" y="809922"/>
+                  </a:lnTo>
+                  <a:lnTo>
+                    <a:pt x="6542037" y="812275"/>
+                  </a:lnTo>
+                  <a:lnTo>
+                    <a:pt x="6612382" y="814572"/>
+                  </a:lnTo>
+                  <a:lnTo>
+                    <a:pt x="6682726" y="816815"/>
+                  </a:lnTo>
+                  <a:lnTo>
+                    <a:pt x="6753071" y="819004"/>
+                  </a:lnTo>
+                  <a:lnTo>
+                    <a:pt x="6823415" y="821141"/>
+                  </a:lnTo>
+                  <a:lnTo>
+                    <a:pt x="6893760" y="823227"/>
+                  </a:lnTo>
+                  <a:lnTo>
+                    <a:pt x="6964104" y="825263"/>
+                  </a:lnTo>
+                </a:path>
+              </a:pathLst>
+            </a:custGeom>
+            <a:ln w="27101" cap="flat">
+              <a:solidFill>
+                <a:srgbClr val="FF8C00">
+                  <a:alpha val="100000"/>
+                </a:srgbClr>
+              </a:solidFill>
+              <a:prstDash val="solid"/>
+              <a:round/>
+            </a:ln>
+          </p:spPr>
+          <p:txBody>
+            <a:bodyPr/>
+            <a:lstStyle/>
+            <a:p/>
+          </p:txBody>
+        </p:sp>
+        <p:sp>
+          <p:nvSpPr>
+            <p:cNvPr id="71" name="pl71"/>
+            <p:cNvSpPr/>
+            <p:nvPr/>
+          </p:nvSpPr>
+          <p:spPr>
+            <a:xfrm>
+              <a:off x="887106" y="5294352"/>
+              <a:ext cx="7660515" cy="0"/>
+            </a:xfrm>
+            <a:custGeom>
+              <a:avLst/>
+              <a:pathLst>
+                <a:path w="7660515" h="0">
+                  <a:moveTo>
+                    <a:pt x="0" y="0"/>
+                  </a:moveTo>
+                  <a:lnTo>
+                    <a:pt x="7660515" y="0"/>
+                  </a:lnTo>
+                  <a:lnTo>
+                    <a:pt x="7660515" y="0"/>
+                  </a:lnTo>
+                </a:path>
+              </a:pathLst>
+            </a:custGeom>
+            <a:ln w="13550" cap="flat">
+              <a:solidFill>
+                <a:srgbClr val="7F7F7F">
+                  <a:alpha val="100000"/>
+                </a:srgbClr>
+              </a:solidFill>
+              <a:prstDash val="dash"/>
+              <a:round/>
+            </a:ln>
+          </p:spPr>
+          <p:txBody>
+            <a:bodyPr/>
+            <a:lstStyle/>
+            <a:p/>
+          </p:txBody>
+        </p:sp>
+        <p:sp>
+          <p:nvSpPr>
+            <p:cNvPr id="72" name="pl72"/>
+            <p:cNvSpPr/>
+            <p:nvPr/>
+          </p:nvSpPr>
+          <p:spPr>
+            <a:xfrm>
+              <a:off x="4472829" y="4336484"/>
+              <a:ext cx="0" cy="1317069"/>
+            </a:xfrm>
+            <a:custGeom>
+              <a:avLst/>
+              <a:pathLst>
+                <a:path w="0" h="1317069">
+                  <a:moveTo>
+                    <a:pt x="0" y="1317069"/>
+                  </a:moveTo>
+                  <a:lnTo>
+                    <a:pt x="0" y="0"/>
+                  </a:lnTo>
+                  <a:lnTo>
+                    <a:pt x="0" y="0"/>
+                  </a:lnTo>
+                </a:path>
+              </a:pathLst>
+            </a:custGeom>
+            <a:ln w="13550" cap="flat">
+              <a:solidFill>
+                <a:srgbClr val="666666">
+                  <a:alpha val="100000"/>
+                </a:srgbClr>
+              </a:solidFill>
+              <a:prstDash val="dot"/>
+              <a:round/>
+            </a:ln>
+          </p:spPr>
+          <p:txBody>
+            <a:bodyPr/>
+            <a:lstStyle/>
+            <a:p/>
+          </p:txBody>
+        </p:sp>
+        <p:sp>
+          <p:nvSpPr>
+            <p:cNvPr id="73" name="tx73"/>
+            <p:cNvSpPr/>
+            <p:nvPr/>
+          </p:nvSpPr>
+          <p:spPr>
+            <a:xfrm>
+              <a:off x="762297" y="5553636"/>
+              <a:ext cx="62179" cy="80101"/>
+            </a:xfrm>
+            <a:prstGeom prst="rect">
+              <a:avLst/>
+            </a:prstGeom>
+            <a:noFill/>
+          </p:spPr>
+          <p:txBody>
+            <a:bodyPr lIns="0" rIns="0" tIns="0" bIns="0" anchorCtr="1" anchor="ctr" wrap="none"/>
+            <a:lstStyle/>
+            <a:p>
+              <a:pPr algn="l" marL="0" marR="0" indent="0">
+                <a:lnSpc>
+                  <a:spcPts val="880"/>
+                </a:lnSpc>
+                <a:spcBef>
+                  <a:spcPts val="0"/>
+                </a:spcBef>
+                <a:spcAft>
+                  <a:spcPts val="0"/>
+                </a:spcAft>
+              </a:pPr>
+              <a:r>
+                <a:rPr sz="880">
+                  <a:solidFill>
+                    <a:srgbClr val="4D4D4D">
+                      <a:alpha val="100000"/>
+                    </a:srgbClr>
+                  </a:solidFill>
+                  <a:latin typeface="Helvetica"/>
+                  <a:cs typeface="Helvetica"/>
+                </a:rPr>
+                <a:t>0</a:t>
+              </a:r>
+            </a:p>
+          </p:txBody>
+        </p:sp>
+        <p:sp>
+          <p:nvSpPr>
+            <p:cNvPr id="74" name="tx74"/>
+            <p:cNvSpPr/>
+            <p:nvPr/>
+          </p:nvSpPr>
+          <p:spPr>
+            <a:xfrm>
+              <a:off x="762297" y="5254302"/>
+              <a:ext cx="62179" cy="80101"/>
+            </a:xfrm>
+            <a:prstGeom prst="rect">
+              <a:avLst/>
+            </a:prstGeom>
+            <a:noFill/>
+          </p:spPr>
+          <p:txBody>
+            <a:bodyPr lIns="0" rIns="0" tIns="0" bIns="0" anchorCtr="1" anchor="ctr" wrap="none"/>
+            <a:lstStyle/>
+            <a:p>
+              <a:pPr algn="l" marL="0" marR="0" indent="0">
+                <a:lnSpc>
+                  <a:spcPts val="880"/>
+                </a:lnSpc>
+                <a:spcBef>
+                  <a:spcPts val="0"/>
+                </a:spcBef>
+                <a:spcAft>
+                  <a:spcPts val="0"/>
+                </a:spcAft>
+              </a:pPr>
+              <a:r>
+                <a:rPr sz="880">
+                  <a:solidFill>
+                    <a:srgbClr val="4D4D4D">
+                      <a:alpha val="100000"/>
+                    </a:srgbClr>
+                  </a:solidFill>
+                  <a:latin typeface="Helvetica"/>
+                  <a:cs typeface="Helvetica"/>
+                </a:rPr>
+                <a:t>1</a:t>
+              </a:r>
+            </a:p>
+          </p:txBody>
+        </p:sp>
+        <p:sp>
+          <p:nvSpPr>
+            <p:cNvPr id="75" name="tx75"/>
+            <p:cNvSpPr/>
+            <p:nvPr/>
+          </p:nvSpPr>
+          <p:spPr>
+            <a:xfrm>
+              <a:off x="762297" y="4954968"/>
+              <a:ext cx="62179" cy="80101"/>
+            </a:xfrm>
+            <a:prstGeom prst="rect">
+              <a:avLst/>
+            </a:prstGeom>
+            <a:noFill/>
+          </p:spPr>
+          <p:txBody>
+            <a:bodyPr lIns="0" rIns="0" tIns="0" bIns="0" anchorCtr="1" anchor="ctr" wrap="none"/>
+            <a:lstStyle/>
+            <a:p>
+              <a:pPr algn="l" marL="0" marR="0" indent="0">
+                <a:lnSpc>
+                  <a:spcPts val="880"/>
+                </a:lnSpc>
+                <a:spcBef>
+                  <a:spcPts val="0"/>
+                </a:spcBef>
+                <a:spcAft>
+                  <a:spcPts val="0"/>
+                </a:spcAft>
+              </a:pPr>
+              <a:r>
+                <a:rPr sz="880">
+                  <a:solidFill>
+                    <a:srgbClr val="4D4D4D">
+                      <a:alpha val="100000"/>
+                    </a:srgbClr>
+                  </a:solidFill>
+                  <a:latin typeface="Helvetica"/>
+                  <a:cs typeface="Helvetica"/>
+                </a:rPr>
+                <a:t>2</a:t>
+              </a:r>
+            </a:p>
+          </p:txBody>
+        </p:sp>
+        <p:sp>
+          <p:nvSpPr>
+            <p:cNvPr id="76" name="tx76"/>
+            <p:cNvSpPr/>
+            <p:nvPr/>
+          </p:nvSpPr>
+          <p:spPr>
+            <a:xfrm>
+              <a:off x="762297" y="4655634"/>
+              <a:ext cx="62179" cy="80101"/>
+            </a:xfrm>
+            <a:prstGeom prst="rect">
+              <a:avLst/>
+            </a:prstGeom>
+            <a:noFill/>
+          </p:spPr>
+          <p:txBody>
+            <a:bodyPr lIns="0" rIns="0" tIns="0" bIns="0" anchorCtr="1" anchor="ctr" wrap="none"/>
+            <a:lstStyle/>
+            <a:p>
+              <a:pPr algn="l" marL="0" marR="0" indent="0">
+                <a:lnSpc>
+                  <a:spcPts val="880"/>
+                </a:lnSpc>
+                <a:spcBef>
+                  <a:spcPts val="0"/>
+                </a:spcBef>
+                <a:spcAft>
+                  <a:spcPts val="0"/>
+                </a:spcAft>
+              </a:pPr>
+              <a:r>
+                <a:rPr sz="880">
+                  <a:solidFill>
+                    <a:srgbClr val="4D4D4D">
+                      <a:alpha val="100000"/>
+                    </a:srgbClr>
+                  </a:solidFill>
+                  <a:latin typeface="Helvetica"/>
+                  <a:cs typeface="Helvetica"/>
+                </a:rPr>
+                <a:t>3</a:t>
+              </a:r>
+            </a:p>
+          </p:txBody>
+        </p:sp>
+        <p:sp>
+          <p:nvSpPr>
+            <p:cNvPr id="77" name="tx77"/>
+            <p:cNvSpPr/>
+            <p:nvPr/>
+          </p:nvSpPr>
+          <p:spPr>
+            <a:xfrm>
+              <a:off x="762297" y="4356300"/>
+              <a:ext cx="62179" cy="80101"/>
+            </a:xfrm>
+            <a:prstGeom prst="rect">
+              <a:avLst/>
+            </a:prstGeom>
+            <a:noFill/>
+          </p:spPr>
+          <p:txBody>
+            <a:bodyPr lIns="0" rIns="0" tIns="0" bIns="0" anchorCtr="1" anchor="ctr" wrap="none"/>
+            <a:lstStyle/>
+            <a:p>
+              <a:pPr algn="l" marL="0" marR="0" indent="0">
+                <a:lnSpc>
+                  <a:spcPts val="880"/>
+                </a:lnSpc>
+                <a:spcBef>
+                  <a:spcPts val="0"/>
+                </a:spcBef>
+                <a:spcAft>
+                  <a:spcPts val="0"/>
+                </a:spcAft>
+              </a:pPr>
+              <a:r>
+                <a:rPr sz="880">
+                  <a:solidFill>
+                    <a:srgbClr val="4D4D4D">
+                      <a:alpha val="100000"/>
+                    </a:srgbClr>
+                  </a:solidFill>
+                  <a:latin typeface="Helvetica"/>
+                  <a:cs typeface="Helvetica"/>
+                </a:rPr>
+                <a:t>4</a:t>
+              </a:r>
+            </a:p>
+          </p:txBody>
+        </p:sp>
+        <p:sp>
+          <p:nvSpPr>
+            <p:cNvPr id="78" name="tx78"/>
+            <p:cNvSpPr/>
+            <p:nvPr/>
+          </p:nvSpPr>
+          <p:spPr>
+            <a:xfrm>
+              <a:off x="1306098" y="5716183"/>
+              <a:ext cx="161574" cy="80101"/>
+            </a:xfrm>
+            <a:prstGeom prst="rect">
+              <a:avLst/>
+            </a:prstGeom>
+            <a:noFill/>
+          </p:spPr>
+          <p:txBody>
+            <a:bodyPr lIns="0" rIns="0" tIns="0" bIns="0" anchorCtr="1" anchor="ctr" wrap="none"/>
+            <a:lstStyle/>
+            <a:p>
+              <a:pPr algn="l" marL="0" marR="0" indent="0">
+                <a:lnSpc>
+                  <a:spcPts val="880"/>
+                </a:lnSpc>
+                <a:spcBef>
+                  <a:spcPts val="0"/>
+                </a:spcBef>
+                <a:spcAft>
+                  <a:spcPts val="0"/>
+                </a:spcAft>
+              </a:pPr>
+              <a:r>
+                <a:rPr sz="880">
+                  <a:solidFill>
+                    <a:srgbClr val="4D4D4D">
+                      <a:alpha val="100000"/>
+                    </a:srgbClr>
+                  </a:solidFill>
+                  <a:latin typeface="Helvetica"/>
+                  <a:cs typeface="Helvetica"/>
+                </a:rPr>
+                <a:t>-40</a:t>
+              </a:r>
+            </a:p>
+          </p:txBody>
+        </p:sp>
+        <p:sp>
+          <p:nvSpPr>
+            <p:cNvPr id="79" name="tx79"/>
+            <p:cNvSpPr/>
+            <p:nvPr/>
+          </p:nvSpPr>
+          <p:spPr>
+            <a:xfrm>
+              <a:off x="2113264" y="5716183"/>
+              <a:ext cx="161574" cy="80101"/>
+            </a:xfrm>
+            <a:prstGeom prst="rect">
+              <a:avLst/>
+            </a:prstGeom>
+            <a:noFill/>
+          </p:spPr>
+          <p:txBody>
+            <a:bodyPr lIns="0" rIns="0" tIns="0" bIns="0" anchorCtr="1" anchor="ctr" wrap="none"/>
+            <a:lstStyle/>
+            <a:p>
+              <a:pPr algn="l" marL="0" marR="0" indent="0">
+                <a:lnSpc>
+                  <a:spcPts val="880"/>
+                </a:lnSpc>
+                <a:spcBef>
+                  <a:spcPts val="0"/>
+                </a:spcBef>
+                <a:spcAft>
+                  <a:spcPts val="0"/>
+                </a:spcAft>
+              </a:pPr>
+              <a:r>
+                <a:rPr sz="880">
+                  <a:solidFill>
+                    <a:srgbClr val="4D4D4D">
+                      <a:alpha val="100000"/>
+                    </a:srgbClr>
+                  </a:solidFill>
+                  <a:latin typeface="Helvetica"/>
+                  <a:cs typeface="Helvetica"/>
+                </a:rPr>
+                <a:t>-30</a:t>
+              </a:r>
+            </a:p>
+          </p:txBody>
+        </p:sp>
+        <p:sp>
+          <p:nvSpPr>
+            <p:cNvPr id="80" name="tx80"/>
+            <p:cNvSpPr/>
+            <p:nvPr/>
+          </p:nvSpPr>
+          <p:spPr>
+            <a:xfrm>
+              <a:off x="2920429" y="5716183"/>
+              <a:ext cx="161574" cy="80101"/>
+            </a:xfrm>
+            <a:prstGeom prst="rect">
+              <a:avLst/>
+            </a:prstGeom>
+            <a:noFill/>
+          </p:spPr>
+          <p:txBody>
+            <a:bodyPr lIns="0" rIns="0" tIns="0" bIns="0" anchorCtr="1" anchor="ctr" wrap="none"/>
+            <a:lstStyle/>
+            <a:p>
+              <a:pPr algn="l" marL="0" marR="0" indent="0">
+                <a:lnSpc>
+                  <a:spcPts val="880"/>
+                </a:lnSpc>
+                <a:spcBef>
+                  <a:spcPts val="0"/>
+                </a:spcBef>
+                <a:spcAft>
+                  <a:spcPts val="0"/>
+                </a:spcAft>
+              </a:pPr>
+              <a:r>
+                <a:rPr sz="880">
+                  <a:solidFill>
+                    <a:srgbClr val="4D4D4D">
+                      <a:alpha val="100000"/>
+                    </a:srgbClr>
+                  </a:solidFill>
+                  <a:latin typeface="Helvetica"/>
+                  <a:cs typeface="Helvetica"/>
+                </a:rPr>
+                <a:t>-20</a:t>
+              </a:r>
+            </a:p>
+          </p:txBody>
+        </p:sp>
+        <p:sp>
+          <p:nvSpPr>
+            <p:cNvPr id="81" name="tx81"/>
+            <p:cNvSpPr/>
+            <p:nvPr/>
+          </p:nvSpPr>
+          <p:spPr>
+            <a:xfrm>
+              <a:off x="3727595" y="5716183"/>
+              <a:ext cx="161574" cy="80101"/>
+            </a:xfrm>
+            <a:prstGeom prst="rect">
+              <a:avLst/>
+            </a:prstGeom>
+            <a:noFill/>
+          </p:spPr>
+          <p:txBody>
+            <a:bodyPr lIns="0" rIns="0" tIns="0" bIns="0" anchorCtr="1" anchor="ctr" wrap="none"/>
+            <a:lstStyle/>
+            <a:p>
+              <a:pPr algn="l" marL="0" marR="0" indent="0">
+                <a:lnSpc>
+                  <a:spcPts val="880"/>
+                </a:lnSpc>
+                <a:spcBef>
+                  <a:spcPts val="0"/>
+                </a:spcBef>
+                <a:spcAft>
+                  <a:spcPts val="0"/>
+                </a:spcAft>
+              </a:pPr>
+              <a:r>
+                <a:rPr sz="880">
+                  <a:solidFill>
+                    <a:srgbClr val="4D4D4D">
+                      <a:alpha val="100000"/>
+                    </a:srgbClr>
+                  </a:solidFill>
+                  <a:latin typeface="Helvetica"/>
+                  <a:cs typeface="Helvetica"/>
+                </a:rPr>
+                <a:t>-10</a:t>
+              </a:r>
+            </a:p>
+          </p:txBody>
+        </p:sp>
+        <p:sp>
+          <p:nvSpPr>
+            <p:cNvPr id="82" name="tx82"/>
+            <p:cNvSpPr/>
+            <p:nvPr/>
+          </p:nvSpPr>
+          <p:spPr>
+            <a:xfrm>
+              <a:off x="4584458" y="5716183"/>
+              <a:ext cx="62179" cy="80101"/>
+            </a:xfrm>
+            <a:prstGeom prst="rect">
+              <a:avLst/>
+            </a:prstGeom>
+            <a:noFill/>
+          </p:spPr>
+          <p:txBody>
+            <a:bodyPr lIns="0" rIns="0" tIns="0" bIns="0" anchorCtr="1" anchor="ctr" wrap="none"/>
+            <a:lstStyle/>
+            <a:p>
+              <a:pPr algn="l" marL="0" marR="0" indent="0">
+                <a:lnSpc>
+                  <a:spcPts val="880"/>
+                </a:lnSpc>
+                <a:spcBef>
+                  <a:spcPts val="0"/>
+                </a:spcBef>
+                <a:spcAft>
+                  <a:spcPts val="0"/>
+                </a:spcAft>
+              </a:pPr>
+              <a:r>
+                <a:rPr sz="880">
+                  <a:solidFill>
+                    <a:srgbClr val="4D4D4D">
+                      <a:alpha val="100000"/>
+                    </a:srgbClr>
+                  </a:solidFill>
+                  <a:latin typeface="Helvetica"/>
+                  <a:cs typeface="Helvetica"/>
+                </a:rPr>
+                <a:t>0</a:t>
+              </a:r>
+            </a:p>
+          </p:txBody>
+        </p:sp>
+        <p:sp>
+          <p:nvSpPr>
+            <p:cNvPr id="83" name="tx83"/>
+            <p:cNvSpPr/>
+            <p:nvPr/>
+          </p:nvSpPr>
+          <p:spPr>
+            <a:xfrm>
+              <a:off x="5360534" y="5716183"/>
+              <a:ext cx="124358" cy="80101"/>
+            </a:xfrm>
+            <a:prstGeom prst="rect">
+              <a:avLst/>
+            </a:prstGeom>
+            <a:noFill/>
+          </p:spPr>
+          <p:txBody>
+            <a:bodyPr lIns="0" rIns="0" tIns="0" bIns="0" anchorCtr="1" anchor="ctr" wrap="none"/>
+            <a:lstStyle/>
+            <a:p>
+              <a:pPr algn="l" marL="0" marR="0" indent="0">
+                <a:lnSpc>
+                  <a:spcPts val="880"/>
+                </a:lnSpc>
+                <a:spcBef>
+                  <a:spcPts val="0"/>
+                </a:spcBef>
+                <a:spcAft>
+                  <a:spcPts val="0"/>
+                </a:spcAft>
+              </a:pPr>
+              <a:r>
+                <a:rPr sz="880">
+                  <a:solidFill>
+                    <a:srgbClr val="4D4D4D">
+                      <a:alpha val="100000"/>
+                    </a:srgbClr>
+                  </a:solidFill>
+                  <a:latin typeface="Helvetica"/>
+                  <a:cs typeface="Helvetica"/>
+                </a:rPr>
+                <a:t>10</a:t>
+              </a:r>
+            </a:p>
+          </p:txBody>
+        </p:sp>
+        <p:sp>
+          <p:nvSpPr>
+            <p:cNvPr id="84" name="tx84"/>
+            <p:cNvSpPr/>
+            <p:nvPr/>
+          </p:nvSpPr>
+          <p:spPr>
+            <a:xfrm>
+              <a:off x="6167699" y="5716183"/>
+              <a:ext cx="124358" cy="80101"/>
+            </a:xfrm>
+            <a:prstGeom prst="rect">
+              <a:avLst/>
+            </a:prstGeom>
+            <a:noFill/>
+          </p:spPr>
+          <p:txBody>
+            <a:bodyPr lIns="0" rIns="0" tIns="0" bIns="0" anchorCtr="1" anchor="ctr" wrap="none"/>
+            <a:lstStyle/>
+            <a:p>
+              <a:pPr algn="l" marL="0" marR="0" indent="0">
+                <a:lnSpc>
+                  <a:spcPts val="880"/>
+                </a:lnSpc>
+                <a:spcBef>
+                  <a:spcPts val="0"/>
+                </a:spcBef>
+                <a:spcAft>
+                  <a:spcPts val="0"/>
+                </a:spcAft>
+              </a:pPr>
+              <a:r>
+                <a:rPr sz="880">
+                  <a:solidFill>
+                    <a:srgbClr val="4D4D4D">
+                      <a:alpha val="100000"/>
+                    </a:srgbClr>
+                  </a:solidFill>
+                  <a:latin typeface="Helvetica"/>
+                  <a:cs typeface="Helvetica"/>
+                </a:rPr>
+                <a:t>20</a:t>
+              </a:r>
+            </a:p>
+          </p:txBody>
+        </p:sp>
+        <p:sp>
+          <p:nvSpPr>
+            <p:cNvPr id="85" name="tx85"/>
+            <p:cNvSpPr/>
+            <p:nvPr/>
+          </p:nvSpPr>
+          <p:spPr>
+            <a:xfrm>
+              <a:off x="6974865" y="5716183"/>
+              <a:ext cx="124358" cy="80101"/>
+            </a:xfrm>
+            <a:prstGeom prst="rect">
+              <a:avLst/>
+            </a:prstGeom>
+            <a:noFill/>
+          </p:spPr>
+          <p:txBody>
+            <a:bodyPr lIns="0" rIns="0" tIns="0" bIns="0" anchorCtr="1" anchor="ctr" wrap="none"/>
+            <a:lstStyle/>
+            <a:p>
+              <a:pPr algn="l" marL="0" marR="0" indent="0">
+                <a:lnSpc>
+                  <a:spcPts val="880"/>
+                </a:lnSpc>
+                <a:spcBef>
+                  <a:spcPts val="0"/>
+                </a:spcBef>
+                <a:spcAft>
+                  <a:spcPts val="0"/>
+                </a:spcAft>
+              </a:pPr>
+              <a:r>
+                <a:rPr sz="880">
+                  <a:solidFill>
+                    <a:srgbClr val="4D4D4D">
+                      <a:alpha val="100000"/>
+                    </a:srgbClr>
+                  </a:solidFill>
+                  <a:latin typeface="Helvetica"/>
+                  <a:cs typeface="Helvetica"/>
+                </a:rPr>
+                <a:t>30</a:t>
+              </a:r>
+            </a:p>
+          </p:txBody>
+        </p:sp>
+        <p:sp>
+          <p:nvSpPr>
+            <p:cNvPr id="86" name="tx86"/>
+            <p:cNvSpPr/>
+            <p:nvPr/>
+          </p:nvSpPr>
+          <p:spPr>
+            <a:xfrm>
+              <a:off x="7782030" y="5716183"/>
+              <a:ext cx="124358" cy="80101"/>
+            </a:xfrm>
+            <a:prstGeom prst="rect">
+              <a:avLst/>
+            </a:prstGeom>
+            <a:noFill/>
+          </p:spPr>
+          <p:txBody>
+            <a:bodyPr lIns="0" rIns="0" tIns="0" bIns="0" anchorCtr="1" anchor="ctr" wrap="none"/>
+            <a:lstStyle/>
+            <a:p>
+              <a:pPr algn="l" marL="0" marR="0" indent="0">
+                <a:lnSpc>
+                  <a:spcPts val="880"/>
+                </a:lnSpc>
+                <a:spcBef>
+                  <a:spcPts val="0"/>
+                </a:spcBef>
+                <a:spcAft>
+                  <a:spcPts val="0"/>
+                </a:spcAft>
+              </a:pPr>
+              <a:r>
+                <a:rPr sz="880">
+                  <a:solidFill>
+                    <a:srgbClr val="4D4D4D">
+                      <a:alpha val="100000"/>
+                    </a:srgbClr>
+                  </a:solidFill>
+                  <a:latin typeface="Helvetica"/>
+                  <a:cs typeface="Helvetica"/>
+                </a:rPr>
+                <a:t>40</a:t>
+              </a:r>
+            </a:p>
+          </p:txBody>
+        </p:sp>
+        <p:sp>
+          <p:nvSpPr>
+            <p:cNvPr id="87" name="tx87"/>
+            <p:cNvSpPr/>
+            <p:nvPr/>
+          </p:nvSpPr>
+          <p:spPr>
+            <a:xfrm>
+              <a:off x="2928340" y="5855859"/>
+              <a:ext cx="3578047" cy="100218"/>
+            </a:xfrm>
+            <a:prstGeom prst="rect">
+              <a:avLst/>
+            </a:prstGeom>
+            <a:noFill/>
+          </p:spPr>
+          <p:txBody>
+            <a:bodyPr lIns="0" rIns="0" tIns="0" bIns="0" anchorCtr="1" anchor="ctr" wrap="none"/>
+            <a:lstStyle/>
+            <a:p>
+              <a:pPr algn="l" marL="0" marR="0" indent="0">
+                <a:lnSpc>
+                  <a:spcPts val="1100"/>
+                </a:lnSpc>
+                <a:spcBef>
+                  <a:spcPts val="0"/>
+                </a:spcBef>
+                <a:spcAft>
+                  <a:spcPts val="0"/>
+                </a:spcAft>
+              </a:pPr>
+              <a:r>
+                <a:rPr sz="1100">
+                  <a:solidFill>
+                    <a:srgbClr val="000000">
+                      <a:alpha val="100000"/>
+                    </a:srgbClr>
+                  </a:solidFill>
+                  <a:latin typeface="Helvetica"/>
+                  <a:cs typeface="Helvetica"/>
+                </a:rPr>
+                <a:t>eGFR difference (%): 100 × (CKD-EPI Cr-Cys − CG) / CG</a:t>
+              </a:r>
+            </a:p>
+          </p:txBody>
+        </p:sp>
+        <p:sp>
+          <p:nvSpPr>
+            <p:cNvPr id="88" name="tx88"/>
+            <p:cNvSpPr/>
+            <p:nvPr/>
+          </p:nvSpPr>
+          <p:spPr>
+            <a:xfrm rot="-5400000">
+              <a:off x="138035" y="4944909"/>
+              <a:ext cx="1016904" cy="100218"/>
+            </a:xfrm>
+            <a:prstGeom prst="rect">
+              <a:avLst/>
+            </a:prstGeom>
+            <a:noFill/>
+          </p:spPr>
+          <p:txBody>
+            <a:bodyPr lIns="0" rIns="0" tIns="0" bIns="0" anchorCtr="1" anchor="ctr" wrap="none"/>
+            <a:lstStyle/>
+            <a:p>
+              <a:pPr algn="l" marL="0" marR="0" indent="0">
+                <a:lnSpc>
+                  <a:spcPts val="1100"/>
+                </a:lnSpc>
+                <a:spcBef>
+                  <a:spcPts val="0"/>
+                </a:spcBef>
+                <a:spcAft>
+                  <a:spcPts val="0"/>
+                </a:spcAft>
+              </a:pPr>
+              <a:r>
+                <a:rPr sz="1100">
+                  <a:solidFill>
+                    <a:srgbClr val="000000">
+                      <a:alpha val="100000"/>
+                    </a:srgbClr>
+                  </a:solidFill>
+                  <a:latin typeface="Helvetica"/>
+                  <a:cs typeface="Helvetica"/>
+                </a:rPr>
+                <a:t>subHR (95% CI)</a:t>
+              </a:r>
+            </a:p>
+          </p:txBody>
+        </p:sp>
+        <p:sp>
+          <p:nvSpPr>
+            <p:cNvPr id="89" name="tx89"/>
+            <p:cNvSpPr/>
+            <p:nvPr/>
+          </p:nvSpPr>
+          <p:spPr>
+            <a:xfrm>
+              <a:off x="887106" y="4159544"/>
+              <a:ext cx="6321612" cy="82021"/>
+            </a:xfrm>
+            <a:prstGeom prst="rect">
+              <a:avLst/>
+            </a:prstGeom>
+            <a:noFill/>
+          </p:spPr>
+          <p:txBody>
+            <a:bodyPr lIns="0" rIns="0" tIns="0" bIns="0" anchorCtr="1" anchor="ctr" wrap="none"/>
+            <a:lstStyle/>
+            <a:p>
+              <a:pPr algn="l" marL="0" marR="0" indent="0">
+                <a:lnSpc>
+                  <a:spcPts val="900"/>
+                </a:lnSpc>
+                <a:spcBef>
+                  <a:spcPts val="0"/>
+                </a:spcBef>
+                <a:spcAft>
+                  <a:spcPts val="0"/>
+                </a:spcAft>
+              </a:pPr>
+              <a:r>
+                <a:rPr sz="900">
+                  <a:solidFill>
+                    <a:srgbClr val="404040">
+                      <a:alpha val="100000"/>
+                    </a:srgbClr>
+                  </a:solidFill>
+                  <a:latin typeface="Helvetica"/>
+                  <a:cs typeface="Helvetica"/>
+                </a:rPr>
+                <a:t>subHR per 10 % decline: 1.32 (1.06-1.64), p = 0.013  |  per IQR decline (Δ = 29.5 %): 2.27 (1.19-4.31)  |  IQR: [-15.6, 13.9] %</a:t>
+              </a:r>
+            </a:p>
+          </p:txBody>
+        </p:sp>
+        <p:sp>
+          <p:nvSpPr>
+            <p:cNvPr id="90" name="tx90"/>
+            <p:cNvSpPr/>
+            <p:nvPr/>
+          </p:nvSpPr>
+          <p:spPr>
+            <a:xfrm>
+              <a:off x="887106" y="3932770"/>
               <a:ext cx="2875970" cy="120152"/>
             </a:xfrm>
             <a:prstGeom prst="rect">
